--- a/lecons/USA/Population Geography/12_USA_POP_L09_Population_Growth_and_its_Determinants.pptx
+++ b/lecons/USA/Population Geography/12_USA_POP_L09_Population_Growth_and_its_Determinants.pptx
@@ -3206,7 +3206,7 @@
           <a:p>
             <a:r>
               <a:rPr lang="en-US" dirty="0"/>
-              <a:t>We continue with the definitions. On this slide we have Negative growth, Zero growth and Natural increase. Write each point on a new line, with the key term first, and explain it in your own words when we revise. When you finish, we go to the next slide.</a:t>
+              <a:t>We continue with the definitions. On this slide we have Negative growth, Zero population growth and Natural increase. Write each point on a new line, with the key term first, and explain it in your own words when we revise. When you finish, we go to the next slide.</a:t>
             </a:r>
             <a:endParaRPr lang="en-US" dirty="0"/>
           </a:p>
@@ -3382,7 +3382,7 @@
           <a:p>
             <a:r>
               <a:rPr lang="en-US" dirty="0"/>
-              <a:t>Let us copy Types of Growth. The types of population growth are the following. Copy the point on Positive growth on the left, then draw the diagram on the right: types of growth. Give it a title and label it clearly.</a:t>
+              <a:t>Let us copy Types of Growth. Population growth is of the following types. Copy the point on Positive growth on the left, then draw the diagram on the right: types of growth. Give it a title and label it clearly.</a:t>
             </a:r>
             <a:endParaRPr lang="en-US" dirty="0"/>
           </a:p>
@@ -3558,7 +3558,7 @@
           <a:p>
             <a:r>
               <a:rPr lang="en-US" dirty="0"/>
-              <a:t>We continue with Types of Growth. On this slide we have Negative growth and Zero growth. Write each point on a new line, with the key term first, and explain it in your own words when we revise.</a:t>
+              <a:t>We continue with Types of Growth. Copy the point on Negative growth: write the key term first, then its explanation.</a:t>
             </a:r>
             <a:endParaRPr lang="en-US" dirty="0"/>
           </a:p>
@@ -3646,7 +3646,7 @@
           <a:p>
             <a:r>
               <a:rPr lang="en-US" dirty="0"/>
-              <a:t>Let us copy The Population Change System. The population change system is presented as follows. Copy the point on Formula on the left, then draw the diagram on the right: the population change system. Give it a title and label it clearly.</a:t>
+              <a:t>We continue with Types of Growth. Copy the point on Zero growth: write the key term first, then its explanation.</a:t>
             </a:r>
             <a:endParaRPr lang="en-US" dirty="0"/>
           </a:p>
@@ -3734,7 +3734,7 @@
           <a:p>
             <a:r>
               <a:rPr lang="en-US" dirty="0"/>
-              <a:t>We continue with The Population Change System. On this slide we have Natural increase and Natural decrease. Write each point on a new line, with the key term first, and explain it in your own words when we revise. When you finish, we go to the next slide.</a:t>
+              <a:t>Let us copy The Population Change System. The population change system works as follows. Copy the point on The formula on the left, then draw the diagram on the right: the population change system. Give it a title and label it clearly.</a:t>
             </a:r>
             <a:endParaRPr lang="en-US" dirty="0"/>
           </a:p>
@@ -3822,7 +3822,7 @@
           <a:p>
             <a:r>
               <a:rPr lang="en-US" dirty="0"/>
-              <a:t>We continue with The Population Change System. On this slide we have Net migration. Write each point on a new line, with the key term first, and explain it in your own words when we revise.</a:t>
+              <a:t>We continue with The Population Change System. Copy the point on Natural increase and decrease: write the key term first, then its explanation.</a:t>
             </a:r>
             <a:endParaRPr lang="en-US" dirty="0"/>
           </a:p>
@@ -3910,7 +3910,7 @@
           <a:p>
             <a:r>
               <a:rPr lang="en-US" dirty="0"/>
-              <a:t>Let us copy Fertility. The factors of fertility are the following. On this slide we have Meaning and Factors of high fertility. Write each point on a new line, with the key term first, and explain it in your own words when we revise. When you finish, we go to the next slide.</a:t>
+              <a:t>We continue with The Population Change System. Copy the point on Net migration: write the key term first, then its explanation.</a:t>
             </a:r>
             <a:endParaRPr lang="en-US" dirty="0"/>
           </a:p>
@@ -3998,7 +3998,7 @@
           <a:p>
             <a:r>
               <a:rPr lang="en-US" dirty="0"/>
-              <a:t>We continue with Fertility. Copy this carefully.</a:t>
+              <a:t>Let us copy Fertility. Fertility, the main driver of population growth, depends on the following factors. Copy the point on Meaning: write the key term first, then its explanation.</a:t>
             </a:r>
             <a:endParaRPr lang="en-US" dirty="0"/>
           </a:p>
@@ -4086,7 +4086,7 @@
           <a:p>
             <a:r>
               <a:rPr lang="en-US" dirty="0"/>
-              <a:t>Copy the point on Example on the left, then draw the diagram on the right: factors of births and deaths. Give it a title and label it clearly.</a:t>
+              <a:t>Copy the point on Factors of high fertility on the left, then draw the diagram on the right: the factors of growth. Give it a title and label it clearly.</a:t>
             </a:r>
             <a:endParaRPr lang="en-US" dirty="0"/>
           </a:p>
@@ -4174,7 +4174,7 @@
           <a:p>
             <a:r>
               <a:rPr lang="en-US" dirty="0"/>
-              <a:t>We continue with Fertility. On this slide we have Factors of low fertility. Write each point on a new line, with the key term first, and explain it in your own words when we revise.</a:t>
+              <a:t>We continue with Fertility. Copy the point on Factors of low fertility: write the key term first, then its explanation.</a:t>
             </a:r>
             <a:endParaRPr lang="en-US" dirty="0"/>
           </a:p>
@@ -4262,7 +4262,7 @@
           <a:p>
             <a:r>
               <a:rPr lang="en-US" dirty="0"/>
-              <a:t>Let us copy Mortality and Migration. The factors of mortality and migration are the following. On this slide we have Factors of high mortality. Write each point on a new line, with the key term first, and explain it in your own words when we revise. When you finish, we go to the next slide.</a:t>
+              <a:t>Let us copy Mortality and Migration. Mortality and migration depend on the following factors. Copy the point on Factors of high mortality: write the key term first, then its explanation.</a:t>
             </a:r>
             <a:endParaRPr lang="en-US" dirty="0"/>
           </a:p>
@@ -4350,7 +4350,7 @@
           <a:p>
             <a:r>
               <a:rPr lang="en-US" dirty="0"/>
-              <a:t>We continue with Mortality and Migration. Copy this carefully.</a:t>
+              <a:t>Copy the point on Factors of low mortality on the left, then draw the diagram on the right: vaccination. Give it a title and label it clearly.</a:t>
             </a:r>
             <a:endParaRPr lang="en-US" dirty="0"/>
           </a:p>
@@ -4526,7 +4526,7 @@
           <a:p>
             <a:r>
               <a:rPr lang="en-US" dirty="0"/>
-              <a:t>Copy the point on Factors of low mortality on the left, then draw the diagram on the right: vaccination. Give it a title and label it clearly.</a:t>
+              <a:t>We continue with Mortality and Migration. Copy the point on Factors of migration: write the key term first, then its explanation.</a:t>
             </a:r>
             <a:endParaRPr lang="en-US" dirty="0"/>
           </a:p>
@@ -4614,7 +4614,7 @@
           <a:p>
             <a:r>
               <a:rPr lang="en-US" dirty="0"/>
-              <a:t>We continue with Mortality and Migration. On this slide we have Push factors of migration and Pull factors of migration. Write each point on a new line, with the key term first, and explain it in your own words when we revise.</a:t>
+              <a:t>Let us copy Spatial Differences on a World Scale. The determinants of growth differ across the world as follows. Copy the point on Less developed countries on the left, then draw the diagram on the right: birth and death rates. Give it a title and label it clearly.</a:t>
             </a:r>
             <a:endParaRPr lang="en-US" dirty="0"/>
           </a:p>
@@ -4702,7 +4702,7 @@
           <a:p>
             <a:r>
               <a:rPr lang="en-US" dirty="0"/>
-              <a:t>Let us copy Spatial Differences of Growth on a World Scale. Population growth differs across the world as follows. Copy the point on Less developed countries on the left, then draw the diagram on the right: birth and death rates by continent. Give it a title and label it clearly.</a:t>
+              <a:t>We continue with Spatial Differences on a World Scale. Copy the point on More developed countries: write the key term first, then its explanation.</a:t>
             </a:r>
             <a:endParaRPr lang="en-US" dirty="0"/>
           </a:p>
@@ -4790,7 +4790,7 @@
           <a:p>
             <a:r>
               <a:rPr lang="en-US" dirty="0"/>
-              <a:t>We continue with Spatial Differences of Growth on a World Scale. On this slide we have More developed countries and Role of migration. Write each point on a new line, with the key term first, and explain it in your own words when we revise.</a:t>
+              <a:t>We continue with Spatial Differences on a World Scale. Copy the point on The role of migration: write the key term first, then its explanation.</a:t>
             </a:r>
             <a:endParaRPr lang="en-US" dirty="0"/>
           </a:p>
@@ -15328,7 +15328,7 @@
                 <a:ea typeface="Times New Roman" pitchFamily="34" charset="-122"/>
                 <a:cs typeface="Times New Roman" pitchFamily="34" charset="-120"/>
               </a:rPr>
-              <a:t>Zero growth: </a:t>
+              <a:t>Zero population growth: </a:t>
             </a:r>
             <a:pPr algn="l" indent="0" marL="0">
               <a:spcAft>
@@ -15771,7 +15771,7 @@
                 <a:ea typeface="Times New Roman" pitchFamily="34" charset="-122"/>
                 <a:cs typeface="Times New Roman" pitchFamily="34" charset="-120"/>
               </a:rPr>
-              <a:t>1. Population Growth and the Population Change System</a:t>
+              <a:t>1. Meaning of Population Growth</a:t>
             </a:r>
             <a:endParaRPr lang="en-US" sz="3600" dirty="0"/>
           </a:p>
@@ -15786,7 +15786,7 @@
         <p:spPr>
           <a:xfrm>
             <a:off x="365760" y="1737360"/>
-            <a:ext cx="5120640" cy="457200"/>
+            <a:ext cx="6035040" cy="457200"/>
           </a:xfrm>
           <a:prstGeom prst="rect">
             <a:avLst/>
@@ -15827,7 +15827,7 @@
         <p:spPr>
           <a:xfrm>
             <a:off x="365760" y="2240280"/>
-            <a:ext cx="4846320" cy="4160520"/>
+            <a:ext cx="6035040" cy="4160520"/>
           </a:xfrm>
           <a:prstGeom prst="rect">
             <a:avLst/>
@@ -15854,7 +15854,7 @@
                 <a:ea typeface="Times New Roman" pitchFamily="34" charset="-122"/>
                 <a:cs typeface="Times New Roman" pitchFamily="34" charset="-120"/>
               </a:rPr>
-              <a:t>The types of population growth are the following:</a:t>
+              <a:t>Population growth is of the following types:</a:t>
             </a:r>
             <a:endParaRPr lang="en-US" sz="3200" dirty="0"/>
           </a:p>
@@ -15891,7 +15891,7 @@
                 <a:ea typeface="Times New Roman" pitchFamily="34" charset="-122"/>
                 <a:cs typeface="Times New Roman" pitchFamily="34" charset="-120"/>
               </a:rPr>
-              <a:t>The population increases, as in Cameroon (about +2.6 % a year) and Niger.</a:t>
+              <a:t>The population increases because births and immigrants are more numerous than deaths and emigrants. Cameroon, which grows by about 2.6 % a year, and Niger are examples.</a:t>
             </a:r>
             <a:endParaRPr lang="en-US" sz="3200" dirty="0"/>
           </a:p>
@@ -15913,8 +15913,8 @@
         </p:blipFill>
         <p:spPr>
           <a:xfrm>
-            <a:off x="5349240" y="2461422"/>
-            <a:ext cx="6659575" cy="2913564"/>
+            <a:off x="6537960" y="2721454"/>
+            <a:ext cx="5470855" cy="2393499"/>
           </a:xfrm>
           <a:prstGeom prst="rect">
             <a:avLst/>
@@ -15929,8 +15929,8 @@
         </p:nvSpPr>
         <p:spPr>
           <a:xfrm>
-            <a:off x="5349240" y="6089904"/>
-            <a:ext cx="6659575" cy="347472"/>
+            <a:off x="6537960" y="6089904"/>
+            <a:ext cx="5470855" cy="347472"/>
           </a:xfrm>
           <a:prstGeom prst="rect">
             <a:avLst/>
@@ -16328,7 +16328,7 @@
         <p:spPr>
           <a:xfrm>
             <a:off x="0" y="658368"/>
-            <a:ext cx="3840480" cy="5833872"/>
+            <a:ext cx="5120640" cy="5833872"/>
           </a:xfrm>
           <a:prstGeom prst="rect">
             <a:avLst/>
@@ -16343,8 +16343,8 @@
         </p:nvSpPr>
         <p:spPr>
           <a:xfrm>
-            <a:off x="4069080" y="1005840"/>
-            <a:ext cx="7802575" cy="731520"/>
+            <a:off x="5349240" y="1005840"/>
+            <a:ext cx="6522415" cy="731520"/>
           </a:xfrm>
           <a:prstGeom prst="rect">
             <a:avLst/>
@@ -16370,7 +16370,7 @@
                 <a:ea typeface="Times New Roman" pitchFamily="34" charset="-122"/>
                 <a:cs typeface="Times New Roman" pitchFamily="34" charset="-120"/>
               </a:rPr>
-              <a:t>1. Population Growth and the Population Change System</a:t>
+              <a:t>1. Meaning of Population Growth</a:t>
             </a:r>
             <a:endParaRPr lang="en-US" sz="3600" dirty="0"/>
           </a:p>
@@ -16384,8 +16384,8 @@
         </p:nvSpPr>
         <p:spPr>
           <a:xfrm>
-            <a:off x="4069080" y="1737360"/>
-            <a:ext cx="7802575" cy="457200"/>
+            <a:off x="5349240" y="1737360"/>
+            <a:ext cx="6522415" cy="457200"/>
           </a:xfrm>
           <a:prstGeom prst="rect">
             <a:avLst/>
@@ -16423,8 +16423,8 @@
         </p:nvSpPr>
         <p:spPr>
           <a:xfrm>
-            <a:off x="4069080" y="2240280"/>
-            <a:ext cx="7802575" cy="4206240"/>
+            <a:off x="5349240" y="2240280"/>
+            <a:ext cx="6522415" cy="4206240"/>
           </a:xfrm>
           <a:prstGeom prst="rect">
             <a:avLst/>
@@ -16468,44 +16468,7 @@
                 <a:ea typeface="Times New Roman" pitchFamily="34" charset="-122"/>
                 <a:cs typeface="Times New Roman" pitchFamily="34" charset="-120"/>
               </a:rPr>
-              <a:t>The population decreases, as in Japan and Italy.</a:t>
-            </a:r>
-            <a:endParaRPr lang="en-US" sz="4000" dirty="0"/>
-          </a:p>
-          <a:p>
-            <a:pPr algn="l" indent="0" marL="0">
-              <a:spcAft>
-                <a:spcPts val="800"/>
-              </a:spcAft>
-              <a:buNone/>
-            </a:pPr>
-            <a:r>
-              <a:rPr lang="en-US" sz="4000" b="1" dirty="0">
-                <a:solidFill>
-                  <a:srgbClr val="111111"/>
-                </a:solidFill>
-                <a:latin typeface="Times New Roman" pitchFamily="34" charset="0"/>
-                <a:ea typeface="Times New Roman" pitchFamily="34" charset="-122"/>
-                <a:cs typeface="Times New Roman" pitchFamily="34" charset="-120"/>
-              </a:rPr>
-              <a:t>Zero growth: </a:t>
-            </a:r>
-            <a:pPr algn="l" indent="0" marL="0">
-              <a:spcAft>
-                <a:spcPts val="800"/>
-              </a:spcAft>
-              <a:buNone/>
-            </a:pPr>
-            <a:r>
-              <a:rPr lang="en-US" sz="4000" dirty="0">
-                <a:solidFill>
-                  <a:srgbClr val="111111"/>
-                </a:solidFill>
-                <a:latin typeface="Times New Roman" pitchFamily="34" charset="0"/>
-                <a:ea typeface="Times New Roman" pitchFamily="34" charset="-122"/>
-                <a:cs typeface="Times New Roman" pitchFamily="34" charset="-120"/>
-              </a:rPr>
-              <a:t>The population stays stable, as in some European countries such as France, which is close to it.</a:t>
+              <a:t>The population decreases because deaths and emigrants are more numerous than births and immigrants. Japan and Italy are examples.</a:t>
             </a:r>
             <a:endParaRPr lang="en-US" sz="4000" dirty="0"/>
           </a:p>
@@ -16623,170 +16586,9 @@
           </a:p>
         </p:txBody>
       </p:sp>
-      <p:sp>
-        <p:nvSpPr>
-          <p:cNvPr id="3" name="Text 1"/>
-          <p:cNvSpPr/>
-          <p:nvPr/>
-        </p:nvSpPr>
-        <p:spPr>
-          <a:xfrm>
-            <a:off x="365760" y="1005840"/>
-            <a:ext cx="11460175" cy="731520"/>
-          </a:xfrm>
-          <a:prstGeom prst="rect">
-            <a:avLst/>
-          </a:prstGeom>
-          <a:noFill/>
-          <a:ln/>
-        </p:spPr>
-        <p:txBody>
-          <a:bodyPr wrap="square" lIns="0" tIns="0" rIns="0" bIns="0" rtlCol="0" anchor="ctr">
-            <a:normAutofit/>
-          </a:bodyPr>
-          <a:lstStyle/>
-          <a:p>
-            <a:pPr algn="ctr" indent="0" marL="0">
-              <a:buNone/>
-            </a:pPr>
-            <a:r>
-              <a:rPr lang="en-US" sz="3600" b="1" dirty="0">
-                <a:solidFill>
-                  <a:srgbClr val="990011"/>
-                </a:solidFill>
-                <a:latin typeface="Times New Roman" pitchFamily="34" charset="0"/>
-                <a:ea typeface="Times New Roman" pitchFamily="34" charset="-122"/>
-                <a:cs typeface="Times New Roman" pitchFamily="34" charset="-120"/>
-              </a:rPr>
-              <a:t>1. Population Growth and the Population Change System</a:t>
-            </a:r>
-            <a:endParaRPr lang="en-US" sz="3600" dirty="0"/>
-          </a:p>
-        </p:txBody>
-      </p:sp>
-      <p:sp>
-        <p:nvSpPr>
-          <p:cNvPr id="4" name="Text 2"/>
-          <p:cNvSpPr/>
-          <p:nvPr/>
-        </p:nvSpPr>
-        <p:spPr>
-          <a:xfrm>
-            <a:off x="365760" y="1737360"/>
-            <a:ext cx="5120640" cy="457200"/>
-          </a:xfrm>
-          <a:prstGeom prst="rect">
-            <a:avLst/>
-          </a:prstGeom>
-          <a:noFill/>
-          <a:ln/>
-        </p:spPr>
-        <p:txBody>
-          <a:bodyPr wrap="square" lIns="0" tIns="0" rIns="0" bIns="0" rtlCol="0" anchor="ctr">
-            <a:normAutofit/>
-          </a:bodyPr>
-          <a:lstStyle/>
-          <a:p>
-            <a:pPr algn="l" indent="0" marL="0">
-              <a:buNone/>
-            </a:pPr>
-            <a:r>
-              <a:rPr lang="en-US" sz="3000" b="1" dirty="0">
-                <a:solidFill>
-                  <a:srgbClr val="990011"/>
-                </a:solidFill>
-                <a:latin typeface="Times New Roman" pitchFamily="34" charset="0"/>
-                <a:ea typeface="Times New Roman" pitchFamily="34" charset="-122"/>
-                <a:cs typeface="Times New Roman" pitchFamily="34" charset="-120"/>
-              </a:rPr>
-              <a:t>B) The Population Change System</a:t>
-            </a:r>
-            <a:endParaRPr lang="en-US" sz="3000" dirty="0"/>
-          </a:p>
-        </p:txBody>
-      </p:sp>
-      <p:sp>
-        <p:nvSpPr>
-          <p:cNvPr id="5" name="Text 3"/>
-          <p:cNvSpPr/>
-          <p:nvPr/>
-        </p:nvSpPr>
-        <p:spPr>
-          <a:xfrm>
-            <a:off x="365760" y="2240280"/>
-            <a:ext cx="4846320" cy="4160520"/>
-          </a:xfrm>
-          <a:prstGeom prst="rect">
-            <a:avLst/>
-          </a:prstGeom>
-          <a:noFill/>
-          <a:ln/>
-        </p:spPr>
-        <p:txBody>
-          <a:bodyPr wrap="square" lIns="0" tIns="0" rIns="0" bIns="0" rtlCol="0" anchor="t"/>
-          <a:lstStyle/>
-          <a:p>
-            <a:pPr algn="l" indent="0" marL="0">
-              <a:spcAft>
-                <a:spcPts val="800"/>
-              </a:spcAft>
-              <a:buNone/>
-            </a:pPr>
-            <a:r>
-              <a:rPr lang="en-US" sz="3600" i="1" dirty="0">
-                <a:solidFill>
-                  <a:srgbClr val="111111"/>
-                </a:solidFill>
-                <a:latin typeface="Times New Roman" pitchFamily="34" charset="0"/>
-                <a:ea typeface="Times New Roman" pitchFamily="34" charset="-122"/>
-                <a:cs typeface="Times New Roman" pitchFamily="34" charset="-120"/>
-              </a:rPr>
-              <a:t>The population change system is presented as follows:</a:t>
-            </a:r>
-            <a:endParaRPr lang="en-US" sz="3600" dirty="0"/>
-          </a:p>
-          <a:p>
-            <a:pPr algn="l" indent="0" marL="0">
-              <a:spcAft>
-                <a:spcPts val="800"/>
-              </a:spcAft>
-              <a:buNone/>
-            </a:pPr>
-            <a:r>
-              <a:rPr lang="en-US" sz="3600" b="1" dirty="0">
-                <a:solidFill>
-                  <a:srgbClr val="111111"/>
-                </a:solidFill>
-                <a:latin typeface="Times New Roman" pitchFamily="34" charset="0"/>
-                <a:ea typeface="Times New Roman" pitchFamily="34" charset="-122"/>
-                <a:cs typeface="Times New Roman" pitchFamily="34" charset="-120"/>
-              </a:rPr>
-              <a:t>Formula: </a:t>
-            </a:r>
-            <a:pPr algn="l" indent="0" marL="0">
-              <a:spcAft>
-                <a:spcPts val="800"/>
-              </a:spcAft>
-              <a:buNone/>
-            </a:pPr>
-            <a:r>
-              <a:rPr lang="en-US" sz="3600" dirty="0">
-                <a:solidFill>
-                  <a:srgbClr val="111111"/>
-                </a:solidFill>
-                <a:latin typeface="Times New Roman" pitchFamily="34" charset="0"/>
-                <a:ea typeface="Times New Roman" pitchFamily="34" charset="-122"/>
-                <a:cs typeface="Times New Roman" pitchFamily="34" charset="-120"/>
-              </a:rPr>
-              <a:t>Population change = (births − deaths) + (immigrants − emigrants).</a:t>
-            </a:r>
-            <a:endParaRPr lang="en-US" sz="3600" dirty="0"/>
-          </a:p>
-        </p:txBody>
-      </p:sp>
       <p:pic>
         <p:nvPicPr>
-          <p:cNvPr id="6" name="Image 0" descr="/home/claude/f4/img/v2/change_system_big.png">    </p:cNvPr>
+          <p:cNvPr id="3" name="Image 0" descr="/home/claude/f4/img/minesec_sheet.png">    </p:cNvPr>
           <p:cNvPicPr>
             <a:picLocks noChangeAspect="1"/>
           </p:cNvPicPr>
@@ -16800,8 +16602,8 @@
         </p:blipFill>
         <p:spPr>
           <a:xfrm>
-            <a:off x="5349240" y="2617506"/>
-            <a:ext cx="6659575" cy="2601397"/>
+            <a:off x="0" y="658368"/>
+            <a:ext cx="5120640" cy="5833872"/>
           </a:xfrm>
           <a:prstGeom prst="rect">
             <a:avLst/>
@@ -16810,14 +16612,14 @@
       </p:pic>
       <p:sp>
         <p:nvSpPr>
-          <p:cNvPr id="7" name="Text 4"/>
+          <p:cNvPr id="4" name="Text 1"/>
           <p:cNvSpPr/>
           <p:nvPr/>
         </p:nvSpPr>
         <p:spPr>
           <a:xfrm>
-            <a:off x="5349240" y="6089904"/>
-            <a:ext cx="6659575" cy="347472"/>
+            <a:off x="5349240" y="1005840"/>
+            <a:ext cx="6522415" cy="731520"/>
           </a:xfrm>
           <a:prstGeom prst="rect">
             <a:avLst/>
@@ -16826,24 +16628,124 @@
           <a:ln/>
         </p:spPr>
         <p:txBody>
-          <a:bodyPr wrap="square" lIns="0" tIns="0" rIns="0" bIns="0" rtlCol="0" anchor="ctr"/>
+          <a:bodyPr wrap="square" lIns="0" tIns="0" rIns="0" bIns="0" rtlCol="0" anchor="ctr">
+            <a:normAutofit/>
+          </a:bodyPr>
           <a:lstStyle/>
           <a:p>
             <a:pPr algn="ctr" indent="0" marL="0">
               <a:buNone/>
             </a:pPr>
             <a:r>
-              <a:rPr lang="en-US" sz="1600" i="1" dirty="0">
-                <a:solidFill>
-                  <a:srgbClr val="555555"/>
+              <a:rPr lang="en-US" sz="3600" b="1" dirty="0">
+                <a:solidFill>
+                  <a:srgbClr val="990011"/>
                 </a:solidFill>
                 <a:latin typeface="Times New Roman" pitchFamily="34" charset="0"/>
                 <a:ea typeface="Times New Roman" pitchFamily="34" charset="-122"/>
                 <a:cs typeface="Times New Roman" pitchFamily="34" charset="-120"/>
               </a:rPr>
-              <a:t>Illustration: the population change system</a:t>
-            </a:r>
-            <a:endParaRPr lang="en-US" sz="1600" dirty="0"/>
+              <a:t>1. Meaning of Population Growth</a:t>
+            </a:r>
+            <a:endParaRPr lang="en-US" sz="3600" dirty="0"/>
+          </a:p>
+        </p:txBody>
+      </p:sp>
+      <p:sp>
+        <p:nvSpPr>
+          <p:cNvPr id="5" name="Text 2"/>
+          <p:cNvSpPr/>
+          <p:nvPr/>
+        </p:nvSpPr>
+        <p:spPr>
+          <a:xfrm>
+            <a:off x="5349240" y="1737360"/>
+            <a:ext cx="6522415" cy="457200"/>
+          </a:xfrm>
+          <a:prstGeom prst="rect">
+            <a:avLst/>
+          </a:prstGeom>
+          <a:noFill/>
+          <a:ln/>
+        </p:spPr>
+        <p:txBody>
+          <a:bodyPr wrap="square" lIns="0" tIns="0" rIns="0" bIns="0" rtlCol="0" anchor="ctr"/>
+          <a:lstStyle/>
+          <a:p>
+            <a:pPr algn="l" indent="0" marL="0">
+              <a:buNone/>
+            </a:pPr>
+            <a:r>
+              <a:rPr lang="en-US" sz="3200" b="1" dirty="0">
+                <a:solidFill>
+                  <a:srgbClr val="990011"/>
+                </a:solidFill>
+                <a:latin typeface="Times New Roman" pitchFamily="34" charset="0"/>
+                <a:ea typeface="Times New Roman" pitchFamily="34" charset="-122"/>
+                <a:cs typeface="Times New Roman" pitchFamily="34" charset="-120"/>
+              </a:rPr>
+              <a:t>A) Types of Growth</a:t>
+            </a:r>
+            <a:endParaRPr lang="en-US" sz="3200" dirty="0"/>
+          </a:p>
+        </p:txBody>
+      </p:sp>
+      <p:sp>
+        <p:nvSpPr>
+          <p:cNvPr id="6" name="Text 3"/>
+          <p:cNvSpPr/>
+          <p:nvPr/>
+        </p:nvSpPr>
+        <p:spPr>
+          <a:xfrm>
+            <a:off x="5349240" y="2240280"/>
+            <a:ext cx="6522415" cy="4206240"/>
+          </a:xfrm>
+          <a:prstGeom prst="rect">
+            <a:avLst/>
+          </a:prstGeom>
+          <a:noFill/>
+          <a:ln/>
+        </p:spPr>
+        <p:txBody>
+          <a:bodyPr wrap="square" lIns="0" tIns="0" rIns="0" bIns="0" rtlCol="0" anchor="t"/>
+          <a:lstStyle/>
+          <a:p>
+            <a:pPr algn="l" indent="0" marL="0">
+              <a:spcAft>
+                <a:spcPts val="800"/>
+              </a:spcAft>
+              <a:buNone/>
+            </a:pPr>
+            <a:r>
+              <a:rPr lang="en-US" sz="4000" b="1" dirty="0">
+                <a:solidFill>
+                  <a:srgbClr val="111111"/>
+                </a:solidFill>
+                <a:latin typeface="Times New Roman" pitchFamily="34" charset="0"/>
+                <a:ea typeface="Times New Roman" pitchFamily="34" charset="-122"/>
+                <a:cs typeface="Times New Roman" pitchFamily="34" charset="-120"/>
+              </a:rPr>
+              <a:t>Zero growth: </a:t>
+            </a:r>
+            <a:pPr algn="l" indent="0" marL="0">
+              <a:spcAft>
+                <a:spcPts val="800"/>
+              </a:spcAft>
+              <a:buNone/>
+            </a:pPr>
+            <a:r>
+              <a:rPr lang="en-US" sz="4000" dirty="0">
+                <a:solidFill>
+                  <a:srgbClr val="111111"/>
+                </a:solidFill>
+                <a:latin typeface="Times New Roman" pitchFamily="34" charset="0"/>
+                <a:ea typeface="Times New Roman" pitchFamily="34" charset="-122"/>
+                <a:cs typeface="Times New Roman" pitchFamily="34" charset="-120"/>
+              </a:rPr>
+              <a:t>The population stays stable because additions equal losses. Some European countries, such as France, are close to zero growth.</a:t>
+            </a:r>
+            <a:endParaRPr lang="en-US" sz="4000" dirty="0"/>
           </a:p>
         </p:txBody>
       </p:sp>
@@ -16959,9 +16861,170 @@
           </a:p>
         </p:txBody>
       </p:sp>
+      <p:sp>
+        <p:nvSpPr>
+          <p:cNvPr id="3" name="Text 1"/>
+          <p:cNvSpPr/>
+          <p:nvPr/>
+        </p:nvSpPr>
+        <p:spPr>
+          <a:xfrm>
+            <a:off x="365760" y="1005840"/>
+            <a:ext cx="11460175" cy="731520"/>
+          </a:xfrm>
+          <a:prstGeom prst="rect">
+            <a:avLst/>
+          </a:prstGeom>
+          <a:noFill/>
+          <a:ln/>
+        </p:spPr>
+        <p:txBody>
+          <a:bodyPr wrap="square" lIns="0" tIns="0" rIns="0" bIns="0" rtlCol="0" anchor="ctr">
+            <a:normAutofit/>
+          </a:bodyPr>
+          <a:lstStyle/>
+          <a:p>
+            <a:pPr algn="ctr" indent="0" marL="0">
+              <a:buNone/>
+            </a:pPr>
+            <a:r>
+              <a:rPr lang="en-US" sz="3600" b="1" dirty="0">
+                <a:solidFill>
+                  <a:srgbClr val="990011"/>
+                </a:solidFill>
+                <a:latin typeface="Times New Roman" pitchFamily="34" charset="0"/>
+                <a:ea typeface="Times New Roman" pitchFamily="34" charset="-122"/>
+                <a:cs typeface="Times New Roman" pitchFamily="34" charset="-120"/>
+              </a:rPr>
+              <a:t>1. Meaning of Population Growth</a:t>
+            </a:r>
+            <a:endParaRPr lang="en-US" sz="3600" dirty="0"/>
+          </a:p>
+        </p:txBody>
+      </p:sp>
+      <p:sp>
+        <p:nvSpPr>
+          <p:cNvPr id="4" name="Text 2"/>
+          <p:cNvSpPr/>
+          <p:nvPr/>
+        </p:nvSpPr>
+        <p:spPr>
+          <a:xfrm>
+            <a:off x="365760" y="1737360"/>
+            <a:ext cx="6035040" cy="457200"/>
+          </a:xfrm>
+          <a:prstGeom prst="rect">
+            <a:avLst/>
+          </a:prstGeom>
+          <a:noFill/>
+          <a:ln/>
+        </p:spPr>
+        <p:txBody>
+          <a:bodyPr wrap="square" lIns="0" tIns="0" rIns="0" bIns="0" rtlCol="0" anchor="ctr">
+            <a:normAutofit/>
+          </a:bodyPr>
+          <a:lstStyle/>
+          <a:p>
+            <a:pPr algn="l" indent="0" marL="0">
+              <a:buNone/>
+            </a:pPr>
+            <a:r>
+              <a:rPr lang="en-US" sz="3000" b="1" dirty="0">
+                <a:solidFill>
+                  <a:srgbClr val="990011"/>
+                </a:solidFill>
+                <a:latin typeface="Times New Roman" pitchFamily="34" charset="0"/>
+                <a:ea typeface="Times New Roman" pitchFamily="34" charset="-122"/>
+                <a:cs typeface="Times New Roman" pitchFamily="34" charset="-120"/>
+              </a:rPr>
+              <a:t>B) The Population Change System</a:t>
+            </a:r>
+            <a:endParaRPr lang="en-US" sz="3000" dirty="0"/>
+          </a:p>
+        </p:txBody>
+      </p:sp>
+      <p:sp>
+        <p:nvSpPr>
+          <p:cNvPr id="5" name="Text 3"/>
+          <p:cNvSpPr/>
+          <p:nvPr/>
+        </p:nvSpPr>
+        <p:spPr>
+          <a:xfrm>
+            <a:off x="365760" y="2240280"/>
+            <a:ext cx="6035040" cy="4160520"/>
+          </a:xfrm>
+          <a:prstGeom prst="rect">
+            <a:avLst/>
+          </a:prstGeom>
+          <a:noFill/>
+          <a:ln/>
+        </p:spPr>
+        <p:txBody>
+          <a:bodyPr wrap="square" lIns="0" tIns="0" rIns="0" bIns="0" rtlCol="0" anchor="t"/>
+          <a:lstStyle/>
+          <a:p>
+            <a:pPr algn="l" indent="0" marL="0">
+              <a:spcAft>
+                <a:spcPts val="800"/>
+              </a:spcAft>
+              <a:buNone/>
+            </a:pPr>
+            <a:r>
+              <a:rPr lang="en-US" sz="3200" i="1" dirty="0">
+                <a:solidFill>
+                  <a:srgbClr val="111111"/>
+                </a:solidFill>
+                <a:latin typeface="Times New Roman" pitchFamily="34" charset="0"/>
+                <a:ea typeface="Times New Roman" pitchFamily="34" charset="-122"/>
+                <a:cs typeface="Times New Roman" pitchFamily="34" charset="-120"/>
+              </a:rPr>
+              <a:t>The population change system works as follows:</a:t>
+            </a:r>
+            <a:endParaRPr lang="en-US" sz="3200" dirty="0"/>
+          </a:p>
+          <a:p>
+            <a:pPr algn="l" indent="0" marL="0">
+              <a:spcAft>
+                <a:spcPts val="800"/>
+              </a:spcAft>
+              <a:buNone/>
+            </a:pPr>
+            <a:r>
+              <a:rPr lang="en-US" sz="3200" b="1" dirty="0">
+                <a:solidFill>
+                  <a:srgbClr val="111111"/>
+                </a:solidFill>
+                <a:latin typeface="Times New Roman" pitchFamily="34" charset="0"/>
+                <a:ea typeface="Times New Roman" pitchFamily="34" charset="-122"/>
+                <a:cs typeface="Times New Roman" pitchFamily="34" charset="-120"/>
+              </a:rPr>
+              <a:t>The formula: </a:t>
+            </a:r>
+            <a:pPr algn="l" indent="0" marL="0">
+              <a:spcAft>
+                <a:spcPts val="800"/>
+              </a:spcAft>
+              <a:buNone/>
+            </a:pPr>
+            <a:r>
+              <a:rPr lang="en-US" sz="3200" dirty="0">
+                <a:solidFill>
+                  <a:srgbClr val="111111"/>
+                </a:solidFill>
+                <a:latin typeface="Times New Roman" pitchFamily="34" charset="0"/>
+                <a:ea typeface="Times New Roman" pitchFamily="34" charset="-122"/>
+                <a:cs typeface="Times New Roman" pitchFamily="34" charset="-120"/>
+              </a:rPr>
+              <a:t>Population change = (births − deaths) + (immigrants − emigrants). Births and immigrants are the inputs of the system, while deaths and emigrants are its outputs.</a:t>
+            </a:r>
+            <a:endParaRPr lang="en-US" sz="3200" dirty="0"/>
+          </a:p>
+        </p:txBody>
+      </p:sp>
       <p:pic>
         <p:nvPicPr>
-          <p:cNvPr id="3" name="Image 0" descr="/home/claude/f4/img/minesec_sheet.png">    </p:cNvPr>
+          <p:cNvPr id="6" name="Image 0" descr="/home/claude/f4/img/v2/change_system_big.png">    </p:cNvPr>
           <p:cNvPicPr>
             <a:picLocks noChangeAspect="1"/>
           </p:cNvPicPr>
@@ -16975,8 +17038,8 @@
         </p:blipFill>
         <p:spPr>
           <a:xfrm>
-            <a:off x="0" y="658368"/>
-            <a:ext cx="3840480" cy="5833872"/>
+            <a:off x="6537960" y="2849678"/>
+            <a:ext cx="5470855" cy="2137053"/>
           </a:xfrm>
           <a:prstGeom prst="rect">
             <a:avLst/>
@@ -16985,14 +17048,14 @@
       </p:pic>
       <p:sp>
         <p:nvSpPr>
-          <p:cNvPr id="4" name="Text 1"/>
+          <p:cNvPr id="7" name="Text 4"/>
           <p:cNvSpPr/>
           <p:nvPr/>
         </p:nvSpPr>
         <p:spPr>
           <a:xfrm>
-            <a:off x="4069080" y="1005840"/>
-            <a:ext cx="7802575" cy="731520"/>
+            <a:off x="6537960" y="6089904"/>
+            <a:ext cx="5470855" cy="347472"/>
           </a:xfrm>
           <a:prstGeom prst="rect">
             <a:avLst/>
@@ -17001,161 +17064,24 @@
           <a:ln/>
         </p:spPr>
         <p:txBody>
-          <a:bodyPr wrap="square" lIns="0" tIns="0" rIns="0" bIns="0" rtlCol="0" anchor="ctr">
-            <a:normAutofit/>
-          </a:bodyPr>
+          <a:bodyPr wrap="square" lIns="0" tIns="0" rIns="0" bIns="0" rtlCol="0" anchor="ctr"/>
           <a:lstStyle/>
           <a:p>
             <a:pPr algn="ctr" indent="0" marL="0">
               <a:buNone/>
             </a:pPr>
             <a:r>
-              <a:rPr lang="en-US" sz="3600" b="1" dirty="0">
-                <a:solidFill>
-                  <a:srgbClr val="990011"/>
+              <a:rPr lang="en-US" sz="1600" i="1" dirty="0">
+                <a:solidFill>
+                  <a:srgbClr val="555555"/>
                 </a:solidFill>
                 <a:latin typeface="Times New Roman" pitchFamily="34" charset="0"/>
                 <a:ea typeface="Times New Roman" pitchFamily="34" charset="-122"/>
                 <a:cs typeface="Times New Roman" pitchFamily="34" charset="-120"/>
               </a:rPr>
-              <a:t>1. Population Growth and the Population Change System</a:t>
-            </a:r>
-            <a:endParaRPr lang="en-US" sz="3600" dirty="0"/>
-          </a:p>
-        </p:txBody>
-      </p:sp>
-      <p:sp>
-        <p:nvSpPr>
-          <p:cNvPr id="5" name="Text 2"/>
-          <p:cNvSpPr/>
-          <p:nvPr/>
-        </p:nvSpPr>
-        <p:spPr>
-          <a:xfrm>
-            <a:off x="4069080" y="1737360"/>
-            <a:ext cx="7802575" cy="457200"/>
-          </a:xfrm>
-          <a:prstGeom prst="rect">
-            <a:avLst/>
-          </a:prstGeom>
-          <a:noFill/>
-          <a:ln/>
-        </p:spPr>
-        <p:txBody>
-          <a:bodyPr wrap="square" lIns="0" tIns="0" rIns="0" bIns="0" rtlCol="0" anchor="ctr"/>
-          <a:lstStyle/>
-          <a:p>
-            <a:pPr algn="l" indent="0" marL="0">
-              <a:buNone/>
-            </a:pPr>
-            <a:r>
-              <a:rPr lang="en-US" sz="3200" b="1" dirty="0">
-                <a:solidFill>
-                  <a:srgbClr val="990011"/>
-                </a:solidFill>
-                <a:latin typeface="Times New Roman" pitchFamily="34" charset="0"/>
-                <a:ea typeface="Times New Roman" pitchFamily="34" charset="-122"/>
-                <a:cs typeface="Times New Roman" pitchFamily="34" charset="-120"/>
-              </a:rPr>
-              <a:t>B) The Population Change System</a:t>
-            </a:r>
-            <a:endParaRPr lang="en-US" sz="3200" dirty="0"/>
-          </a:p>
-        </p:txBody>
-      </p:sp>
-      <p:sp>
-        <p:nvSpPr>
-          <p:cNvPr id="6" name="Text 3"/>
-          <p:cNvSpPr/>
-          <p:nvPr/>
-        </p:nvSpPr>
-        <p:spPr>
-          <a:xfrm>
-            <a:off x="4069080" y="2240280"/>
-            <a:ext cx="7802575" cy="4206240"/>
-          </a:xfrm>
-          <a:prstGeom prst="rect">
-            <a:avLst/>
-          </a:prstGeom>
-          <a:noFill/>
-          <a:ln/>
-        </p:spPr>
-        <p:txBody>
-          <a:bodyPr wrap="square" lIns="0" tIns="0" rIns="0" bIns="0" rtlCol="0" anchor="t"/>
-          <a:lstStyle/>
-          <a:p>
-            <a:pPr algn="l" indent="0" marL="0">
-              <a:spcAft>
-                <a:spcPts val="800"/>
-              </a:spcAft>
-              <a:buNone/>
-            </a:pPr>
-            <a:r>
-              <a:rPr lang="en-US" sz="4000" b="1" dirty="0">
-                <a:solidFill>
-                  <a:srgbClr val="111111"/>
-                </a:solidFill>
-                <a:latin typeface="Times New Roman" pitchFamily="34" charset="0"/>
-                <a:ea typeface="Times New Roman" pitchFamily="34" charset="-122"/>
-                <a:cs typeface="Times New Roman" pitchFamily="34" charset="-120"/>
-              </a:rPr>
-              <a:t>Natural increase: </a:t>
-            </a:r>
-            <a:pPr algn="l" indent="0" marL="0">
-              <a:spcAft>
-                <a:spcPts val="800"/>
-              </a:spcAft>
-              <a:buNone/>
-            </a:pPr>
-            <a:r>
-              <a:rPr lang="en-US" sz="4000" dirty="0">
-                <a:solidFill>
-                  <a:srgbClr val="111111"/>
-                </a:solidFill>
-                <a:latin typeface="Times New Roman" pitchFamily="34" charset="0"/>
-                <a:ea typeface="Times New Roman" pitchFamily="34" charset="-122"/>
-                <a:cs typeface="Times New Roman" pitchFamily="34" charset="-120"/>
-              </a:rPr>
-              <a:t>It happens when the crude birth rate is higher than the crude death rate, as in Cameroon.</a:t>
-            </a:r>
-            <a:endParaRPr lang="en-US" sz="4000" dirty="0"/>
-          </a:p>
-          <a:p>
-            <a:pPr algn="l" indent="0" marL="0">
-              <a:spcAft>
-                <a:spcPts val="800"/>
-              </a:spcAft>
-              <a:buNone/>
-            </a:pPr>
-            <a:r>
-              <a:rPr lang="en-US" sz="4000" b="1" dirty="0">
-                <a:solidFill>
-                  <a:srgbClr val="111111"/>
-                </a:solidFill>
-                <a:latin typeface="Times New Roman" pitchFamily="34" charset="0"/>
-                <a:ea typeface="Times New Roman" pitchFamily="34" charset="-122"/>
-                <a:cs typeface="Times New Roman" pitchFamily="34" charset="-120"/>
-              </a:rPr>
-              <a:t>Natural decrease: </a:t>
-            </a:r>
-            <a:pPr algn="l" indent="0" marL="0">
-              <a:spcAft>
-                <a:spcPts val="800"/>
-              </a:spcAft>
-              <a:buNone/>
-            </a:pPr>
-            <a:r>
-              <a:rPr lang="en-US" sz="4000" dirty="0">
-                <a:solidFill>
-                  <a:srgbClr val="111111"/>
-                </a:solidFill>
-                <a:latin typeface="Times New Roman" pitchFamily="34" charset="0"/>
-                <a:ea typeface="Times New Roman" pitchFamily="34" charset="-122"/>
-                <a:cs typeface="Times New Roman" pitchFamily="34" charset="-120"/>
-              </a:rPr>
-              <a:t>It happens when deaths exceed births, as in Japan.</a:t>
-            </a:r>
-            <a:endParaRPr lang="en-US" sz="4000" dirty="0"/>
+              <a:t>Illustration: the population change system</a:t>
+            </a:r>
+            <a:endParaRPr lang="en-US" sz="1600" dirty="0"/>
           </a:p>
         </p:txBody>
       </p:sp>
@@ -17288,7 +17214,7 @@
         <p:spPr>
           <a:xfrm>
             <a:off x="0" y="658368"/>
-            <a:ext cx="5120640" cy="5833872"/>
+            <a:ext cx="3840480" cy="5833872"/>
           </a:xfrm>
           <a:prstGeom prst="rect">
             <a:avLst/>
@@ -17303,8 +17229,8 @@
         </p:nvSpPr>
         <p:spPr>
           <a:xfrm>
-            <a:off x="5349240" y="1005840"/>
-            <a:ext cx="6522415" cy="731520"/>
+            <a:off x="4069080" y="1005840"/>
+            <a:ext cx="7802575" cy="731520"/>
           </a:xfrm>
           <a:prstGeom prst="rect">
             <a:avLst/>
@@ -17330,7 +17256,7 @@
                 <a:ea typeface="Times New Roman" pitchFamily="34" charset="-122"/>
                 <a:cs typeface="Times New Roman" pitchFamily="34" charset="-120"/>
               </a:rPr>
-              <a:t>1. Population Growth and the Population Change System</a:t>
+              <a:t>1. Meaning of Population Growth</a:t>
             </a:r>
             <a:endParaRPr lang="en-US" sz="3600" dirty="0"/>
           </a:p>
@@ -17344,8 +17270,8 @@
         </p:nvSpPr>
         <p:spPr>
           <a:xfrm>
-            <a:off x="5349240" y="1737360"/>
-            <a:ext cx="6522415" cy="457200"/>
+            <a:off x="4069080" y="1737360"/>
+            <a:ext cx="7802575" cy="457200"/>
           </a:xfrm>
           <a:prstGeom prst="rect">
             <a:avLst/>
@@ -17361,7 +17287,7 @@
               <a:buNone/>
             </a:pPr>
             <a:r>
-              <a:rPr lang="en-US" sz="2300" b="1" dirty="0">
+              <a:rPr lang="en-US" sz="3200" b="1" dirty="0">
                 <a:solidFill>
                   <a:srgbClr val="990011"/>
                 </a:solidFill>
@@ -17369,9 +17295,9 @@
                 <a:ea typeface="Times New Roman" pitchFamily="34" charset="-122"/>
                 <a:cs typeface="Times New Roman" pitchFamily="34" charset="-120"/>
               </a:rPr>
-              <a:t>B) The Population Change System (continued)</a:t>
-            </a:r>
-            <a:endParaRPr lang="en-US" sz="2300" dirty="0"/>
+              <a:t>B) The Population Change System</a:t>
+            </a:r>
+            <a:endParaRPr lang="en-US" sz="3200" dirty="0"/>
           </a:p>
         </p:txBody>
       </p:sp>
@@ -17383,8 +17309,8 @@
         </p:nvSpPr>
         <p:spPr>
           <a:xfrm>
-            <a:off x="5349240" y="2240280"/>
-            <a:ext cx="6522415" cy="4206240"/>
+            <a:off x="4069080" y="2240280"/>
+            <a:ext cx="7802575" cy="4206240"/>
           </a:xfrm>
           <a:prstGeom prst="rect">
             <a:avLst/>
@@ -17411,7 +17337,7 @@
                 <a:ea typeface="Times New Roman" pitchFamily="34" charset="-122"/>
                 <a:cs typeface="Times New Roman" pitchFamily="34" charset="-120"/>
               </a:rPr>
-              <a:t>Net migration: </a:t>
+              <a:t>Natural increase and decrease: </a:t>
             </a:r>
             <a:pPr algn="l" indent="0" marL="0">
               <a:spcAft>
@@ -17428,7 +17354,7 @@
                 <a:ea typeface="Times New Roman" pitchFamily="34" charset="-122"/>
                 <a:cs typeface="Times New Roman" pitchFamily="34" charset="-120"/>
               </a:rPr>
-              <a:t>Immigrants − emigrants; it is positive in Garoua and Douala, which receive many migrants.</a:t>
+              <a:t>Natural increase happens when the birth rate is higher than the death rate, as in Cameroon. Natural decrease happens when deaths exceed births, as in Japan.</a:t>
             </a:r>
             <a:endParaRPr lang="en-US" sz="4000" dirty="0"/>
           </a:p>
@@ -17563,7 +17489,7 @@
         <p:spPr>
           <a:xfrm>
             <a:off x="0" y="658368"/>
-            <a:ext cx="1463040" cy="5833872"/>
+            <a:ext cx="2468880" cy="5833872"/>
           </a:xfrm>
           <a:prstGeom prst="rect">
             <a:avLst/>
@@ -17578,8 +17504,8 @@
         </p:nvSpPr>
         <p:spPr>
           <a:xfrm>
-            <a:off x="1691640" y="1005840"/>
-            <a:ext cx="10180015" cy="731520"/>
+            <a:off x="2697480" y="1005840"/>
+            <a:ext cx="9174175" cy="731520"/>
           </a:xfrm>
           <a:prstGeom prst="rect">
             <a:avLst/>
@@ -17605,7 +17531,7 @@
                 <a:ea typeface="Times New Roman" pitchFamily="34" charset="-122"/>
                 <a:cs typeface="Times New Roman" pitchFamily="34" charset="-120"/>
               </a:rPr>
-              <a:t>2. Determinants of Population Growth</a:t>
+              <a:t>1. Meaning of Population Growth</a:t>
             </a:r>
             <a:endParaRPr lang="en-US" sz="3600" dirty="0"/>
           </a:p>
@@ -17619,8 +17545,8 @@
         </p:nvSpPr>
         <p:spPr>
           <a:xfrm>
-            <a:off x="1691640" y="1737360"/>
-            <a:ext cx="10180015" cy="457200"/>
+            <a:off x="2697480" y="1737360"/>
+            <a:ext cx="9174175" cy="457200"/>
           </a:xfrm>
           <a:prstGeom prst="rect">
             <a:avLst/>
@@ -17644,7 +17570,7 @@
                 <a:ea typeface="Times New Roman" pitchFamily="34" charset="-122"/>
                 <a:cs typeface="Times New Roman" pitchFamily="34" charset="-120"/>
               </a:rPr>
-              <a:t>A) Fertility</a:t>
+              <a:t>B) The Population Change System</a:t>
             </a:r>
             <a:endParaRPr lang="en-US" sz="3200" dirty="0"/>
           </a:p>
@@ -17658,8 +17584,8 @@
         </p:nvSpPr>
         <p:spPr>
           <a:xfrm>
-            <a:off x="1691640" y="2240280"/>
-            <a:ext cx="10180015" cy="4206240"/>
+            <a:off x="2697480" y="2240280"/>
+            <a:ext cx="9174175" cy="4206240"/>
           </a:xfrm>
           <a:prstGeom prst="rect">
             <a:avLst/>
@@ -17678,7 +17604,7 @@
               <a:buNone/>
             </a:pPr>
             <a:r>
-              <a:rPr lang="en-US" sz="4000" i="1" dirty="0">
+              <a:rPr lang="en-US" sz="4000" b="1" dirty="0">
                 <a:solidFill>
                   <a:srgbClr val="111111"/>
                 </a:solidFill>
@@ -17686,11 +17612,8 @@
                 <a:ea typeface="Times New Roman" pitchFamily="34" charset="-122"/>
                 <a:cs typeface="Times New Roman" pitchFamily="34" charset="-120"/>
               </a:rPr>
-              <a:t>The factors of fertility are the following:</a:t>
-            </a:r>
-            <a:endParaRPr lang="en-US" sz="4000" dirty="0"/>
-          </a:p>
-          <a:p>
+              <a:t>Net migration: </a:t>
+            </a:r>
             <a:pPr algn="l" indent="0" marL="0">
               <a:spcAft>
                 <a:spcPts val="800"/>
@@ -17698,7 +17621,7 @@
               <a:buNone/>
             </a:pPr>
             <a:r>
-              <a:rPr lang="en-US" sz="4000" b="1" dirty="0">
+              <a:rPr lang="en-US" sz="4000" dirty="0">
                 <a:solidFill>
                   <a:srgbClr val="111111"/>
                 </a:solidFill>
@@ -17706,65 +17629,7 @@
                 <a:ea typeface="Times New Roman" pitchFamily="34" charset="-122"/>
                 <a:cs typeface="Times New Roman" pitchFamily="34" charset="-120"/>
               </a:rPr>
-              <a:t>Meaning: </a:t>
-            </a:r>
-            <a:pPr algn="l" indent="0" marL="0">
-              <a:spcAft>
-                <a:spcPts val="800"/>
-              </a:spcAft>
-              <a:buNone/>
-            </a:pPr>
-            <a:r>
-              <a:rPr lang="en-US" sz="4000" dirty="0">
-                <a:solidFill>
-                  <a:srgbClr val="111111"/>
-                </a:solidFill>
-                <a:latin typeface="Times New Roman" pitchFamily="34" charset="0"/>
-                <a:ea typeface="Times New Roman" pitchFamily="34" charset="-122"/>
-                <a:cs typeface="Times New Roman" pitchFamily="34" charset="-120"/>
-              </a:rPr>
-              <a:t>Fertility is the frequency of live births; it is the main driver of population growth.</a:t>
-            </a:r>
-            <a:endParaRPr lang="en-US" sz="4000" dirty="0"/>
-          </a:p>
-          <a:p>
-            <a:pPr algn="l" indent="0" marL="0">
-              <a:spcAft>
-                <a:spcPts val="800"/>
-              </a:spcAft>
-              <a:buNone/>
-            </a:pPr>
-            <a:r>
-              <a:rPr lang="en-US" sz="4000" b="1" dirty="0">
-                <a:solidFill>
-                  <a:srgbClr val="111111"/>
-                </a:solidFill>
-                <a:latin typeface="Times New Roman" pitchFamily="34" charset="0"/>
-                <a:ea typeface="Times New Roman" pitchFamily="34" charset="-122"/>
-                <a:cs typeface="Times New Roman" pitchFamily="34" charset="-120"/>
-              </a:rPr>
-              <a:t>Factors of high fertility:</a:t>
-            </a:r>
-            <a:endParaRPr lang="en-US" sz="4000" dirty="0"/>
-          </a:p>
-          <a:p>
-            <a:pPr algn="l" marL="342900" indent="-342900">
-              <a:spcAft>
-                <a:spcPts val="800"/>
-              </a:spcAft>
-              <a:buSzPct val="100000"/>
-              <a:buChar char="•"/>
-            </a:pPr>
-            <a:r>
-              <a:rPr lang="en-US" sz="4000" dirty="0">
-                <a:solidFill>
-                  <a:srgbClr val="111111"/>
-                </a:solidFill>
-                <a:latin typeface="Times New Roman" pitchFamily="34" charset="0"/>
-                <a:ea typeface="Times New Roman" pitchFamily="34" charset="-122"/>
-                <a:cs typeface="Times New Roman" pitchFamily="34" charset="-120"/>
-              </a:rPr>
-              <a:t>Early marriage.</a:t>
+              <a:t>Net migration is the number of immigrants minus the number of emigrants. It is positive in Garoua and Douala, which receive many migrants, and negative in the villages they leave.</a:t>
             </a:r>
             <a:endParaRPr lang="en-US" sz="4000" dirty="0"/>
           </a:p>
@@ -17899,7 +17764,7 @@
         <p:spPr>
           <a:xfrm>
             <a:off x="0" y="658368"/>
-            <a:ext cx="5120640" cy="5833872"/>
+            <a:ext cx="2468880" cy="5833872"/>
           </a:xfrm>
           <a:prstGeom prst="rect">
             <a:avLst/>
@@ -17914,8 +17779,8 @@
         </p:nvSpPr>
         <p:spPr>
           <a:xfrm>
-            <a:off x="5349240" y="1005840"/>
-            <a:ext cx="6522415" cy="731520"/>
+            <a:off x="2697480" y="1005840"/>
+            <a:ext cx="9174175" cy="731520"/>
           </a:xfrm>
           <a:prstGeom prst="rect">
             <a:avLst/>
@@ -17955,8 +17820,8 @@
         </p:nvSpPr>
         <p:spPr>
           <a:xfrm>
-            <a:off x="5349240" y="1737360"/>
-            <a:ext cx="6522415" cy="457200"/>
+            <a:off x="2697480" y="1737360"/>
+            <a:ext cx="9174175" cy="457200"/>
           </a:xfrm>
           <a:prstGeom prst="rect">
             <a:avLst/>
@@ -17980,7 +17845,7 @@
                 <a:ea typeface="Times New Roman" pitchFamily="34" charset="-122"/>
                 <a:cs typeface="Times New Roman" pitchFamily="34" charset="-120"/>
               </a:rPr>
-              <a:t>A) Fertility (continued)</a:t>
+              <a:t>A) Fertility</a:t>
             </a:r>
             <a:endParaRPr lang="en-US" sz="3200" dirty="0"/>
           </a:p>
@@ -17994,8 +17859,8 @@
         </p:nvSpPr>
         <p:spPr>
           <a:xfrm>
-            <a:off x="5349240" y="2240280"/>
-            <a:ext cx="6522415" cy="4206240"/>
+            <a:off x="2697480" y="2240280"/>
+            <a:ext cx="9174175" cy="4206240"/>
           </a:xfrm>
           <a:prstGeom prst="rect">
             <a:avLst/>
@@ -18007,15 +17872,14 @@
           <a:bodyPr wrap="square" lIns="0" tIns="0" rIns="0" bIns="0" rtlCol="0" anchor="t"/>
           <a:lstStyle/>
           <a:p>
-            <a:pPr algn="l" marL="342900" indent="-342900">
+            <a:pPr algn="l" indent="0" marL="0">
               <a:spcAft>
                 <a:spcPts val="800"/>
               </a:spcAft>
-              <a:buSzPct val="100000"/>
-              <a:buChar char="•"/>
-            </a:pPr>
-            <a:r>
-              <a:rPr lang="en-US" sz="4000" dirty="0">
+              <a:buNone/>
+            </a:pPr>
+            <a:r>
+              <a:rPr lang="en-US" sz="4000" i="1" dirty="0">
                 <a:solidFill>
                   <a:srgbClr val="111111"/>
                 </a:solidFill>
@@ -18023,20 +17887,19 @@
                 <a:ea typeface="Times New Roman" pitchFamily="34" charset="-122"/>
                 <a:cs typeface="Times New Roman" pitchFamily="34" charset="-120"/>
               </a:rPr>
-              <a:t>The value given to large families.</a:t>
+              <a:t>Fertility, the main driver of population growth, depends on the following factors:</a:t>
             </a:r>
             <a:endParaRPr lang="en-US" sz="4000" dirty="0"/>
           </a:p>
           <a:p>
-            <a:pPr algn="l" marL="342900" indent="-342900">
+            <a:pPr algn="l" indent="0" marL="0">
               <a:spcAft>
                 <a:spcPts val="800"/>
               </a:spcAft>
-              <a:buSzPct val="100000"/>
-              <a:buChar char="•"/>
-            </a:pPr>
-            <a:r>
-              <a:rPr lang="en-US" sz="4000" dirty="0">
+              <a:buNone/>
+            </a:pPr>
+            <a:r>
+              <a:rPr lang="en-US" sz="4000" b="1" dirty="0">
                 <a:solidFill>
                   <a:srgbClr val="111111"/>
                 </a:solidFill>
@@ -18044,17 +17907,13 @@
                 <a:ea typeface="Times New Roman" pitchFamily="34" charset="-122"/>
                 <a:cs typeface="Times New Roman" pitchFamily="34" charset="-120"/>
               </a:rPr>
-              <a:t>The need for farm labour.</a:t>
-            </a:r>
-            <a:endParaRPr lang="en-US" sz="4000" dirty="0"/>
-          </a:p>
-          <a:p>
-            <a:pPr algn="l" marL="342900" indent="-342900">
+              <a:t>Meaning: </a:t>
+            </a:r>
+            <a:pPr algn="l" indent="0" marL="0">
               <a:spcAft>
                 <a:spcPts val="800"/>
               </a:spcAft>
-              <a:buSzPct val="100000"/>
-              <a:buChar char="•"/>
+              <a:buNone/>
             </a:pPr>
             <a:r>
               <a:rPr lang="en-US" sz="4000" dirty="0">
@@ -18065,28 +17924,7 @@
                 <a:ea typeface="Times New Roman" pitchFamily="34" charset="-122"/>
                 <a:cs typeface="Times New Roman" pitchFamily="34" charset="-120"/>
               </a:rPr>
-              <a:t>High infant mortality.</a:t>
-            </a:r>
-            <a:endParaRPr lang="en-US" sz="4000" dirty="0"/>
-          </a:p>
-          <a:p>
-            <a:pPr algn="l" marL="342900" indent="-342900">
-              <a:spcAft>
-                <a:spcPts val="800"/>
-              </a:spcAft>
-              <a:buSzPct val="100000"/>
-              <a:buChar char="•"/>
-            </a:pPr>
-            <a:r>
-              <a:rPr lang="en-US" sz="4000" dirty="0">
-                <a:solidFill>
-                  <a:srgbClr val="111111"/>
-                </a:solidFill>
-                <a:latin typeface="Times New Roman" pitchFamily="34" charset="0"/>
-                <a:ea typeface="Times New Roman" pitchFamily="34" charset="-122"/>
-                <a:cs typeface="Times New Roman" pitchFamily="34" charset="-120"/>
-              </a:rPr>
-              <a:t>Low education of girls.</a:t>
+              <a:t>Fertility is the frequency of live births in a population. It is the main determinant of population growth.</a:t>
             </a:r>
             <a:endParaRPr lang="en-US" sz="4000" dirty="0"/>
           </a:p>
@@ -18254,7 +18092,7 @@
         <p:spPr>
           <a:xfrm>
             <a:off x="365760" y="1737360"/>
-            <a:ext cx="5120640" cy="457200"/>
+            <a:ext cx="6035040" cy="457200"/>
           </a:xfrm>
           <a:prstGeom prst="rect">
             <a:avLst/>
@@ -18295,7 +18133,7 @@
         <p:spPr>
           <a:xfrm>
             <a:off x="365760" y="2240280"/>
-            <a:ext cx="4846320" cy="4160520"/>
+            <a:ext cx="6035040" cy="4160520"/>
           </a:xfrm>
           <a:prstGeom prst="rect">
             <a:avLst/>
@@ -18314,7 +18152,7 @@
               <a:buNone/>
             </a:pPr>
             <a:r>
-              <a:rPr lang="en-US" sz="3600" b="1" dirty="0">
+              <a:rPr lang="en-US" sz="3200" b="1" dirty="0">
                 <a:solidFill>
                   <a:srgbClr val="111111"/>
                 </a:solidFill>
@@ -18322,7 +18160,7 @@
                 <a:ea typeface="Times New Roman" pitchFamily="34" charset="-122"/>
                 <a:cs typeface="Times New Roman" pitchFamily="34" charset="-120"/>
               </a:rPr>
-              <a:t>Example: </a:t>
+              <a:t>Factors of high fertility: </a:t>
             </a:r>
             <a:pPr algn="l" indent="0" marL="0">
               <a:spcAft>
@@ -18331,7 +18169,7 @@
               <a:buNone/>
             </a:pPr>
             <a:r>
-              <a:rPr lang="en-US" sz="3600" dirty="0">
+              <a:rPr lang="en-US" sz="3200" dirty="0">
                 <a:solidFill>
                   <a:srgbClr val="111111"/>
                 </a:solidFill>
@@ -18339,9 +18177,9 @@
                 <a:ea typeface="Times New Roman" pitchFamily="34" charset="-122"/>
                 <a:cs typeface="Times New Roman" pitchFamily="34" charset="-120"/>
               </a:rPr>
-              <a:t>In rural North Cameroon, many women have more than five children.</a:t>
-            </a:r>
-            <a:endParaRPr lang="en-US" sz="3600" dirty="0"/>
+              <a:t>Early marriage, the value given to large families, the need for farm labour and high infant mortality keep fertility high. In rural North Cameroon, where few girls go to school, many women have more than five children.</a:t>
+            </a:r>
+            <a:endParaRPr lang="en-US" sz="3200" dirty="0"/>
           </a:p>
         </p:txBody>
       </p:sp>
@@ -18361,8 +18199,8 @@
         </p:blipFill>
         <p:spPr>
           <a:xfrm>
-            <a:off x="5349240" y="2617506"/>
-            <a:ext cx="6659575" cy="2601397"/>
+            <a:off x="6537960" y="2849678"/>
+            <a:ext cx="5470855" cy="2137053"/>
           </a:xfrm>
           <a:prstGeom prst="rect">
             <a:avLst/>
@@ -18377,8 +18215,8 @@
         </p:nvSpPr>
         <p:spPr>
           <a:xfrm>
-            <a:off x="5349240" y="6089904"/>
-            <a:ext cx="6659575" cy="347472"/>
+            <a:off x="6537960" y="6089904"/>
+            <a:ext cx="5470855" cy="347472"/>
           </a:xfrm>
           <a:prstGeom prst="rect">
             <a:avLst/>
@@ -18402,7 +18240,7 @@
                 <a:ea typeface="Times New Roman" pitchFamily="34" charset="-122"/>
                 <a:cs typeface="Times New Roman" pitchFamily="34" charset="-120"/>
               </a:rPr>
-              <a:t>Illustration: factors of births and deaths</a:t>
+              <a:t>Illustration: the factors of growth</a:t>
             </a:r>
             <a:endParaRPr lang="en-US" sz="1600" dirty="0"/>
           </a:p>
@@ -18537,7 +18375,7 @@
         <p:spPr>
           <a:xfrm>
             <a:off x="0" y="658368"/>
-            <a:ext cx="2468880" cy="5833872"/>
+            <a:ext cx="3840480" cy="5833872"/>
           </a:xfrm>
           <a:prstGeom prst="rect">
             <a:avLst/>
@@ -18552,8 +18390,8 @@
         </p:nvSpPr>
         <p:spPr>
           <a:xfrm>
-            <a:off x="2697480" y="1005840"/>
-            <a:ext cx="9174175" cy="731520"/>
+            <a:off x="4069080" y="1005840"/>
+            <a:ext cx="7802575" cy="731520"/>
           </a:xfrm>
           <a:prstGeom prst="rect">
             <a:avLst/>
@@ -18593,8 +18431,8 @@
         </p:nvSpPr>
         <p:spPr>
           <a:xfrm>
-            <a:off x="2697480" y="1737360"/>
-            <a:ext cx="9174175" cy="457200"/>
+            <a:off x="4069080" y="1737360"/>
+            <a:ext cx="7802575" cy="457200"/>
           </a:xfrm>
           <a:prstGeom prst="rect">
             <a:avLst/>
@@ -18632,8 +18470,8 @@
         </p:nvSpPr>
         <p:spPr>
           <a:xfrm>
-            <a:off x="2697480" y="2240280"/>
-            <a:ext cx="9174175" cy="4206240"/>
+            <a:off x="4069080" y="2240280"/>
+            <a:ext cx="7802575" cy="4206240"/>
           </a:xfrm>
           <a:prstGeom prst="rect">
             <a:avLst/>
@@ -18660,17 +18498,13 @@
                 <a:ea typeface="Times New Roman" pitchFamily="34" charset="-122"/>
                 <a:cs typeface="Times New Roman" pitchFamily="34" charset="-120"/>
               </a:rPr>
-              <a:t>Factors of low fertility:</a:t>
-            </a:r>
-            <a:endParaRPr lang="en-US" sz="4000" dirty="0"/>
-          </a:p>
-          <a:p>
-            <a:pPr algn="l" marL="342900" indent="-342900">
+              <a:t>Factors of low fertility: </a:t>
+            </a:r>
+            <a:pPr algn="l" indent="0" marL="0">
               <a:spcAft>
                 <a:spcPts val="800"/>
               </a:spcAft>
-              <a:buSzPct val="100000"/>
-              <a:buChar char="•"/>
+              <a:buNone/>
             </a:pPr>
             <a:r>
               <a:rPr lang="en-US" sz="4000" dirty="0">
@@ -18681,70 +18515,7 @@
                 <a:ea typeface="Times New Roman" pitchFamily="34" charset="-122"/>
                 <a:cs typeface="Times New Roman" pitchFamily="34" charset="-120"/>
               </a:rPr>
-              <a:t>The high cost of raising children.</a:t>
-            </a:r>
-            <a:endParaRPr lang="en-US" sz="4000" dirty="0"/>
-          </a:p>
-          <a:p>
-            <a:pPr algn="l" marL="342900" indent="-342900">
-              <a:spcAft>
-                <a:spcPts val="800"/>
-              </a:spcAft>
-              <a:buSzPct val="100000"/>
-              <a:buChar char="•"/>
-            </a:pPr>
-            <a:r>
-              <a:rPr lang="en-US" sz="4000" dirty="0">
-                <a:solidFill>
-                  <a:srgbClr val="111111"/>
-                </a:solidFill>
-                <a:latin typeface="Times New Roman" pitchFamily="34" charset="0"/>
-                <a:ea typeface="Times New Roman" pitchFamily="34" charset="-122"/>
-                <a:cs typeface="Times New Roman" pitchFamily="34" charset="-120"/>
-              </a:rPr>
-              <a:t>Wide use of family planning.</a:t>
-            </a:r>
-            <a:endParaRPr lang="en-US" sz="4000" dirty="0"/>
-          </a:p>
-          <a:p>
-            <a:pPr algn="l" marL="342900" indent="-342900">
-              <a:spcAft>
-                <a:spcPts val="800"/>
-              </a:spcAft>
-              <a:buSzPct val="100000"/>
-              <a:buChar char="•"/>
-            </a:pPr>
-            <a:r>
-              <a:rPr lang="en-US" sz="4000" dirty="0">
-                <a:solidFill>
-                  <a:srgbClr val="111111"/>
-                </a:solidFill>
-                <a:latin typeface="Times New Roman" pitchFamily="34" charset="0"/>
-                <a:ea typeface="Times New Roman" pitchFamily="34" charset="-122"/>
-                <a:cs typeface="Times New Roman" pitchFamily="34" charset="-120"/>
-              </a:rPr>
-              <a:t>Education and careers of women.</a:t>
-            </a:r>
-            <a:endParaRPr lang="en-US" sz="4000" dirty="0"/>
-          </a:p>
-          <a:p>
-            <a:pPr algn="l" marL="342900" indent="-342900">
-              <a:spcAft>
-                <a:spcPts val="800"/>
-              </a:spcAft>
-              <a:buSzPct val="100000"/>
-              <a:buChar char="•"/>
-            </a:pPr>
-            <a:r>
-              <a:rPr lang="en-US" sz="4000" dirty="0">
-                <a:solidFill>
-                  <a:srgbClr val="111111"/>
-                </a:solidFill>
-                <a:latin typeface="Times New Roman" pitchFamily="34" charset="0"/>
-                <a:ea typeface="Times New Roman" pitchFamily="34" charset="-122"/>
-                <a:cs typeface="Times New Roman" pitchFamily="34" charset="-120"/>
-              </a:rPr>
-              <a:t>Low infant mortality.</a:t>
+              <a:t>The high cost of raising children and the wide use of family planning reduce fertility. The education and careers of women and low infant mortality also reduce it.</a:t>
             </a:r>
             <a:endParaRPr lang="en-US" sz="4000" dirty="0"/>
           </a:p>
@@ -18879,7 +18650,7 @@
         <p:spPr>
           <a:xfrm>
             <a:off x="0" y="658368"/>
-            <a:ext cx="5120640" cy="5833872"/>
+            <a:ext cx="1463040" cy="5833872"/>
           </a:xfrm>
           <a:prstGeom prst="rect">
             <a:avLst/>
@@ -18894,8 +18665,8 @@
         </p:nvSpPr>
         <p:spPr>
           <a:xfrm>
-            <a:off x="5349240" y="1005840"/>
-            <a:ext cx="6522415" cy="731520"/>
+            <a:off x="1691640" y="1005840"/>
+            <a:ext cx="10180015" cy="731520"/>
           </a:xfrm>
           <a:prstGeom prst="rect">
             <a:avLst/>
@@ -18935,8 +18706,8 @@
         </p:nvSpPr>
         <p:spPr>
           <a:xfrm>
-            <a:off x="5349240" y="1737360"/>
-            <a:ext cx="6522415" cy="457200"/>
+            <a:off x="1691640" y="1737360"/>
+            <a:ext cx="10180015" cy="457200"/>
           </a:xfrm>
           <a:prstGeom prst="rect">
             <a:avLst/>
@@ -18974,8 +18745,8 @@
         </p:nvSpPr>
         <p:spPr>
           <a:xfrm>
-            <a:off x="5349240" y="2240280"/>
-            <a:ext cx="6522415" cy="4206240"/>
+            <a:off x="1691640" y="2240280"/>
+            <a:ext cx="10180015" cy="4206240"/>
           </a:xfrm>
           <a:prstGeom prst="rect">
             <a:avLst/>
@@ -19002,7 +18773,7 @@
                 <a:ea typeface="Times New Roman" pitchFamily="34" charset="-122"/>
                 <a:cs typeface="Times New Roman" pitchFamily="34" charset="-120"/>
               </a:rPr>
-              <a:t>The factors of mortality and migration are the following:</a:t>
+              <a:t>Mortality and migration depend on the following factors:</a:t>
             </a:r>
             <a:endParaRPr lang="en-US" sz="4000" dirty="0"/>
           </a:p>
@@ -19022,17 +18793,13 @@
                 <a:ea typeface="Times New Roman" pitchFamily="34" charset="-122"/>
                 <a:cs typeface="Times New Roman" pitchFamily="34" charset="-120"/>
               </a:rPr>
-              <a:t>Factors of high mortality:</a:t>
-            </a:r>
-            <a:endParaRPr lang="en-US" sz="4000" dirty="0"/>
-          </a:p>
-          <a:p>
-            <a:pPr algn="l" marL="342900" indent="-342900">
+              <a:t>Factors of high mortality: </a:t>
+            </a:r>
+            <a:pPr algn="l" indent="0" marL="0">
               <a:spcAft>
                 <a:spcPts val="800"/>
               </a:spcAft>
-              <a:buSzPct val="100000"/>
-              <a:buChar char="•"/>
+              <a:buNone/>
             </a:pPr>
             <a:r>
               <a:rPr lang="en-US" sz="4000" dirty="0">
@@ -19043,28 +18810,7 @@
                 <a:ea typeface="Times New Roman" pitchFamily="34" charset="-122"/>
                 <a:cs typeface="Times New Roman" pitchFamily="34" charset="-120"/>
               </a:rPr>
-              <a:t>Poor health care.</a:t>
-            </a:r>
-            <a:endParaRPr lang="en-US" sz="4000" dirty="0"/>
-          </a:p>
-          <a:p>
-            <a:pPr algn="l" marL="342900" indent="-342900">
-              <a:spcAft>
-                <a:spcPts val="800"/>
-              </a:spcAft>
-              <a:buSzPct val="100000"/>
-              <a:buChar char="•"/>
-            </a:pPr>
-            <a:r>
-              <a:rPr lang="en-US" sz="4000" dirty="0">
-                <a:solidFill>
-                  <a:srgbClr val="111111"/>
-                </a:solidFill>
-                <a:latin typeface="Times New Roman" pitchFamily="34" charset="0"/>
-                <a:ea typeface="Times New Roman" pitchFamily="34" charset="-122"/>
-                <a:cs typeface="Times New Roman" pitchFamily="34" charset="-120"/>
-              </a:rPr>
-              <a:t>Poor sanitation and hygiene.</a:t>
+              <a:t>Poor health care, poor sanitation and hygiene, malnutrition and famine keep death rates high. Disasters and wars also kill many people.</a:t>
             </a:r>
             <a:endParaRPr lang="en-US" sz="4000" dirty="0"/>
           </a:p>
@@ -19182,9 +18928,150 @@
           </a:p>
         </p:txBody>
       </p:sp>
+      <p:sp>
+        <p:nvSpPr>
+          <p:cNvPr id="3" name="Text 1"/>
+          <p:cNvSpPr/>
+          <p:nvPr/>
+        </p:nvSpPr>
+        <p:spPr>
+          <a:xfrm>
+            <a:off x="365760" y="1005840"/>
+            <a:ext cx="11460175" cy="731520"/>
+          </a:xfrm>
+          <a:prstGeom prst="rect">
+            <a:avLst/>
+          </a:prstGeom>
+          <a:noFill/>
+          <a:ln/>
+        </p:spPr>
+        <p:txBody>
+          <a:bodyPr wrap="square" lIns="0" tIns="0" rIns="0" bIns="0" rtlCol="0" anchor="ctr">
+            <a:normAutofit/>
+          </a:bodyPr>
+          <a:lstStyle/>
+          <a:p>
+            <a:pPr algn="ctr" indent="0" marL="0">
+              <a:buNone/>
+            </a:pPr>
+            <a:r>
+              <a:rPr lang="en-US" sz="3600" b="1" dirty="0">
+                <a:solidFill>
+                  <a:srgbClr val="990011"/>
+                </a:solidFill>
+                <a:latin typeface="Times New Roman" pitchFamily="34" charset="0"/>
+                <a:ea typeface="Times New Roman" pitchFamily="34" charset="-122"/>
+                <a:cs typeface="Times New Roman" pitchFamily="34" charset="-120"/>
+              </a:rPr>
+              <a:t>2. Determinants of Population Growth</a:t>
+            </a:r>
+            <a:endParaRPr lang="en-US" sz="3600" dirty="0"/>
+          </a:p>
+        </p:txBody>
+      </p:sp>
+      <p:sp>
+        <p:nvSpPr>
+          <p:cNvPr id="4" name="Text 2"/>
+          <p:cNvSpPr/>
+          <p:nvPr/>
+        </p:nvSpPr>
+        <p:spPr>
+          <a:xfrm>
+            <a:off x="365760" y="1737360"/>
+            <a:ext cx="6035040" cy="457200"/>
+          </a:xfrm>
+          <a:prstGeom prst="rect">
+            <a:avLst/>
+          </a:prstGeom>
+          <a:noFill/>
+          <a:ln/>
+        </p:spPr>
+        <p:txBody>
+          <a:bodyPr wrap="square" lIns="0" tIns="0" rIns="0" bIns="0" rtlCol="0" anchor="ctr">
+            <a:normAutofit/>
+          </a:bodyPr>
+          <a:lstStyle/>
+          <a:p>
+            <a:pPr algn="l" indent="0" marL="0">
+              <a:buNone/>
+            </a:pPr>
+            <a:r>
+              <a:rPr lang="en-US" sz="3000" b="1" dirty="0">
+                <a:solidFill>
+                  <a:srgbClr val="990011"/>
+                </a:solidFill>
+                <a:latin typeface="Times New Roman" pitchFamily="34" charset="0"/>
+                <a:ea typeface="Times New Roman" pitchFamily="34" charset="-122"/>
+                <a:cs typeface="Times New Roman" pitchFamily="34" charset="-120"/>
+              </a:rPr>
+              <a:t>B) Mortality and Migration</a:t>
+            </a:r>
+            <a:endParaRPr lang="en-US" sz="3000" dirty="0"/>
+          </a:p>
+        </p:txBody>
+      </p:sp>
+      <p:sp>
+        <p:nvSpPr>
+          <p:cNvPr id="5" name="Text 3"/>
+          <p:cNvSpPr/>
+          <p:nvPr/>
+        </p:nvSpPr>
+        <p:spPr>
+          <a:xfrm>
+            <a:off x="365760" y="2240280"/>
+            <a:ext cx="6035040" cy="4160520"/>
+          </a:xfrm>
+          <a:prstGeom prst="rect">
+            <a:avLst/>
+          </a:prstGeom>
+          <a:noFill/>
+          <a:ln/>
+        </p:spPr>
+        <p:txBody>
+          <a:bodyPr wrap="square" lIns="0" tIns="0" rIns="0" bIns="0" rtlCol="0" anchor="t"/>
+          <a:lstStyle/>
+          <a:p>
+            <a:pPr algn="l" indent="0" marL="0">
+              <a:spcAft>
+                <a:spcPts val="800"/>
+              </a:spcAft>
+              <a:buNone/>
+            </a:pPr>
+            <a:r>
+              <a:rPr lang="en-US" sz="3600" b="1" dirty="0">
+                <a:solidFill>
+                  <a:srgbClr val="111111"/>
+                </a:solidFill>
+                <a:latin typeface="Times New Roman" pitchFamily="34" charset="0"/>
+                <a:ea typeface="Times New Roman" pitchFamily="34" charset="-122"/>
+                <a:cs typeface="Times New Roman" pitchFamily="34" charset="-120"/>
+              </a:rPr>
+              <a:t>Factors of low mortality: </a:t>
+            </a:r>
+            <a:pPr algn="l" indent="0" marL="0">
+              <a:spcAft>
+                <a:spcPts val="800"/>
+              </a:spcAft>
+              <a:buNone/>
+            </a:pPr>
+            <a:r>
+              <a:rPr lang="en-US" sz="3600" dirty="0">
+                <a:solidFill>
+                  <a:srgbClr val="111111"/>
+                </a:solidFill>
+                <a:latin typeface="Times New Roman" pitchFamily="34" charset="0"/>
+                <a:ea typeface="Times New Roman" pitchFamily="34" charset="-122"/>
+                <a:cs typeface="Times New Roman" pitchFamily="34" charset="-120"/>
+              </a:rPr>
+              <a:t>Vaccines, hospitals, clean water and good food reduce deaths. A high standard of living allows people to live longer.</a:t>
+            </a:r>
+            <a:endParaRPr lang="en-US" sz="3600" dirty="0"/>
+          </a:p>
+        </p:txBody>
+      </p:sp>
       <p:pic>
         <p:nvPicPr>
-          <p:cNvPr id="3" name="Image 0" descr="/home/claude/f4/img/minesec_sheet.png">    </p:cNvPr>
+          <p:cNvPr id="6" name="Image 0" descr="/home/claude/f4/img/v2/usa_vaccine.jpg">    </p:cNvPr>
           <p:cNvPicPr>
             <a:picLocks noChangeAspect="1"/>
           </p:cNvPicPr>
@@ -19198,8 +19085,8 @@
         </p:blipFill>
         <p:spPr>
           <a:xfrm>
-            <a:off x="0" y="658368"/>
-            <a:ext cx="5120640" cy="5833872"/>
+            <a:off x="6537960" y="2400897"/>
+            <a:ext cx="5470855" cy="3034615"/>
           </a:xfrm>
           <a:prstGeom prst="rect">
             <a:avLst/>
@@ -19208,14 +19095,14 @@
       </p:pic>
       <p:sp>
         <p:nvSpPr>
-          <p:cNvPr id="4" name="Text 1"/>
+          <p:cNvPr id="7" name="Text 4"/>
           <p:cNvSpPr/>
           <p:nvPr/>
         </p:nvSpPr>
         <p:spPr>
           <a:xfrm>
-            <a:off x="5349240" y="1005840"/>
-            <a:ext cx="6522415" cy="731520"/>
+            <a:off x="6537960" y="6089904"/>
+            <a:ext cx="5470855" cy="347472"/>
           </a:xfrm>
           <a:prstGeom prst="rect">
             <a:avLst/>
@@ -19224,129 +19111,24 @@
           <a:ln/>
         </p:spPr>
         <p:txBody>
-          <a:bodyPr wrap="square" lIns="0" tIns="0" rIns="0" bIns="0" rtlCol="0" anchor="ctr">
-            <a:normAutofit/>
-          </a:bodyPr>
+          <a:bodyPr wrap="square" lIns="0" tIns="0" rIns="0" bIns="0" rtlCol="0" anchor="ctr"/>
           <a:lstStyle/>
           <a:p>
             <a:pPr algn="ctr" indent="0" marL="0">
               <a:buNone/>
             </a:pPr>
             <a:r>
-              <a:rPr lang="en-US" sz="3600" b="1" dirty="0">
-                <a:solidFill>
-                  <a:srgbClr val="990011"/>
+              <a:rPr lang="en-US" sz="1600" i="1" dirty="0">
+                <a:solidFill>
+                  <a:srgbClr val="555555"/>
                 </a:solidFill>
                 <a:latin typeface="Times New Roman" pitchFamily="34" charset="0"/>
                 <a:ea typeface="Times New Roman" pitchFamily="34" charset="-122"/>
                 <a:cs typeface="Times New Roman" pitchFamily="34" charset="-120"/>
               </a:rPr>
-              <a:t>2. Determinants of Population Growth</a:t>
-            </a:r>
-            <a:endParaRPr lang="en-US" sz="3600" dirty="0"/>
-          </a:p>
-        </p:txBody>
-      </p:sp>
-      <p:sp>
-        <p:nvSpPr>
-          <p:cNvPr id="5" name="Text 2"/>
-          <p:cNvSpPr/>
-          <p:nvPr/>
-        </p:nvSpPr>
-        <p:spPr>
-          <a:xfrm>
-            <a:off x="5349240" y="1737360"/>
-            <a:ext cx="6522415" cy="457200"/>
-          </a:xfrm>
-          <a:prstGeom prst="rect">
-            <a:avLst/>
-          </a:prstGeom>
-          <a:noFill/>
-          <a:ln/>
-        </p:spPr>
-        <p:txBody>
-          <a:bodyPr wrap="square" lIns="0" tIns="0" rIns="0" bIns="0" rtlCol="0" anchor="ctr"/>
-          <a:lstStyle/>
-          <a:p>
-            <a:pPr algn="l" indent="0" marL="0">
-              <a:buNone/>
-            </a:pPr>
-            <a:r>
-              <a:rPr lang="en-US" sz="2700" b="1" dirty="0">
-                <a:solidFill>
-                  <a:srgbClr val="990011"/>
-                </a:solidFill>
-                <a:latin typeface="Times New Roman" pitchFamily="34" charset="0"/>
-                <a:ea typeface="Times New Roman" pitchFamily="34" charset="-122"/>
-                <a:cs typeface="Times New Roman" pitchFamily="34" charset="-120"/>
-              </a:rPr>
-              <a:t>B) Mortality and Migration (continued)</a:t>
-            </a:r>
-            <a:endParaRPr lang="en-US" sz="2700" dirty="0"/>
-          </a:p>
-        </p:txBody>
-      </p:sp>
-      <p:sp>
-        <p:nvSpPr>
-          <p:cNvPr id="6" name="Text 3"/>
-          <p:cNvSpPr/>
-          <p:nvPr/>
-        </p:nvSpPr>
-        <p:spPr>
-          <a:xfrm>
-            <a:off x="5349240" y="2240280"/>
-            <a:ext cx="6522415" cy="4206240"/>
-          </a:xfrm>
-          <a:prstGeom prst="rect">
-            <a:avLst/>
-          </a:prstGeom>
-          <a:noFill/>
-          <a:ln/>
-        </p:spPr>
-        <p:txBody>
-          <a:bodyPr wrap="square" lIns="0" tIns="0" rIns="0" bIns="0" rtlCol="0" anchor="t"/>
-          <a:lstStyle/>
-          <a:p>
-            <a:pPr algn="l" marL="342900" indent="-342900">
-              <a:spcAft>
-                <a:spcPts val="800"/>
-              </a:spcAft>
-              <a:buSzPct val="100000"/>
-              <a:buChar char="•"/>
-            </a:pPr>
-            <a:r>
-              <a:rPr lang="en-US" sz="4000" dirty="0">
-                <a:solidFill>
-                  <a:srgbClr val="111111"/>
-                </a:solidFill>
-                <a:latin typeface="Times New Roman" pitchFamily="34" charset="0"/>
-                <a:ea typeface="Times New Roman" pitchFamily="34" charset="-122"/>
-                <a:cs typeface="Times New Roman" pitchFamily="34" charset="-120"/>
-              </a:rPr>
-              <a:t>Malnutrition and famine.</a:t>
-            </a:r>
-            <a:endParaRPr lang="en-US" sz="4000" dirty="0"/>
-          </a:p>
-          <a:p>
-            <a:pPr algn="l" marL="342900" indent="-342900">
-              <a:spcAft>
-                <a:spcPts val="800"/>
-              </a:spcAft>
-              <a:buSzPct val="100000"/>
-              <a:buChar char="•"/>
-            </a:pPr>
-            <a:r>
-              <a:rPr lang="en-US" sz="4000" dirty="0">
-                <a:solidFill>
-                  <a:srgbClr val="111111"/>
-                </a:solidFill>
-                <a:latin typeface="Times New Roman" pitchFamily="34" charset="0"/>
-                <a:ea typeface="Times New Roman" pitchFamily="34" charset="-122"/>
-                <a:cs typeface="Times New Roman" pitchFamily="34" charset="-120"/>
-              </a:rPr>
-              <a:t>Disasters and wars.</a:t>
-            </a:r>
-            <a:endParaRPr lang="en-US" sz="4000" dirty="0"/>
+              <a:t>Illustration: vaccination</a:t>
+            </a:r>
+            <a:endParaRPr lang="en-US" sz="1600" dirty="0"/>
           </a:p>
         </p:txBody>
       </p:sp>
@@ -19681,150 +19463,9 @@
           </a:p>
         </p:txBody>
       </p:sp>
-      <p:sp>
-        <p:nvSpPr>
-          <p:cNvPr id="3" name="Text 1"/>
-          <p:cNvSpPr/>
-          <p:nvPr/>
-        </p:nvSpPr>
-        <p:spPr>
-          <a:xfrm>
-            <a:off x="365760" y="1005840"/>
-            <a:ext cx="11460175" cy="731520"/>
-          </a:xfrm>
-          <a:prstGeom prst="rect">
-            <a:avLst/>
-          </a:prstGeom>
-          <a:noFill/>
-          <a:ln/>
-        </p:spPr>
-        <p:txBody>
-          <a:bodyPr wrap="square" lIns="0" tIns="0" rIns="0" bIns="0" rtlCol="0" anchor="ctr">
-            <a:normAutofit/>
-          </a:bodyPr>
-          <a:lstStyle/>
-          <a:p>
-            <a:pPr algn="ctr" indent="0" marL="0">
-              <a:buNone/>
-            </a:pPr>
-            <a:r>
-              <a:rPr lang="en-US" sz="3600" b="1" dirty="0">
-                <a:solidFill>
-                  <a:srgbClr val="990011"/>
-                </a:solidFill>
-                <a:latin typeface="Times New Roman" pitchFamily="34" charset="0"/>
-                <a:ea typeface="Times New Roman" pitchFamily="34" charset="-122"/>
-                <a:cs typeface="Times New Roman" pitchFamily="34" charset="-120"/>
-              </a:rPr>
-              <a:t>2. Determinants of Population Growth</a:t>
-            </a:r>
-            <a:endParaRPr lang="en-US" sz="3600" dirty="0"/>
-          </a:p>
-        </p:txBody>
-      </p:sp>
-      <p:sp>
-        <p:nvSpPr>
-          <p:cNvPr id="4" name="Text 2"/>
-          <p:cNvSpPr/>
-          <p:nvPr/>
-        </p:nvSpPr>
-        <p:spPr>
-          <a:xfrm>
-            <a:off x="365760" y="1737360"/>
-            <a:ext cx="5120640" cy="457200"/>
-          </a:xfrm>
-          <a:prstGeom prst="rect">
-            <a:avLst/>
-          </a:prstGeom>
-          <a:noFill/>
-          <a:ln/>
-        </p:spPr>
-        <p:txBody>
-          <a:bodyPr wrap="square" lIns="0" tIns="0" rIns="0" bIns="0" rtlCol="0" anchor="ctr">
-            <a:normAutofit/>
-          </a:bodyPr>
-          <a:lstStyle/>
-          <a:p>
-            <a:pPr algn="l" indent="0" marL="0">
-              <a:buNone/>
-            </a:pPr>
-            <a:r>
-              <a:rPr lang="en-US" sz="3000" b="1" dirty="0">
-                <a:solidFill>
-                  <a:srgbClr val="990011"/>
-                </a:solidFill>
-                <a:latin typeface="Times New Roman" pitchFamily="34" charset="0"/>
-                <a:ea typeface="Times New Roman" pitchFamily="34" charset="-122"/>
-                <a:cs typeface="Times New Roman" pitchFamily="34" charset="-120"/>
-              </a:rPr>
-              <a:t>B) Mortality and Migration</a:t>
-            </a:r>
-            <a:endParaRPr lang="en-US" sz="3000" dirty="0"/>
-          </a:p>
-        </p:txBody>
-      </p:sp>
-      <p:sp>
-        <p:nvSpPr>
-          <p:cNvPr id="5" name="Text 3"/>
-          <p:cNvSpPr/>
-          <p:nvPr/>
-        </p:nvSpPr>
-        <p:spPr>
-          <a:xfrm>
-            <a:off x="365760" y="2240280"/>
-            <a:ext cx="4846320" cy="4160520"/>
-          </a:xfrm>
-          <a:prstGeom prst="rect">
-            <a:avLst/>
-          </a:prstGeom>
-          <a:noFill/>
-          <a:ln/>
-        </p:spPr>
-        <p:txBody>
-          <a:bodyPr wrap="square" lIns="0" tIns="0" rIns="0" bIns="0" rtlCol="0" anchor="t"/>
-          <a:lstStyle/>
-          <a:p>
-            <a:pPr algn="l" indent="0" marL="0">
-              <a:spcAft>
-                <a:spcPts val="800"/>
-              </a:spcAft>
-              <a:buNone/>
-            </a:pPr>
-            <a:r>
-              <a:rPr lang="en-US" sz="3600" b="1" dirty="0">
-                <a:solidFill>
-                  <a:srgbClr val="111111"/>
-                </a:solidFill>
-                <a:latin typeface="Times New Roman" pitchFamily="34" charset="0"/>
-                <a:ea typeface="Times New Roman" pitchFamily="34" charset="-122"/>
-                <a:cs typeface="Times New Roman" pitchFamily="34" charset="-120"/>
-              </a:rPr>
-              <a:t>Factors of low mortality: </a:t>
-            </a:r>
-            <a:pPr algn="l" indent="0" marL="0">
-              <a:spcAft>
-                <a:spcPts val="800"/>
-              </a:spcAft>
-              <a:buNone/>
-            </a:pPr>
-            <a:r>
-              <a:rPr lang="en-US" sz="3600" dirty="0">
-                <a:solidFill>
-                  <a:srgbClr val="111111"/>
-                </a:solidFill>
-                <a:latin typeface="Times New Roman" pitchFamily="34" charset="0"/>
-                <a:ea typeface="Times New Roman" pitchFamily="34" charset="-122"/>
-                <a:cs typeface="Times New Roman" pitchFamily="34" charset="-120"/>
-              </a:rPr>
-              <a:t>Vaccines, hospitals, clean water, good food and a high standard of living.</a:t>
-            </a:r>
-            <a:endParaRPr lang="en-US" sz="3600" dirty="0"/>
-          </a:p>
-        </p:txBody>
-      </p:sp>
       <p:pic>
         <p:nvPicPr>
-          <p:cNvPr id="6" name="Image 0" descr="/home/claude/f4/img/v2/usa_vaccine.jpg">    </p:cNvPr>
+          <p:cNvPr id="3" name="Image 0" descr="/home/claude/f4/img/minesec_sheet.png">    </p:cNvPr>
           <p:cNvPicPr>
             <a:picLocks noChangeAspect="1"/>
           </p:cNvPicPr>
@@ -19838,8 +19479,8 @@
         </p:blipFill>
         <p:spPr>
           <a:xfrm>
-            <a:off x="5349240" y="2071212"/>
-            <a:ext cx="6659575" cy="3693983"/>
+            <a:off x="0" y="658368"/>
+            <a:ext cx="2468880" cy="5833872"/>
           </a:xfrm>
           <a:prstGeom prst="rect">
             <a:avLst/>
@@ -19848,14 +19489,14 @@
       </p:pic>
       <p:sp>
         <p:nvSpPr>
-          <p:cNvPr id="7" name="Text 4"/>
+          <p:cNvPr id="4" name="Text 1"/>
           <p:cNvSpPr/>
           <p:nvPr/>
         </p:nvSpPr>
         <p:spPr>
           <a:xfrm>
-            <a:off x="5349240" y="6089904"/>
-            <a:ext cx="6659575" cy="347472"/>
+            <a:off x="2697480" y="1005840"/>
+            <a:ext cx="9174175" cy="731520"/>
           </a:xfrm>
           <a:prstGeom prst="rect">
             <a:avLst/>
@@ -19864,24 +19505,124 @@
           <a:ln/>
         </p:spPr>
         <p:txBody>
-          <a:bodyPr wrap="square" lIns="0" tIns="0" rIns="0" bIns="0" rtlCol="0" anchor="ctr"/>
+          <a:bodyPr wrap="square" lIns="0" tIns="0" rIns="0" bIns="0" rtlCol="0" anchor="ctr">
+            <a:normAutofit/>
+          </a:bodyPr>
           <a:lstStyle/>
           <a:p>
             <a:pPr algn="ctr" indent="0" marL="0">
               <a:buNone/>
             </a:pPr>
             <a:r>
-              <a:rPr lang="en-US" sz="1600" i="1" dirty="0">
-                <a:solidFill>
-                  <a:srgbClr val="555555"/>
+              <a:rPr lang="en-US" sz="3600" b="1" dirty="0">
+                <a:solidFill>
+                  <a:srgbClr val="990011"/>
                 </a:solidFill>
                 <a:latin typeface="Times New Roman" pitchFamily="34" charset="0"/>
                 <a:ea typeface="Times New Roman" pitchFamily="34" charset="-122"/>
                 <a:cs typeface="Times New Roman" pitchFamily="34" charset="-120"/>
               </a:rPr>
-              <a:t>Illustration: vaccination</a:t>
-            </a:r>
-            <a:endParaRPr lang="en-US" sz="1600" dirty="0"/>
+              <a:t>2. Determinants of Population Growth</a:t>
+            </a:r>
+            <a:endParaRPr lang="en-US" sz="3600" dirty="0"/>
+          </a:p>
+        </p:txBody>
+      </p:sp>
+      <p:sp>
+        <p:nvSpPr>
+          <p:cNvPr id="5" name="Text 2"/>
+          <p:cNvSpPr/>
+          <p:nvPr/>
+        </p:nvSpPr>
+        <p:spPr>
+          <a:xfrm>
+            <a:off x="2697480" y="1737360"/>
+            <a:ext cx="9174175" cy="457200"/>
+          </a:xfrm>
+          <a:prstGeom prst="rect">
+            <a:avLst/>
+          </a:prstGeom>
+          <a:noFill/>
+          <a:ln/>
+        </p:spPr>
+        <p:txBody>
+          <a:bodyPr wrap="square" lIns="0" tIns="0" rIns="0" bIns="0" rtlCol="0" anchor="ctr"/>
+          <a:lstStyle/>
+          <a:p>
+            <a:pPr algn="l" indent="0" marL="0">
+              <a:buNone/>
+            </a:pPr>
+            <a:r>
+              <a:rPr lang="en-US" sz="3200" b="1" dirty="0">
+                <a:solidFill>
+                  <a:srgbClr val="990011"/>
+                </a:solidFill>
+                <a:latin typeface="Times New Roman" pitchFamily="34" charset="0"/>
+                <a:ea typeface="Times New Roman" pitchFamily="34" charset="-122"/>
+                <a:cs typeface="Times New Roman" pitchFamily="34" charset="-120"/>
+              </a:rPr>
+              <a:t>B) Mortality and Migration</a:t>
+            </a:r>
+            <a:endParaRPr lang="en-US" sz="3200" dirty="0"/>
+          </a:p>
+        </p:txBody>
+      </p:sp>
+      <p:sp>
+        <p:nvSpPr>
+          <p:cNvPr id="6" name="Text 3"/>
+          <p:cNvSpPr/>
+          <p:nvPr/>
+        </p:nvSpPr>
+        <p:spPr>
+          <a:xfrm>
+            <a:off x="2697480" y="2240280"/>
+            <a:ext cx="9174175" cy="4206240"/>
+          </a:xfrm>
+          <a:prstGeom prst="rect">
+            <a:avLst/>
+          </a:prstGeom>
+          <a:noFill/>
+          <a:ln/>
+        </p:spPr>
+        <p:txBody>
+          <a:bodyPr wrap="square" lIns="0" tIns="0" rIns="0" bIns="0" rtlCol="0" anchor="t"/>
+          <a:lstStyle/>
+          <a:p>
+            <a:pPr algn="l" indent="0" marL="0">
+              <a:spcAft>
+                <a:spcPts val="800"/>
+              </a:spcAft>
+              <a:buNone/>
+            </a:pPr>
+            <a:r>
+              <a:rPr lang="en-US" sz="4000" b="1" dirty="0">
+                <a:solidFill>
+                  <a:srgbClr val="111111"/>
+                </a:solidFill>
+                <a:latin typeface="Times New Roman" pitchFamily="34" charset="0"/>
+                <a:ea typeface="Times New Roman" pitchFamily="34" charset="-122"/>
+                <a:cs typeface="Times New Roman" pitchFamily="34" charset="-120"/>
+              </a:rPr>
+              <a:t>Factors of migration: </a:t>
+            </a:r>
+            <a:pPr algn="l" indent="0" marL="0">
+              <a:spcAft>
+                <a:spcPts val="800"/>
+              </a:spcAft>
+              <a:buNone/>
+            </a:pPr>
+            <a:r>
+              <a:rPr lang="en-US" sz="4000" dirty="0">
+                <a:solidFill>
+                  <a:srgbClr val="111111"/>
+                </a:solidFill>
+                <a:latin typeface="Times New Roman" pitchFamily="34" charset="0"/>
+                <a:ea typeface="Times New Roman" pitchFamily="34" charset="-122"/>
+                <a:cs typeface="Times New Roman" pitchFamily="34" charset="-120"/>
+              </a:rPr>
+              <a:t>Lack of jobs, poverty, drought and insecurity, such as the Boko Haram attacks in the Far North, push people out. Jobs, better schools and hospitals and security pull them to places such as Garoua and Douala.</a:t>
+            </a:r>
+            <a:endParaRPr lang="en-US" sz="4000" dirty="0"/>
           </a:p>
         </p:txBody>
       </p:sp>
@@ -19997,9 +19738,129 @@
           </a:p>
         </p:txBody>
       </p:sp>
+      <p:sp>
+        <p:nvSpPr>
+          <p:cNvPr id="3" name="Text 1"/>
+          <p:cNvSpPr/>
+          <p:nvPr/>
+        </p:nvSpPr>
+        <p:spPr>
+          <a:xfrm>
+            <a:off x="365760" y="1005840"/>
+            <a:ext cx="11460175" cy="731520"/>
+          </a:xfrm>
+          <a:prstGeom prst="rect">
+            <a:avLst/>
+          </a:prstGeom>
+          <a:noFill/>
+          <a:ln/>
+        </p:spPr>
+        <p:txBody>
+          <a:bodyPr wrap="square" lIns="0" tIns="0" rIns="0" bIns="0" rtlCol="0" anchor="ctr">
+            <a:normAutofit/>
+          </a:bodyPr>
+          <a:lstStyle/>
+          <a:p>
+            <a:pPr algn="ctr" indent="0" marL="0">
+              <a:buNone/>
+            </a:pPr>
+            <a:r>
+              <a:rPr lang="en-US" sz="3600" b="1" dirty="0">
+                <a:solidFill>
+                  <a:srgbClr val="990011"/>
+                </a:solidFill>
+                <a:latin typeface="Times New Roman" pitchFamily="34" charset="0"/>
+                <a:ea typeface="Times New Roman" pitchFamily="34" charset="-122"/>
+                <a:cs typeface="Times New Roman" pitchFamily="34" charset="-120"/>
+              </a:rPr>
+              <a:t>3. Spatial Differences on a World Scale</a:t>
+            </a:r>
+            <a:endParaRPr lang="en-US" sz="3600" dirty="0"/>
+          </a:p>
+        </p:txBody>
+      </p:sp>
+      <p:sp>
+        <p:nvSpPr>
+          <p:cNvPr id="4" name="Text 2"/>
+          <p:cNvSpPr/>
+          <p:nvPr/>
+        </p:nvSpPr>
+        <p:spPr>
+          <a:xfrm>
+            <a:off x="365760" y="1783080"/>
+            <a:ext cx="6035040" cy="4617720"/>
+          </a:xfrm>
+          <a:prstGeom prst="rect">
+            <a:avLst/>
+          </a:prstGeom>
+          <a:noFill/>
+          <a:ln/>
+        </p:spPr>
+        <p:txBody>
+          <a:bodyPr wrap="square" lIns="0" tIns="0" rIns="0" bIns="0" rtlCol="0" anchor="t"/>
+          <a:lstStyle/>
+          <a:p>
+            <a:pPr algn="l" indent="0" marL="0">
+              <a:spcAft>
+                <a:spcPts val="800"/>
+              </a:spcAft>
+              <a:buNone/>
+            </a:pPr>
+            <a:r>
+              <a:rPr lang="en-US" sz="3400" i="1" dirty="0">
+                <a:solidFill>
+                  <a:srgbClr val="111111"/>
+                </a:solidFill>
+                <a:latin typeface="Times New Roman" pitchFamily="34" charset="0"/>
+                <a:ea typeface="Times New Roman" pitchFamily="34" charset="-122"/>
+                <a:cs typeface="Times New Roman" pitchFamily="34" charset="-120"/>
+              </a:rPr>
+              <a:t>The determinants of growth differ across the world as follows:</a:t>
+            </a:r>
+            <a:endParaRPr lang="en-US" sz="3400" dirty="0"/>
+          </a:p>
+          <a:p>
+            <a:pPr algn="l" indent="0" marL="0">
+              <a:spcAft>
+                <a:spcPts val="800"/>
+              </a:spcAft>
+              <a:buNone/>
+            </a:pPr>
+            <a:r>
+              <a:rPr lang="en-US" sz="3400" b="1" dirty="0">
+                <a:solidFill>
+                  <a:srgbClr val="111111"/>
+                </a:solidFill>
+                <a:latin typeface="Times New Roman" pitchFamily="34" charset="0"/>
+                <a:ea typeface="Times New Roman" pitchFamily="34" charset="-122"/>
+                <a:cs typeface="Times New Roman" pitchFamily="34" charset="-120"/>
+              </a:rPr>
+              <a:t>Less developed countries: </a:t>
+            </a:r>
+            <a:pPr algn="l" indent="0" marL="0">
+              <a:spcAft>
+                <a:spcPts val="800"/>
+              </a:spcAft>
+              <a:buNone/>
+            </a:pPr>
+            <a:r>
+              <a:rPr lang="en-US" sz="3400" dirty="0">
+                <a:solidFill>
+                  <a:srgbClr val="111111"/>
+                </a:solidFill>
+                <a:latin typeface="Times New Roman" pitchFamily="34" charset="0"/>
+                <a:ea typeface="Times New Roman" pitchFamily="34" charset="-122"/>
+                <a:cs typeface="Times New Roman" pitchFamily="34" charset="-120"/>
+              </a:rPr>
+              <a:t>Most of Africa, including Cameroon, has high fertility and falling mortality. Natural increase is therefore high.</a:t>
+            </a:r>
+            <a:endParaRPr lang="en-US" sz="3400" dirty="0"/>
+          </a:p>
+        </p:txBody>
+      </p:sp>
       <p:pic>
         <p:nvPicPr>
-          <p:cNvPr id="3" name="Image 0" descr="/home/claude/f4/img/minesec_sheet.png">    </p:cNvPr>
+          <p:cNvPr id="5" name="Image 0" descr="/home/claude/f4/img/v2/birth_death_big.png">    </p:cNvPr>
           <p:cNvPicPr>
             <a:picLocks noChangeAspect="1"/>
           </p:cNvPicPr>
@@ -20013,8 +19874,8 @@
         </p:blipFill>
         <p:spPr>
           <a:xfrm>
-            <a:off x="0" y="658368"/>
-            <a:ext cx="2468880" cy="5833872"/>
+            <a:off x="6537960" y="2721454"/>
+            <a:ext cx="5470855" cy="2393499"/>
           </a:xfrm>
           <a:prstGeom prst="rect">
             <a:avLst/>
@@ -20023,14 +19884,14 @@
       </p:pic>
       <p:sp>
         <p:nvSpPr>
-          <p:cNvPr id="4" name="Text 1"/>
+          <p:cNvPr id="6" name="Text 3"/>
           <p:cNvSpPr/>
           <p:nvPr/>
         </p:nvSpPr>
         <p:spPr>
           <a:xfrm>
-            <a:off x="2697480" y="1005840"/>
-            <a:ext cx="9174175" cy="731520"/>
+            <a:off x="6537960" y="6089904"/>
+            <a:ext cx="5470855" cy="347472"/>
           </a:xfrm>
           <a:prstGeom prst="rect">
             <a:avLst/>
@@ -20039,161 +19900,24 @@
           <a:ln/>
         </p:spPr>
         <p:txBody>
-          <a:bodyPr wrap="square" lIns="0" tIns="0" rIns="0" bIns="0" rtlCol="0" anchor="ctr">
-            <a:normAutofit/>
-          </a:bodyPr>
+          <a:bodyPr wrap="square" lIns="0" tIns="0" rIns="0" bIns="0" rtlCol="0" anchor="ctr"/>
           <a:lstStyle/>
           <a:p>
             <a:pPr algn="ctr" indent="0" marL="0">
               <a:buNone/>
             </a:pPr>
             <a:r>
-              <a:rPr lang="en-US" sz="3600" b="1" dirty="0">
-                <a:solidFill>
-                  <a:srgbClr val="990011"/>
+              <a:rPr lang="en-US" sz="1600" i="1" dirty="0">
+                <a:solidFill>
+                  <a:srgbClr val="555555"/>
                 </a:solidFill>
                 <a:latin typeface="Times New Roman" pitchFamily="34" charset="0"/>
                 <a:ea typeface="Times New Roman" pitchFamily="34" charset="-122"/>
                 <a:cs typeface="Times New Roman" pitchFamily="34" charset="-120"/>
               </a:rPr>
-              <a:t>2. Determinants of Population Growth</a:t>
-            </a:r>
-            <a:endParaRPr lang="en-US" sz="3600" dirty="0"/>
-          </a:p>
-        </p:txBody>
-      </p:sp>
-      <p:sp>
-        <p:nvSpPr>
-          <p:cNvPr id="5" name="Text 2"/>
-          <p:cNvSpPr/>
-          <p:nvPr/>
-        </p:nvSpPr>
-        <p:spPr>
-          <a:xfrm>
-            <a:off x="2697480" y="1737360"/>
-            <a:ext cx="9174175" cy="457200"/>
-          </a:xfrm>
-          <a:prstGeom prst="rect">
-            <a:avLst/>
-          </a:prstGeom>
-          <a:noFill/>
-          <a:ln/>
-        </p:spPr>
-        <p:txBody>
-          <a:bodyPr wrap="square" lIns="0" tIns="0" rIns="0" bIns="0" rtlCol="0" anchor="ctr"/>
-          <a:lstStyle/>
-          <a:p>
-            <a:pPr algn="l" indent="0" marL="0">
-              <a:buNone/>
-            </a:pPr>
-            <a:r>
-              <a:rPr lang="en-US" sz="3200" b="1" dirty="0">
-                <a:solidFill>
-                  <a:srgbClr val="990011"/>
-                </a:solidFill>
-                <a:latin typeface="Times New Roman" pitchFamily="34" charset="0"/>
-                <a:ea typeface="Times New Roman" pitchFamily="34" charset="-122"/>
-                <a:cs typeface="Times New Roman" pitchFamily="34" charset="-120"/>
-              </a:rPr>
-              <a:t>B) Mortality and Migration</a:t>
-            </a:r>
-            <a:endParaRPr lang="en-US" sz="3200" dirty="0"/>
-          </a:p>
-        </p:txBody>
-      </p:sp>
-      <p:sp>
-        <p:nvSpPr>
-          <p:cNvPr id="6" name="Text 3"/>
-          <p:cNvSpPr/>
-          <p:nvPr/>
-        </p:nvSpPr>
-        <p:spPr>
-          <a:xfrm>
-            <a:off x="2697480" y="2240280"/>
-            <a:ext cx="9174175" cy="4206240"/>
-          </a:xfrm>
-          <a:prstGeom prst="rect">
-            <a:avLst/>
-          </a:prstGeom>
-          <a:noFill/>
-          <a:ln/>
-        </p:spPr>
-        <p:txBody>
-          <a:bodyPr wrap="square" lIns="0" tIns="0" rIns="0" bIns="0" rtlCol="0" anchor="t"/>
-          <a:lstStyle/>
-          <a:p>
-            <a:pPr algn="l" indent="0" marL="0">
-              <a:spcAft>
-                <a:spcPts val="800"/>
-              </a:spcAft>
-              <a:buNone/>
-            </a:pPr>
-            <a:r>
-              <a:rPr lang="en-US" sz="4000" b="1" dirty="0">
-                <a:solidFill>
-                  <a:srgbClr val="111111"/>
-                </a:solidFill>
-                <a:latin typeface="Times New Roman" pitchFamily="34" charset="0"/>
-                <a:ea typeface="Times New Roman" pitchFamily="34" charset="-122"/>
-                <a:cs typeface="Times New Roman" pitchFamily="34" charset="-120"/>
-              </a:rPr>
-              <a:t>Push factors of migration: </a:t>
-            </a:r>
-            <a:pPr algn="l" indent="0" marL="0">
-              <a:spcAft>
-                <a:spcPts val="800"/>
-              </a:spcAft>
-              <a:buNone/>
-            </a:pPr>
-            <a:r>
-              <a:rPr lang="en-US" sz="4000" dirty="0">
-                <a:solidFill>
-                  <a:srgbClr val="111111"/>
-                </a:solidFill>
-                <a:latin typeface="Times New Roman" pitchFamily="34" charset="0"/>
-                <a:ea typeface="Times New Roman" pitchFamily="34" charset="-122"/>
-                <a:cs typeface="Times New Roman" pitchFamily="34" charset="-120"/>
-              </a:rPr>
-              <a:t>Lack of jobs, poverty, drought and insecurity, such as the Boko Haram attacks in the Far North.</a:t>
-            </a:r>
-            <a:endParaRPr lang="en-US" sz="4000" dirty="0"/>
-          </a:p>
-          <a:p>
-            <a:pPr algn="l" indent="0" marL="0">
-              <a:spcAft>
-                <a:spcPts val="800"/>
-              </a:spcAft>
-              <a:buNone/>
-            </a:pPr>
-            <a:r>
-              <a:rPr lang="en-US" sz="4000" b="1" dirty="0">
-                <a:solidFill>
-                  <a:srgbClr val="111111"/>
-                </a:solidFill>
-                <a:latin typeface="Times New Roman" pitchFamily="34" charset="0"/>
-                <a:ea typeface="Times New Roman" pitchFamily="34" charset="-122"/>
-                <a:cs typeface="Times New Roman" pitchFamily="34" charset="-120"/>
-              </a:rPr>
-              <a:t>Pull factors of migration: </a:t>
-            </a:r>
-            <a:pPr algn="l" indent="0" marL="0">
-              <a:spcAft>
-                <a:spcPts val="800"/>
-              </a:spcAft>
-              <a:buNone/>
-            </a:pPr>
-            <a:r>
-              <a:rPr lang="en-US" sz="4000" dirty="0">
-                <a:solidFill>
-                  <a:srgbClr val="111111"/>
-                </a:solidFill>
-                <a:latin typeface="Times New Roman" pitchFamily="34" charset="0"/>
-                <a:ea typeface="Times New Roman" pitchFamily="34" charset="-122"/>
-                <a:cs typeface="Times New Roman" pitchFamily="34" charset="-120"/>
-              </a:rPr>
-              <a:t>Jobs in Garoua or Douala, better schools and hospitals, security and stability.</a:t>
-            </a:r>
-            <a:endParaRPr lang="en-US" sz="4000" dirty="0"/>
+              <a:t>Illustration: birth and death rates</a:t>
+            </a:r>
+            <a:endParaRPr lang="en-US" sz="1600" dirty="0"/>
           </a:p>
         </p:txBody>
       </p:sp>
@@ -20309,129 +20033,9 @@
           </a:p>
         </p:txBody>
       </p:sp>
-      <p:sp>
-        <p:nvSpPr>
-          <p:cNvPr id="3" name="Text 1"/>
-          <p:cNvSpPr/>
-          <p:nvPr/>
-        </p:nvSpPr>
-        <p:spPr>
-          <a:xfrm>
-            <a:off x="365760" y="1005840"/>
-            <a:ext cx="11460175" cy="731520"/>
-          </a:xfrm>
-          <a:prstGeom prst="rect">
-            <a:avLst/>
-          </a:prstGeom>
-          <a:noFill/>
-          <a:ln/>
-        </p:spPr>
-        <p:txBody>
-          <a:bodyPr wrap="square" lIns="0" tIns="0" rIns="0" bIns="0" rtlCol="0" anchor="ctr">
-            <a:normAutofit/>
-          </a:bodyPr>
-          <a:lstStyle/>
-          <a:p>
-            <a:pPr algn="ctr" indent="0" marL="0">
-              <a:buNone/>
-            </a:pPr>
-            <a:r>
-              <a:rPr lang="en-US" sz="3600" b="1" dirty="0">
-                <a:solidFill>
-                  <a:srgbClr val="990011"/>
-                </a:solidFill>
-                <a:latin typeface="Times New Roman" pitchFamily="34" charset="0"/>
-                <a:ea typeface="Times New Roman" pitchFamily="34" charset="-122"/>
-                <a:cs typeface="Times New Roman" pitchFamily="34" charset="-120"/>
-              </a:rPr>
-              <a:t>3. Spatial Differences of Growth on a World Scale</a:t>
-            </a:r>
-            <a:endParaRPr lang="en-US" sz="3600" dirty="0"/>
-          </a:p>
-        </p:txBody>
-      </p:sp>
-      <p:sp>
-        <p:nvSpPr>
-          <p:cNvPr id="4" name="Text 2"/>
-          <p:cNvSpPr/>
-          <p:nvPr/>
-        </p:nvSpPr>
-        <p:spPr>
-          <a:xfrm>
-            <a:off x="365760" y="1783080"/>
-            <a:ext cx="4846320" cy="4617720"/>
-          </a:xfrm>
-          <a:prstGeom prst="rect">
-            <a:avLst/>
-          </a:prstGeom>
-          <a:noFill/>
-          <a:ln/>
-        </p:spPr>
-        <p:txBody>
-          <a:bodyPr wrap="square" lIns="0" tIns="0" rIns="0" bIns="0" rtlCol="0" anchor="t"/>
-          <a:lstStyle/>
-          <a:p>
-            <a:pPr algn="l" indent="0" marL="0">
-              <a:spcAft>
-                <a:spcPts val="800"/>
-              </a:spcAft>
-              <a:buNone/>
-            </a:pPr>
-            <a:r>
-              <a:rPr lang="en-US" sz="3200" i="1" dirty="0">
-                <a:solidFill>
-                  <a:srgbClr val="111111"/>
-                </a:solidFill>
-                <a:latin typeface="Times New Roman" pitchFamily="34" charset="0"/>
-                <a:ea typeface="Times New Roman" pitchFamily="34" charset="-122"/>
-                <a:cs typeface="Times New Roman" pitchFamily="34" charset="-120"/>
-              </a:rPr>
-              <a:t>Population growth differs across the world as follows:</a:t>
-            </a:r>
-            <a:endParaRPr lang="en-US" sz="3200" dirty="0"/>
-          </a:p>
-          <a:p>
-            <a:pPr algn="l" indent="0" marL="0">
-              <a:spcAft>
-                <a:spcPts val="800"/>
-              </a:spcAft>
-              <a:buNone/>
-            </a:pPr>
-            <a:r>
-              <a:rPr lang="en-US" sz="3200" b="1" dirty="0">
-                <a:solidFill>
-                  <a:srgbClr val="111111"/>
-                </a:solidFill>
-                <a:latin typeface="Times New Roman" pitchFamily="34" charset="0"/>
-                <a:ea typeface="Times New Roman" pitchFamily="34" charset="-122"/>
-                <a:cs typeface="Times New Roman" pitchFamily="34" charset="-120"/>
-              </a:rPr>
-              <a:t>Less developed countries: </a:t>
-            </a:r>
-            <a:pPr algn="l" indent="0" marL="0">
-              <a:spcAft>
-                <a:spcPts val="800"/>
-              </a:spcAft>
-              <a:buNone/>
-            </a:pPr>
-            <a:r>
-              <a:rPr lang="en-US" sz="3200" dirty="0">
-                <a:solidFill>
-                  <a:srgbClr val="111111"/>
-                </a:solidFill>
-                <a:latin typeface="Times New Roman" pitchFamily="34" charset="0"/>
-                <a:ea typeface="Times New Roman" pitchFamily="34" charset="-122"/>
-                <a:cs typeface="Times New Roman" pitchFamily="34" charset="-120"/>
-              </a:rPr>
-              <a:t>Most of Africa, including Cameroon, has high fertility and falling mortality, so natural increase is high.</a:t>
-            </a:r>
-            <a:endParaRPr lang="en-US" sz="3200" dirty="0"/>
-          </a:p>
-        </p:txBody>
-      </p:sp>
       <p:pic>
         <p:nvPicPr>
-          <p:cNvPr id="5" name="Image 0" descr="/home/claude/f4/img/v2/birth_death_big.png">    </p:cNvPr>
+          <p:cNvPr id="3" name="Image 0" descr="/home/claude/f4/img/minesec_sheet.png">    </p:cNvPr>
           <p:cNvPicPr>
             <a:picLocks noChangeAspect="1"/>
           </p:cNvPicPr>
@@ -20445,8 +20049,8 @@
         </p:blipFill>
         <p:spPr>
           <a:xfrm>
-            <a:off x="5349240" y="2461422"/>
-            <a:ext cx="6659575" cy="2913564"/>
+            <a:off x="0" y="658368"/>
+            <a:ext cx="5120640" cy="5833872"/>
           </a:xfrm>
           <a:prstGeom prst="rect">
             <a:avLst/>
@@ -20455,14 +20059,14 @@
       </p:pic>
       <p:sp>
         <p:nvSpPr>
-          <p:cNvPr id="6" name="Text 3"/>
+          <p:cNvPr id="4" name="Text 1"/>
           <p:cNvSpPr/>
           <p:nvPr/>
         </p:nvSpPr>
         <p:spPr>
           <a:xfrm>
-            <a:off x="5349240" y="6089904"/>
-            <a:ext cx="6659575" cy="347472"/>
+            <a:off x="5349240" y="1005840"/>
+            <a:ext cx="6522415" cy="731520"/>
           </a:xfrm>
           <a:prstGeom prst="rect">
             <a:avLst/>
@@ -20471,24 +20075,85 @@
           <a:ln/>
         </p:spPr>
         <p:txBody>
-          <a:bodyPr wrap="square" lIns="0" tIns="0" rIns="0" bIns="0" rtlCol="0" anchor="ctr"/>
+          <a:bodyPr wrap="square" lIns="0" tIns="0" rIns="0" bIns="0" rtlCol="0" anchor="ctr">
+            <a:normAutofit/>
+          </a:bodyPr>
           <a:lstStyle/>
           <a:p>
             <a:pPr algn="ctr" indent="0" marL="0">
               <a:buNone/>
             </a:pPr>
             <a:r>
-              <a:rPr lang="en-US" sz="1600" i="1" dirty="0">
-                <a:solidFill>
-                  <a:srgbClr val="555555"/>
+              <a:rPr lang="en-US" sz="3600" b="1" dirty="0">
+                <a:solidFill>
+                  <a:srgbClr val="990011"/>
                 </a:solidFill>
                 <a:latin typeface="Times New Roman" pitchFamily="34" charset="0"/>
                 <a:ea typeface="Times New Roman" pitchFamily="34" charset="-122"/>
                 <a:cs typeface="Times New Roman" pitchFamily="34" charset="-120"/>
               </a:rPr>
-              <a:t>Illustration: birth and death rates by continent</a:t>
-            </a:r>
-            <a:endParaRPr lang="en-US" sz="1600" dirty="0"/>
+              <a:t>3. Spatial Differences on a World Scale</a:t>
+            </a:r>
+            <a:endParaRPr lang="en-US" sz="3600" dirty="0"/>
+          </a:p>
+        </p:txBody>
+      </p:sp>
+      <p:sp>
+        <p:nvSpPr>
+          <p:cNvPr id="5" name="Text 2"/>
+          <p:cNvSpPr/>
+          <p:nvPr/>
+        </p:nvSpPr>
+        <p:spPr>
+          <a:xfrm>
+            <a:off x="5349240" y="1783080"/>
+            <a:ext cx="6522415" cy="4663440"/>
+          </a:xfrm>
+          <a:prstGeom prst="rect">
+            <a:avLst/>
+          </a:prstGeom>
+          <a:noFill/>
+          <a:ln/>
+        </p:spPr>
+        <p:txBody>
+          <a:bodyPr wrap="square" lIns="0" tIns="0" rIns="0" bIns="0" rtlCol="0" anchor="t"/>
+          <a:lstStyle/>
+          <a:p>
+            <a:pPr algn="l" indent="0" marL="0">
+              <a:spcAft>
+                <a:spcPts val="800"/>
+              </a:spcAft>
+              <a:buNone/>
+            </a:pPr>
+            <a:r>
+              <a:rPr lang="en-US" sz="4000" b="1" dirty="0">
+                <a:solidFill>
+                  <a:srgbClr val="111111"/>
+                </a:solidFill>
+                <a:latin typeface="Times New Roman" pitchFamily="34" charset="0"/>
+                <a:ea typeface="Times New Roman" pitchFamily="34" charset="-122"/>
+                <a:cs typeface="Times New Roman" pitchFamily="34" charset="-120"/>
+              </a:rPr>
+              <a:t>More developed countries: </a:t>
+            </a:r>
+            <a:pPr algn="l" indent="0" marL="0">
+              <a:spcAft>
+                <a:spcPts val="800"/>
+              </a:spcAft>
+              <a:buNone/>
+            </a:pPr>
+            <a:r>
+              <a:rPr lang="en-US" sz="4000" dirty="0">
+                <a:solidFill>
+                  <a:srgbClr val="111111"/>
+                </a:solidFill>
+                <a:latin typeface="Times New Roman" pitchFamily="34" charset="0"/>
+                <a:ea typeface="Times New Roman" pitchFamily="34" charset="-122"/>
+                <a:cs typeface="Times New Roman" pitchFamily="34" charset="-120"/>
+              </a:rPr>
+              <a:t>The USA, Germany and Japan have low fertility and low mortality. Their growth is slow, zero or negative.</a:t>
+            </a:r>
+            <a:endParaRPr lang="en-US" sz="4000" dirty="0"/>
           </a:p>
         </p:txBody>
       </p:sp>
@@ -20621,7 +20286,7 @@
         <p:spPr>
           <a:xfrm>
             <a:off x="0" y="658368"/>
-            <a:ext cx="2468880" cy="5833872"/>
+            <a:ext cx="5120640" cy="5833872"/>
           </a:xfrm>
           <a:prstGeom prst="rect">
             <a:avLst/>
@@ -20636,8 +20301,8 @@
         </p:nvSpPr>
         <p:spPr>
           <a:xfrm>
-            <a:off x="2697480" y="1005840"/>
-            <a:ext cx="9174175" cy="731520"/>
+            <a:off x="5349240" y="1005840"/>
+            <a:ext cx="6522415" cy="731520"/>
           </a:xfrm>
           <a:prstGeom prst="rect">
             <a:avLst/>
@@ -20663,7 +20328,7 @@
                 <a:ea typeface="Times New Roman" pitchFamily="34" charset="-122"/>
                 <a:cs typeface="Times New Roman" pitchFamily="34" charset="-120"/>
               </a:rPr>
-              <a:t>3. Spatial Differences of Growth on a World Scale</a:t>
+              <a:t>3. Spatial Differences on a World Scale</a:t>
             </a:r>
             <a:endParaRPr lang="en-US" sz="3600" dirty="0"/>
           </a:p>
@@ -20677,8 +20342,8 @@
         </p:nvSpPr>
         <p:spPr>
           <a:xfrm>
-            <a:off x="2697480" y="1783080"/>
-            <a:ext cx="9174175" cy="4663440"/>
+            <a:off x="5349240" y="1783080"/>
+            <a:ext cx="6522415" cy="4663440"/>
           </a:xfrm>
           <a:prstGeom prst="rect">
             <a:avLst/>
@@ -20705,7 +20370,7 @@
                 <a:ea typeface="Times New Roman" pitchFamily="34" charset="-122"/>
                 <a:cs typeface="Times New Roman" pitchFamily="34" charset="-120"/>
               </a:rPr>
-              <a:t>More developed countries: </a:t>
+              <a:t>The role of migration: </a:t>
             </a:r>
             <a:pPr algn="l" indent="0" marL="0">
               <a:spcAft>
@@ -20722,44 +20387,7 @@
                 <a:ea typeface="Times New Roman" pitchFamily="34" charset="-122"/>
                 <a:cs typeface="Times New Roman" pitchFamily="34" charset="-120"/>
               </a:rPr>
-              <a:t>The USA, Germany and Japan have low fertility and low mortality, so growth is slow, zero or negative.</a:t>
-            </a:r>
-            <a:endParaRPr lang="en-US" sz="4000" dirty="0"/>
-          </a:p>
-          <a:p>
-            <a:pPr algn="l" indent="0" marL="0">
-              <a:spcAft>
-                <a:spcPts val="800"/>
-              </a:spcAft>
-              <a:buNone/>
-            </a:pPr>
-            <a:r>
-              <a:rPr lang="en-US" sz="4000" b="1" dirty="0">
-                <a:solidFill>
-                  <a:srgbClr val="111111"/>
-                </a:solidFill>
-                <a:latin typeface="Times New Roman" pitchFamily="34" charset="0"/>
-                <a:ea typeface="Times New Roman" pitchFamily="34" charset="-122"/>
-                <a:cs typeface="Times New Roman" pitchFamily="34" charset="-120"/>
-              </a:rPr>
-              <a:t>Role of migration: </a:t>
-            </a:r>
-            <a:pPr algn="l" indent="0" marL="0">
-              <a:spcAft>
-                <a:spcPts val="800"/>
-              </a:spcAft>
-              <a:buNone/>
-            </a:pPr>
-            <a:r>
-              <a:rPr lang="en-US" sz="4000" dirty="0">
-                <a:solidFill>
-                  <a:srgbClr val="111111"/>
-                </a:solidFill>
-                <a:latin typeface="Times New Roman" pitchFamily="34" charset="0"/>
-                <a:ea typeface="Times New Roman" pitchFamily="34" charset="-122"/>
-                <a:cs typeface="Times New Roman" pitchFamily="34" charset="-120"/>
-              </a:rPr>
-              <a:t>In developed countries, immigration is often the main source of population growth.</a:t>
+              <a:t>In developed countries, immigration is often the main source of population growth. In some poor countries, emigration reduces growth.</a:t>
             </a:r>
             <a:endParaRPr lang="en-US" sz="4000" dirty="0"/>
           </a:p>
@@ -24858,7 +24486,7 @@
                           <a:ea typeface="Calibri" pitchFamily="34" charset="-122"/>
                           <a:cs typeface="Calibri" pitchFamily="34" charset="-120"/>
                         </a:rPr>
-                        <a:t>DEFINITIONS; Types of Growth; The Population Change System; Fertility; Mortality and Migration; Spatial Differences of Growth on a World Scale.</a:t>
+                        <a:t>DEFINITIONS; Types of Growth; The Population Change System; Fertility; Mortality and Migration; Spatial Differences on a World Scale.</a:t>
                       </a:r>
                       <a:endParaRPr lang="en-US" sz="1600" dirty="0">
                         <a:latin typeface="Calibri" charset="0"/>

--- a/lecons/USA/Population Geography/12_USA_POP_L09_Population_Growth_and_its_Determinants.pptx
+++ b/lecons/USA/Population Geography/12_USA_POP_L09_Population_Growth_and_its_Determinants.pptx
@@ -70,9 +70,18 @@
     <p:sldId id="318" r:id="rId64"/>
     <p:sldId id="319" r:id="rId65"/>
     <p:sldId id="320" r:id="rId66"/>
+    <p:sldId id="321" r:id="rId67"/>
+    <p:sldId id="322" r:id="rId68"/>
+    <p:sldId id="323" r:id="rId69"/>
+    <p:sldId id="324" r:id="rId70"/>
+    <p:sldId id="325" r:id="rId71"/>
+    <p:sldId id="326" r:id="rId72"/>
+    <p:sldId id="327" r:id="rId73"/>
+    <p:sldId id="328" r:id="rId74"/>
+    <p:sldId id="329" r:id="rId75"/>
   </p:sldIdLst>
   <p:notesMasterIdLst>
-    <p:notesMasterId r:id="rId67"/>
+    <p:notesMasterId r:id="rId76"/>
   </p:notesMasterIdLst>
   <p:sldSz cx="12192000" cy="6858000"/>
   <p:notesSz cx="6858000" cy="12192000"/>
@@ -3998,7 +4007,7 @@
           <a:p>
             <a:r>
               <a:rPr lang="en-US" dirty="0"/>
-              <a:t>Let us copy Fertility. Fertility, the main driver of population growth, depends on the following factors. Copy the point on Meaning: write the key term first, then its explanation.</a:t>
+              <a:t>Let us copy Factors of High Fertility. Fertility, the main driver of population growth, is kept high by the following factors. Copy the point on Early marriage on the left, then draw the diagram on the right: the factors of growth. Give it a title and label it clearly.</a:t>
             </a:r>
             <a:endParaRPr lang="en-US" dirty="0"/>
           </a:p>
@@ -4086,7 +4095,7 @@
           <a:p>
             <a:r>
               <a:rPr lang="en-US" dirty="0"/>
-              <a:t>Copy the point on Factors of high fertility on the left, then draw the diagram on the right: the factors of growth. Give it a title and label it clearly.</a:t>
+              <a:t>We continue with Factors of High Fertility. Copy the point on The value of large families: write the key term first, then its explanation.</a:t>
             </a:r>
             <a:endParaRPr lang="en-US" dirty="0"/>
           </a:p>
@@ -4174,7 +4183,7 @@
           <a:p>
             <a:r>
               <a:rPr lang="en-US" dirty="0"/>
-              <a:t>We continue with Fertility. Copy the point on Factors of low fertility: write the key term first, then its explanation.</a:t>
+              <a:t>We continue with Factors of High Fertility. Copy the point on High infant mortality: write the key term first, then its explanation.</a:t>
             </a:r>
             <a:endParaRPr lang="en-US" dirty="0"/>
           </a:p>
@@ -4262,7 +4271,7 @@
           <a:p>
             <a:r>
               <a:rPr lang="en-US" dirty="0"/>
-              <a:t>Let us copy Mortality and Migration. Mortality and migration depend on the following factors. Copy the point on Factors of high mortality: write the key term first, then its explanation.</a:t>
+              <a:t>We continue with Factors of High Fertility. Copy the point on Low education of girls: write the key term first, then its explanation.</a:t>
             </a:r>
             <a:endParaRPr lang="en-US" dirty="0"/>
           </a:p>
@@ -4350,7 +4359,7 @@
           <a:p>
             <a:r>
               <a:rPr lang="en-US" dirty="0"/>
-              <a:t>Copy the point on Factors of low mortality on the left, then draw the diagram on the right: vaccination. Give it a title and label it clearly.</a:t>
+              <a:t>Let us copy Factors of Low Fertility. Fertility is reduced by the following factors. Copy the point on The cost of raising children: write the key term first, then its explanation.</a:t>
             </a:r>
             <a:endParaRPr lang="en-US" dirty="0"/>
           </a:p>
@@ -4526,7 +4535,7 @@
           <a:p>
             <a:r>
               <a:rPr lang="en-US" dirty="0"/>
-              <a:t>We continue with Mortality and Migration. Copy the point on Factors of migration: write the key term first, then its explanation.</a:t>
+              <a:t>We continue with Factors of Low Fertility. Copy the point on Family planning: write the key term first, then its explanation.</a:t>
             </a:r>
             <a:endParaRPr lang="en-US" dirty="0"/>
           </a:p>
@@ -4614,7 +4623,7 @@
           <a:p>
             <a:r>
               <a:rPr lang="en-US" dirty="0"/>
-              <a:t>Let us copy Spatial Differences on a World Scale. The determinants of growth differ across the world as follows. Copy the point on Less developed countries on the left, then draw the diagram on the right: birth and death rates. Give it a title and label it clearly.</a:t>
+              <a:t>We continue with Factors of Low Fertility. Copy the point on Education and careers of women: write the key term first, then its explanation.</a:t>
             </a:r>
             <a:endParaRPr lang="en-US" dirty="0"/>
           </a:p>
@@ -4702,7 +4711,7 @@
           <a:p>
             <a:r>
               <a:rPr lang="en-US" dirty="0"/>
-              <a:t>We continue with Spatial Differences on a World Scale. Copy the point on More developed countries: write the key term first, then its explanation.</a:t>
+              <a:t>We continue with Factors of Low Fertility. Copy the point on Low infant mortality: write the key term first, then its explanation.</a:t>
             </a:r>
             <a:endParaRPr lang="en-US" dirty="0"/>
           </a:p>
@@ -4790,7 +4799,7 @@
           <a:p>
             <a:r>
               <a:rPr lang="en-US" dirty="0"/>
-              <a:t>We continue with Spatial Differences on a World Scale. Copy the point on The role of migration: write the key term first, then its explanation.</a:t>
+              <a:t>Let us copy Factors of Mortality. Mortality depends on the following factors. Copy the point on Health care on the left, then draw the diagram on the right: vaccination. Give it a title and label it clearly.</a:t>
             </a:r>
             <a:endParaRPr lang="en-US" dirty="0"/>
           </a:p>
@@ -4878,7 +4887,7 @@
           <a:p>
             <a:r>
               <a:rPr lang="en-US" dirty="0"/>
-              <a:t>Now let us check what you have understood. Question 1: Distinguish between natural increase and net migration. Answer in your exercise book.</a:t>
+              <a:t>We continue with Factors of Mortality. Copy the point on Sanitation and hygiene: write the key term first, then its explanation.</a:t>
             </a:r>
             <a:endParaRPr lang="en-US" dirty="0"/>
           </a:p>
@@ -4966,7 +4975,7 @@
           <a:p>
             <a:r>
               <a:rPr lang="en-US" dirty="0"/>
-              <a:t>The expected answer is: natural increase is births minus deaths; net migration is immigrants minus emigrants. If you got it right, well done.</a:t>
+              <a:t>We continue with Factors of Mortality. Copy the point on Food supply: write the key term first, then its explanation.</a:t>
             </a:r>
             <a:endParaRPr lang="en-US" dirty="0"/>
           </a:p>
@@ -5054,7 +5063,7 @@
           <a:p>
             <a:r>
               <a:rPr lang="en-US" dirty="0"/>
-              <a:t>Now let us check what you have understood. Question 2: Give two factors of low mortality. Answer in your exercise book.</a:t>
+              <a:t>We continue with Factors of Mortality. Copy the point on Wars and disasters: write the key term first, then its explanation.</a:t>
             </a:r>
             <a:endParaRPr lang="en-US" dirty="0"/>
           </a:p>
@@ -5142,7 +5151,7 @@
           <a:p>
             <a:r>
               <a:rPr lang="en-US" dirty="0"/>
-              <a:t>The expected answer is: vaccines and hospitals, clean water, good nutrition (any two). If you got it right, well done.</a:t>
+              <a:t>Let us copy Factors of Migration. Migration depends on the following factors. Copy the point on Lack of jobs and poverty: write the key term first, then its explanation.</a:t>
             </a:r>
             <a:endParaRPr lang="en-US" dirty="0"/>
           </a:p>
@@ -5230,7 +5239,7 @@
           <a:p>
             <a:r>
               <a:rPr lang="en-US" dirty="0"/>
-              <a:t>For those who need more practice, fill in the blanks in your exercise book. The answers are: number 1, increase; number 2, migration; number 3, negative.</a:t>
+              <a:t>We continue with Factors of Migration. Copy the point on Insecurity: write the key term first, then its explanation.</a:t>
             </a:r>
             <a:endParaRPr lang="en-US" dirty="0"/>
           </a:p>
@@ -5318,7 +5327,7 @@
           <a:p>
             <a:r>
               <a:rPr lang="en-US" dirty="0"/>
-              <a:t>For your homework: Define the crude birth rate. We shall correct it at the beginning of our next lesson.</a:t>
+              <a:t>We continue with Factors of Migration. Copy the point on Jobs and services in towns: write the key term first, then its explanation.</a:t>
             </a:r>
             <a:endParaRPr lang="en-US" dirty="0"/>
           </a:p>
@@ -5494,7 +5503,7 @@
           <a:p>
             <a:r>
               <a:rPr lang="en-US" dirty="0"/>
-              <a:t>Our next lesson will be on Practical Work 4: Calculating Demographic Indices. Thank you for your attention, and see you next time.</a:t>
+              <a:t>Let us copy Spatial Differences on a World Scale. The determinants of growth differ across the world as follows. Copy the point on Less developed countries on the left, then draw the diagram on the right: birth and death rates. Give it a title and label it clearly.</a:t>
             </a:r>
             <a:endParaRPr lang="en-US" dirty="0"/>
           </a:p>
@@ -5582,7 +5591,7 @@
           <a:p>
             <a:r>
               <a:rPr lang="en-US" dirty="0"/>
-              <a:t>Let us play the bilingual game. I say a word in English, and you give me the French word. Then we do the reverse.</a:t>
+              <a:t>We continue with Spatial Differences on a World Scale. Copy the point on More developed countries: write the key term first, then its explanation.</a:t>
             </a:r>
             <a:endParaRPr lang="en-US" dirty="0"/>
           </a:p>
@@ -5670,7 +5679,7 @@
           <a:p>
             <a:r>
               <a:rPr lang="en-US" dirty="0"/>
-              <a:t>I record this information in the official logbook of the class after the lesson.</a:t>
+              <a:t>We continue with Spatial Differences on a World Scale. Copy the point on The role of migration: write the key term first, then its explanation.</a:t>
             </a:r>
             <a:endParaRPr lang="en-US" dirty="0"/>
           </a:p>
@@ -5758,7 +5767,7 @@
           <a:p>
             <a:r>
               <a:rPr lang="en-US" dirty="0"/>
-              <a:t>I complete the second page of the logbook: the matter taught, the evaluation, the homework and the attendance.</a:t>
+              <a:t>Now let us check what you have understood. Question 1: Distinguish between natural increase and net migration. Answer in your exercise book.</a:t>
             </a:r>
             <a:endParaRPr lang="en-US" dirty="0"/>
           </a:p>
@@ -5846,7 +5855,7 @@
           <a:p>
             <a:r>
               <a:rPr lang="en-US" dirty="0"/>
-              <a:t>This slide is for me, the teacher: it gives the timing of the lesson and what to do if the projector is not available.</a:t>
+              <a:t>The expected answer is: natural increase is births minus deaths; net migration is immigrants minus emigrants. If you got it right, well done.</a:t>
             </a:r>
             <a:endParaRPr lang="en-US" dirty="0"/>
           </a:p>
@@ -5934,7 +5943,7 @@
           <a:p>
             <a:r>
               <a:rPr lang="en-US" dirty="0"/>
-              <a:t>These are the references and picture credits used to prepare this lesson.</a:t>
+              <a:t>Now let us check what you have understood. Question 2: Give two factors of low mortality. Answer in your exercise book.</a:t>
             </a:r>
             <a:endParaRPr lang="en-US" dirty="0"/>
           </a:p>
@@ -5958,6 +5967,358 @@
             <a:fld id="{F7021451-1387-4CA6-816F-3879F97B5CBC}" type="slidenum">
               <a:rPr lang="en-US"/>
               <a:t>65</a:t>
+            </a:fld>
+            <a:endParaRPr lang="en-US"/>
+          </a:p>
+        </p:txBody>
+      </p:sp>
+    </p:spTree>
+    <p:extLst>
+      <p:ext uri="{BB962C8B-B14F-4D97-AF65-F5344CB8AC3E}">
+        <p14:creationId xmlns:p14="http://schemas.microsoft.com/office/powerpoint/2010/main" val="1024086991"/>
+      </p:ext>
+    </p:extLst>
+  </p:cSld>
+  <p:clrMapOvr>
+    <a:masterClrMapping/>
+  </p:clrMapOvr>
+</p:notes>
+</file>
+
+<file path=ppt/notesSlides/notesSlide66.xml><?xml version="1.0" encoding="utf-8"?>
+<p:notes xmlns:a="http://schemas.openxmlformats.org/drawingml/2006/main" xmlns:r="http://schemas.openxmlformats.org/officeDocument/2006/relationships" xmlns:p="http://schemas.openxmlformats.org/presentationml/2006/main">
+  <p:cSld>
+    <p:spTree>
+      <p:nvGrpSpPr>
+        <p:cNvPr id="1" name=""/>
+        <p:cNvGrpSpPr/>
+        <p:nvPr/>
+      </p:nvGrpSpPr>
+      <p:grpSpPr>
+        <a:xfrm>
+          <a:off x="0" y="0"/>
+          <a:ext cx="0" cy="0"/>
+          <a:chOff x="0" y="0"/>
+          <a:chExt cx="0" cy="0"/>
+        </a:xfrm>
+      </p:grpSpPr>
+      <p:sp>
+        <p:nvSpPr>
+          <p:cNvPr id="2" name="Slide Image Placeholder 1"/>
+          <p:cNvSpPr>
+            <a:spLocks noGrp="1" noRot="1" noChangeAspect="1"/>
+          </p:cNvSpPr>
+          <p:nvPr>
+            <p:ph type="sldImg"/>
+          </p:nvPr>
+        </p:nvSpPr>
+        <p:spPr/>
+      </p:sp>
+      <p:sp>
+        <p:nvSpPr>
+          <p:cNvPr id="3" name="Notes Placeholder 2"/>
+          <p:cNvSpPr>
+            <a:spLocks noGrp="1"/>
+          </p:cNvSpPr>
+          <p:nvPr>
+            <p:ph type="body" idx="1"/>
+          </p:nvPr>
+        </p:nvSpPr>
+        <p:spPr/>
+        <p:txBody>
+          <a:bodyPr/>
+          <a:lstStyle/>
+          <a:p>
+            <a:r>
+              <a:rPr lang="en-US" dirty="0"/>
+              <a:t>The expected answer is: vaccines and hospitals, clean water, good nutrition (any two). If you got it right, well done.</a:t>
+            </a:r>
+            <a:endParaRPr lang="en-US" dirty="0"/>
+          </a:p>
+        </p:txBody>
+      </p:sp>
+      <p:sp>
+        <p:nvSpPr>
+          <p:cNvPr id="4" name="Slide Number Placeholder 3"/>
+          <p:cNvSpPr>
+            <a:spLocks noGrp="1"/>
+          </p:cNvSpPr>
+          <p:nvPr>
+            <p:ph type="sldNum" sz="quarter" idx="10"/>
+          </p:nvPr>
+        </p:nvSpPr>
+        <p:spPr/>
+        <p:txBody>
+          <a:bodyPr/>
+          <a:lstStyle/>
+          <a:p>
+            <a:fld id="{F7021451-1387-4CA6-816F-3879F97B5CBC}" type="slidenum">
+              <a:rPr lang="en-US"/>
+              <a:t>66</a:t>
+            </a:fld>
+            <a:endParaRPr lang="en-US"/>
+          </a:p>
+        </p:txBody>
+      </p:sp>
+    </p:spTree>
+    <p:extLst>
+      <p:ext uri="{BB962C8B-B14F-4D97-AF65-F5344CB8AC3E}">
+        <p14:creationId xmlns:p14="http://schemas.microsoft.com/office/powerpoint/2010/main" val="1024086991"/>
+      </p:ext>
+    </p:extLst>
+  </p:cSld>
+  <p:clrMapOvr>
+    <a:masterClrMapping/>
+  </p:clrMapOvr>
+</p:notes>
+</file>
+
+<file path=ppt/notesSlides/notesSlide67.xml><?xml version="1.0" encoding="utf-8"?>
+<p:notes xmlns:a="http://schemas.openxmlformats.org/drawingml/2006/main" xmlns:r="http://schemas.openxmlformats.org/officeDocument/2006/relationships" xmlns:p="http://schemas.openxmlformats.org/presentationml/2006/main">
+  <p:cSld>
+    <p:spTree>
+      <p:nvGrpSpPr>
+        <p:cNvPr id="1" name=""/>
+        <p:cNvGrpSpPr/>
+        <p:nvPr/>
+      </p:nvGrpSpPr>
+      <p:grpSpPr>
+        <a:xfrm>
+          <a:off x="0" y="0"/>
+          <a:ext cx="0" cy="0"/>
+          <a:chOff x="0" y="0"/>
+          <a:chExt cx="0" cy="0"/>
+        </a:xfrm>
+      </p:grpSpPr>
+      <p:sp>
+        <p:nvSpPr>
+          <p:cNvPr id="2" name="Slide Image Placeholder 1"/>
+          <p:cNvSpPr>
+            <a:spLocks noGrp="1" noRot="1" noChangeAspect="1"/>
+          </p:cNvSpPr>
+          <p:nvPr>
+            <p:ph type="sldImg"/>
+          </p:nvPr>
+        </p:nvSpPr>
+        <p:spPr/>
+      </p:sp>
+      <p:sp>
+        <p:nvSpPr>
+          <p:cNvPr id="3" name="Notes Placeholder 2"/>
+          <p:cNvSpPr>
+            <a:spLocks noGrp="1"/>
+          </p:cNvSpPr>
+          <p:nvPr>
+            <p:ph type="body" idx="1"/>
+          </p:nvPr>
+        </p:nvSpPr>
+        <p:spPr/>
+        <p:txBody>
+          <a:bodyPr/>
+          <a:lstStyle/>
+          <a:p>
+            <a:r>
+              <a:rPr lang="en-US" dirty="0"/>
+              <a:t>For those who need more practice, fill in the blanks in your exercise book. The answers are: number 1, increase; number 2, migration; number 3, negative.</a:t>
+            </a:r>
+            <a:endParaRPr lang="en-US" dirty="0"/>
+          </a:p>
+        </p:txBody>
+      </p:sp>
+      <p:sp>
+        <p:nvSpPr>
+          <p:cNvPr id="4" name="Slide Number Placeholder 3"/>
+          <p:cNvSpPr>
+            <a:spLocks noGrp="1"/>
+          </p:cNvSpPr>
+          <p:nvPr>
+            <p:ph type="sldNum" sz="quarter" idx="10"/>
+          </p:nvPr>
+        </p:nvSpPr>
+        <p:spPr/>
+        <p:txBody>
+          <a:bodyPr/>
+          <a:lstStyle/>
+          <a:p>
+            <a:fld id="{F7021451-1387-4CA6-816F-3879F97B5CBC}" type="slidenum">
+              <a:rPr lang="en-US"/>
+              <a:t>67</a:t>
+            </a:fld>
+            <a:endParaRPr lang="en-US"/>
+          </a:p>
+        </p:txBody>
+      </p:sp>
+    </p:spTree>
+    <p:extLst>
+      <p:ext uri="{BB962C8B-B14F-4D97-AF65-F5344CB8AC3E}">
+        <p14:creationId xmlns:p14="http://schemas.microsoft.com/office/powerpoint/2010/main" val="1024086991"/>
+      </p:ext>
+    </p:extLst>
+  </p:cSld>
+  <p:clrMapOvr>
+    <a:masterClrMapping/>
+  </p:clrMapOvr>
+</p:notes>
+</file>
+
+<file path=ppt/notesSlides/notesSlide68.xml><?xml version="1.0" encoding="utf-8"?>
+<p:notes xmlns:a="http://schemas.openxmlformats.org/drawingml/2006/main" xmlns:r="http://schemas.openxmlformats.org/officeDocument/2006/relationships" xmlns:p="http://schemas.openxmlformats.org/presentationml/2006/main">
+  <p:cSld>
+    <p:spTree>
+      <p:nvGrpSpPr>
+        <p:cNvPr id="1" name=""/>
+        <p:cNvGrpSpPr/>
+        <p:nvPr/>
+      </p:nvGrpSpPr>
+      <p:grpSpPr>
+        <a:xfrm>
+          <a:off x="0" y="0"/>
+          <a:ext cx="0" cy="0"/>
+          <a:chOff x="0" y="0"/>
+          <a:chExt cx="0" cy="0"/>
+        </a:xfrm>
+      </p:grpSpPr>
+      <p:sp>
+        <p:nvSpPr>
+          <p:cNvPr id="2" name="Slide Image Placeholder 1"/>
+          <p:cNvSpPr>
+            <a:spLocks noGrp="1" noRot="1" noChangeAspect="1"/>
+          </p:cNvSpPr>
+          <p:nvPr>
+            <p:ph type="sldImg"/>
+          </p:nvPr>
+        </p:nvSpPr>
+        <p:spPr/>
+      </p:sp>
+      <p:sp>
+        <p:nvSpPr>
+          <p:cNvPr id="3" name="Notes Placeholder 2"/>
+          <p:cNvSpPr>
+            <a:spLocks noGrp="1"/>
+          </p:cNvSpPr>
+          <p:nvPr>
+            <p:ph type="body" idx="1"/>
+          </p:nvPr>
+        </p:nvSpPr>
+        <p:spPr/>
+        <p:txBody>
+          <a:bodyPr/>
+          <a:lstStyle/>
+          <a:p>
+            <a:r>
+              <a:rPr lang="en-US" dirty="0"/>
+              <a:t>For your homework: Define the crude birth rate. We shall correct it at the beginning of our next lesson.</a:t>
+            </a:r>
+            <a:endParaRPr lang="en-US" dirty="0"/>
+          </a:p>
+        </p:txBody>
+      </p:sp>
+      <p:sp>
+        <p:nvSpPr>
+          <p:cNvPr id="4" name="Slide Number Placeholder 3"/>
+          <p:cNvSpPr>
+            <a:spLocks noGrp="1"/>
+          </p:cNvSpPr>
+          <p:nvPr>
+            <p:ph type="sldNum" sz="quarter" idx="10"/>
+          </p:nvPr>
+        </p:nvSpPr>
+        <p:spPr/>
+        <p:txBody>
+          <a:bodyPr/>
+          <a:lstStyle/>
+          <a:p>
+            <a:fld id="{F7021451-1387-4CA6-816F-3879F97B5CBC}" type="slidenum">
+              <a:rPr lang="en-US"/>
+              <a:t>68</a:t>
+            </a:fld>
+            <a:endParaRPr lang="en-US"/>
+          </a:p>
+        </p:txBody>
+      </p:sp>
+    </p:spTree>
+    <p:extLst>
+      <p:ext uri="{BB962C8B-B14F-4D97-AF65-F5344CB8AC3E}">
+        <p14:creationId xmlns:p14="http://schemas.microsoft.com/office/powerpoint/2010/main" val="1024086991"/>
+      </p:ext>
+    </p:extLst>
+  </p:cSld>
+  <p:clrMapOvr>
+    <a:masterClrMapping/>
+  </p:clrMapOvr>
+</p:notes>
+</file>
+
+<file path=ppt/notesSlides/notesSlide69.xml><?xml version="1.0" encoding="utf-8"?>
+<p:notes xmlns:a="http://schemas.openxmlformats.org/drawingml/2006/main" xmlns:r="http://schemas.openxmlformats.org/officeDocument/2006/relationships" xmlns:p="http://schemas.openxmlformats.org/presentationml/2006/main">
+  <p:cSld>
+    <p:spTree>
+      <p:nvGrpSpPr>
+        <p:cNvPr id="1" name=""/>
+        <p:cNvGrpSpPr/>
+        <p:nvPr/>
+      </p:nvGrpSpPr>
+      <p:grpSpPr>
+        <a:xfrm>
+          <a:off x="0" y="0"/>
+          <a:ext cx="0" cy="0"/>
+          <a:chOff x="0" y="0"/>
+          <a:chExt cx="0" cy="0"/>
+        </a:xfrm>
+      </p:grpSpPr>
+      <p:sp>
+        <p:nvSpPr>
+          <p:cNvPr id="2" name="Slide Image Placeholder 1"/>
+          <p:cNvSpPr>
+            <a:spLocks noGrp="1" noRot="1" noChangeAspect="1"/>
+          </p:cNvSpPr>
+          <p:nvPr>
+            <p:ph type="sldImg"/>
+          </p:nvPr>
+        </p:nvSpPr>
+        <p:spPr/>
+      </p:sp>
+      <p:sp>
+        <p:nvSpPr>
+          <p:cNvPr id="3" name="Notes Placeholder 2"/>
+          <p:cNvSpPr>
+            <a:spLocks noGrp="1"/>
+          </p:cNvSpPr>
+          <p:nvPr>
+            <p:ph type="body" idx="1"/>
+          </p:nvPr>
+        </p:nvSpPr>
+        <p:spPr/>
+        <p:txBody>
+          <a:bodyPr/>
+          <a:lstStyle/>
+          <a:p>
+            <a:r>
+              <a:rPr lang="en-US" dirty="0"/>
+              <a:t>Our next lesson will be on Practical Work 4: Calculating Demographic Indices. Thank you for your attention, and see you next time.</a:t>
+            </a:r>
+            <a:endParaRPr lang="en-US" dirty="0"/>
+          </a:p>
+        </p:txBody>
+      </p:sp>
+      <p:sp>
+        <p:nvSpPr>
+          <p:cNvPr id="4" name="Slide Number Placeholder 3"/>
+          <p:cNvSpPr>
+            <a:spLocks noGrp="1"/>
+          </p:cNvSpPr>
+          <p:nvPr>
+            <p:ph type="sldNum" sz="quarter" idx="10"/>
+          </p:nvPr>
+        </p:nvSpPr>
+        <p:spPr/>
+        <p:txBody>
+          <a:bodyPr/>
+          <a:lstStyle/>
+          <a:p>
+            <a:fld id="{F7021451-1387-4CA6-816F-3879F97B5CBC}" type="slidenum">
+              <a:rPr lang="en-US"/>
+              <a:t>69</a:t>
             </a:fld>
             <a:endParaRPr lang="en-US"/>
           </a:p>
@@ -6046,6 +6407,446 @@
             <a:fld id="{F7021451-1387-4CA6-816F-3879F97B5CBC}" type="slidenum">
               <a:rPr lang="en-US"/>
               <a:t>7</a:t>
+            </a:fld>
+            <a:endParaRPr lang="en-US"/>
+          </a:p>
+        </p:txBody>
+      </p:sp>
+    </p:spTree>
+    <p:extLst>
+      <p:ext uri="{BB962C8B-B14F-4D97-AF65-F5344CB8AC3E}">
+        <p14:creationId xmlns:p14="http://schemas.microsoft.com/office/powerpoint/2010/main" val="1024086991"/>
+      </p:ext>
+    </p:extLst>
+  </p:cSld>
+  <p:clrMapOvr>
+    <a:masterClrMapping/>
+  </p:clrMapOvr>
+</p:notes>
+</file>
+
+<file path=ppt/notesSlides/notesSlide70.xml><?xml version="1.0" encoding="utf-8"?>
+<p:notes xmlns:a="http://schemas.openxmlformats.org/drawingml/2006/main" xmlns:r="http://schemas.openxmlformats.org/officeDocument/2006/relationships" xmlns:p="http://schemas.openxmlformats.org/presentationml/2006/main">
+  <p:cSld>
+    <p:spTree>
+      <p:nvGrpSpPr>
+        <p:cNvPr id="1" name=""/>
+        <p:cNvGrpSpPr/>
+        <p:nvPr/>
+      </p:nvGrpSpPr>
+      <p:grpSpPr>
+        <a:xfrm>
+          <a:off x="0" y="0"/>
+          <a:ext cx="0" cy="0"/>
+          <a:chOff x="0" y="0"/>
+          <a:chExt cx="0" cy="0"/>
+        </a:xfrm>
+      </p:grpSpPr>
+      <p:sp>
+        <p:nvSpPr>
+          <p:cNvPr id="2" name="Slide Image Placeholder 1"/>
+          <p:cNvSpPr>
+            <a:spLocks noGrp="1" noRot="1" noChangeAspect="1"/>
+          </p:cNvSpPr>
+          <p:nvPr>
+            <p:ph type="sldImg"/>
+          </p:nvPr>
+        </p:nvSpPr>
+        <p:spPr/>
+      </p:sp>
+      <p:sp>
+        <p:nvSpPr>
+          <p:cNvPr id="3" name="Notes Placeholder 2"/>
+          <p:cNvSpPr>
+            <a:spLocks noGrp="1"/>
+          </p:cNvSpPr>
+          <p:nvPr>
+            <p:ph type="body" idx="1"/>
+          </p:nvPr>
+        </p:nvSpPr>
+        <p:spPr/>
+        <p:txBody>
+          <a:bodyPr/>
+          <a:lstStyle/>
+          <a:p>
+            <a:r>
+              <a:rPr lang="en-US" dirty="0"/>
+              <a:t>Let us play the bilingual game. I say a word in English, and you give me the French word. Then we do the reverse.</a:t>
+            </a:r>
+            <a:endParaRPr lang="en-US" dirty="0"/>
+          </a:p>
+        </p:txBody>
+      </p:sp>
+      <p:sp>
+        <p:nvSpPr>
+          <p:cNvPr id="4" name="Slide Number Placeholder 3"/>
+          <p:cNvSpPr>
+            <a:spLocks noGrp="1"/>
+          </p:cNvSpPr>
+          <p:nvPr>
+            <p:ph type="sldNum" sz="quarter" idx="10"/>
+          </p:nvPr>
+        </p:nvSpPr>
+        <p:spPr/>
+        <p:txBody>
+          <a:bodyPr/>
+          <a:lstStyle/>
+          <a:p>
+            <a:fld id="{F7021451-1387-4CA6-816F-3879F97B5CBC}" type="slidenum">
+              <a:rPr lang="en-US"/>
+              <a:t>70</a:t>
+            </a:fld>
+            <a:endParaRPr lang="en-US"/>
+          </a:p>
+        </p:txBody>
+      </p:sp>
+    </p:spTree>
+    <p:extLst>
+      <p:ext uri="{BB962C8B-B14F-4D97-AF65-F5344CB8AC3E}">
+        <p14:creationId xmlns:p14="http://schemas.microsoft.com/office/powerpoint/2010/main" val="1024086991"/>
+      </p:ext>
+    </p:extLst>
+  </p:cSld>
+  <p:clrMapOvr>
+    <a:masterClrMapping/>
+  </p:clrMapOvr>
+</p:notes>
+</file>
+
+<file path=ppt/notesSlides/notesSlide71.xml><?xml version="1.0" encoding="utf-8"?>
+<p:notes xmlns:a="http://schemas.openxmlformats.org/drawingml/2006/main" xmlns:r="http://schemas.openxmlformats.org/officeDocument/2006/relationships" xmlns:p="http://schemas.openxmlformats.org/presentationml/2006/main">
+  <p:cSld>
+    <p:spTree>
+      <p:nvGrpSpPr>
+        <p:cNvPr id="1" name=""/>
+        <p:cNvGrpSpPr/>
+        <p:nvPr/>
+      </p:nvGrpSpPr>
+      <p:grpSpPr>
+        <a:xfrm>
+          <a:off x="0" y="0"/>
+          <a:ext cx="0" cy="0"/>
+          <a:chOff x="0" y="0"/>
+          <a:chExt cx="0" cy="0"/>
+        </a:xfrm>
+      </p:grpSpPr>
+      <p:sp>
+        <p:nvSpPr>
+          <p:cNvPr id="2" name="Slide Image Placeholder 1"/>
+          <p:cNvSpPr>
+            <a:spLocks noGrp="1" noRot="1" noChangeAspect="1"/>
+          </p:cNvSpPr>
+          <p:nvPr>
+            <p:ph type="sldImg"/>
+          </p:nvPr>
+        </p:nvSpPr>
+        <p:spPr/>
+      </p:sp>
+      <p:sp>
+        <p:nvSpPr>
+          <p:cNvPr id="3" name="Notes Placeholder 2"/>
+          <p:cNvSpPr>
+            <a:spLocks noGrp="1"/>
+          </p:cNvSpPr>
+          <p:nvPr>
+            <p:ph type="body" idx="1"/>
+          </p:nvPr>
+        </p:nvSpPr>
+        <p:spPr/>
+        <p:txBody>
+          <a:bodyPr/>
+          <a:lstStyle/>
+          <a:p>
+            <a:r>
+              <a:rPr lang="en-US" dirty="0"/>
+              <a:t>I record this information in the official logbook of the class after the lesson.</a:t>
+            </a:r>
+            <a:endParaRPr lang="en-US" dirty="0"/>
+          </a:p>
+        </p:txBody>
+      </p:sp>
+      <p:sp>
+        <p:nvSpPr>
+          <p:cNvPr id="4" name="Slide Number Placeholder 3"/>
+          <p:cNvSpPr>
+            <a:spLocks noGrp="1"/>
+          </p:cNvSpPr>
+          <p:nvPr>
+            <p:ph type="sldNum" sz="quarter" idx="10"/>
+          </p:nvPr>
+        </p:nvSpPr>
+        <p:spPr/>
+        <p:txBody>
+          <a:bodyPr/>
+          <a:lstStyle/>
+          <a:p>
+            <a:fld id="{F7021451-1387-4CA6-816F-3879F97B5CBC}" type="slidenum">
+              <a:rPr lang="en-US"/>
+              <a:t>71</a:t>
+            </a:fld>
+            <a:endParaRPr lang="en-US"/>
+          </a:p>
+        </p:txBody>
+      </p:sp>
+    </p:spTree>
+    <p:extLst>
+      <p:ext uri="{BB962C8B-B14F-4D97-AF65-F5344CB8AC3E}">
+        <p14:creationId xmlns:p14="http://schemas.microsoft.com/office/powerpoint/2010/main" val="1024086991"/>
+      </p:ext>
+    </p:extLst>
+  </p:cSld>
+  <p:clrMapOvr>
+    <a:masterClrMapping/>
+  </p:clrMapOvr>
+</p:notes>
+</file>
+
+<file path=ppt/notesSlides/notesSlide72.xml><?xml version="1.0" encoding="utf-8"?>
+<p:notes xmlns:a="http://schemas.openxmlformats.org/drawingml/2006/main" xmlns:r="http://schemas.openxmlformats.org/officeDocument/2006/relationships" xmlns:p="http://schemas.openxmlformats.org/presentationml/2006/main">
+  <p:cSld>
+    <p:spTree>
+      <p:nvGrpSpPr>
+        <p:cNvPr id="1" name=""/>
+        <p:cNvGrpSpPr/>
+        <p:nvPr/>
+      </p:nvGrpSpPr>
+      <p:grpSpPr>
+        <a:xfrm>
+          <a:off x="0" y="0"/>
+          <a:ext cx="0" cy="0"/>
+          <a:chOff x="0" y="0"/>
+          <a:chExt cx="0" cy="0"/>
+        </a:xfrm>
+      </p:grpSpPr>
+      <p:sp>
+        <p:nvSpPr>
+          <p:cNvPr id="2" name="Slide Image Placeholder 1"/>
+          <p:cNvSpPr>
+            <a:spLocks noGrp="1" noRot="1" noChangeAspect="1"/>
+          </p:cNvSpPr>
+          <p:nvPr>
+            <p:ph type="sldImg"/>
+          </p:nvPr>
+        </p:nvSpPr>
+        <p:spPr/>
+      </p:sp>
+      <p:sp>
+        <p:nvSpPr>
+          <p:cNvPr id="3" name="Notes Placeholder 2"/>
+          <p:cNvSpPr>
+            <a:spLocks noGrp="1"/>
+          </p:cNvSpPr>
+          <p:nvPr>
+            <p:ph type="body" idx="1"/>
+          </p:nvPr>
+        </p:nvSpPr>
+        <p:spPr/>
+        <p:txBody>
+          <a:bodyPr/>
+          <a:lstStyle/>
+          <a:p>
+            <a:r>
+              <a:rPr lang="en-US" dirty="0"/>
+              <a:t>I complete the second page of the logbook: the matter taught, the evaluation, the homework and the attendance.</a:t>
+            </a:r>
+            <a:endParaRPr lang="en-US" dirty="0"/>
+          </a:p>
+        </p:txBody>
+      </p:sp>
+      <p:sp>
+        <p:nvSpPr>
+          <p:cNvPr id="4" name="Slide Number Placeholder 3"/>
+          <p:cNvSpPr>
+            <a:spLocks noGrp="1"/>
+          </p:cNvSpPr>
+          <p:nvPr>
+            <p:ph type="sldNum" sz="quarter" idx="10"/>
+          </p:nvPr>
+        </p:nvSpPr>
+        <p:spPr/>
+        <p:txBody>
+          <a:bodyPr/>
+          <a:lstStyle/>
+          <a:p>
+            <a:fld id="{F7021451-1387-4CA6-816F-3879F97B5CBC}" type="slidenum">
+              <a:rPr lang="en-US"/>
+              <a:t>72</a:t>
+            </a:fld>
+            <a:endParaRPr lang="en-US"/>
+          </a:p>
+        </p:txBody>
+      </p:sp>
+    </p:spTree>
+    <p:extLst>
+      <p:ext uri="{BB962C8B-B14F-4D97-AF65-F5344CB8AC3E}">
+        <p14:creationId xmlns:p14="http://schemas.microsoft.com/office/powerpoint/2010/main" val="1024086991"/>
+      </p:ext>
+    </p:extLst>
+  </p:cSld>
+  <p:clrMapOvr>
+    <a:masterClrMapping/>
+  </p:clrMapOvr>
+</p:notes>
+</file>
+
+<file path=ppt/notesSlides/notesSlide73.xml><?xml version="1.0" encoding="utf-8"?>
+<p:notes xmlns:a="http://schemas.openxmlformats.org/drawingml/2006/main" xmlns:r="http://schemas.openxmlformats.org/officeDocument/2006/relationships" xmlns:p="http://schemas.openxmlformats.org/presentationml/2006/main">
+  <p:cSld>
+    <p:spTree>
+      <p:nvGrpSpPr>
+        <p:cNvPr id="1" name=""/>
+        <p:cNvGrpSpPr/>
+        <p:nvPr/>
+      </p:nvGrpSpPr>
+      <p:grpSpPr>
+        <a:xfrm>
+          <a:off x="0" y="0"/>
+          <a:ext cx="0" cy="0"/>
+          <a:chOff x="0" y="0"/>
+          <a:chExt cx="0" cy="0"/>
+        </a:xfrm>
+      </p:grpSpPr>
+      <p:sp>
+        <p:nvSpPr>
+          <p:cNvPr id="2" name="Slide Image Placeholder 1"/>
+          <p:cNvSpPr>
+            <a:spLocks noGrp="1" noRot="1" noChangeAspect="1"/>
+          </p:cNvSpPr>
+          <p:nvPr>
+            <p:ph type="sldImg"/>
+          </p:nvPr>
+        </p:nvSpPr>
+        <p:spPr/>
+      </p:sp>
+      <p:sp>
+        <p:nvSpPr>
+          <p:cNvPr id="3" name="Notes Placeholder 2"/>
+          <p:cNvSpPr>
+            <a:spLocks noGrp="1"/>
+          </p:cNvSpPr>
+          <p:nvPr>
+            <p:ph type="body" idx="1"/>
+          </p:nvPr>
+        </p:nvSpPr>
+        <p:spPr/>
+        <p:txBody>
+          <a:bodyPr/>
+          <a:lstStyle/>
+          <a:p>
+            <a:r>
+              <a:rPr lang="en-US" dirty="0"/>
+              <a:t>This slide is for me, the teacher: it gives the timing of the lesson and what to do if the projector is not available.</a:t>
+            </a:r>
+            <a:endParaRPr lang="en-US" dirty="0"/>
+          </a:p>
+        </p:txBody>
+      </p:sp>
+      <p:sp>
+        <p:nvSpPr>
+          <p:cNvPr id="4" name="Slide Number Placeholder 3"/>
+          <p:cNvSpPr>
+            <a:spLocks noGrp="1"/>
+          </p:cNvSpPr>
+          <p:nvPr>
+            <p:ph type="sldNum" sz="quarter" idx="10"/>
+          </p:nvPr>
+        </p:nvSpPr>
+        <p:spPr/>
+        <p:txBody>
+          <a:bodyPr/>
+          <a:lstStyle/>
+          <a:p>
+            <a:fld id="{F7021451-1387-4CA6-816F-3879F97B5CBC}" type="slidenum">
+              <a:rPr lang="en-US"/>
+              <a:t>73</a:t>
+            </a:fld>
+            <a:endParaRPr lang="en-US"/>
+          </a:p>
+        </p:txBody>
+      </p:sp>
+    </p:spTree>
+    <p:extLst>
+      <p:ext uri="{BB962C8B-B14F-4D97-AF65-F5344CB8AC3E}">
+        <p14:creationId xmlns:p14="http://schemas.microsoft.com/office/powerpoint/2010/main" val="1024086991"/>
+      </p:ext>
+    </p:extLst>
+  </p:cSld>
+  <p:clrMapOvr>
+    <a:masterClrMapping/>
+  </p:clrMapOvr>
+</p:notes>
+</file>
+
+<file path=ppt/notesSlides/notesSlide74.xml><?xml version="1.0" encoding="utf-8"?>
+<p:notes xmlns:a="http://schemas.openxmlformats.org/drawingml/2006/main" xmlns:r="http://schemas.openxmlformats.org/officeDocument/2006/relationships" xmlns:p="http://schemas.openxmlformats.org/presentationml/2006/main">
+  <p:cSld>
+    <p:spTree>
+      <p:nvGrpSpPr>
+        <p:cNvPr id="1" name=""/>
+        <p:cNvGrpSpPr/>
+        <p:nvPr/>
+      </p:nvGrpSpPr>
+      <p:grpSpPr>
+        <a:xfrm>
+          <a:off x="0" y="0"/>
+          <a:ext cx="0" cy="0"/>
+          <a:chOff x="0" y="0"/>
+          <a:chExt cx="0" cy="0"/>
+        </a:xfrm>
+      </p:grpSpPr>
+      <p:sp>
+        <p:nvSpPr>
+          <p:cNvPr id="2" name="Slide Image Placeholder 1"/>
+          <p:cNvSpPr>
+            <a:spLocks noGrp="1" noRot="1" noChangeAspect="1"/>
+          </p:cNvSpPr>
+          <p:nvPr>
+            <p:ph type="sldImg"/>
+          </p:nvPr>
+        </p:nvSpPr>
+        <p:spPr/>
+      </p:sp>
+      <p:sp>
+        <p:nvSpPr>
+          <p:cNvPr id="3" name="Notes Placeholder 2"/>
+          <p:cNvSpPr>
+            <a:spLocks noGrp="1"/>
+          </p:cNvSpPr>
+          <p:nvPr>
+            <p:ph type="body" idx="1"/>
+          </p:nvPr>
+        </p:nvSpPr>
+        <p:spPr/>
+        <p:txBody>
+          <a:bodyPr/>
+          <a:lstStyle/>
+          <a:p>
+            <a:r>
+              <a:rPr lang="en-US" dirty="0"/>
+              <a:t>These are the references and picture credits used to prepare this lesson.</a:t>
+            </a:r>
+            <a:endParaRPr lang="en-US" dirty="0"/>
+          </a:p>
+        </p:txBody>
+      </p:sp>
+      <p:sp>
+        <p:nvSpPr>
+          <p:cNvPr id="4" name="Slide Number Placeholder 3"/>
+          <p:cNvSpPr>
+            <a:spLocks noGrp="1"/>
+          </p:cNvSpPr>
+          <p:nvPr>
+            <p:ph type="sldNum" sz="quarter" idx="10"/>
+          </p:nvPr>
+        </p:nvSpPr>
+        <p:spPr/>
+        <p:txBody>
+          <a:bodyPr/>
+          <a:lstStyle/>
+          <a:p>
+            <a:fld id="{F7021451-1387-4CA6-816F-3879F97B5CBC}" type="slidenum">
+              <a:rPr lang="en-US"/>
+              <a:t>74</a:t>
             </a:fld>
             <a:endParaRPr lang="en-US"/>
           </a:p>
@@ -17747,9 +18548,170 @@
           </a:p>
         </p:txBody>
       </p:sp>
+      <p:sp>
+        <p:nvSpPr>
+          <p:cNvPr id="3" name="Text 1"/>
+          <p:cNvSpPr/>
+          <p:nvPr/>
+        </p:nvSpPr>
+        <p:spPr>
+          <a:xfrm>
+            <a:off x="365760" y="1005840"/>
+            <a:ext cx="11460175" cy="731520"/>
+          </a:xfrm>
+          <a:prstGeom prst="rect">
+            <a:avLst/>
+          </a:prstGeom>
+          <a:noFill/>
+          <a:ln/>
+        </p:spPr>
+        <p:txBody>
+          <a:bodyPr wrap="square" lIns="0" tIns="0" rIns="0" bIns="0" rtlCol="0" anchor="ctr">
+            <a:normAutofit/>
+          </a:bodyPr>
+          <a:lstStyle/>
+          <a:p>
+            <a:pPr algn="ctr" indent="0" marL="0">
+              <a:buNone/>
+            </a:pPr>
+            <a:r>
+              <a:rPr lang="en-US" sz="3600" b="1" dirty="0">
+                <a:solidFill>
+                  <a:srgbClr val="990011"/>
+                </a:solidFill>
+                <a:latin typeface="Times New Roman" pitchFamily="34" charset="0"/>
+                <a:ea typeface="Times New Roman" pitchFamily="34" charset="-122"/>
+                <a:cs typeface="Times New Roman" pitchFamily="34" charset="-120"/>
+              </a:rPr>
+              <a:t>2. Determinants of Population Growth</a:t>
+            </a:r>
+            <a:endParaRPr lang="en-US" sz="3600" dirty="0"/>
+          </a:p>
+        </p:txBody>
+      </p:sp>
+      <p:sp>
+        <p:nvSpPr>
+          <p:cNvPr id="4" name="Text 2"/>
+          <p:cNvSpPr/>
+          <p:nvPr/>
+        </p:nvSpPr>
+        <p:spPr>
+          <a:xfrm>
+            <a:off x="365760" y="1737360"/>
+            <a:ext cx="6035040" cy="457200"/>
+          </a:xfrm>
+          <a:prstGeom prst="rect">
+            <a:avLst/>
+          </a:prstGeom>
+          <a:noFill/>
+          <a:ln/>
+        </p:spPr>
+        <p:txBody>
+          <a:bodyPr wrap="square" lIns="0" tIns="0" rIns="0" bIns="0" rtlCol="0" anchor="ctr">
+            <a:normAutofit/>
+          </a:bodyPr>
+          <a:lstStyle/>
+          <a:p>
+            <a:pPr algn="l" indent="0" marL="0">
+              <a:buNone/>
+            </a:pPr>
+            <a:r>
+              <a:rPr lang="en-US" sz="3000" b="1" dirty="0">
+                <a:solidFill>
+                  <a:srgbClr val="990011"/>
+                </a:solidFill>
+                <a:latin typeface="Times New Roman" pitchFamily="34" charset="0"/>
+                <a:ea typeface="Times New Roman" pitchFamily="34" charset="-122"/>
+                <a:cs typeface="Times New Roman" pitchFamily="34" charset="-120"/>
+              </a:rPr>
+              <a:t>A) Factors of High Fertility</a:t>
+            </a:r>
+            <a:endParaRPr lang="en-US" sz="3000" dirty="0"/>
+          </a:p>
+        </p:txBody>
+      </p:sp>
+      <p:sp>
+        <p:nvSpPr>
+          <p:cNvPr id="5" name="Text 3"/>
+          <p:cNvSpPr/>
+          <p:nvPr/>
+        </p:nvSpPr>
+        <p:spPr>
+          <a:xfrm>
+            <a:off x="365760" y="2240280"/>
+            <a:ext cx="6035040" cy="4160520"/>
+          </a:xfrm>
+          <a:prstGeom prst="rect">
+            <a:avLst/>
+          </a:prstGeom>
+          <a:noFill/>
+          <a:ln/>
+        </p:spPr>
+        <p:txBody>
+          <a:bodyPr wrap="square" lIns="0" tIns="0" rIns="0" bIns="0" rtlCol="0" anchor="t"/>
+          <a:lstStyle/>
+          <a:p>
+            <a:pPr algn="l" indent="0" marL="0">
+              <a:spcAft>
+                <a:spcPts val="800"/>
+              </a:spcAft>
+              <a:buNone/>
+            </a:pPr>
+            <a:r>
+              <a:rPr lang="en-US" sz="3400" i="1" dirty="0">
+                <a:solidFill>
+                  <a:srgbClr val="111111"/>
+                </a:solidFill>
+                <a:latin typeface="Times New Roman" pitchFamily="34" charset="0"/>
+                <a:ea typeface="Times New Roman" pitchFamily="34" charset="-122"/>
+                <a:cs typeface="Times New Roman" pitchFamily="34" charset="-120"/>
+              </a:rPr>
+              <a:t>Fertility, the main driver of population growth, is kept high by the following factors:</a:t>
+            </a:r>
+            <a:endParaRPr lang="en-US" sz="3400" dirty="0"/>
+          </a:p>
+          <a:p>
+            <a:pPr algn="l" indent="0" marL="0">
+              <a:spcAft>
+                <a:spcPts val="800"/>
+              </a:spcAft>
+              <a:buNone/>
+            </a:pPr>
+            <a:r>
+              <a:rPr lang="en-US" sz="3400" b="1" dirty="0">
+                <a:solidFill>
+                  <a:srgbClr val="111111"/>
+                </a:solidFill>
+                <a:latin typeface="Times New Roman" pitchFamily="34" charset="0"/>
+                <a:ea typeface="Times New Roman" pitchFamily="34" charset="-122"/>
+                <a:cs typeface="Times New Roman" pitchFamily="34" charset="-120"/>
+              </a:rPr>
+              <a:t>Early marriage: </a:t>
+            </a:r>
+            <a:pPr algn="l" indent="0" marL="0">
+              <a:spcAft>
+                <a:spcPts val="800"/>
+              </a:spcAft>
+              <a:buNone/>
+            </a:pPr>
+            <a:r>
+              <a:rPr lang="en-US" sz="3400" dirty="0">
+                <a:solidFill>
+                  <a:srgbClr val="111111"/>
+                </a:solidFill>
+                <a:latin typeface="Times New Roman" pitchFamily="34" charset="0"/>
+                <a:ea typeface="Times New Roman" pitchFamily="34" charset="-122"/>
+                <a:cs typeface="Times New Roman" pitchFamily="34" charset="-120"/>
+              </a:rPr>
+              <a:t>Girls who marry young start having children early. They therefore have more children during their lives.</a:t>
+            </a:r>
+            <a:endParaRPr lang="en-US" sz="3400" dirty="0"/>
+          </a:p>
+        </p:txBody>
+      </p:sp>
       <p:pic>
         <p:nvPicPr>
-          <p:cNvPr id="3" name="Image 0" descr="/home/claude/f4/img/minesec_sheet.png">    </p:cNvPr>
+          <p:cNvPr id="6" name="Image 0" descr="/home/claude/f4/img/v2/growth_factors_big.png">    </p:cNvPr>
           <p:cNvPicPr>
             <a:picLocks noChangeAspect="1"/>
           </p:cNvPicPr>
@@ -17763,8 +18725,8 @@
         </p:blipFill>
         <p:spPr>
           <a:xfrm>
-            <a:off x="0" y="658368"/>
-            <a:ext cx="2468880" cy="5833872"/>
+            <a:off x="6537960" y="2849678"/>
+            <a:ext cx="5470855" cy="2137053"/>
           </a:xfrm>
           <a:prstGeom prst="rect">
             <a:avLst/>
@@ -17773,14 +18735,14 @@
       </p:pic>
       <p:sp>
         <p:nvSpPr>
-          <p:cNvPr id="4" name="Text 1"/>
+          <p:cNvPr id="7" name="Text 4"/>
           <p:cNvSpPr/>
           <p:nvPr/>
         </p:nvSpPr>
         <p:spPr>
           <a:xfrm>
-            <a:off x="2697480" y="1005840"/>
-            <a:ext cx="9174175" cy="731520"/>
+            <a:off x="6537960" y="6089904"/>
+            <a:ext cx="5470855" cy="347472"/>
           </a:xfrm>
           <a:prstGeom prst="rect">
             <a:avLst/>
@@ -17789,144 +18751,24 @@
           <a:ln/>
         </p:spPr>
         <p:txBody>
-          <a:bodyPr wrap="square" lIns="0" tIns="0" rIns="0" bIns="0" rtlCol="0" anchor="ctr">
-            <a:normAutofit/>
-          </a:bodyPr>
+          <a:bodyPr wrap="square" lIns="0" tIns="0" rIns="0" bIns="0" rtlCol="0" anchor="ctr"/>
           <a:lstStyle/>
           <a:p>
             <a:pPr algn="ctr" indent="0" marL="0">
               <a:buNone/>
             </a:pPr>
             <a:r>
-              <a:rPr lang="en-US" sz="3600" b="1" dirty="0">
-                <a:solidFill>
-                  <a:srgbClr val="990011"/>
+              <a:rPr lang="en-US" sz="1600" i="1" dirty="0">
+                <a:solidFill>
+                  <a:srgbClr val="555555"/>
                 </a:solidFill>
                 <a:latin typeface="Times New Roman" pitchFamily="34" charset="0"/>
                 <a:ea typeface="Times New Roman" pitchFamily="34" charset="-122"/>
                 <a:cs typeface="Times New Roman" pitchFamily="34" charset="-120"/>
               </a:rPr>
-              <a:t>2. Determinants of Population Growth</a:t>
-            </a:r>
-            <a:endParaRPr lang="en-US" sz="3600" dirty="0"/>
-          </a:p>
-        </p:txBody>
-      </p:sp>
-      <p:sp>
-        <p:nvSpPr>
-          <p:cNvPr id="5" name="Text 2"/>
-          <p:cNvSpPr/>
-          <p:nvPr/>
-        </p:nvSpPr>
-        <p:spPr>
-          <a:xfrm>
-            <a:off x="2697480" y="1737360"/>
-            <a:ext cx="9174175" cy="457200"/>
-          </a:xfrm>
-          <a:prstGeom prst="rect">
-            <a:avLst/>
-          </a:prstGeom>
-          <a:noFill/>
-          <a:ln/>
-        </p:spPr>
-        <p:txBody>
-          <a:bodyPr wrap="square" lIns="0" tIns="0" rIns="0" bIns="0" rtlCol="0" anchor="ctr"/>
-          <a:lstStyle/>
-          <a:p>
-            <a:pPr algn="l" indent="0" marL="0">
-              <a:buNone/>
-            </a:pPr>
-            <a:r>
-              <a:rPr lang="en-US" sz="3200" b="1" dirty="0">
-                <a:solidFill>
-                  <a:srgbClr val="990011"/>
-                </a:solidFill>
-                <a:latin typeface="Times New Roman" pitchFamily="34" charset="0"/>
-                <a:ea typeface="Times New Roman" pitchFamily="34" charset="-122"/>
-                <a:cs typeface="Times New Roman" pitchFamily="34" charset="-120"/>
-              </a:rPr>
-              <a:t>A) Fertility</a:t>
-            </a:r>
-            <a:endParaRPr lang="en-US" sz="3200" dirty="0"/>
-          </a:p>
-        </p:txBody>
-      </p:sp>
-      <p:sp>
-        <p:nvSpPr>
-          <p:cNvPr id="6" name="Text 3"/>
-          <p:cNvSpPr/>
-          <p:nvPr/>
-        </p:nvSpPr>
-        <p:spPr>
-          <a:xfrm>
-            <a:off x="2697480" y="2240280"/>
-            <a:ext cx="9174175" cy="4206240"/>
-          </a:xfrm>
-          <a:prstGeom prst="rect">
-            <a:avLst/>
-          </a:prstGeom>
-          <a:noFill/>
-          <a:ln/>
-        </p:spPr>
-        <p:txBody>
-          <a:bodyPr wrap="square" lIns="0" tIns="0" rIns="0" bIns="0" rtlCol="0" anchor="t"/>
-          <a:lstStyle/>
-          <a:p>
-            <a:pPr algn="l" indent="0" marL="0">
-              <a:spcAft>
-                <a:spcPts val="800"/>
-              </a:spcAft>
-              <a:buNone/>
-            </a:pPr>
-            <a:r>
-              <a:rPr lang="en-US" sz="4000" i="1" dirty="0">
-                <a:solidFill>
-                  <a:srgbClr val="111111"/>
-                </a:solidFill>
-                <a:latin typeface="Times New Roman" pitchFamily="34" charset="0"/>
-                <a:ea typeface="Times New Roman" pitchFamily="34" charset="-122"/>
-                <a:cs typeface="Times New Roman" pitchFamily="34" charset="-120"/>
-              </a:rPr>
-              <a:t>Fertility, the main driver of population growth, depends on the following factors:</a:t>
-            </a:r>
-            <a:endParaRPr lang="en-US" sz="4000" dirty="0"/>
-          </a:p>
-          <a:p>
-            <a:pPr algn="l" indent="0" marL="0">
-              <a:spcAft>
-                <a:spcPts val="800"/>
-              </a:spcAft>
-              <a:buNone/>
-            </a:pPr>
-            <a:r>
-              <a:rPr lang="en-US" sz="4000" b="1" dirty="0">
-                <a:solidFill>
-                  <a:srgbClr val="111111"/>
-                </a:solidFill>
-                <a:latin typeface="Times New Roman" pitchFamily="34" charset="0"/>
-                <a:ea typeface="Times New Roman" pitchFamily="34" charset="-122"/>
-                <a:cs typeface="Times New Roman" pitchFamily="34" charset="-120"/>
-              </a:rPr>
-              <a:t>Meaning: </a:t>
-            </a:r>
-            <a:pPr algn="l" indent="0" marL="0">
-              <a:spcAft>
-                <a:spcPts val="800"/>
-              </a:spcAft>
-              <a:buNone/>
-            </a:pPr>
-            <a:r>
-              <a:rPr lang="en-US" sz="4000" dirty="0">
-                <a:solidFill>
-                  <a:srgbClr val="111111"/>
-                </a:solidFill>
-                <a:latin typeface="Times New Roman" pitchFamily="34" charset="0"/>
-                <a:ea typeface="Times New Roman" pitchFamily="34" charset="-122"/>
-                <a:cs typeface="Times New Roman" pitchFamily="34" charset="-120"/>
-              </a:rPr>
-              <a:t>Fertility is the frequency of live births in a population. It is the main determinant of population growth.</a:t>
-            </a:r>
-            <a:endParaRPr lang="en-US" sz="4000" dirty="0"/>
+              <a:t>Illustration: the factors of growth</a:t>
+            </a:r>
+            <a:endParaRPr lang="en-US" sz="1600" dirty="0"/>
           </a:p>
         </p:txBody>
       </p:sp>
@@ -18042,150 +18884,9 @@
           </a:p>
         </p:txBody>
       </p:sp>
-      <p:sp>
-        <p:nvSpPr>
-          <p:cNvPr id="3" name="Text 1"/>
-          <p:cNvSpPr/>
-          <p:nvPr/>
-        </p:nvSpPr>
-        <p:spPr>
-          <a:xfrm>
-            <a:off x="365760" y="1005840"/>
-            <a:ext cx="11460175" cy="731520"/>
-          </a:xfrm>
-          <a:prstGeom prst="rect">
-            <a:avLst/>
-          </a:prstGeom>
-          <a:noFill/>
-          <a:ln/>
-        </p:spPr>
-        <p:txBody>
-          <a:bodyPr wrap="square" lIns="0" tIns="0" rIns="0" bIns="0" rtlCol="0" anchor="ctr">
-            <a:normAutofit/>
-          </a:bodyPr>
-          <a:lstStyle/>
-          <a:p>
-            <a:pPr algn="ctr" indent="0" marL="0">
-              <a:buNone/>
-            </a:pPr>
-            <a:r>
-              <a:rPr lang="en-US" sz="3600" b="1" dirty="0">
-                <a:solidFill>
-                  <a:srgbClr val="990011"/>
-                </a:solidFill>
-                <a:latin typeface="Times New Roman" pitchFamily="34" charset="0"/>
-                <a:ea typeface="Times New Roman" pitchFamily="34" charset="-122"/>
-                <a:cs typeface="Times New Roman" pitchFamily="34" charset="-120"/>
-              </a:rPr>
-              <a:t>2. Determinants of Population Growth</a:t>
-            </a:r>
-            <a:endParaRPr lang="en-US" sz="3600" dirty="0"/>
-          </a:p>
-        </p:txBody>
-      </p:sp>
-      <p:sp>
-        <p:nvSpPr>
-          <p:cNvPr id="4" name="Text 2"/>
-          <p:cNvSpPr/>
-          <p:nvPr/>
-        </p:nvSpPr>
-        <p:spPr>
-          <a:xfrm>
-            <a:off x="365760" y="1737360"/>
-            <a:ext cx="6035040" cy="457200"/>
-          </a:xfrm>
-          <a:prstGeom prst="rect">
-            <a:avLst/>
-          </a:prstGeom>
-          <a:noFill/>
-          <a:ln/>
-        </p:spPr>
-        <p:txBody>
-          <a:bodyPr wrap="square" lIns="0" tIns="0" rIns="0" bIns="0" rtlCol="0" anchor="ctr">
-            <a:normAutofit/>
-          </a:bodyPr>
-          <a:lstStyle/>
-          <a:p>
-            <a:pPr algn="l" indent="0" marL="0">
-              <a:buNone/>
-            </a:pPr>
-            <a:r>
-              <a:rPr lang="en-US" sz="3000" b="1" dirty="0">
-                <a:solidFill>
-                  <a:srgbClr val="990011"/>
-                </a:solidFill>
-                <a:latin typeface="Times New Roman" pitchFamily="34" charset="0"/>
-                <a:ea typeface="Times New Roman" pitchFamily="34" charset="-122"/>
-                <a:cs typeface="Times New Roman" pitchFamily="34" charset="-120"/>
-              </a:rPr>
-              <a:t>A) Fertility</a:t>
-            </a:r>
-            <a:endParaRPr lang="en-US" sz="3000" dirty="0"/>
-          </a:p>
-        </p:txBody>
-      </p:sp>
-      <p:sp>
-        <p:nvSpPr>
-          <p:cNvPr id="5" name="Text 3"/>
-          <p:cNvSpPr/>
-          <p:nvPr/>
-        </p:nvSpPr>
-        <p:spPr>
-          <a:xfrm>
-            <a:off x="365760" y="2240280"/>
-            <a:ext cx="6035040" cy="4160520"/>
-          </a:xfrm>
-          <a:prstGeom prst="rect">
-            <a:avLst/>
-          </a:prstGeom>
-          <a:noFill/>
-          <a:ln/>
-        </p:spPr>
-        <p:txBody>
-          <a:bodyPr wrap="square" lIns="0" tIns="0" rIns="0" bIns="0" rtlCol="0" anchor="t"/>
-          <a:lstStyle/>
-          <a:p>
-            <a:pPr algn="l" indent="0" marL="0">
-              <a:spcAft>
-                <a:spcPts val="800"/>
-              </a:spcAft>
-              <a:buNone/>
-            </a:pPr>
-            <a:r>
-              <a:rPr lang="en-US" sz="3200" b="1" dirty="0">
-                <a:solidFill>
-                  <a:srgbClr val="111111"/>
-                </a:solidFill>
-                <a:latin typeface="Times New Roman" pitchFamily="34" charset="0"/>
-                <a:ea typeface="Times New Roman" pitchFamily="34" charset="-122"/>
-                <a:cs typeface="Times New Roman" pitchFamily="34" charset="-120"/>
-              </a:rPr>
-              <a:t>Factors of high fertility: </a:t>
-            </a:r>
-            <a:pPr algn="l" indent="0" marL="0">
-              <a:spcAft>
-                <a:spcPts val="800"/>
-              </a:spcAft>
-              <a:buNone/>
-            </a:pPr>
-            <a:r>
-              <a:rPr lang="en-US" sz="3200" dirty="0">
-                <a:solidFill>
-                  <a:srgbClr val="111111"/>
-                </a:solidFill>
-                <a:latin typeface="Times New Roman" pitchFamily="34" charset="0"/>
-                <a:ea typeface="Times New Roman" pitchFamily="34" charset="-122"/>
-                <a:cs typeface="Times New Roman" pitchFamily="34" charset="-120"/>
-              </a:rPr>
-              <a:t>Early marriage, the value given to large families, the need for farm labour and high infant mortality keep fertility high. In rural North Cameroon, where few girls go to school, many women have more than five children.</a:t>
-            </a:r>
-            <a:endParaRPr lang="en-US" sz="3200" dirty="0"/>
-          </a:p>
-        </p:txBody>
-      </p:sp>
       <p:pic>
         <p:nvPicPr>
-          <p:cNvPr id="6" name="Image 0" descr="/home/claude/f4/img/v2/growth_factors_big.png">    </p:cNvPr>
+          <p:cNvPr id="3" name="Image 0" descr="/home/claude/f4/img/minesec_sheet.png">    </p:cNvPr>
           <p:cNvPicPr>
             <a:picLocks noChangeAspect="1"/>
           </p:cNvPicPr>
@@ -18199,8 +18900,8 @@
         </p:blipFill>
         <p:spPr>
           <a:xfrm>
-            <a:off x="6537960" y="2849678"/>
-            <a:ext cx="5470855" cy="2137053"/>
+            <a:off x="0" y="658368"/>
+            <a:ext cx="3840480" cy="5833872"/>
           </a:xfrm>
           <a:prstGeom prst="rect">
             <a:avLst/>
@@ -18209,14 +18910,14 @@
       </p:pic>
       <p:sp>
         <p:nvSpPr>
-          <p:cNvPr id="7" name="Text 4"/>
+          <p:cNvPr id="4" name="Text 1"/>
           <p:cNvSpPr/>
           <p:nvPr/>
         </p:nvSpPr>
         <p:spPr>
           <a:xfrm>
-            <a:off x="6537960" y="6089904"/>
-            <a:ext cx="5470855" cy="347472"/>
+            <a:off x="4069080" y="1005840"/>
+            <a:ext cx="7802575" cy="731520"/>
           </a:xfrm>
           <a:prstGeom prst="rect">
             <a:avLst/>
@@ -18225,24 +18926,124 @@
           <a:ln/>
         </p:spPr>
         <p:txBody>
-          <a:bodyPr wrap="square" lIns="0" tIns="0" rIns="0" bIns="0" rtlCol="0" anchor="ctr"/>
+          <a:bodyPr wrap="square" lIns="0" tIns="0" rIns="0" bIns="0" rtlCol="0" anchor="ctr">
+            <a:normAutofit/>
+          </a:bodyPr>
           <a:lstStyle/>
           <a:p>
             <a:pPr algn="ctr" indent="0" marL="0">
               <a:buNone/>
             </a:pPr>
             <a:r>
-              <a:rPr lang="en-US" sz="1600" i="1" dirty="0">
-                <a:solidFill>
-                  <a:srgbClr val="555555"/>
+              <a:rPr lang="en-US" sz="3600" b="1" dirty="0">
+                <a:solidFill>
+                  <a:srgbClr val="990011"/>
                 </a:solidFill>
                 <a:latin typeface="Times New Roman" pitchFamily="34" charset="0"/>
                 <a:ea typeface="Times New Roman" pitchFamily="34" charset="-122"/>
                 <a:cs typeface="Times New Roman" pitchFamily="34" charset="-120"/>
               </a:rPr>
-              <a:t>Illustration: the factors of growth</a:t>
-            </a:r>
-            <a:endParaRPr lang="en-US" sz="1600" dirty="0"/>
+              <a:t>2. Determinants of Population Growth</a:t>
+            </a:r>
+            <a:endParaRPr lang="en-US" sz="3600" dirty="0"/>
+          </a:p>
+        </p:txBody>
+      </p:sp>
+      <p:sp>
+        <p:nvSpPr>
+          <p:cNvPr id="5" name="Text 2"/>
+          <p:cNvSpPr/>
+          <p:nvPr/>
+        </p:nvSpPr>
+        <p:spPr>
+          <a:xfrm>
+            <a:off x="4069080" y="1737360"/>
+            <a:ext cx="7802575" cy="457200"/>
+          </a:xfrm>
+          <a:prstGeom prst="rect">
+            <a:avLst/>
+          </a:prstGeom>
+          <a:noFill/>
+          <a:ln/>
+        </p:spPr>
+        <p:txBody>
+          <a:bodyPr wrap="square" lIns="0" tIns="0" rIns="0" bIns="0" rtlCol="0" anchor="ctr"/>
+          <a:lstStyle/>
+          <a:p>
+            <a:pPr algn="l" indent="0" marL="0">
+              <a:buNone/>
+            </a:pPr>
+            <a:r>
+              <a:rPr lang="en-US" sz="3200" b="1" dirty="0">
+                <a:solidFill>
+                  <a:srgbClr val="990011"/>
+                </a:solidFill>
+                <a:latin typeface="Times New Roman" pitchFamily="34" charset="0"/>
+                <a:ea typeface="Times New Roman" pitchFamily="34" charset="-122"/>
+                <a:cs typeface="Times New Roman" pitchFamily="34" charset="-120"/>
+              </a:rPr>
+              <a:t>A) Factors of High Fertility</a:t>
+            </a:r>
+            <a:endParaRPr lang="en-US" sz="3200" dirty="0"/>
+          </a:p>
+        </p:txBody>
+      </p:sp>
+      <p:sp>
+        <p:nvSpPr>
+          <p:cNvPr id="6" name="Text 3"/>
+          <p:cNvSpPr/>
+          <p:nvPr/>
+        </p:nvSpPr>
+        <p:spPr>
+          <a:xfrm>
+            <a:off x="4069080" y="2240280"/>
+            <a:ext cx="7802575" cy="4206240"/>
+          </a:xfrm>
+          <a:prstGeom prst="rect">
+            <a:avLst/>
+          </a:prstGeom>
+          <a:noFill/>
+          <a:ln/>
+        </p:spPr>
+        <p:txBody>
+          <a:bodyPr wrap="square" lIns="0" tIns="0" rIns="0" bIns="0" rtlCol="0" anchor="t"/>
+          <a:lstStyle/>
+          <a:p>
+            <a:pPr algn="l" indent="0" marL="0">
+              <a:spcAft>
+                <a:spcPts val="800"/>
+              </a:spcAft>
+              <a:buNone/>
+            </a:pPr>
+            <a:r>
+              <a:rPr lang="en-US" sz="4000" b="1" dirty="0">
+                <a:solidFill>
+                  <a:srgbClr val="111111"/>
+                </a:solidFill>
+                <a:latin typeface="Times New Roman" pitchFamily="34" charset="0"/>
+                <a:ea typeface="Times New Roman" pitchFamily="34" charset="-122"/>
+                <a:cs typeface="Times New Roman" pitchFamily="34" charset="-120"/>
+              </a:rPr>
+              <a:t>The value of large families: </a:t>
+            </a:r>
+            <a:pPr algn="l" indent="0" marL="0">
+              <a:spcAft>
+                <a:spcPts val="800"/>
+              </a:spcAft>
+              <a:buNone/>
+            </a:pPr>
+            <a:r>
+              <a:rPr lang="en-US" sz="4000" dirty="0">
+                <a:solidFill>
+                  <a:srgbClr val="111111"/>
+                </a:solidFill>
+                <a:latin typeface="Times New Roman" pitchFamily="34" charset="0"/>
+                <a:ea typeface="Times New Roman" pitchFamily="34" charset="-122"/>
+                <a:cs typeface="Times New Roman" pitchFamily="34" charset="-120"/>
+              </a:rPr>
+              <a:t>In many societies, many children are a sign of wealth and prestige. Children also help on the farm and support their parents in old age.</a:t>
+            </a:r>
+            <a:endParaRPr lang="en-US" sz="4000" dirty="0"/>
           </a:p>
         </p:txBody>
       </p:sp>
@@ -18456,7 +19257,7 @@
                 <a:ea typeface="Times New Roman" pitchFamily="34" charset="-122"/>
                 <a:cs typeface="Times New Roman" pitchFamily="34" charset="-120"/>
               </a:rPr>
-              <a:t>A) Fertility</a:t>
+              <a:t>A) Factors of High Fertility</a:t>
             </a:r>
             <a:endParaRPr lang="en-US" sz="3200" dirty="0"/>
           </a:p>
@@ -18498,7 +19299,7 @@
                 <a:ea typeface="Times New Roman" pitchFamily="34" charset="-122"/>
                 <a:cs typeface="Times New Roman" pitchFamily="34" charset="-120"/>
               </a:rPr>
-              <a:t>Factors of low fertility: </a:t>
+              <a:t>High infant mortality: </a:t>
             </a:r>
             <a:pPr algn="l" indent="0" marL="0">
               <a:spcAft>
@@ -18515,7 +19316,7 @@
                 <a:ea typeface="Times New Roman" pitchFamily="34" charset="-122"/>
                 <a:cs typeface="Times New Roman" pitchFamily="34" charset="-120"/>
               </a:rPr>
-              <a:t>The high cost of raising children and the wide use of family planning reduce fertility. The education and careers of women and low infant mortality also reduce it.</a:t>
+              <a:t>Where many babies die, parents have more children to make sure that some survive. Fertility stays high as long as infant deaths remain frequent.</a:t>
             </a:r>
             <a:endParaRPr lang="en-US" sz="4000" dirty="0"/>
           </a:p>
@@ -18650,7 +19451,7 @@
         <p:spPr>
           <a:xfrm>
             <a:off x="0" y="658368"/>
-            <a:ext cx="1463040" cy="5833872"/>
+            <a:ext cx="3840480" cy="5833872"/>
           </a:xfrm>
           <a:prstGeom prst="rect">
             <a:avLst/>
@@ -18665,8 +19466,8 @@
         </p:nvSpPr>
         <p:spPr>
           <a:xfrm>
-            <a:off x="1691640" y="1005840"/>
-            <a:ext cx="10180015" cy="731520"/>
+            <a:off x="4069080" y="1005840"/>
+            <a:ext cx="7802575" cy="731520"/>
           </a:xfrm>
           <a:prstGeom prst="rect">
             <a:avLst/>
@@ -18706,8 +19507,8 @@
         </p:nvSpPr>
         <p:spPr>
           <a:xfrm>
-            <a:off x="1691640" y="1737360"/>
-            <a:ext cx="10180015" cy="457200"/>
+            <a:off x="4069080" y="1737360"/>
+            <a:ext cx="7802575" cy="457200"/>
           </a:xfrm>
           <a:prstGeom prst="rect">
             <a:avLst/>
@@ -18731,7 +19532,7 @@
                 <a:ea typeface="Times New Roman" pitchFamily="34" charset="-122"/>
                 <a:cs typeface="Times New Roman" pitchFamily="34" charset="-120"/>
               </a:rPr>
-              <a:t>B) Mortality and Migration</a:t>
+              <a:t>A) Factors of High Fertility</a:t>
             </a:r>
             <a:endParaRPr lang="en-US" sz="3200" dirty="0"/>
           </a:p>
@@ -18745,8 +19546,8 @@
         </p:nvSpPr>
         <p:spPr>
           <a:xfrm>
-            <a:off x="1691640" y="2240280"/>
-            <a:ext cx="10180015" cy="4206240"/>
+            <a:off x="4069080" y="2240280"/>
+            <a:ext cx="7802575" cy="4206240"/>
           </a:xfrm>
           <a:prstGeom prst="rect">
             <a:avLst/>
@@ -18765,7 +19566,7 @@
               <a:buNone/>
             </a:pPr>
             <a:r>
-              <a:rPr lang="en-US" sz="4000" i="1" dirty="0">
+              <a:rPr lang="en-US" sz="4000" b="1" dirty="0">
                 <a:solidFill>
                   <a:srgbClr val="111111"/>
                 </a:solidFill>
@@ -18773,11 +19574,8 @@
                 <a:ea typeface="Times New Roman" pitchFamily="34" charset="-122"/>
                 <a:cs typeface="Times New Roman" pitchFamily="34" charset="-120"/>
               </a:rPr>
-              <a:t>Mortality and migration depend on the following factors:</a:t>
-            </a:r>
-            <a:endParaRPr lang="en-US" sz="4000" dirty="0"/>
-          </a:p>
-          <a:p>
+              <a:t>Low education of girls: </a:t>
+            </a:r>
             <a:pPr algn="l" indent="0" marL="0">
               <a:spcAft>
                 <a:spcPts val="800"/>
@@ -18785,7 +19583,7 @@
               <a:buNone/>
             </a:pPr>
             <a:r>
-              <a:rPr lang="en-US" sz="4000" b="1" dirty="0">
+              <a:rPr lang="en-US" sz="4000" dirty="0">
                 <a:solidFill>
                   <a:srgbClr val="111111"/>
                 </a:solidFill>
@@ -18793,24 +19591,7 @@
                 <a:ea typeface="Times New Roman" pitchFamily="34" charset="-122"/>
                 <a:cs typeface="Times New Roman" pitchFamily="34" charset="-120"/>
               </a:rPr>
-              <a:t>Factors of high mortality: </a:t>
-            </a:r>
-            <a:pPr algn="l" indent="0" marL="0">
-              <a:spcAft>
-                <a:spcPts val="800"/>
-              </a:spcAft>
-              <a:buNone/>
-            </a:pPr>
-            <a:r>
-              <a:rPr lang="en-US" sz="4000" dirty="0">
-                <a:solidFill>
-                  <a:srgbClr val="111111"/>
-                </a:solidFill>
-                <a:latin typeface="Times New Roman" pitchFamily="34" charset="0"/>
-                <a:ea typeface="Times New Roman" pitchFamily="34" charset="-122"/>
-                <a:cs typeface="Times New Roman" pitchFamily="34" charset="-120"/>
-              </a:rPr>
-              <a:t>Poor health care, poor sanitation and hygiene, malnutrition and famine keep death rates high. Disasters and wars also kill many people.</a:t>
+              <a:t>Girls who leave school early marry earlier and know less about family planning. In rural North Cameroon, many women have more than five children.</a:t>
             </a:r>
             <a:endParaRPr lang="en-US" sz="4000" dirty="0"/>
           </a:p>
@@ -18928,150 +19709,9 @@
           </a:p>
         </p:txBody>
       </p:sp>
-      <p:sp>
-        <p:nvSpPr>
-          <p:cNvPr id="3" name="Text 1"/>
-          <p:cNvSpPr/>
-          <p:nvPr/>
-        </p:nvSpPr>
-        <p:spPr>
-          <a:xfrm>
-            <a:off x="365760" y="1005840"/>
-            <a:ext cx="11460175" cy="731520"/>
-          </a:xfrm>
-          <a:prstGeom prst="rect">
-            <a:avLst/>
-          </a:prstGeom>
-          <a:noFill/>
-          <a:ln/>
-        </p:spPr>
-        <p:txBody>
-          <a:bodyPr wrap="square" lIns="0" tIns="0" rIns="0" bIns="0" rtlCol="0" anchor="ctr">
-            <a:normAutofit/>
-          </a:bodyPr>
-          <a:lstStyle/>
-          <a:p>
-            <a:pPr algn="ctr" indent="0" marL="0">
-              <a:buNone/>
-            </a:pPr>
-            <a:r>
-              <a:rPr lang="en-US" sz="3600" b="1" dirty="0">
-                <a:solidFill>
-                  <a:srgbClr val="990011"/>
-                </a:solidFill>
-                <a:latin typeface="Times New Roman" pitchFamily="34" charset="0"/>
-                <a:ea typeface="Times New Roman" pitchFamily="34" charset="-122"/>
-                <a:cs typeface="Times New Roman" pitchFamily="34" charset="-120"/>
-              </a:rPr>
-              <a:t>2. Determinants of Population Growth</a:t>
-            </a:r>
-            <a:endParaRPr lang="en-US" sz="3600" dirty="0"/>
-          </a:p>
-        </p:txBody>
-      </p:sp>
-      <p:sp>
-        <p:nvSpPr>
-          <p:cNvPr id="4" name="Text 2"/>
-          <p:cNvSpPr/>
-          <p:nvPr/>
-        </p:nvSpPr>
-        <p:spPr>
-          <a:xfrm>
-            <a:off x="365760" y="1737360"/>
-            <a:ext cx="6035040" cy="457200"/>
-          </a:xfrm>
-          <a:prstGeom prst="rect">
-            <a:avLst/>
-          </a:prstGeom>
-          <a:noFill/>
-          <a:ln/>
-        </p:spPr>
-        <p:txBody>
-          <a:bodyPr wrap="square" lIns="0" tIns="0" rIns="0" bIns="0" rtlCol="0" anchor="ctr">
-            <a:normAutofit/>
-          </a:bodyPr>
-          <a:lstStyle/>
-          <a:p>
-            <a:pPr algn="l" indent="0" marL="0">
-              <a:buNone/>
-            </a:pPr>
-            <a:r>
-              <a:rPr lang="en-US" sz="3000" b="1" dirty="0">
-                <a:solidFill>
-                  <a:srgbClr val="990011"/>
-                </a:solidFill>
-                <a:latin typeface="Times New Roman" pitchFamily="34" charset="0"/>
-                <a:ea typeface="Times New Roman" pitchFamily="34" charset="-122"/>
-                <a:cs typeface="Times New Roman" pitchFamily="34" charset="-120"/>
-              </a:rPr>
-              <a:t>B) Mortality and Migration</a:t>
-            </a:r>
-            <a:endParaRPr lang="en-US" sz="3000" dirty="0"/>
-          </a:p>
-        </p:txBody>
-      </p:sp>
-      <p:sp>
-        <p:nvSpPr>
-          <p:cNvPr id="5" name="Text 3"/>
-          <p:cNvSpPr/>
-          <p:nvPr/>
-        </p:nvSpPr>
-        <p:spPr>
-          <a:xfrm>
-            <a:off x="365760" y="2240280"/>
-            <a:ext cx="6035040" cy="4160520"/>
-          </a:xfrm>
-          <a:prstGeom prst="rect">
-            <a:avLst/>
-          </a:prstGeom>
-          <a:noFill/>
-          <a:ln/>
-        </p:spPr>
-        <p:txBody>
-          <a:bodyPr wrap="square" lIns="0" tIns="0" rIns="0" bIns="0" rtlCol="0" anchor="t"/>
-          <a:lstStyle/>
-          <a:p>
-            <a:pPr algn="l" indent="0" marL="0">
-              <a:spcAft>
-                <a:spcPts val="800"/>
-              </a:spcAft>
-              <a:buNone/>
-            </a:pPr>
-            <a:r>
-              <a:rPr lang="en-US" sz="3600" b="1" dirty="0">
-                <a:solidFill>
-                  <a:srgbClr val="111111"/>
-                </a:solidFill>
-                <a:latin typeface="Times New Roman" pitchFamily="34" charset="0"/>
-                <a:ea typeface="Times New Roman" pitchFamily="34" charset="-122"/>
-                <a:cs typeface="Times New Roman" pitchFamily="34" charset="-120"/>
-              </a:rPr>
-              <a:t>Factors of low mortality: </a:t>
-            </a:r>
-            <a:pPr algn="l" indent="0" marL="0">
-              <a:spcAft>
-                <a:spcPts val="800"/>
-              </a:spcAft>
-              <a:buNone/>
-            </a:pPr>
-            <a:r>
-              <a:rPr lang="en-US" sz="3600" dirty="0">
-                <a:solidFill>
-                  <a:srgbClr val="111111"/>
-                </a:solidFill>
-                <a:latin typeface="Times New Roman" pitchFamily="34" charset="0"/>
-                <a:ea typeface="Times New Roman" pitchFamily="34" charset="-122"/>
-                <a:cs typeface="Times New Roman" pitchFamily="34" charset="-120"/>
-              </a:rPr>
-              <a:t>Vaccines, hospitals, clean water and good food reduce deaths. A high standard of living allows people to live longer.</a:t>
-            </a:r>
-            <a:endParaRPr lang="en-US" sz="3600" dirty="0"/>
-          </a:p>
-        </p:txBody>
-      </p:sp>
       <p:pic>
         <p:nvPicPr>
-          <p:cNvPr id="6" name="Image 0" descr="/home/claude/f4/img/v2/usa_vaccine.jpg">    </p:cNvPr>
+          <p:cNvPr id="3" name="Image 0" descr="/home/claude/f4/img/minesec_sheet.png">    </p:cNvPr>
           <p:cNvPicPr>
             <a:picLocks noChangeAspect="1"/>
           </p:cNvPicPr>
@@ -19085,8 +19725,8 @@
         </p:blipFill>
         <p:spPr>
           <a:xfrm>
-            <a:off x="6537960" y="2400897"/>
-            <a:ext cx="5470855" cy="3034615"/>
+            <a:off x="0" y="658368"/>
+            <a:ext cx="2468880" cy="5833872"/>
           </a:xfrm>
           <a:prstGeom prst="rect">
             <a:avLst/>
@@ -19095,14 +19735,14 @@
       </p:pic>
       <p:sp>
         <p:nvSpPr>
-          <p:cNvPr id="7" name="Text 4"/>
+          <p:cNvPr id="4" name="Text 1"/>
           <p:cNvSpPr/>
           <p:nvPr/>
         </p:nvSpPr>
         <p:spPr>
           <a:xfrm>
-            <a:off x="6537960" y="6089904"/>
-            <a:ext cx="5470855" cy="347472"/>
+            <a:off x="2697480" y="1005840"/>
+            <a:ext cx="9174175" cy="731520"/>
           </a:xfrm>
           <a:prstGeom prst="rect">
             <a:avLst/>
@@ -19111,24 +19751,144 @@
           <a:ln/>
         </p:spPr>
         <p:txBody>
-          <a:bodyPr wrap="square" lIns="0" tIns="0" rIns="0" bIns="0" rtlCol="0" anchor="ctr"/>
+          <a:bodyPr wrap="square" lIns="0" tIns="0" rIns="0" bIns="0" rtlCol="0" anchor="ctr">
+            <a:normAutofit/>
+          </a:bodyPr>
           <a:lstStyle/>
           <a:p>
             <a:pPr algn="ctr" indent="0" marL="0">
               <a:buNone/>
             </a:pPr>
             <a:r>
-              <a:rPr lang="en-US" sz="1600" i="1" dirty="0">
-                <a:solidFill>
-                  <a:srgbClr val="555555"/>
+              <a:rPr lang="en-US" sz="3600" b="1" dirty="0">
+                <a:solidFill>
+                  <a:srgbClr val="990011"/>
                 </a:solidFill>
                 <a:latin typeface="Times New Roman" pitchFamily="34" charset="0"/>
                 <a:ea typeface="Times New Roman" pitchFamily="34" charset="-122"/>
                 <a:cs typeface="Times New Roman" pitchFamily="34" charset="-120"/>
               </a:rPr>
-              <a:t>Illustration: vaccination</a:t>
-            </a:r>
-            <a:endParaRPr lang="en-US" sz="1600" dirty="0"/>
+              <a:t>2. Determinants of Population Growth</a:t>
+            </a:r>
+            <a:endParaRPr lang="en-US" sz="3600" dirty="0"/>
+          </a:p>
+        </p:txBody>
+      </p:sp>
+      <p:sp>
+        <p:nvSpPr>
+          <p:cNvPr id="5" name="Text 2"/>
+          <p:cNvSpPr/>
+          <p:nvPr/>
+        </p:nvSpPr>
+        <p:spPr>
+          <a:xfrm>
+            <a:off x="2697480" y="1737360"/>
+            <a:ext cx="9174175" cy="457200"/>
+          </a:xfrm>
+          <a:prstGeom prst="rect">
+            <a:avLst/>
+          </a:prstGeom>
+          <a:noFill/>
+          <a:ln/>
+        </p:spPr>
+        <p:txBody>
+          <a:bodyPr wrap="square" lIns="0" tIns="0" rIns="0" bIns="0" rtlCol="0" anchor="ctr"/>
+          <a:lstStyle/>
+          <a:p>
+            <a:pPr algn="l" indent="0" marL="0">
+              <a:buNone/>
+            </a:pPr>
+            <a:r>
+              <a:rPr lang="en-US" sz="3200" b="1" dirty="0">
+                <a:solidFill>
+                  <a:srgbClr val="990011"/>
+                </a:solidFill>
+                <a:latin typeface="Times New Roman" pitchFamily="34" charset="0"/>
+                <a:ea typeface="Times New Roman" pitchFamily="34" charset="-122"/>
+                <a:cs typeface="Times New Roman" pitchFamily="34" charset="-120"/>
+              </a:rPr>
+              <a:t>B) Factors of Low Fertility</a:t>
+            </a:r>
+            <a:endParaRPr lang="en-US" sz="3200" dirty="0"/>
+          </a:p>
+        </p:txBody>
+      </p:sp>
+      <p:sp>
+        <p:nvSpPr>
+          <p:cNvPr id="6" name="Text 3"/>
+          <p:cNvSpPr/>
+          <p:nvPr/>
+        </p:nvSpPr>
+        <p:spPr>
+          <a:xfrm>
+            <a:off x="2697480" y="2240280"/>
+            <a:ext cx="9174175" cy="4206240"/>
+          </a:xfrm>
+          <a:prstGeom prst="rect">
+            <a:avLst/>
+          </a:prstGeom>
+          <a:noFill/>
+          <a:ln/>
+        </p:spPr>
+        <p:txBody>
+          <a:bodyPr wrap="square" lIns="0" tIns="0" rIns="0" bIns="0" rtlCol="0" anchor="t"/>
+          <a:lstStyle/>
+          <a:p>
+            <a:pPr algn="l" indent="0" marL="0">
+              <a:spcAft>
+                <a:spcPts val="800"/>
+              </a:spcAft>
+              <a:buNone/>
+            </a:pPr>
+            <a:r>
+              <a:rPr lang="en-US" sz="4000" i="1" dirty="0">
+                <a:solidFill>
+                  <a:srgbClr val="111111"/>
+                </a:solidFill>
+                <a:latin typeface="Times New Roman" pitchFamily="34" charset="0"/>
+                <a:ea typeface="Times New Roman" pitchFamily="34" charset="-122"/>
+                <a:cs typeface="Times New Roman" pitchFamily="34" charset="-120"/>
+              </a:rPr>
+              <a:t>Fertility is reduced by the following factors:</a:t>
+            </a:r>
+            <a:endParaRPr lang="en-US" sz="4000" dirty="0"/>
+          </a:p>
+          <a:p>
+            <a:pPr algn="l" indent="0" marL="0">
+              <a:spcAft>
+                <a:spcPts val="800"/>
+              </a:spcAft>
+              <a:buNone/>
+            </a:pPr>
+            <a:r>
+              <a:rPr lang="en-US" sz="4000" b="1" dirty="0">
+                <a:solidFill>
+                  <a:srgbClr val="111111"/>
+                </a:solidFill>
+                <a:latin typeface="Times New Roman" pitchFamily="34" charset="0"/>
+                <a:ea typeface="Times New Roman" pitchFamily="34" charset="-122"/>
+                <a:cs typeface="Times New Roman" pitchFamily="34" charset="-120"/>
+              </a:rPr>
+              <a:t>The cost of raising children: </a:t>
+            </a:r>
+            <a:pPr algn="l" indent="0" marL="0">
+              <a:spcAft>
+                <a:spcPts val="800"/>
+              </a:spcAft>
+              <a:buNone/>
+            </a:pPr>
+            <a:r>
+              <a:rPr lang="en-US" sz="4000" dirty="0">
+                <a:solidFill>
+                  <a:srgbClr val="111111"/>
+                </a:solidFill>
+                <a:latin typeface="Times New Roman" pitchFamily="34" charset="0"/>
+                <a:ea typeface="Times New Roman" pitchFamily="34" charset="-122"/>
+                <a:cs typeface="Times New Roman" pitchFamily="34" charset="-120"/>
+              </a:rPr>
+              <a:t>In towns and rich countries, food, housing and school fees are expensive. Couples therefore choose to have fewer children.</a:t>
+            </a:r>
+            <a:endParaRPr lang="en-US" sz="4000" dirty="0"/>
           </a:p>
         </p:txBody>
       </p:sp>
@@ -19480,7 +20240,7 @@
         <p:spPr>
           <a:xfrm>
             <a:off x="0" y="658368"/>
-            <a:ext cx="2468880" cy="5833872"/>
+            <a:ext cx="5120640" cy="5833872"/>
           </a:xfrm>
           <a:prstGeom prst="rect">
             <a:avLst/>
@@ -19495,8 +20255,8 @@
         </p:nvSpPr>
         <p:spPr>
           <a:xfrm>
-            <a:off x="2697480" y="1005840"/>
-            <a:ext cx="9174175" cy="731520"/>
+            <a:off x="5349240" y="1005840"/>
+            <a:ext cx="6522415" cy="731520"/>
           </a:xfrm>
           <a:prstGeom prst="rect">
             <a:avLst/>
@@ -19536,8 +20296,8 @@
         </p:nvSpPr>
         <p:spPr>
           <a:xfrm>
-            <a:off x="2697480" y="1737360"/>
-            <a:ext cx="9174175" cy="457200"/>
+            <a:off x="5349240" y="1737360"/>
+            <a:ext cx="6522415" cy="457200"/>
           </a:xfrm>
           <a:prstGeom prst="rect">
             <a:avLst/>
@@ -19561,7 +20321,7 @@
                 <a:ea typeface="Times New Roman" pitchFamily="34" charset="-122"/>
                 <a:cs typeface="Times New Roman" pitchFamily="34" charset="-120"/>
               </a:rPr>
-              <a:t>B) Mortality and Migration</a:t>
+              <a:t>B) Factors of Low Fertility</a:t>
             </a:r>
             <a:endParaRPr lang="en-US" sz="3200" dirty="0"/>
           </a:p>
@@ -19575,8 +20335,8 @@
         </p:nvSpPr>
         <p:spPr>
           <a:xfrm>
-            <a:off x="2697480" y="2240280"/>
-            <a:ext cx="9174175" cy="4206240"/>
+            <a:off x="5349240" y="2240280"/>
+            <a:ext cx="6522415" cy="4206240"/>
           </a:xfrm>
           <a:prstGeom prst="rect">
             <a:avLst/>
@@ -19603,7 +20363,7 @@
                 <a:ea typeface="Times New Roman" pitchFamily="34" charset="-122"/>
                 <a:cs typeface="Times New Roman" pitchFamily="34" charset="-120"/>
               </a:rPr>
-              <a:t>Factors of migration: </a:t>
+              <a:t>Family planning: </a:t>
             </a:r>
             <a:pPr algn="l" indent="0" marL="0">
               <a:spcAft>
@@ -19620,7 +20380,7 @@
                 <a:ea typeface="Times New Roman" pitchFamily="34" charset="-122"/>
                 <a:cs typeface="Times New Roman" pitchFamily="34" charset="-120"/>
               </a:rPr>
-              <a:t>Lack of jobs, poverty, drought and insecurity, such as the Boko Haram attacks in the Far North, push people out. Jobs, better schools and hospitals and security pull them to places such as Garoua and Douala.</a:t>
+              <a:t>Contraception allows couples to space births and limit the size of their families. Fertility falls where it is widely available.</a:t>
             </a:r>
             <a:endParaRPr lang="en-US" sz="4000" dirty="0"/>
           </a:p>
@@ -19738,129 +20498,9 @@
           </a:p>
         </p:txBody>
       </p:sp>
-      <p:sp>
-        <p:nvSpPr>
-          <p:cNvPr id="3" name="Text 1"/>
-          <p:cNvSpPr/>
-          <p:nvPr/>
-        </p:nvSpPr>
-        <p:spPr>
-          <a:xfrm>
-            <a:off x="365760" y="1005840"/>
-            <a:ext cx="11460175" cy="731520"/>
-          </a:xfrm>
-          <a:prstGeom prst="rect">
-            <a:avLst/>
-          </a:prstGeom>
-          <a:noFill/>
-          <a:ln/>
-        </p:spPr>
-        <p:txBody>
-          <a:bodyPr wrap="square" lIns="0" tIns="0" rIns="0" bIns="0" rtlCol="0" anchor="ctr">
-            <a:normAutofit/>
-          </a:bodyPr>
-          <a:lstStyle/>
-          <a:p>
-            <a:pPr algn="ctr" indent="0" marL="0">
-              <a:buNone/>
-            </a:pPr>
-            <a:r>
-              <a:rPr lang="en-US" sz="3600" b="1" dirty="0">
-                <a:solidFill>
-                  <a:srgbClr val="990011"/>
-                </a:solidFill>
-                <a:latin typeface="Times New Roman" pitchFamily="34" charset="0"/>
-                <a:ea typeface="Times New Roman" pitchFamily="34" charset="-122"/>
-                <a:cs typeface="Times New Roman" pitchFamily="34" charset="-120"/>
-              </a:rPr>
-              <a:t>3. Spatial Differences on a World Scale</a:t>
-            </a:r>
-            <a:endParaRPr lang="en-US" sz="3600" dirty="0"/>
-          </a:p>
-        </p:txBody>
-      </p:sp>
-      <p:sp>
-        <p:nvSpPr>
-          <p:cNvPr id="4" name="Text 2"/>
-          <p:cNvSpPr/>
-          <p:nvPr/>
-        </p:nvSpPr>
-        <p:spPr>
-          <a:xfrm>
-            <a:off x="365760" y="1783080"/>
-            <a:ext cx="6035040" cy="4617720"/>
-          </a:xfrm>
-          <a:prstGeom prst="rect">
-            <a:avLst/>
-          </a:prstGeom>
-          <a:noFill/>
-          <a:ln/>
-        </p:spPr>
-        <p:txBody>
-          <a:bodyPr wrap="square" lIns="0" tIns="0" rIns="0" bIns="0" rtlCol="0" anchor="t"/>
-          <a:lstStyle/>
-          <a:p>
-            <a:pPr algn="l" indent="0" marL="0">
-              <a:spcAft>
-                <a:spcPts val="800"/>
-              </a:spcAft>
-              <a:buNone/>
-            </a:pPr>
-            <a:r>
-              <a:rPr lang="en-US" sz="3400" i="1" dirty="0">
-                <a:solidFill>
-                  <a:srgbClr val="111111"/>
-                </a:solidFill>
-                <a:latin typeface="Times New Roman" pitchFamily="34" charset="0"/>
-                <a:ea typeface="Times New Roman" pitchFamily="34" charset="-122"/>
-                <a:cs typeface="Times New Roman" pitchFamily="34" charset="-120"/>
-              </a:rPr>
-              <a:t>The determinants of growth differ across the world as follows:</a:t>
-            </a:r>
-            <a:endParaRPr lang="en-US" sz="3400" dirty="0"/>
-          </a:p>
-          <a:p>
-            <a:pPr algn="l" indent="0" marL="0">
-              <a:spcAft>
-                <a:spcPts val="800"/>
-              </a:spcAft>
-              <a:buNone/>
-            </a:pPr>
-            <a:r>
-              <a:rPr lang="en-US" sz="3400" b="1" dirty="0">
-                <a:solidFill>
-                  <a:srgbClr val="111111"/>
-                </a:solidFill>
-                <a:latin typeface="Times New Roman" pitchFamily="34" charset="0"/>
-                <a:ea typeface="Times New Roman" pitchFamily="34" charset="-122"/>
-                <a:cs typeface="Times New Roman" pitchFamily="34" charset="-120"/>
-              </a:rPr>
-              <a:t>Less developed countries: </a:t>
-            </a:r>
-            <a:pPr algn="l" indent="0" marL="0">
-              <a:spcAft>
-                <a:spcPts val="800"/>
-              </a:spcAft>
-              <a:buNone/>
-            </a:pPr>
-            <a:r>
-              <a:rPr lang="en-US" sz="3400" dirty="0">
-                <a:solidFill>
-                  <a:srgbClr val="111111"/>
-                </a:solidFill>
-                <a:latin typeface="Times New Roman" pitchFamily="34" charset="0"/>
-                <a:ea typeface="Times New Roman" pitchFamily="34" charset="-122"/>
-                <a:cs typeface="Times New Roman" pitchFamily="34" charset="-120"/>
-              </a:rPr>
-              <a:t>Most of Africa, including Cameroon, has high fertility and falling mortality. Natural increase is therefore high.</a:t>
-            </a:r>
-            <a:endParaRPr lang="en-US" sz="3400" dirty="0"/>
-          </a:p>
-        </p:txBody>
-      </p:sp>
       <p:pic>
         <p:nvPicPr>
-          <p:cNvPr id="5" name="Image 0" descr="/home/claude/f4/img/v2/birth_death_big.png">    </p:cNvPr>
+          <p:cNvPr id="3" name="Image 0" descr="/home/claude/f4/img/minesec_sheet.png">    </p:cNvPr>
           <p:cNvPicPr>
             <a:picLocks noChangeAspect="1"/>
           </p:cNvPicPr>
@@ -19874,8 +20514,8 @@
         </p:blipFill>
         <p:spPr>
           <a:xfrm>
-            <a:off x="6537960" y="2721454"/>
-            <a:ext cx="5470855" cy="2393499"/>
+            <a:off x="0" y="658368"/>
+            <a:ext cx="5120640" cy="5833872"/>
           </a:xfrm>
           <a:prstGeom prst="rect">
             <a:avLst/>
@@ -19884,14 +20524,14 @@
       </p:pic>
       <p:sp>
         <p:nvSpPr>
-          <p:cNvPr id="6" name="Text 3"/>
+          <p:cNvPr id="4" name="Text 1"/>
           <p:cNvSpPr/>
           <p:nvPr/>
         </p:nvSpPr>
         <p:spPr>
           <a:xfrm>
-            <a:off x="6537960" y="6089904"/>
-            <a:ext cx="5470855" cy="347472"/>
+            <a:off x="5349240" y="1005840"/>
+            <a:ext cx="6522415" cy="731520"/>
           </a:xfrm>
           <a:prstGeom prst="rect">
             <a:avLst/>
@@ -19900,24 +20540,124 @@
           <a:ln/>
         </p:spPr>
         <p:txBody>
-          <a:bodyPr wrap="square" lIns="0" tIns="0" rIns="0" bIns="0" rtlCol="0" anchor="ctr"/>
+          <a:bodyPr wrap="square" lIns="0" tIns="0" rIns="0" bIns="0" rtlCol="0" anchor="ctr">
+            <a:normAutofit/>
+          </a:bodyPr>
           <a:lstStyle/>
           <a:p>
             <a:pPr algn="ctr" indent="0" marL="0">
               <a:buNone/>
             </a:pPr>
             <a:r>
-              <a:rPr lang="en-US" sz="1600" i="1" dirty="0">
-                <a:solidFill>
-                  <a:srgbClr val="555555"/>
+              <a:rPr lang="en-US" sz="3600" b="1" dirty="0">
+                <a:solidFill>
+                  <a:srgbClr val="990011"/>
                 </a:solidFill>
                 <a:latin typeface="Times New Roman" pitchFamily="34" charset="0"/>
                 <a:ea typeface="Times New Roman" pitchFamily="34" charset="-122"/>
                 <a:cs typeface="Times New Roman" pitchFamily="34" charset="-120"/>
               </a:rPr>
-              <a:t>Illustration: birth and death rates</a:t>
-            </a:r>
-            <a:endParaRPr lang="en-US" sz="1600" dirty="0"/>
+              <a:t>2. Determinants of Population Growth</a:t>
+            </a:r>
+            <a:endParaRPr lang="en-US" sz="3600" dirty="0"/>
+          </a:p>
+        </p:txBody>
+      </p:sp>
+      <p:sp>
+        <p:nvSpPr>
+          <p:cNvPr id="5" name="Text 2"/>
+          <p:cNvSpPr/>
+          <p:nvPr/>
+        </p:nvSpPr>
+        <p:spPr>
+          <a:xfrm>
+            <a:off x="5349240" y="1737360"/>
+            <a:ext cx="6522415" cy="457200"/>
+          </a:xfrm>
+          <a:prstGeom prst="rect">
+            <a:avLst/>
+          </a:prstGeom>
+          <a:noFill/>
+          <a:ln/>
+        </p:spPr>
+        <p:txBody>
+          <a:bodyPr wrap="square" lIns="0" tIns="0" rIns="0" bIns="0" rtlCol="0" anchor="ctr"/>
+          <a:lstStyle/>
+          <a:p>
+            <a:pPr algn="l" indent="0" marL="0">
+              <a:buNone/>
+            </a:pPr>
+            <a:r>
+              <a:rPr lang="en-US" sz="3200" b="1" dirty="0">
+                <a:solidFill>
+                  <a:srgbClr val="990011"/>
+                </a:solidFill>
+                <a:latin typeface="Times New Roman" pitchFamily="34" charset="0"/>
+                <a:ea typeface="Times New Roman" pitchFamily="34" charset="-122"/>
+                <a:cs typeface="Times New Roman" pitchFamily="34" charset="-120"/>
+              </a:rPr>
+              <a:t>B) Factors of Low Fertility</a:t>
+            </a:r>
+            <a:endParaRPr lang="en-US" sz="3200" dirty="0"/>
+          </a:p>
+        </p:txBody>
+      </p:sp>
+      <p:sp>
+        <p:nvSpPr>
+          <p:cNvPr id="6" name="Text 3"/>
+          <p:cNvSpPr/>
+          <p:nvPr/>
+        </p:nvSpPr>
+        <p:spPr>
+          <a:xfrm>
+            <a:off x="5349240" y="2240280"/>
+            <a:ext cx="6522415" cy="4206240"/>
+          </a:xfrm>
+          <a:prstGeom prst="rect">
+            <a:avLst/>
+          </a:prstGeom>
+          <a:noFill/>
+          <a:ln/>
+        </p:spPr>
+        <p:txBody>
+          <a:bodyPr wrap="square" lIns="0" tIns="0" rIns="0" bIns="0" rtlCol="0" anchor="t"/>
+          <a:lstStyle/>
+          <a:p>
+            <a:pPr algn="l" indent="0" marL="0">
+              <a:spcAft>
+                <a:spcPts val="800"/>
+              </a:spcAft>
+              <a:buNone/>
+            </a:pPr>
+            <a:r>
+              <a:rPr lang="en-US" sz="4000" b="1" dirty="0">
+                <a:solidFill>
+                  <a:srgbClr val="111111"/>
+                </a:solidFill>
+                <a:latin typeface="Times New Roman" pitchFamily="34" charset="0"/>
+                <a:ea typeface="Times New Roman" pitchFamily="34" charset="-122"/>
+                <a:cs typeface="Times New Roman" pitchFamily="34" charset="-120"/>
+              </a:rPr>
+              <a:t>Education and careers of women: </a:t>
+            </a:r>
+            <a:pPr algn="l" indent="0" marL="0">
+              <a:spcAft>
+                <a:spcPts val="800"/>
+              </a:spcAft>
+              <a:buNone/>
+            </a:pPr>
+            <a:r>
+              <a:rPr lang="en-US" sz="4000" dirty="0">
+                <a:solidFill>
+                  <a:srgbClr val="111111"/>
+                </a:solidFill>
+                <a:latin typeface="Times New Roman" pitchFamily="34" charset="0"/>
+                <a:ea typeface="Times New Roman" pitchFamily="34" charset="-122"/>
+                <a:cs typeface="Times New Roman" pitchFamily="34" charset="-120"/>
+              </a:rPr>
+              <a:t>Educated women marry later and many work outside the home. They therefore have fewer children.</a:t>
+            </a:r>
+            <a:endParaRPr lang="en-US" sz="4000" dirty="0"/>
           </a:p>
         </p:txBody>
       </p:sp>
@@ -20092,7 +20832,7 @@
                 <a:ea typeface="Times New Roman" pitchFamily="34" charset="-122"/>
                 <a:cs typeface="Times New Roman" pitchFamily="34" charset="-120"/>
               </a:rPr>
-              <a:t>3. Spatial Differences on a World Scale</a:t>
+              <a:t>2. Determinants of Population Growth</a:t>
             </a:r>
             <a:endParaRPr lang="en-US" sz="3600" dirty="0"/>
           </a:p>
@@ -20106,8 +20846,47 @@
         </p:nvSpPr>
         <p:spPr>
           <a:xfrm>
-            <a:off x="5349240" y="1783080"/>
-            <a:ext cx="6522415" cy="4663440"/>
+            <a:off x="5349240" y="1737360"/>
+            <a:ext cx="6522415" cy="457200"/>
+          </a:xfrm>
+          <a:prstGeom prst="rect">
+            <a:avLst/>
+          </a:prstGeom>
+          <a:noFill/>
+          <a:ln/>
+        </p:spPr>
+        <p:txBody>
+          <a:bodyPr wrap="square" lIns="0" tIns="0" rIns="0" bIns="0" rtlCol="0" anchor="ctr"/>
+          <a:lstStyle/>
+          <a:p>
+            <a:pPr algn="l" indent="0" marL="0">
+              <a:buNone/>
+            </a:pPr>
+            <a:r>
+              <a:rPr lang="en-US" sz="3200" b="1" dirty="0">
+                <a:solidFill>
+                  <a:srgbClr val="990011"/>
+                </a:solidFill>
+                <a:latin typeface="Times New Roman" pitchFamily="34" charset="0"/>
+                <a:ea typeface="Times New Roman" pitchFamily="34" charset="-122"/>
+                <a:cs typeface="Times New Roman" pitchFamily="34" charset="-120"/>
+              </a:rPr>
+              <a:t>B) Factors of Low Fertility</a:t>
+            </a:r>
+            <a:endParaRPr lang="en-US" sz="3200" dirty="0"/>
+          </a:p>
+        </p:txBody>
+      </p:sp>
+      <p:sp>
+        <p:nvSpPr>
+          <p:cNvPr id="6" name="Text 3"/>
+          <p:cNvSpPr/>
+          <p:nvPr/>
+        </p:nvSpPr>
+        <p:spPr>
+          <a:xfrm>
+            <a:off x="5349240" y="2240280"/>
+            <a:ext cx="6522415" cy="4206240"/>
           </a:xfrm>
           <a:prstGeom prst="rect">
             <a:avLst/>
@@ -20134,7 +20913,7 @@
                 <a:ea typeface="Times New Roman" pitchFamily="34" charset="-122"/>
                 <a:cs typeface="Times New Roman" pitchFamily="34" charset="-120"/>
               </a:rPr>
-              <a:t>More developed countries: </a:t>
+              <a:t>Low infant mortality: </a:t>
             </a:r>
             <a:pPr algn="l" indent="0" marL="0">
               <a:spcAft>
@@ -20151,7 +20930,7 @@
                 <a:ea typeface="Times New Roman" pitchFamily="34" charset="-122"/>
                 <a:cs typeface="Times New Roman" pitchFamily="34" charset="-120"/>
               </a:rPr>
-              <a:t>The USA, Germany and Japan have low fertility and low mortality. Their growth is slow, zero or negative.</a:t>
+              <a:t>When almost all babies survive, parents no longer need many births. Fertility falls a few years after infant mortality.</a:t>
             </a:r>
             <a:endParaRPr lang="en-US" sz="4000" dirty="0"/>
           </a:p>
@@ -20269,9 +21048,170 @@
           </a:p>
         </p:txBody>
       </p:sp>
+      <p:sp>
+        <p:nvSpPr>
+          <p:cNvPr id="3" name="Text 1"/>
+          <p:cNvSpPr/>
+          <p:nvPr/>
+        </p:nvSpPr>
+        <p:spPr>
+          <a:xfrm>
+            <a:off x="365760" y="1005840"/>
+            <a:ext cx="11460175" cy="731520"/>
+          </a:xfrm>
+          <a:prstGeom prst="rect">
+            <a:avLst/>
+          </a:prstGeom>
+          <a:noFill/>
+          <a:ln/>
+        </p:spPr>
+        <p:txBody>
+          <a:bodyPr wrap="square" lIns="0" tIns="0" rIns="0" bIns="0" rtlCol="0" anchor="ctr">
+            <a:normAutofit/>
+          </a:bodyPr>
+          <a:lstStyle/>
+          <a:p>
+            <a:pPr algn="ctr" indent="0" marL="0">
+              <a:buNone/>
+            </a:pPr>
+            <a:r>
+              <a:rPr lang="en-US" sz="3600" b="1" dirty="0">
+                <a:solidFill>
+                  <a:srgbClr val="990011"/>
+                </a:solidFill>
+                <a:latin typeface="Times New Roman" pitchFamily="34" charset="0"/>
+                <a:ea typeface="Times New Roman" pitchFamily="34" charset="-122"/>
+                <a:cs typeface="Times New Roman" pitchFamily="34" charset="-120"/>
+              </a:rPr>
+              <a:t>2. Determinants of Population Growth</a:t>
+            </a:r>
+            <a:endParaRPr lang="en-US" sz="3600" dirty="0"/>
+          </a:p>
+        </p:txBody>
+      </p:sp>
+      <p:sp>
+        <p:nvSpPr>
+          <p:cNvPr id="4" name="Text 2"/>
+          <p:cNvSpPr/>
+          <p:nvPr/>
+        </p:nvSpPr>
+        <p:spPr>
+          <a:xfrm>
+            <a:off x="365760" y="1737360"/>
+            <a:ext cx="6035040" cy="457200"/>
+          </a:xfrm>
+          <a:prstGeom prst="rect">
+            <a:avLst/>
+          </a:prstGeom>
+          <a:noFill/>
+          <a:ln/>
+        </p:spPr>
+        <p:txBody>
+          <a:bodyPr wrap="square" lIns="0" tIns="0" rIns="0" bIns="0" rtlCol="0" anchor="ctr">
+            <a:normAutofit/>
+          </a:bodyPr>
+          <a:lstStyle/>
+          <a:p>
+            <a:pPr algn="l" indent="0" marL="0">
+              <a:buNone/>
+            </a:pPr>
+            <a:r>
+              <a:rPr lang="en-US" sz="3000" b="1" dirty="0">
+                <a:solidFill>
+                  <a:srgbClr val="990011"/>
+                </a:solidFill>
+                <a:latin typeface="Times New Roman" pitchFamily="34" charset="0"/>
+                <a:ea typeface="Times New Roman" pitchFamily="34" charset="-122"/>
+                <a:cs typeface="Times New Roman" pitchFamily="34" charset="-120"/>
+              </a:rPr>
+              <a:t>C) Factors of Mortality</a:t>
+            </a:r>
+            <a:endParaRPr lang="en-US" sz="3000" dirty="0"/>
+          </a:p>
+        </p:txBody>
+      </p:sp>
+      <p:sp>
+        <p:nvSpPr>
+          <p:cNvPr id="5" name="Text 3"/>
+          <p:cNvSpPr/>
+          <p:nvPr/>
+        </p:nvSpPr>
+        <p:spPr>
+          <a:xfrm>
+            <a:off x="365760" y="2240280"/>
+            <a:ext cx="6035040" cy="4160520"/>
+          </a:xfrm>
+          <a:prstGeom prst="rect">
+            <a:avLst/>
+          </a:prstGeom>
+          <a:noFill/>
+          <a:ln/>
+        </p:spPr>
+        <p:txBody>
+          <a:bodyPr wrap="square" lIns="0" tIns="0" rIns="0" bIns="0" rtlCol="0" anchor="t"/>
+          <a:lstStyle/>
+          <a:p>
+            <a:pPr algn="l" indent="0" marL="0">
+              <a:spcAft>
+                <a:spcPts val="800"/>
+              </a:spcAft>
+              <a:buNone/>
+            </a:pPr>
+            <a:r>
+              <a:rPr lang="en-US" sz="3600" i="1" dirty="0">
+                <a:solidFill>
+                  <a:srgbClr val="111111"/>
+                </a:solidFill>
+                <a:latin typeface="Times New Roman" pitchFamily="34" charset="0"/>
+                <a:ea typeface="Times New Roman" pitchFamily="34" charset="-122"/>
+                <a:cs typeface="Times New Roman" pitchFamily="34" charset="-120"/>
+              </a:rPr>
+              <a:t>Mortality depends on the following factors:</a:t>
+            </a:r>
+            <a:endParaRPr lang="en-US" sz="3600" dirty="0"/>
+          </a:p>
+          <a:p>
+            <a:pPr algn="l" indent="0" marL="0">
+              <a:spcAft>
+                <a:spcPts val="800"/>
+              </a:spcAft>
+              <a:buNone/>
+            </a:pPr>
+            <a:r>
+              <a:rPr lang="en-US" sz="3600" b="1" dirty="0">
+                <a:solidFill>
+                  <a:srgbClr val="111111"/>
+                </a:solidFill>
+                <a:latin typeface="Times New Roman" pitchFamily="34" charset="0"/>
+                <a:ea typeface="Times New Roman" pitchFamily="34" charset="-122"/>
+                <a:cs typeface="Times New Roman" pitchFamily="34" charset="-120"/>
+              </a:rPr>
+              <a:t>Health care: </a:t>
+            </a:r>
+            <a:pPr algn="l" indent="0" marL="0">
+              <a:spcAft>
+                <a:spcPts val="800"/>
+              </a:spcAft>
+              <a:buNone/>
+            </a:pPr>
+            <a:r>
+              <a:rPr lang="en-US" sz="3600" dirty="0">
+                <a:solidFill>
+                  <a:srgbClr val="111111"/>
+                </a:solidFill>
+                <a:latin typeface="Times New Roman" pitchFamily="34" charset="0"/>
+                <a:ea typeface="Times New Roman" pitchFamily="34" charset="-122"/>
+                <a:cs typeface="Times New Roman" pitchFamily="34" charset="-120"/>
+              </a:rPr>
+              <a:t>Vaccines, hospitals and medicines reduce deaths from diseases. Where health care is poor, many people die young.</a:t>
+            </a:r>
+            <a:endParaRPr lang="en-US" sz="3600" dirty="0"/>
+          </a:p>
+        </p:txBody>
+      </p:sp>
       <p:pic>
         <p:nvPicPr>
-          <p:cNvPr id="3" name="Image 0" descr="/home/claude/f4/img/minesec_sheet.png">    </p:cNvPr>
+          <p:cNvPr id="6" name="Image 0" descr="/home/claude/f4/img/v2/usa_vaccine.jpg">    </p:cNvPr>
           <p:cNvPicPr>
             <a:picLocks noChangeAspect="1"/>
           </p:cNvPicPr>
@@ -20285,8 +21225,8 @@
         </p:blipFill>
         <p:spPr>
           <a:xfrm>
-            <a:off x="0" y="658368"/>
-            <a:ext cx="5120640" cy="5833872"/>
+            <a:off x="6537960" y="2400897"/>
+            <a:ext cx="5470855" cy="3034615"/>
           </a:xfrm>
           <a:prstGeom prst="rect">
             <a:avLst/>
@@ -20295,14 +21235,14 @@
       </p:pic>
       <p:sp>
         <p:nvSpPr>
-          <p:cNvPr id="4" name="Text 1"/>
+          <p:cNvPr id="7" name="Text 4"/>
           <p:cNvSpPr/>
           <p:nvPr/>
         </p:nvSpPr>
         <p:spPr>
           <a:xfrm>
-            <a:off x="5349240" y="1005840"/>
-            <a:ext cx="6522415" cy="731520"/>
+            <a:off x="6537960" y="6089904"/>
+            <a:ext cx="5470855" cy="347472"/>
           </a:xfrm>
           <a:prstGeom prst="rect">
             <a:avLst/>
@@ -20311,85 +21251,24 @@
           <a:ln/>
         </p:spPr>
         <p:txBody>
-          <a:bodyPr wrap="square" lIns="0" tIns="0" rIns="0" bIns="0" rtlCol="0" anchor="ctr">
-            <a:normAutofit/>
-          </a:bodyPr>
+          <a:bodyPr wrap="square" lIns="0" tIns="0" rIns="0" bIns="0" rtlCol="0" anchor="ctr"/>
           <a:lstStyle/>
           <a:p>
             <a:pPr algn="ctr" indent="0" marL="0">
               <a:buNone/>
             </a:pPr>
             <a:r>
-              <a:rPr lang="en-US" sz="3600" b="1" dirty="0">
-                <a:solidFill>
-                  <a:srgbClr val="990011"/>
+              <a:rPr lang="en-US" sz="1600" i="1" dirty="0">
+                <a:solidFill>
+                  <a:srgbClr val="555555"/>
                 </a:solidFill>
                 <a:latin typeface="Times New Roman" pitchFamily="34" charset="0"/>
                 <a:ea typeface="Times New Roman" pitchFamily="34" charset="-122"/>
                 <a:cs typeface="Times New Roman" pitchFamily="34" charset="-120"/>
               </a:rPr>
-              <a:t>3. Spatial Differences on a World Scale</a:t>
-            </a:r>
-            <a:endParaRPr lang="en-US" sz="3600" dirty="0"/>
-          </a:p>
-        </p:txBody>
-      </p:sp>
-      <p:sp>
-        <p:nvSpPr>
-          <p:cNvPr id="5" name="Text 2"/>
-          <p:cNvSpPr/>
-          <p:nvPr/>
-        </p:nvSpPr>
-        <p:spPr>
-          <a:xfrm>
-            <a:off x="5349240" y="1783080"/>
-            <a:ext cx="6522415" cy="4663440"/>
-          </a:xfrm>
-          <a:prstGeom prst="rect">
-            <a:avLst/>
-          </a:prstGeom>
-          <a:noFill/>
-          <a:ln/>
-        </p:spPr>
-        <p:txBody>
-          <a:bodyPr wrap="square" lIns="0" tIns="0" rIns="0" bIns="0" rtlCol="0" anchor="t"/>
-          <a:lstStyle/>
-          <a:p>
-            <a:pPr algn="l" indent="0" marL="0">
-              <a:spcAft>
-                <a:spcPts val="800"/>
-              </a:spcAft>
-              <a:buNone/>
-            </a:pPr>
-            <a:r>
-              <a:rPr lang="en-US" sz="4000" b="1" dirty="0">
-                <a:solidFill>
-                  <a:srgbClr val="111111"/>
-                </a:solidFill>
-                <a:latin typeface="Times New Roman" pitchFamily="34" charset="0"/>
-                <a:ea typeface="Times New Roman" pitchFamily="34" charset="-122"/>
-                <a:cs typeface="Times New Roman" pitchFamily="34" charset="-120"/>
-              </a:rPr>
-              <a:t>The role of migration: </a:t>
-            </a:r>
-            <a:pPr algn="l" indent="0" marL="0">
-              <a:spcAft>
-                <a:spcPts val="800"/>
-              </a:spcAft>
-              <a:buNone/>
-            </a:pPr>
-            <a:r>
-              <a:rPr lang="en-US" sz="4000" dirty="0">
-                <a:solidFill>
-                  <a:srgbClr val="111111"/>
-                </a:solidFill>
-                <a:latin typeface="Times New Roman" pitchFamily="34" charset="0"/>
-                <a:ea typeface="Times New Roman" pitchFamily="34" charset="-122"/>
-                <a:cs typeface="Times New Roman" pitchFamily="34" charset="-120"/>
-              </a:rPr>
-              <a:t>In developed countries, immigration is often the main source of population growth. In some poor countries, emigration reduces growth.</a:t>
-            </a:r>
-            <a:endParaRPr lang="en-US" sz="4000" dirty="0"/>
+              <a:t>Illustration: vaccination</a:t>
+            </a:r>
+            <a:endParaRPr lang="en-US" sz="1600" dirty="0"/>
           </a:p>
         </p:txBody>
       </p:sp>
@@ -20499,7 +21378,7 @@
                 <a:ea typeface="Calibri" pitchFamily="34" charset="-122"/>
                 <a:cs typeface="Calibri" pitchFamily="34" charset="-120"/>
               </a:rPr>
-              <a:t>FORMATIVE EVALUATION</a:t>
+              <a:t>BOARD SUMMARY</a:t>
             </a:r>
             <a:endParaRPr lang="en-US" sz="1400" dirty="0"/>
           </a:p>
@@ -20522,7 +21401,7 @@
         <p:spPr>
           <a:xfrm>
             <a:off x="0" y="658368"/>
-            <a:ext cx="5120640" cy="5833872"/>
+            <a:ext cx="3840480" cy="5833872"/>
           </a:xfrm>
           <a:prstGeom prst="rect">
             <a:avLst/>
@@ -20537,8 +21416,8 @@
         </p:nvSpPr>
         <p:spPr>
           <a:xfrm>
-            <a:off x="5349240" y="1005840"/>
-            <a:ext cx="6522415" cy="731520"/>
+            <a:off x="4069080" y="1005840"/>
+            <a:ext cx="7802575" cy="731520"/>
           </a:xfrm>
           <a:prstGeom prst="rect">
             <a:avLst/>
@@ -20564,7 +21443,7 @@
                 <a:ea typeface="Times New Roman" pitchFamily="34" charset="-122"/>
                 <a:cs typeface="Times New Roman" pitchFamily="34" charset="-120"/>
               </a:rPr>
-              <a:t>Evaluation 1</a:t>
+              <a:t>2. Determinants of Population Growth</a:t>
             </a:r>
             <a:endParaRPr lang="en-US" sz="3600" dirty="0"/>
           </a:p>
@@ -20578,8 +21457,47 @@
         </p:nvSpPr>
         <p:spPr>
           <a:xfrm>
-            <a:off x="5349240" y="1783080"/>
-            <a:ext cx="6522415" cy="4663440"/>
+            <a:off x="4069080" y="1737360"/>
+            <a:ext cx="7802575" cy="457200"/>
+          </a:xfrm>
+          <a:prstGeom prst="rect">
+            <a:avLst/>
+          </a:prstGeom>
+          <a:noFill/>
+          <a:ln/>
+        </p:spPr>
+        <p:txBody>
+          <a:bodyPr wrap="square" lIns="0" tIns="0" rIns="0" bIns="0" rtlCol="0" anchor="ctr"/>
+          <a:lstStyle/>
+          <a:p>
+            <a:pPr algn="l" indent="0" marL="0">
+              <a:buNone/>
+            </a:pPr>
+            <a:r>
+              <a:rPr lang="en-US" sz="3200" b="1" dirty="0">
+                <a:solidFill>
+                  <a:srgbClr val="990011"/>
+                </a:solidFill>
+                <a:latin typeface="Times New Roman" pitchFamily="34" charset="0"/>
+                <a:ea typeface="Times New Roman" pitchFamily="34" charset="-122"/>
+                <a:cs typeface="Times New Roman" pitchFamily="34" charset="-120"/>
+              </a:rPr>
+              <a:t>C) Factors of Mortality</a:t>
+            </a:r>
+            <a:endParaRPr lang="en-US" sz="3200" dirty="0"/>
+          </a:p>
+        </p:txBody>
+      </p:sp>
+      <p:sp>
+        <p:nvSpPr>
+          <p:cNvPr id="6" name="Text 3"/>
+          <p:cNvSpPr/>
+          <p:nvPr/>
+        </p:nvSpPr>
+        <p:spPr>
+          <a:xfrm>
+            <a:off x="4069080" y="2240280"/>
+            <a:ext cx="7802575" cy="4206240"/>
           </a:xfrm>
           <a:prstGeom prst="rect">
             <a:avLst/>
@@ -20598,7 +21516,7 @@
               <a:buNone/>
             </a:pPr>
             <a:r>
-              <a:rPr lang="en-US" sz="4000" dirty="0">
+              <a:rPr lang="en-US" sz="4000" b="1" dirty="0">
                 <a:solidFill>
                   <a:srgbClr val="111111"/>
                 </a:solidFill>
@@ -20606,7 +21524,24 @@
                 <a:ea typeface="Times New Roman" pitchFamily="34" charset="-122"/>
                 <a:cs typeface="Times New Roman" pitchFamily="34" charset="-120"/>
               </a:rPr>
-              <a:t>Distinguish between natural increase and net migration.</a:t>
+              <a:t>Sanitation and hygiene: </a:t>
+            </a:r>
+            <a:pPr algn="l" indent="0" marL="0">
+              <a:spcAft>
+                <a:spcPts val="800"/>
+              </a:spcAft>
+              <a:buNone/>
+            </a:pPr>
+            <a:r>
+              <a:rPr lang="en-US" sz="4000" dirty="0">
+                <a:solidFill>
+                  <a:srgbClr val="111111"/>
+                </a:solidFill>
+                <a:latin typeface="Times New Roman" pitchFamily="34" charset="0"/>
+                <a:ea typeface="Times New Roman" pitchFamily="34" charset="-122"/>
+                <a:cs typeface="Times New Roman" pitchFamily="34" charset="-120"/>
+              </a:rPr>
+              <a:t>Clean water, toilets and sewers prevent cholera and other diseases. Poor sanitation keeps death rates high, especially among children.</a:t>
             </a:r>
             <a:endParaRPr lang="en-US" sz="4000" dirty="0"/>
           </a:p>
@@ -20718,7 +21653,7 @@
                 <a:ea typeface="Calibri" pitchFamily="34" charset="-122"/>
                 <a:cs typeface="Calibri" pitchFamily="34" charset="-120"/>
               </a:rPr>
-              <a:t>FORMATIVE EVALUATION</a:t>
+              <a:t>BOARD SUMMARY</a:t>
             </a:r>
             <a:endParaRPr lang="en-US" sz="1400" dirty="0"/>
           </a:p>
@@ -20783,7 +21718,7 @@
                 <a:ea typeface="Times New Roman" pitchFamily="34" charset="-122"/>
                 <a:cs typeface="Times New Roman" pitchFamily="34" charset="-120"/>
               </a:rPr>
-              <a:t>Expected Answer</a:t>
+              <a:t>2. Determinants of Population Growth</a:t>
             </a:r>
             <a:endParaRPr lang="en-US" sz="3600" dirty="0"/>
           </a:p>
@@ -20797,8 +21732,47 @@
         </p:nvSpPr>
         <p:spPr>
           <a:xfrm>
-            <a:off x="5349240" y="1783080"/>
-            <a:ext cx="6522415" cy="4663440"/>
+            <a:off x="5349240" y="1737360"/>
+            <a:ext cx="6522415" cy="457200"/>
+          </a:xfrm>
+          <a:prstGeom prst="rect">
+            <a:avLst/>
+          </a:prstGeom>
+          <a:noFill/>
+          <a:ln/>
+        </p:spPr>
+        <p:txBody>
+          <a:bodyPr wrap="square" lIns="0" tIns="0" rIns="0" bIns="0" rtlCol="0" anchor="ctr"/>
+          <a:lstStyle/>
+          <a:p>
+            <a:pPr algn="l" indent="0" marL="0">
+              <a:buNone/>
+            </a:pPr>
+            <a:r>
+              <a:rPr lang="en-US" sz="3200" b="1" dirty="0">
+                <a:solidFill>
+                  <a:srgbClr val="990011"/>
+                </a:solidFill>
+                <a:latin typeface="Times New Roman" pitchFamily="34" charset="0"/>
+                <a:ea typeface="Times New Roman" pitchFamily="34" charset="-122"/>
+                <a:cs typeface="Times New Roman" pitchFamily="34" charset="-120"/>
+              </a:rPr>
+              <a:t>C) Factors of Mortality</a:t>
+            </a:r>
+            <a:endParaRPr lang="en-US" sz="3200" dirty="0"/>
+          </a:p>
+        </p:txBody>
+      </p:sp>
+      <p:sp>
+        <p:nvSpPr>
+          <p:cNvPr id="6" name="Text 3"/>
+          <p:cNvSpPr/>
+          <p:nvPr/>
+        </p:nvSpPr>
+        <p:spPr>
+          <a:xfrm>
+            <a:off x="5349240" y="2240280"/>
+            <a:ext cx="6522415" cy="4206240"/>
           </a:xfrm>
           <a:prstGeom prst="rect">
             <a:avLst/>
@@ -20817,7 +21791,7 @@
               <a:buNone/>
             </a:pPr>
             <a:r>
-              <a:rPr lang="en-US" sz="4000" dirty="0">
+              <a:rPr lang="en-US" sz="4000" b="1" dirty="0">
                 <a:solidFill>
                   <a:srgbClr val="111111"/>
                 </a:solidFill>
@@ -20825,7 +21799,24 @@
                 <a:ea typeface="Times New Roman" pitchFamily="34" charset="-122"/>
                 <a:cs typeface="Times New Roman" pitchFamily="34" charset="-120"/>
               </a:rPr>
-              <a:t>Natural increase is births minus deaths; net migration is immigrants minus emigrants.</a:t>
+              <a:t>Food supply: </a:t>
+            </a:r>
+            <a:pPr algn="l" indent="0" marL="0">
+              <a:spcAft>
+                <a:spcPts val="800"/>
+              </a:spcAft>
+              <a:buNone/>
+            </a:pPr>
+            <a:r>
+              <a:rPr lang="en-US" sz="4000" dirty="0">
+                <a:solidFill>
+                  <a:srgbClr val="111111"/>
+                </a:solidFill>
+                <a:latin typeface="Times New Roman" pitchFamily="34" charset="0"/>
+                <a:ea typeface="Times New Roman" pitchFamily="34" charset="-122"/>
+                <a:cs typeface="Times New Roman" pitchFamily="34" charset="-120"/>
+              </a:rPr>
+              <a:t>Good food makes people strong and resistant to diseases. Malnutrition and famine raise death rates.</a:t>
             </a:r>
             <a:endParaRPr lang="en-US" sz="4000" dirty="0"/>
           </a:p>
@@ -20937,7 +21928,7 @@
                 <a:ea typeface="Calibri" pitchFamily="34" charset="-122"/>
                 <a:cs typeface="Calibri" pitchFamily="34" charset="-120"/>
               </a:rPr>
-              <a:t>FORMATIVE EVALUATION</a:t>
+              <a:t>BOARD SUMMARY</a:t>
             </a:r>
             <a:endParaRPr lang="en-US" sz="1400" dirty="0"/>
           </a:p>
@@ -21002,7 +21993,7 @@
                 <a:ea typeface="Times New Roman" pitchFamily="34" charset="-122"/>
                 <a:cs typeface="Times New Roman" pitchFamily="34" charset="-120"/>
               </a:rPr>
-              <a:t>Evaluation 2</a:t>
+              <a:t>2. Determinants of Population Growth</a:t>
             </a:r>
             <a:endParaRPr lang="en-US" sz="3600" dirty="0"/>
           </a:p>
@@ -21016,8 +22007,47 @@
         </p:nvSpPr>
         <p:spPr>
           <a:xfrm>
-            <a:off x="5349240" y="1783080"/>
-            <a:ext cx="6522415" cy="4663440"/>
+            <a:off x="5349240" y="1737360"/>
+            <a:ext cx="6522415" cy="457200"/>
+          </a:xfrm>
+          <a:prstGeom prst="rect">
+            <a:avLst/>
+          </a:prstGeom>
+          <a:noFill/>
+          <a:ln/>
+        </p:spPr>
+        <p:txBody>
+          <a:bodyPr wrap="square" lIns="0" tIns="0" rIns="0" bIns="0" rtlCol="0" anchor="ctr"/>
+          <a:lstStyle/>
+          <a:p>
+            <a:pPr algn="l" indent="0" marL="0">
+              <a:buNone/>
+            </a:pPr>
+            <a:r>
+              <a:rPr lang="en-US" sz="3200" b="1" dirty="0">
+                <a:solidFill>
+                  <a:srgbClr val="990011"/>
+                </a:solidFill>
+                <a:latin typeface="Times New Roman" pitchFamily="34" charset="0"/>
+                <a:ea typeface="Times New Roman" pitchFamily="34" charset="-122"/>
+                <a:cs typeface="Times New Roman" pitchFamily="34" charset="-120"/>
+              </a:rPr>
+              <a:t>C) Factors of Mortality</a:t>
+            </a:r>
+            <a:endParaRPr lang="en-US" sz="3200" dirty="0"/>
+          </a:p>
+        </p:txBody>
+      </p:sp>
+      <p:sp>
+        <p:nvSpPr>
+          <p:cNvPr id="6" name="Text 3"/>
+          <p:cNvSpPr/>
+          <p:nvPr/>
+        </p:nvSpPr>
+        <p:spPr>
+          <a:xfrm>
+            <a:off x="5349240" y="2240280"/>
+            <a:ext cx="6522415" cy="4206240"/>
           </a:xfrm>
           <a:prstGeom prst="rect">
             <a:avLst/>
@@ -21036,7 +22066,7 @@
               <a:buNone/>
             </a:pPr>
             <a:r>
-              <a:rPr lang="en-US" sz="4000" dirty="0">
+              <a:rPr lang="en-US" sz="4000" b="1" dirty="0">
                 <a:solidFill>
                   <a:srgbClr val="111111"/>
                 </a:solidFill>
@@ -21044,7 +22074,24 @@
                 <a:ea typeface="Times New Roman" pitchFamily="34" charset="-122"/>
                 <a:cs typeface="Times New Roman" pitchFamily="34" charset="-120"/>
               </a:rPr>
-              <a:t>Give two factors of low mortality.</a:t>
+              <a:t>Wars and disasters: </a:t>
+            </a:r>
+            <a:pPr algn="l" indent="0" marL="0">
+              <a:spcAft>
+                <a:spcPts val="800"/>
+              </a:spcAft>
+              <a:buNone/>
+            </a:pPr>
+            <a:r>
+              <a:rPr lang="en-US" sz="4000" dirty="0">
+                <a:solidFill>
+                  <a:srgbClr val="111111"/>
+                </a:solidFill>
+                <a:latin typeface="Times New Roman" pitchFamily="34" charset="0"/>
+                <a:ea typeface="Times New Roman" pitchFamily="34" charset="-122"/>
+                <a:cs typeface="Times New Roman" pitchFamily="34" charset="-120"/>
+              </a:rPr>
+              <a:t>Wars, floods and droughts kill many people at once. They also destroy hospitals and harvests, which causes more deaths later.</a:t>
             </a:r>
             <a:endParaRPr lang="en-US" sz="4000" dirty="0"/>
           </a:p>
@@ -21156,7 +22203,7 @@
                 <a:ea typeface="Calibri" pitchFamily="34" charset="-122"/>
                 <a:cs typeface="Calibri" pitchFamily="34" charset="-120"/>
               </a:rPr>
-              <a:t>FORMATIVE EVALUATION</a:t>
+              <a:t>BOARD SUMMARY</a:t>
             </a:r>
             <a:endParaRPr lang="en-US" sz="1400" dirty="0"/>
           </a:p>
@@ -21179,7 +22226,7 @@
         <p:spPr>
           <a:xfrm>
             <a:off x="0" y="658368"/>
-            <a:ext cx="5120640" cy="5833872"/>
+            <a:ext cx="2468880" cy="5833872"/>
           </a:xfrm>
           <a:prstGeom prst="rect">
             <a:avLst/>
@@ -21194,8 +22241,8 @@
         </p:nvSpPr>
         <p:spPr>
           <a:xfrm>
-            <a:off x="5349240" y="1005840"/>
-            <a:ext cx="6522415" cy="731520"/>
+            <a:off x="2697480" y="1005840"/>
+            <a:ext cx="9174175" cy="731520"/>
           </a:xfrm>
           <a:prstGeom prst="rect">
             <a:avLst/>
@@ -21221,7 +22268,7 @@
                 <a:ea typeface="Times New Roman" pitchFamily="34" charset="-122"/>
                 <a:cs typeface="Times New Roman" pitchFamily="34" charset="-120"/>
               </a:rPr>
-              <a:t>Expected Answer</a:t>
+              <a:t>2. Determinants of Population Growth</a:t>
             </a:r>
             <a:endParaRPr lang="en-US" sz="3600" dirty="0"/>
           </a:p>
@@ -21235,8 +22282,47 @@
         </p:nvSpPr>
         <p:spPr>
           <a:xfrm>
-            <a:off x="5349240" y="1783080"/>
-            <a:ext cx="6522415" cy="4663440"/>
+            <a:off x="2697480" y="1737360"/>
+            <a:ext cx="9174175" cy="457200"/>
+          </a:xfrm>
+          <a:prstGeom prst="rect">
+            <a:avLst/>
+          </a:prstGeom>
+          <a:noFill/>
+          <a:ln/>
+        </p:spPr>
+        <p:txBody>
+          <a:bodyPr wrap="square" lIns="0" tIns="0" rIns="0" bIns="0" rtlCol="0" anchor="ctr"/>
+          <a:lstStyle/>
+          <a:p>
+            <a:pPr algn="l" indent="0" marL="0">
+              <a:buNone/>
+            </a:pPr>
+            <a:r>
+              <a:rPr lang="en-US" sz="3200" b="1" dirty="0">
+                <a:solidFill>
+                  <a:srgbClr val="990011"/>
+                </a:solidFill>
+                <a:latin typeface="Times New Roman" pitchFamily="34" charset="0"/>
+                <a:ea typeface="Times New Roman" pitchFamily="34" charset="-122"/>
+                <a:cs typeface="Times New Roman" pitchFamily="34" charset="-120"/>
+              </a:rPr>
+              <a:t>D) Factors of Migration</a:t>
+            </a:r>
+            <a:endParaRPr lang="en-US" sz="3200" dirty="0"/>
+          </a:p>
+        </p:txBody>
+      </p:sp>
+      <p:sp>
+        <p:nvSpPr>
+          <p:cNvPr id="6" name="Text 3"/>
+          <p:cNvSpPr/>
+          <p:nvPr/>
+        </p:nvSpPr>
+        <p:spPr>
+          <a:xfrm>
+            <a:off x="2697480" y="2240280"/>
+            <a:ext cx="9174175" cy="4206240"/>
           </a:xfrm>
           <a:prstGeom prst="rect">
             <a:avLst/>
@@ -21255,7 +22341,7 @@
               <a:buNone/>
             </a:pPr>
             <a:r>
-              <a:rPr lang="en-US" sz="4000" dirty="0">
+              <a:rPr lang="en-US" sz="4000" i="1" dirty="0">
                 <a:solidFill>
                   <a:srgbClr val="111111"/>
                 </a:solidFill>
@@ -21263,7 +22349,44 @@
                 <a:ea typeface="Times New Roman" pitchFamily="34" charset="-122"/>
                 <a:cs typeface="Times New Roman" pitchFamily="34" charset="-120"/>
               </a:rPr>
-              <a:t>Vaccines and hospitals, clean water, good nutrition (any two).</a:t>
+              <a:t>Migration depends on the following factors:</a:t>
+            </a:r>
+            <a:endParaRPr lang="en-US" sz="4000" dirty="0"/>
+          </a:p>
+          <a:p>
+            <a:pPr algn="l" indent="0" marL="0">
+              <a:spcAft>
+                <a:spcPts val="800"/>
+              </a:spcAft>
+              <a:buNone/>
+            </a:pPr>
+            <a:r>
+              <a:rPr lang="en-US" sz="4000" b="1" dirty="0">
+                <a:solidFill>
+                  <a:srgbClr val="111111"/>
+                </a:solidFill>
+                <a:latin typeface="Times New Roman" pitchFamily="34" charset="0"/>
+                <a:ea typeface="Times New Roman" pitchFamily="34" charset="-122"/>
+                <a:cs typeface="Times New Roman" pitchFamily="34" charset="-120"/>
+              </a:rPr>
+              <a:t>Lack of jobs and poverty: </a:t>
+            </a:r>
+            <a:pPr algn="l" indent="0" marL="0">
+              <a:spcAft>
+                <a:spcPts val="800"/>
+              </a:spcAft>
+              <a:buNone/>
+            </a:pPr>
+            <a:r>
+              <a:rPr lang="en-US" sz="4000" dirty="0">
+                <a:solidFill>
+                  <a:srgbClr val="111111"/>
+                </a:solidFill>
+                <a:latin typeface="Times New Roman" pitchFamily="34" charset="0"/>
+                <a:ea typeface="Times New Roman" pitchFamily="34" charset="-122"/>
+                <a:cs typeface="Times New Roman" pitchFamily="34" charset="-120"/>
+              </a:rPr>
+              <a:t>People leave areas where they cannot earn a living. Rural areas therefore lose young people to towns and to other countries.</a:t>
             </a:r>
             <a:endParaRPr lang="en-US" sz="4000" dirty="0"/>
           </a:p>
@@ -21375,7 +22498,7 @@
                 <a:ea typeface="Calibri" pitchFamily="34" charset="-122"/>
                 <a:cs typeface="Calibri" pitchFamily="34" charset="-120"/>
               </a:rPr>
-              <a:t>REMEDIATION</a:t>
+              <a:t>BOARD SUMMARY</a:t>
             </a:r>
             <a:endParaRPr lang="en-US" sz="1400" dirty="0"/>
           </a:p>
@@ -21440,7 +22563,7 @@
                 <a:ea typeface="Times New Roman" pitchFamily="34" charset="-122"/>
                 <a:cs typeface="Times New Roman" pitchFamily="34" charset="-120"/>
               </a:rPr>
-              <a:t>Remediation</a:t>
+              <a:t>2. Determinants of Population Growth</a:t>
             </a:r>
             <a:endParaRPr lang="en-US" sz="3600" dirty="0"/>
           </a:p>
@@ -21454,8 +22577,47 @@
         </p:nvSpPr>
         <p:spPr>
           <a:xfrm>
-            <a:off x="5349240" y="1783080"/>
-            <a:ext cx="6522415" cy="4663440"/>
+            <a:off x="5349240" y="1737360"/>
+            <a:ext cx="6522415" cy="457200"/>
+          </a:xfrm>
+          <a:prstGeom prst="rect">
+            <a:avLst/>
+          </a:prstGeom>
+          <a:noFill/>
+          <a:ln/>
+        </p:spPr>
+        <p:txBody>
+          <a:bodyPr wrap="square" lIns="0" tIns="0" rIns="0" bIns="0" rtlCol="0" anchor="ctr"/>
+          <a:lstStyle/>
+          <a:p>
+            <a:pPr algn="l" indent="0" marL="0">
+              <a:buNone/>
+            </a:pPr>
+            <a:r>
+              <a:rPr lang="en-US" sz="3200" b="1" dirty="0">
+                <a:solidFill>
+                  <a:srgbClr val="990011"/>
+                </a:solidFill>
+                <a:latin typeface="Times New Roman" pitchFamily="34" charset="0"/>
+                <a:ea typeface="Times New Roman" pitchFamily="34" charset="-122"/>
+                <a:cs typeface="Times New Roman" pitchFamily="34" charset="-120"/>
+              </a:rPr>
+              <a:t>D) Factors of Migration</a:t>
+            </a:r>
+            <a:endParaRPr lang="en-US" sz="3200" dirty="0"/>
+          </a:p>
+        </p:txBody>
+      </p:sp>
+      <p:sp>
+        <p:nvSpPr>
+          <p:cNvPr id="6" name="Text 3"/>
+          <p:cNvSpPr/>
+          <p:nvPr/>
+        </p:nvSpPr>
+        <p:spPr>
+          <a:xfrm>
+            <a:off x="5349240" y="2240280"/>
+            <a:ext cx="6522415" cy="4206240"/>
           </a:xfrm>
           <a:prstGeom prst="rect">
             <a:avLst/>
@@ -21482,18 +22644,13 @@
                 <a:ea typeface="Times New Roman" pitchFamily="34" charset="-122"/>
                 <a:cs typeface="Times New Roman" pitchFamily="34" charset="-120"/>
               </a:rPr>
-              <a:t>Fill in the blanks:</a:t>
-            </a:r>
-            <a:endParaRPr lang="en-US" sz="4000" dirty="0"/>
-          </a:p>
-          <a:p>
-            <a:pPr algn="l" marL="342900" indent="-342900">
+              <a:t>Insecurity: </a:t>
+            </a:r>
+            <a:pPr algn="l" indent="0" marL="0">
               <a:spcAft>
                 <a:spcPts val="800"/>
               </a:spcAft>
-              <a:buSzPct val="100000"/>
-              <a:buFont typeface="+mj-lt"/>
-              <a:buAutoNum type="arabicPeriod" startAt="1"/>
+              <a:buNone/>
             </a:pPr>
             <a:r>
               <a:rPr lang="en-US" sz="4000" dirty="0">
@@ -21504,51 +22661,7 @@
                 <a:ea typeface="Times New Roman" pitchFamily="34" charset="-122"/>
                 <a:cs typeface="Times New Roman" pitchFamily="34" charset="-120"/>
               </a:rPr>
-              <a:t>When births exceed deaths, there is natural ______.</a:t>
-            </a:r>
-            <a:endParaRPr lang="en-US" sz="4000" dirty="0"/>
-          </a:p>
-          <a:p>
-            <a:pPr algn="l" marL="342900" indent="-342900">
-              <a:spcAft>
-                <a:spcPts val="800"/>
-              </a:spcAft>
-              <a:buSzPct val="100000"/>
-              <a:buFont typeface="+mj-lt"/>
-              <a:buAutoNum type="arabicPeriod" startAt="1"/>
-            </a:pPr>
-            <a:r>
-              <a:rPr lang="en-US" sz="4000" dirty="0">
-                <a:solidFill>
-                  <a:srgbClr val="111111"/>
-                </a:solidFill>
-                <a:latin typeface="Times New Roman" pitchFamily="34" charset="0"/>
-                <a:ea typeface="Times New Roman" pitchFamily="34" charset="-122"/>
-                <a:cs typeface="Times New Roman" pitchFamily="34" charset="-120"/>
-              </a:rPr>
-              <a:t>Immigrants − emigrants = net ______.</a:t>
-            </a:r>
-            <a:endParaRPr lang="en-US" sz="4000" dirty="0"/>
-          </a:p>
-          <a:p>
-            <a:pPr algn="l" marL="342900" indent="-342900">
-              <a:spcAft>
-                <a:spcPts val="800"/>
-              </a:spcAft>
-              <a:buSzPct val="100000"/>
-              <a:buFont typeface="+mj-lt"/>
-              <a:buAutoNum type="arabicPeriod" startAt="1"/>
-            </a:pPr>
-            <a:r>
-              <a:rPr lang="en-US" sz="4000" dirty="0">
-                <a:solidFill>
-                  <a:srgbClr val="111111"/>
-                </a:solidFill>
-                <a:latin typeface="Times New Roman" pitchFamily="34" charset="0"/>
-                <a:ea typeface="Times New Roman" pitchFamily="34" charset="-122"/>
-                <a:cs typeface="Times New Roman" pitchFamily="34" charset="-120"/>
-              </a:rPr>
-              <a:t>Japan has ______ growth.</a:t>
+              <a:t>Wars and attacks force people to flee, as the Boko Haram attacks did in the Far North. The areas they leave lose population quickly.</a:t>
             </a:r>
             <a:endParaRPr lang="en-US" sz="4000" dirty="0"/>
           </a:p>
@@ -21660,7 +22773,7 @@
                 <a:ea typeface="Calibri" pitchFamily="34" charset="-122"/>
                 <a:cs typeface="Calibri" pitchFamily="34" charset="-120"/>
               </a:rPr>
-              <a:t>HOMEWORK</a:t>
+              <a:t>BOARD SUMMARY</a:t>
             </a:r>
             <a:endParaRPr lang="en-US" sz="1400" dirty="0"/>
           </a:p>
@@ -21683,7 +22796,7 @@
         <p:spPr>
           <a:xfrm>
             <a:off x="0" y="658368"/>
-            <a:ext cx="5120640" cy="5833872"/>
+            <a:ext cx="2468880" cy="5833872"/>
           </a:xfrm>
           <a:prstGeom prst="rect">
             <a:avLst/>
@@ -21698,8 +22811,8 @@
         </p:nvSpPr>
         <p:spPr>
           <a:xfrm>
-            <a:off x="5349240" y="1005840"/>
-            <a:ext cx="6522415" cy="731520"/>
+            <a:off x="2697480" y="1005840"/>
+            <a:ext cx="9174175" cy="731520"/>
           </a:xfrm>
           <a:prstGeom prst="rect">
             <a:avLst/>
@@ -21725,7 +22838,7 @@
                 <a:ea typeface="Times New Roman" pitchFamily="34" charset="-122"/>
                 <a:cs typeface="Times New Roman" pitchFamily="34" charset="-120"/>
               </a:rPr>
-              <a:t>Homework</a:t>
+              <a:t>2. Determinants of Population Growth</a:t>
             </a:r>
             <a:endParaRPr lang="en-US" sz="3600" dirty="0"/>
           </a:p>
@@ -21739,8 +22852,47 @@
         </p:nvSpPr>
         <p:spPr>
           <a:xfrm>
-            <a:off x="5349240" y="1783080"/>
-            <a:ext cx="6522415" cy="4663440"/>
+            <a:off x="2697480" y="1737360"/>
+            <a:ext cx="9174175" cy="457200"/>
+          </a:xfrm>
+          <a:prstGeom prst="rect">
+            <a:avLst/>
+          </a:prstGeom>
+          <a:noFill/>
+          <a:ln/>
+        </p:spPr>
+        <p:txBody>
+          <a:bodyPr wrap="square" lIns="0" tIns="0" rIns="0" bIns="0" rtlCol="0" anchor="ctr"/>
+          <a:lstStyle/>
+          <a:p>
+            <a:pPr algn="l" indent="0" marL="0">
+              <a:buNone/>
+            </a:pPr>
+            <a:r>
+              <a:rPr lang="en-US" sz="3200" b="1" dirty="0">
+                <a:solidFill>
+                  <a:srgbClr val="990011"/>
+                </a:solidFill>
+                <a:latin typeface="Times New Roman" pitchFamily="34" charset="0"/>
+                <a:ea typeface="Times New Roman" pitchFamily="34" charset="-122"/>
+                <a:cs typeface="Times New Roman" pitchFamily="34" charset="-120"/>
+              </a:rPr>
+              <a:t>D) Factors of Migration</a:t>
+            </a:r>
+            <a:endParaRPr lang="en-US" sz="3200" dirty="0"/>
+          </a:p>
+        </p:txBody>
+      </p:sp>
+      <p:sp>
+        <p:nvSpPr>
+          <p:cNvPr id="6" name="Text 3"/>
+          <p:cNvSpPr/>
+          <p:nvPr/>
+        </p:nvSpPr>
+        <p:spPr>
+          <a:xfrm>
+            <a:off x="2697480" y="2240280"/>
+            <a:ext cx="9174175" cy="4206240"/>
           </a:xfrm>
           <a:prstGeom prst="rect">
             <a:avLst/>
@@ -21759,7 +22911,7 @@
               <a:buNone/>
             </a:pPr>
             <a:r>
-              <a:rPr lang="en-US" sz="4000" dirty="0">
+              <a:rPr lang="en-US" sz="4000" b="1" dirty="0">
                 <a:solidFill>
                   <a:srgbClr val="111111"/>
                 </a:solidFill>
@@ -21767,7 +22919,24 @@
                 <a:ea typeface="Times New Roman" pitchFamily="34" charset="-122"/>
                 <a:cs typeface="Times New Roman" pitchFamily="34" charset="-120"/>
               </a:rPr>
-              <a:t>Define the crude birth rate.</a:t>
+              <a:t>Jobs and services in towns: </a:t>
+            </a:r>
+            <a:pPr algn="l" indent="0" marL="0">
+              <a:spcAft>
+                <a:spcPts val="800"/>
+              </a:spcAft>
+              <a:buNone/>
+            </a:pPr>
+            <a:r>
+              <a:rPr lang="en-US" sz="4000" dirty="0">
+                <a:solidFill>
+                  <a:srgbClr val="111111"/>
+                </a:solidFill>
+                <a:latin typeface="Times New Roman" pitchFamily="34" charset="0"/>
+                <a:ea typeface="Times New Roman" pitchFamily="34" charset="-122"/>
+                <a:cs typeface="Times New Roman" pitchFamily="34" charset="-120"/>
+              </a:rPr>
+              <a:t>Jobs, better schools, hospitals and security attract people to places such as Garoua and Douala. The population of these towns grows faster than natural increase alone.</a:t>
             </a:r>
             <a:endParaRPr lang="en-US" sz="4000" dirty="0"/>
           </a:p>
@@ -22210,15 +23379,135 @@
                 <a:ea typeface="Calibri" pitchFamily="34" charset="-122"/>
                 <a:cs typeface="Calibri" pitchFamily="34" charset="-120"/>
               </a:rPr>
-              <a:t>NEXT LESSON</a:t>
+              <a:t>BOARD SUMMARY</a:t>
             </a:r>
             <a:endParaRPr lang="en-US" sz="1400" dirty="0"/>
+          </a:p>
+        </p:txBody>
+      </p:sp>
+      <p:sp>
+        <p:nvSpPr>
+          <p:cNvPr id="3" name="Text 1"/>
+          <p:cNvSpPr/>
+          <p:nvPr/>
+        </p:nvSpPr>
+        <p:spPr>
+          <a:xfrm>
+            <a:off x="365760" y="1005840"/>
+            <a:ext cx="11460175" cy="731520"/>
+          </a:xfrm>
+          <a:prstGeom prst="rect">
+            <a:avLst/>
+          </a:prstGeom>
+          <a:noFill/>
+          <a:ln/>
+        </p:spPr>
+        <p:txBody>
+          <a:bodyPr wrap="square" lIns="0" tIns="0" rIns="0" bIns="0" rtlCol="0" anchor="ctr">
+            <a:normAutofit/>
+          </a:bodyPr>
+          <a:lstStyle/>
+          <a:p>
+            <a:pPr algn="ctr" indent="0" marL="0">
+              <a:buNone/>
+            </a:pPr>
+            <a:r>
+              <a:rPr lang="en-US" sz="3600" b="1" dirty="0">
+                <a:solidFill>
+                  <a:srgbClr val="990011"/>
+                </a:solidFill>
+                <a:latin typeface="Times New Roman" pitchFamily="34" charset="0"/>
+                <a:ea typeface="Times New Roman" pitchFamily="34" charset="-122"/>
+                <a:cs typeface="Times New Roman" pitchFamily="34" charset="-120"/>
+              </a:rPr>
+              <a:t>3. Spatial Differences on a World Scale</a:t>
+            </a:r>
+            <a:endParaRPr lang="en-US" sz="3600" dirty="0"/>
+          </a:p>
+        </p:txBody>
+      </p:sp>
+      <p:sp>
+        <p:nvSpPr>
+          <p:cNvPr id="4" name="Text 2"/>
+          <p:cNvSpPr/>
+          <p:nvPr/>
+        </p:nvSpPr>
+        <p:spPr>
+          <a:xfrm>
+            <a:off x="365760" y="1783080"/>
+            <a:ext cx="6035040" cy="4617720"/>
+          </a:xfrm>
+          <a:prstGeom prst="rect">
+            <a:avLst/>
+          </a:prstGeom>
+          <a:noFill/>
+          <a:ln/>
+        </p:spPr>
+        <p:txBody>
+          <a:bodyPr wrap="square" lIns="0" tIns="0" rIns="0" bIns="0" rtlCol="0" anchor="t"/>
+          <a:lstStyle/>
+          <a:p>
+            <a:pPr algn="l" indent="0" marL="0">
+              <a:spcAft>
+                <a:spcPts val="800"/>
+              </a:spcAft>
+              <a:buNone/>
+            </a:pPr>
+            <a:r>
+              <a:rPr lang="en-US" sz="3400" i="1" dirty="0">
+                <a:solidFill>
+                  <a:srgbClr val="111111"/>
+                </a:solidFill>
+                <a:latin typeface="Times New Roman" pitchFamily="34" charset="0"/>
+                <a:ea typeface="Times New Roman" pitchFamily="34" charset="-122"/>
+                <a:cs typeface="Times New Roman" pitchFamily="34" charset="-120"/>
+              </a:rPr>
+              <a:t>The determinants of growth differ across the world as follows:</a:t>
+            </a:r>
+            <a:endParaRPr lang="en-US" sz="3400" dirty="0"/>
+          </a:p>
+          <a:p>
+            <a:pPr algn="l" indent="0" marL="0">
+              <a:spcAft>
+                <a:spcPts val="800"/>
+              </a:spcAft>
+              <a:buNone/>
+            </a:pPr>
+            <a:r>
+              <a:rPr lang="en-US" sz="3400" b="1" dirty="0">
+                <a:solidFill>
+                  <a:srgbClr val="111111"/>
+                </a:solidFill>
+                <a:latin typeface="Times New Roman" pitchFamily="34" charset="0"/>
+                <a:ea typeface="Times New Roman" pitchFamily="34" charset="-122"/>
+                <a:cs typeface="Times New Roman" pitchFamily="34" charset="-120"/>
+              </a:rPr>
+              <a:t>Less developed countries: </a:t>
+            </a:r>
+            <a:pPr algn="l" indent="0" marL="0">
+              <a:spcAft>
+                <a:spcPts val="800"/>
+              </a:spcAft>
+              <a:buNone/>
+            </a:pPr>
+            <a:r>
+              <a:rPr lang="en-US" sz="3400" dirty="0">
+                <a:solidFill>
+                  <a:srgbClr val="111111"/>
+                </a:solidFill>
+                <a:latin typeface="Times New Roman" pitchFamily="34" charset="0"/>
+                <a:ea typeface="Times New Roman" pitchFamily="34" charset="-122"/>
+                <a:cs typeface="Times New Roman" pitchFamily="34" charset="-120"/>
+              </a:rPr>
+              <a:t>Most of Africa, including Cameroon, has high fertility and falling mortality. Natural increase is therefore high.</a:t>
+            </a:r>
+            <a:endParaRPr lang="en-US" sz="3400" dirty="0"/>
           </a:p>
         </p:txBody>
       </p:sp>
       <p:pic>
         <p:nvPicPr>
-          <p:cNvPr id="3" name="Image 0" descr="/home/claude/f4/img/minesec_sheet.png">    </p:cNvPr>
+          <p:cNvPr id="5" name="Image 0" descr="/home/claude/f4/img/v2/birth_death_big.png">    </p:cNvPr>
           <p:cNvPicPr>
             <a:picLocks noChangeAspect="1"/>
           </p:cNvPicPr>
@@ -22232,8 +23521,8 @@
         </p:blipFill>
         <p:spPr>
           <a:xfrm>
-            <a:off x="0" y="658368"/>
-            <a:ext cx="5120640" cy="5833872"/>
+            <a:off x="6537960" y="2721454"/>
+            <a:ext cx="5470855" cy="2393499"/>
           </a:xfrm>
           <a:prstGeom prst="rect">
             <a:avLst/>
@@ -22242,14 +23531,14 @@
       </p:pic>
       <p:sp>
         <p:nvSpPr>
-          <p:cNvPr id="4" name="Text 1"/>
+          <p:cNvPr id="6" name="Text 3"/>
           <p:cNvSpPr/>
           <p:nvPr/>
         </p:nvSpPr>
         <p:spPr>
           <a:xfrm>
-            <a:off x="5349240" y="1005840"/>
-            <a:ext cx="6522415" cy="731520"/>
+            <a:off x="6537960" y="6089904"/>
+            <a:ext cx="5470855" cy="347472"/>
           </a:xfrm>
           <a:prstGeom prst="rect">
             <a:avLst/>
@@ -22258,88 +23547,24 @@
           <a:ln/>
         </p:spPr>
         <p:txBody>
-          <a:bodyPr wrap="square" lIns="0" tIns="0" rIns="0" bIns="0" rtlCol="0" anchor="ctr">
-            <a:normAutofit/>
-          </a:bodyPr>
+          <a:bodyPr wrap="square" lIns="0" tIns="0" rIns="0" bIns="0" rtlCol="0" anchor="ctr"/>
           <a:lstStyle/>
           <a:p>
             <a:pPr algn="ctr" indent="0" marL="0">
               <a:buNone/>
             </a:pPr>
             <a:r>
-              <a:rPr lang="en-US" sz="3600" b="1" dirty="0">
-                <a:solidFill>
-                  <a:srgbClr val="990011"/>
+              <a:rPr lang="en-US" sz="1600" i="1" dirty="0">
+                <a:solidFill>
+                  <a:srgbClr val="555555"/>
                 </a:solidFill>
                 <a:latin typeface="Times New Roman" pitchFamily="34" charset="0"/>
                 <a:ea typeface="Times New Roman" pitchFamily="34" charset="-122"/>
                 <a:cs typeface="Times New Roman" pitchFamily="34" charset="-120"/>
               </a:rPr>
-              <a:t>Next Lesson</a:t>
-            </a:r>
-            <a:endParaRPr lang="en-US" sz="3600" dirty="0"/>
-          </a:p>
-        </p:txBody>
-      </p:sp>
-      <p:sp>
-        <p:nvSpPr>
-          <p:cNvPr id="5" name="Text 2"/>
-          <p:cNvSpPr/>
-          <p:nvPr/>
-        </p:nvSpPr>
-        <p:spPr>
-          <a:xfrm>
-            <a:off x="5349240" y="1783080"/>
-            <a:ext cx="6522415" cy="4663440"/>
-          </a:xfrm>
-          <a:prstGeom prst="rect">
-            <a:avLst/>
-          </a:prstGeom>
-          <a:noFill/>
-          <a:ln/>
-        </p:spPr>
-        <p:txBody>
-          <a:bodyPr wrap="square" lIns="0" tIns="0" rIns="0" bIns="0" rtlCol="0" anchor="ctr"/>
-          <a:lstStyle/>
-          <a:p>
-            <a:pPr algn="ctr" indent="0" marL="0">
-              <a:spcAft>
-                <a:spcPts val="800"/>
-              </a:spcAft>
-              <a:buNone/>
-            </a:pPr>
-            <a:r>
-              <a:rPr lang="en-US" sz="4000" b="1" dirty="0">
-                <a:solidFill>
-                  <a:srgbClr val="111111"/>
-                </a:solidFill>
-                <a:latin typeface="Times New Roman" pitchFamily="34" charset="0"/>
-                <a:ea typeface="Times New Roman" pitchFamily="34" charset="-122"/>
-                <a:cs typeface="Times New Roman" pitchFamily="34" charset="-120"/>
-              </a:rPr>
-              <a:t>Our next lesson will be on:</a:t>
-            </a:r>
-            <a:endParaRPr lang="en-US" sz="4000" dirty="0"/>
-          </a:p>
-          <a:p>
-            <a:pPr algn="ctr" indent="0" marL="0">
-              <a:spcAft>
-                <a:spcPts val="800"/>
-              </a:spcAft>
-              <a:buNone/>
-            </a:pPr>
-            <a:r>
-              <a:rPr lang="en-US" sz="4000" b="1" dirty="0">
-                <a:solidFill>
-                  <a:srgbClr val="990011"/>
-                </a:solidFill>
-                <a:latin typeface="Times New Roman" pitchFamily="34" charset="0"/>
-                <a:ea typeface="Times New Roman" pitchFamily="34" charset="-122"/>
-                <a:cs typeface="Times New Roman" pitchFamily="34" charset="-120"/>
-              </a:rPr>
-              <a:t>Practical Work 4: Calculating Demographic Indices</a:t>
-            </a:r>
-            <a:endParaRPr lang="en-US" sz="4000" dirty="0"/>
+              <a:t>Illustration: birth and death rates</a:t>
+            </a:r>
+            <a:endParaRPr lang="en-US" sz="1600" dirty="0"/>
           </a:p>
         </p:txBody>
       </p:sp>
@@ -22449,22 +23674,46 @@
                 <a:ea typeface="Calibri" pitchFamily="34" charset="-122"/>
                 <a:cs typeface="Calibri" pitchFamily="34" charset="-120"/>
               </a:rPr>
-              <a:t>BILINGUAL GAME</a:t>
+              <a:t>BOARD SUMMARY</a:t>
             </a:r>
             <a:endParaRPr lang="en-US" sz="1400" dirty="0"/>
           </a:p>
         </p:txBody>
       </p:sp>
-      <p:sp>
-        <p:nvSpPr>
-          <p:cNvPr id="3" name="Text 1"/>
+      <p:pic>
+        <p:nvPicPr>
+          <p:cNvPr id="3" name="Image 0" descr="/home/claude/f4/img/minesec_sheet.png">    </p:cNvPr>
+          <p:cNvPicPr>
+            <a:picLocks noChangeAspect="1"/>
+          </p:cNvPicPr>
+          <p:nvPr/>
+        </p:nvPicPr>
+        <p:blipFill>
+          <a:blip r:embed="rId1"/>
+          <a:stretch>
+            <a:fillRect/>
+          </a:stretch>
+        </p:blipFill>
+        <p:spPr>
+          <a:xfrm>
+            <a:off x="0" y="658368"/>
+            <a:ext cx="5120640" cy="5833872"/>
+          </a:xfrm>
+          <a:prstGeom prst="rect">
+            <a:avLst/>
+          </a:prstGeom>
+        </p:spPr>
+      </p:pic>
+      <p:sp>
+        <p:nvSpPr>
+          <p:cNvPr id="4" name="Text 1"/>
           <p:cNvSpPr/>
           <p:nvPr/>
         </p:nvSpPr>
         <p:spPr>
           <a:xfrm>
-            <a:off x="457200" y="1005840"/>
-            <a:ext cx="11277295" cy="731520"/>
+            <a:off x="5349240" y="1005840"/>
+            <a:ext cx="6522415" cy="731520"/>
           </a:xfrm>
           <a:prstGeom prst="rect">
             <a:avLst/>
@@ -22473,7 +23722,9 @@
           <a:ln/>
         </p:spPr>
         <p:txBody>
-          <a:bodyPr wrap="square" lIns="0" tIns="0" rIns="0" bIns="0" rtlCol="0" anchor="ctr"/>
+          <a:bodyPr wrap="square" lIns="0" tIns="0" rIns="0" bIns="0" rtlCol="0" anchor="ctr">
+            <a:normAutofit/>
+          </a:bodyPr>
           <a:lstStyle/>
           <a:p>
             <a:pPr algn="ctr" indent="0" marL="0">
@@ -22488,6 +23739,2334 @@
                 <a:ea typeface="Times New Roman" pitchFamily="34" charset="-122"/>
                 <a:cs typeface="Times New Roman" pitchFamily="34" charset="-120"/>
               </a:rPr>
+              <a:t>3. Spatial Differences on a World Scale</a:t>
+            </a:r>
+            <a:endParaRPr lang="en-US" sz="3600" dirty="0"/>
+          </a:p>
+        </p:txBody>
+      </p:sp>
+      <p:sp>
+        <p:nvSpPr>
+          <p:cNvPr id="5" name="Text 2"/>
+          <p:cNvSpPr/>
+          <p:nvPr/>
+        </p:nvSpPr>
+        <p:spPr>
+          <a:xfrm>
+            <a:off x="5349240" y="1783080"/>
+            <a:ext cx="6522415" cy="4663440"/>
+          </a:xfrm>
+          <a:prstGeom prst="rect">
+            <a:avLst/>
+          </a:prstGeom>
+          <a:noFill/>
+          <a:ln/>
+        </p:spPr>
+        <p:txBody>
+          <a:bodyPr wrap="square" lIns="0" tIns="0" rIns="0" bIns="0" rtlCol="0" anchor="t"/>
+          <a:lstStyle/>
+          <a:p>
+            <a:pPr algn="l" indent="0" marL="0">
+              <a:spcAft>
+                <a:spcPts val="800"/>
+              </a:spcAft>
+              <a:buNone/>
+            </a:pPr>
+            <a:r>
+              <a:rPr lang="en-US" sz="4000" b="1" dirty="0">
+                <a:solidFill>
+                  <a:srgbClr val="111111"/>
+                </a:solidFill>
+                <a:latin typeface="Times New Roman" pitchFamily="34" charset="0"/>
+                <a:ea typeface="Times New Roman" pitchFamily="34" charset="-122"/>
+                <a:cs typeface="Times New Roman" pitchFamily="34" charset="-120"/>
+              </a:rPr>
+              <a:t>More developed countries: </a:t>
+            </a:r>
+            <a:pPr algn="l" indent="0" marL="0">
+              <a:spcAft>
+                <a:spcPts val="800"/>
+              </a:spcAft>
+              <a:buNone/>
+            </a:pPr>
+            <a:r>
+              <a:rPr lang="en-US" sz="4000" dirty="0">
+                <a:solidFill>
+                  <a:srgbClr val="111111"/>
+                </a:solidFill>
+                <a:latin typeface="Times New Roman" pitchFamily="34" charset="0"/>
+                <a:ea typeface="Times New Roman" pitchFamily="34" charset="-122"/>
+                <a:cs typeface="Times New Roman" pitchFamily="34" charset="-120"/>
+              </a:rPr>
+              <a:t>The USA, Germany and Japan have low fertility and low mortality. Their growth is slow, zero or negative.</a:t>
+            </a:r>
+            <a:endParaRPr lang="en-US" sz="4000" dirty="0"/>
+          </a:p>
+        </p:txBody>
+      </p:sp>
+      <p:sp>
+        <p:nvSpPr>
+          <p:cNvPr id="25" name="Slide Number Placeholder 0"/>
+          <p:cNvSpPr>
+            <a:spLocks noGrp="1"/>
+          </p:cNvSpPr>
+          <p:nvPr>
+            <p:ph type="sldNum" sz="quarter" idx="4294967295"/>
+          </p:nvPr>
+        </p:nvSpPr>
+        <p:spPr>
+          <a:xfrm>
+            <a:off x="27432" y="91440"/>
+            <a:ext cx="585216" cy="475488"/>
+          </a:xfrm>
+          <a:prstGeom prst="rect">
+            <a:avLst/>
+          </a:prstGeom>
+          <a:extLst>
+            <a:ext uri="{C572A759-6A51-4108-AA02-DFA0A04FC94B}">
+              <ma14:wrappingTextBoxFlag xmlns:ma14="http://schemas.microsoft.com/office/mac/drawingml/2011/main" val="0"/>
+            </a:ext>
+          </a:extLst>
+        </p:spPr>
+        <p:txBody>
+          <a:bodyPr/>
+          <a:lstStyle>
+            <a:lvl1pPr>
+              <a:defRPr sz="2000">
+                <a:solidFill>
+                  <a:srgbClr val="FFFFFF"/>
+                </a:solidFill>
+                <a:latin typeface="Calibri"/>
+                <a:ea typeface="Calibri"/>
+                <a:cs typeface="Calibri"/>
+              </a:defRPr>
+            </a:lvl1pPr>
+          </a:lstStyle>
+          <a:p>
+            <a:pPr algn="ctr"/>
+            <a:fld id="{F7021451-1387-4CA6-816F-3879F97B5CBC}" type="slidenum">
+              <a:rPr b="1" lang="en-US"/>
+              <a:t>61</a:t>
+            </a:fld>
+            <a:endParaRPr lang="en-US"/>
+          </a:p>
+        </p:txBody>
+      </p:sp>
+    </p:spTree>
+  </p:cSld>
+  <p:clrMapOvr>
+    <a:masterClrMapping/>
+  </p:clrMapOvr>
+</p:sld>
+</file>
+
+<file path=ppt/slides/slide62.xml><?xml version="1.0" encoding="utf-8"?>
+<p:sld xmlns:a="http://schemas.openxmlformats.org/drawingml/2006/main" xmlns:r="http://schemas.openxmlformats.org/officeDocument/2006/relationships" xmlns:p="http://schemas.openxmlformats.org/presentationml/2006/main">
+  <p:cSld name="Slide 62">
+    <p:spTree>
+      <p:nvGrpSpPr>
+        <p:cNvPr id="1" name=""/>
+        <p:cNvGrpSpPr/>
+        <p:nvPr/>
+      </p:nvGrpSpPr>
+      <p:grpSpPr>
+        <a:xfrm>
+          <a:off x="0" y="0"/>
+          <a:ext cx="0" cy="0"/>
+          <a:chOff x="0" y="0"/>
+          <a:chExt cx="0" cy="0"/>
+        </a:xfrm>
+      </p:grpSpPr>
+      <p:sp>
+        <p:nvSpPr>
+          <p:cNvPr id="2" name="Text 0"/>
+          <p:cNvSpPr/>
+          <p:nvPr/>
+        </p:nvSpPr>
+        <p:spPr>
+          <a:xfrm>
+            <a:off x="457200" y="713232"/>
+            <a:ext cx="11368735" cy="274320"/>
+          </a:xfrm>
+          <a:prstGeom prst="rect">
+            <a:avLst/>
+          </a:prstGeom>
+          <a:noFill/>
+          <a:ln/>
+        </p:spPr>
+        <p:txBody>
+          <a:bodyPr wrap="square" lIns="0" tIns="0" rIns="0" bIns="0" rtlCol="0" anchor="ctr"/>
+          <a:lstStyle/>
+          <a:p>
+            <a:pPr algn="r" indent="0" marL="0">
+              <a:buNone/>
+            </a:pPr>
+            <a:r>
+              <a:rPr lang="en-US" sz="1400" b="1" dirty="0">
+                <a:solidFill>
+                  <a:srgbClr val="1C3F6E"/>
+                </a:solidFill>
+                <a:latin typeface="Calibri" pitchFamily="34" charset="0"/>
+                <a:ea typeface="Calibri" pitchFamily="34" charset="-122"/>
+                <a:cs typeface="Calibri" pitchFamily="34" charset="-120"/>
+              </a:rPr>
+              <a:t>BOARD SUMMARY</a:t>
+            </a:r>
+            <a:endParaRPr lang="en-US" sz="1400" dirty="0"/>
+          </a:p>
+        </p:txBody>
+      </p:sp>
+      <p:pic>
+        <p:nvPicPr>
+          <p:cNvPr id="3" name="Image 0" descr="/home/claude/f4/img/minesec_sheet.png">    </p:cNvPr>
+          <p:cNvPicPr>
+            <a:picLocks noChangeAspect="1"/>
+          </p:cNvPicPr>
+          <p:nvPr/>
+        </p:nvPicPr>
+        <p:blipFill>
+          <a:blip r:embed="rId1"/>
+          <a:stretch>
+            <a:fillRect/>
+          </a:stretch>
+        </p:blipFill>
+        <p:spPr>
+          <a:xfrm>
+            <a:off x="0" y="658368"/>
+            <a:ext cx="5120640" cy="5833872"/>
+          </a:xfrm>
+          <a:prstGeom prst="rect">
+            <a:avLst/>
+          </a:prstGeom>
+        </p:spPr>
+      </p:pic>
+      <p:sp>
+        <p:nvSpPr>
+          <p:cNvPr id="4" name="Text 1"/>
+          <p:cNvSpPr/>
+          <p:nvPr/>
+        </p:nvSpPr>
+        <p:spPr>
+          <a:xfrm>
+            <a:off x="5349240" y="1005840"/>
+            <a:ext cx="6522415" cy="731520"/>
+          </a:xfrm>
+          <a:prstGeom prst="rect">
+            <a:avLst/>
+          </a:prstGeom>
+          <a:noFill/>
+          <a:ln/>
+        </p:spPr>
+        <p:txBody>
+          <a:bodyPr wrap="square" lIns="0" tIns="0" rIns="0" bIns="0" rtlCol="0" anchor="ctr">
+            <a:normAutofit/>
+          </a:bodyPr>
+          <a:lstStyle/>
+          <a:p>
+            <a:pPr algn="ctr" indent="0" marL="0">
+              <a:buNone/>
+            </a:pPr>
+            <a:r>
+              <a:rPr lang="en-US" sz="3600" b="1" dirty="0">
+                <a:solidFill>
+                  <a:srgbClr val="990011"/>
+                </a:solidFill>
+                <a:latin typeface="Times New Roman" pitchFamily="34" charset="0"/>
+                <a:ea typeface="Times New Roman" pitchFamily="34" charset="-122"/>
+                <a:cs typeface="Times New Roman" pitchFamily="34" charset="-120"/>
+              </a:rPr>
+              <a:t>3. Spatial Differences on a World Scale</a:t>
+            </a:r>
+            <a:endParaRPr lang="en-US" sz="3600" dirty="0"/>
+          </a:p>
+        </p:txBody>
+      </p:sp>
+      <p:sp>
+        <p:nvSpPr>
+          <p:cNvPr id="5" name="Text 2"/>
+          <p:cNvSpPr/>
+          <p:nvPr/>
+        </p:nvSpPr>
+        <p:spPr>
+          <a:xfrm>
+            <a:off x="5349240" y="1783080"/>
+            <a:ext cx="6522415" cy="4663440"/>
+          </a:xfrm>
+          <a:prstGeom prst="rect">
+            <a:avLst/>
+          </a:prstGeom>
+          <a:noFill/>
+          <a:ln/>
+        </p:spPr>
+        <p:txBody>
+          <a:bodyPr wrap="square" lIns="0" tIns="0" rIns="0" bIns="0" rtlCol="0" anchor="t"/>
+          <a:lstStyle/>
+          <a:p>
+            <a:pPr algn="l" indent="0" marL="0">
+              <a:spcAft>
+                <a:spcPts val="800"/>
+              </a:spcAft>
+              <a:buNone/>
+            </a:pPr>
+            <a:r>
+              <a:rPr lang="en-US" sz="4000" b="1" dirty="0">
+                <a:solidFill>
+                  <a:srgbClr val="111111"/>
+                </a:solidFill>
+                <a:latin typeface="Times New Roman" pitchFamily="34" charset="0"/>
+                <a:ea typeface="Times New Roman" pitchFamily="34" charset="-122"/>
+                <a:cs typeface="Times New Roman" pitchFamily="34" charset="-120"/>
+              </a:rPr>
+              <a:t>The role of migration: </a:t>
+            </a:r>
+            <a:pPr algn="l" indent="0" marL="0">
+              <a:spcAft>
+                <a:spcPts val="800"/>
+              </a:spcAft>
+              <a:buNone/>
+            </a:pPr>
+            <a:r>
+              <a:rPr lang="en-US" sz="4000" dirty="0">
+                <a:solidFill>
+                  <a:srgbClr val="111111"/>
+                </a:solidFill>
+                <a:latin typeface="Times New Roman" pitchFamily="34" charset="0"/>
+                <a:ea typeface="Times New Roman" pitchFamily="34" charset="-122"/>
+                <a:cs typeface="Times New Roman" pitchFamily="34" charset="-120"/>
+              </a:rPr>
+              <a:t>In developed countries, immigration is often the main source of population growth. In some poor countries, emigration reduces growth.</a:t>
+            </a:r>
+            <a:endParaRPr lang="en-US" sz="4000" dirty="0"/>
+          </a:p>
+        </p:txBody>
+      </p:sp>
+      <p:sp>
+        <p:nvSpPr>
+          <p:cNvPr id="25" name="Slide Number Placeholder 0"/>
+          <p:cNvSpPr>
+            <a:spLocks noGrp="1"/>
+          </p:cNvSpPr>
+          <p:nvPr>
+            <p:ph type="sldNum" sz="quarter" idx="4294967295"/>
+          </p:nvPr>
+        </p:nvSpPr>
+        <p:spPr>
+          <a:xfrm>
+            <a:off x="27432" y="91440"/>
+            <a:ext cx="585216" cy="475488"/>
+          </a:xfrm>
+          <a:prstGeom prst="rect">
+            <a:avLst/>
+          </a:prstGeom>
+          <a:extLst>
+            <a:ext uri="{C572A759-6A51-4108-AA02-DFA0A04FC94B}">
+              <ma14:wrappingTextBoxFlag xmlns:ma14="http://schemas.microsoft.com/office/mac/drawingml/2011/main" val="0"/>
+            </a:ext>
+          </a:extLst>
+        </p:spPr>
+        <p:txBody>
+          <a:bodyPr/>
+          <a:lstStyle>
+            <a:lvl1pPr>
+              <a:defRPr sz="2000">
+                <a:solidFill>
+                  <a:srgbClr val="FFFFFF"/>
+                </a:solidFill>
+                <a:latin typeface="Calibri"/>
+                <a:ea typeface="Calibri"/>
+                <a:cs typeface="Calibri"/>
+              </a:defRPr>
+            </a:lvl1pPr>
+          </a:lstStyle>
+          <a:p>
+            <a:pPr algn="ctr"/>
+            <a:fld id="{F7021451-1387-4CA6-816F-3879F97B5CBC}" type="slidenum">
+              <a:rPr b="1" lang="en-US"/>
+              <a:t>62</a:t>
+            </a:fld>
+            <a:endParaRPr lang="en-US"/>
+          </a:p>
+        </p:txBody>
+      </p:sp>
+    </p:spTree>
+  </p:cSld>
+  <p:clrMapOvr>
+    <a:masterClrMapping/>
+  </p:clrMapOvr>
+</p:sld>
+</file>
+
+<file path=ppt/slides/slide63.xml><?xml version="1.0" encoding="utf-8"?>
+<p:sld xmlns:a="http://schemas.openxmlformats.org/drawingml/2006/main" xmlns:r="http://schemas.openxmlformats.org/officeDocument/2006/relationships" xmlns:p="http://schemas.openxmlformats.org/presentationml/2006/main">
+  <p:cSld name="Slide 63">
+    <p:spTree>
+      <p:nvGrpSpPr>
+        <p:cNvPr id="1" name=""/>
+        <p:cNvGrpSpPr/>
+        <p:nvPr/>
+      </p:nvGrpSpPr>
+      <p:grpSpPr>
+        <a:xfrm>
+          <a:off x="0" y="0"/>
+          <a:ext cx="0" cy="0"/>
+          <a:chOff x="0" y="0"/>
+          <a:chExt cx="0" cy="0"/>
+        </a:xfrm>
+      </p:grpSpPr>
+      <p:sp>
+        <p:nvSpPr>
+          <p:cNvPr id="2" name="Text 0"/>
+          <p:cNvSpPr/>
+          <p:nvPr/>
+        </p:nvSpPr>
+        <p:spPr>
+          <a:xfrm>
+            <a:off x="457200" y="713232"/>
+            <a:ext cx="11368735" cy="274320"/>
+          </a:xfrm>
+          <a:prstGeom prst="rect">
+            <a:avLst/>
+          </a:prstGeom>
+          <a:noFill/>
+          <a:ln/>
+        </p:spPr>
+        <p:txBody>
+          <a:bodyPr wrap="square" lIns="0" tIns="0" rIns="0" bIns="0" rtlCol="0" anchor="ctr"/>
+          <a:lstStyle/>
+          <a:p>
+            <a:pPr algn="r" indent="0" marL="0">
+              <a:buNone/>
+            </a:pPr>
+            <a:r>
+              <a:rPr lang="en-US" sz="1400" b="1" dirty="0">
+                <a:solidFill>
+                  <a:srgbClr val="1C3F6E"/>
+                </a:solidFill>
+                <a:latin typeface="Calibri" pitchFamily="34" charset="0"/>
+                <a:ea typeface="Calibri" pitchFamily="34" charset="-122"/>
+                <a:cs typeface="Calibri" pitchFamily="34" charset="-120"/>
+              </a:rPr>
+              <a:t>FORMATIVE EVALUATION</a:t>
+            </a:r>
+            <a:endParaRPr lang="en-US" sz="1400" dirty="0"/>
+          </a:p>
+        </p:txBody>
+      </p:sp>
+      <p:pic>
+        <p:nvPicPr>
+          <p:cNvPr id="3" name="Image 0" descr="/home/claude/f4/img/minesec_sheet.png">    </p:cNvPr>
+          <p:cNvPicPr>
+            <a:picLocks noChangeAspect="1"/>
+          </p:cNvPicPr>
+          <p:nvPr/>
+        </p:nvPicPr>
+        <p:blipFill>
+          <a:blip r:embed="rId1"/>
+          <a:stretch>
+            <a:fillRect/>
+          </a:stretch>
+        </p:blipFill>
+        <p:spPr>
+          <a:xfrm>
+            <a:off x="0" y="658368"/>
+            <a:ext cx="5120640" cy="5833872"/>
+          </a:xfrm>
+          <a:prstGeom prst="rect">
+            <a:avLst/>
+          </a:prstGeom>
+        </p:spPr>
+      </p:pic>
+      <p:sp>
+        <p:nvSpPr>
+          <p:cNvPr id="4" name="Text 1"/>
+          <p:cNvSpPr/>
+          <p:nvPr/>
+        </p:nvSpPr>
+        <p:spPr>
+          <a:xfrm>
+            <a:off x="5349240" y="1005840"/>
+            <a:ext cx="6522415" cy="731520"/>
+          </a:xfrm>
+          <a:prstGeom prst="rect">
+            <a:avLst/>
+          </a:prstGeom>
+          <a:noFill/>
+          <a:ln/>
+        </p:spPr>
+        <p:txBody>
+          <a:bodyPr wrap="square" lIns="0" tIns="0" rIns="0" bIns="0" rtlCol="0" anchor="ctr">
+            <a:normAutofit/>
+          </a:bodyPr>
+          <a:lstStyle/>
+          <a:p>
+            <a:pPr algn="ctr" indent="0" marL="0">
+              <a:buNone/>
+            </a:pPr>
+            <a:r>
+              <a:rPr lang="en-US" sz="3600" b="1" dirty="0">
+                <a:solidFill>
+                  <a:srgbClr val="990011"/>
+                </a:solidFill>
+                <a:latin typeface="Times New Roman" pitchFamily="34" charset="0"/>
+                <a:ea typeface="Times New Roman" pitchFamily="34" charset="-122"/>
+                <a:cs typeface="Times New Roman" pitchFamily="34" charset="-120"/>
+              </a:rPr>
+              <a:t>Evaluation 1</a:t>
+            </a:r>
+            <a:endParaRPr lang="en-US" sz="3600" dirty="0"/>
+          </a:p>
+        </p:txBody>
+      </p:sp>
+      <p:sp>
+        <p:nvSpPr>
+          <p:cNvPr id="5" name="Text 2"/>
+          <p:cNvSpPr/>
+          <p:nvPr/>
+        </p:nvSpPr>
+        <p:spPr>
+          <a:xfrm>
+            <a:off x="5349240" y="1783080"/>
+            <a:ext cx="6522415" cy="4663440"/>
+          </a:xfrm>
+          <a:prstGeom prst="rect">
+            <a:avLst/>
+          </a:prstGeom>
+          <a:noFill/>
+          <a:ln/>
+        </p:spPr>
+        <p:txBody>
+          <a:bodyPr wrap="square" lIns="0" tIns="0" rIns="0" bIns="0" rtlCol="0" anchor="t"/>
+          <a:lstStyle/>
+          <a:p>
+            <a:pPr algn="l" indent="0" marL="0">
+              <a:spcAft>
+                <a:spcPts val="800"/>
+              </a:spcAft>
+              <a:buNone/>
+            </a:pPr>
+            <a:r>
+              <a:rPr lang="en-US" sz="4000" dirty="0">
+                <a:solidFill>
+                  <a:srgbClr val="111111"/>
+                </a:solidFill>
+                <a:latin typeface="Times New Roman" pitchFamily="34" charset="0"/>
+                <a:ea typeface="Times New Roman" pitchFamily="34" charset="-122"/>
+                <a:cs typeface="Times New Roman" pitchFamily="34" charset="-120"/>
+              </a:rPr>
+              <a:t>Distinguish between natural increase and net migration.</a:t>
+            </a:r>
+            <a:endParaRPr lang="en-US" sz="4000" dirty="0"/>
+          </a:p>
+        </p:txBody>
+      </p:sp>
+      <p:sp>
+        <p:nvSpPr>
+          <p:cNvPr id="25" name="Slide Number Placeholder 0"/>
+          <p:cNvSpPr>
+            <a:spLocks noGrp="1"/>
+          </p:cNvSpPr>
+          <p:nvPr>
+            <p:ph type="sldNum" sz="quarter" idx="4294967295"/>
+          </p:nvPr>
+        </p:nvSpPr>
+        <p:spPr>
+          <a:xfrm>
+            <a:off x="27432" y="91440"/>
+            <a:ext cx="585216" cy="475488"/>
+          </a:xfrm>
+          <a:prstGeom prst="rect">
+            <a:avLst/>
+          </a:prstGeom>
+          <a:extLst>
+            <a:ext uri="{C572A759-6A51-4108-AA02-DFA0A04FC94B}">
+              <ma14:wrappingTextBoxFlag xmlns:ma14="http://schemas.microsoft.com/office/mac/drawingml/2011/main" val="0"/>
+            </a:ext>
+          </a:extLst>
+        </p:spPr>
+        <p:txBody>
+          <a:bodyPr/>
+          <a:lstStyle>
+            <a:lvl1pPr>
+              <a:defRPr sz="2000">
+                <a:solidFill>
+                  <a:srgbClr val="FFFFFF"/>
+                </a:solidFill>
+                <a:latin typeface="Calibri"/>
+                <a:ea typeface="Calibri"/>
+                <a:cs typeface="Calibri"/>
+              </a:defRPr>
+            </a:lvl1pPr>
+          </a:lstStyle>
+          <a:p>
+            <a:pPr algn="ctr"/>
+            <a:fld id="{F7021451-1387-4CA6-816F-3879F97B5CBC}" type="slidenum">
+              <a:rPr b="1" lang="en-US"/>
+              <a:t>63</a:t>
+            </a:fld>
+            <a:endParaRPr lang="en-US"/>
+          </a:p>
+        </p:txBody>
+      </p:sp>
+    </p:spTree>
+  </p:cSld>
+  <p:clrMapOvr>
+    <a:masterClrMapping/>
+  </p:clrMapOvr>
+</p:sld>
+</file>
+
+<file path=ppt/slides/slide64.xml><?xml version="1.0" encoding="utf-8"?>
+<p:sld xmlns:a="http://schemas.openxmlformats.org/drawingml/2006/main" xmlns:r="http://schemas.openxmlformats.org/officeDocument/2006/relationships" xmlns:p="http://schemas.openxmlformats.org/presentationml/2006/main">
+  <p:cSld name="Slide 64">
+    <p:spTree>
+      <p:nvGrpSpPr>
+        <p:cNvPr id="1" name=""/>
+        <p:cNvGrpSpPr/>
+        <p:nvPr/>
+      </p:nvGrpSpPr>
+      <p:grpSpPr>
+        <a:xfrm>
+          <a:off x="0" y="0"/>
+          <a:ext cx="0" cy="0"/>
+          <a:chOff x="0" y="0"/>
+          <a:chExt cx="0" cy="0"/>
+        </a:xfrm>
+      </p:grpSpPr>
+      <p:sp>
+        <p:nvSpPr>
+          <p:cNvPr id="2" name="Text 0"/>
+          <p:cNvSpPr/>
+          <p:nvPr/>
+        </p:nvSpPr>
+        <p:spPr>
+          <a:xfrm>
+            <a:off x="457200" y="713232"/>
+            <a:ext cx="11368735" cy="274320"/>
+          </a:xfrm>
+          <a:prstGeom prst="rect">
+            <a:avLst/>
+          </a:prstGeom>
+          <a:noFill/>
+          <a:ln/>
+        </p:spPr>
+        <p:txBody>
+          <a:bodyPr wrap="square" lIns="0" tIns="0" rIns="0" bIns="0" rtlCol="0" anchor="ctr"/>
+          <a:lstStyle/>
+          <a:p>
+            <a:pPr algn="r" indent="0" marL="0">
+              <a:buNone/>
+            </a:pPr>
+            <a:r>
+              <a:rPr lang="en-US" sz="1400" b="1" dirty="0">
+                <a:solidFill>
+                  <a:srgbClr val="1C3F6E"/>
+                </a:solidFill>
+                <a:latin typeface="Calibri" pitchFamily="34" charset="0"/>
+                <a:ea typeface="Calibri" pitchFamily="34" charset="-122"/>
+                <a:cs typeface="Calibri" pitchFamily="34" charset="-120"/>
+              </a:rPr>
+              <a:t>FORMATIVE EVALUATION</a:t>
+            </a:r>
+            <a:endParaRPr lang="en-US" sz="1400" dirty="0"/>
+          </a:p>
+        </p:txBody>
+      </p:sp>
+      <p:pic>
+        <p:nvPicPr>
+          <p:cNvPr id="3" name="Image 0" descr="/home/claude/f4/img/minesec_sheet.png">    </p:cNvPr>
+          <p:cNvPicPr>
+            <a:picLocks noChangeAspect="1"/>
+          </p:cNvPicPr>
+          <p:nvPr/>
+        </p:nvPicPr>
+        <p:blipFill>
+          <a:blip r:embed="rId1"/>
+          <a:stretch>
+            <a:fillRect/>
+          </a:stretch>
+        </p:blipFill>
+        <p:spPr>
+          <a:xfrm>
+            <a:off x="0" y="658368"/>
+            <a:ext cx="5120640" cy="5833872"/>
+          </a:xfrm>
+          <a:prstGeom prst="rect">
+            <a:avLst/>
+          </a:prstGeom>
+        </p:spPr>
+      </p:pic>
+      <p:sp>
+        <p:nvSpPr>
+          <p:cNvPr id="4" name="Text 1"/>
+          <p:cNvSpPr/>
+          <p:nvPr/>
+        </p:nvSpPr>
+        <p:spPr>
+          <a:xfrm>
+            <a:off x="5349240" y="1005840"/>
+            <a:ext cx="6522415" cy="731520"/>
+          </a:xfrm>
+          <a:prstGeom prst="rect">
+            <a:avLst/>
+          </a:prstGeom>
+          <a:noFill/>
+          <a:ln/>
+        </p:spPr>
+        <p:txBody>
+          <a:bodyPr wrap="square" lIns="0" tIns="0" rIns="0" bIns="0" rtlCol="0" anchor="ctr">
+            <a:normAutofit/>
+          </a:bodyPr>
+          <a:lstStyle/>
+          <a:p>
+            <a:pPr algn="ctr" indent="0" marL="0">
+              <a:buNone/>
+            </a:pPr>
+            <a:r>
+              <a:rPr lang="en-US" sz="3600" b="1" dirty="0">
+                <a:solidFill>
+                  <a:srgbClr val="990011"/>
+                </a:solidFill>
+                <a:latin typeface="Times New Roman" pitchFamily="34" charset="0"/>
+                <a:ea typeface="Times New Roman" pitchFamily="34" charset="-122"/>
+                <a:cs typeface="Times New Roman" pitchFamily="34" charset="-120"/>
+              </a:rPr>
+              <a:t>Expected Answer</a:t>
+            </a:r>
+            <a:endParaRPr lang="en-US" sz="3600" dirty="0"/>
+          </a:p>
+        </p:txBody>
+      </p:sp>
+      <p:sp>
+        <p:nvSpPr>
+          <p:cNvPr id="5" name="Text 2"/>
+          <p:cNvSpPr/>
+          <p:nvPr/>
+        </p:nvSpPr>
+        <p:spPr>
+          <a:xfrm>
+            <a:off x="5349240" y="1783080"/>
+            <a:ext cx="6522415" cy="4663440"/>
+          </a:xfrm>
+          <a:prstGeom prst="rect">
+            <a:avLst/>
+          </a:prstGeom>
+          <a:noFill/>
+          <a:ln/>
+        </p:spPr>
+        <p:txBody>
+          <a:bodyPr wrap="square" lIns="0" tIns="0" rIns="0" bIns="0" rtlCol="0" anchor="t"/>
+          <a:lstStyle/>
+          <a:p>
+            <a:pPr algn="l" indent="0" marL="0">
+              <a:spcAft>
+                <a:spcPts val="800"/>
+              </a:spcAft>
+              <a:buNone/>
+            </a:pPr>
+            <a:r>
+              <a:rPr lang="en-US" sz="4000" dirty="0">
+                <a:solidFill>
+                  <a:srgbClr val="111111"/>
+                </a:solidFill>
+                <a:latin typeface="Times New Roman" pitchFamily="34" charset="0"/>
+                <a:ea typeface="Times New Roman" pitchFamily="34" charset="-122"/>
+                <a:cs typeface="Times New Roman" pitchFamily="34" charset="-120"/>
+              </a:rPr>
+              <a:t>Natural increase is births minus deaths; net migration is immigrants minus emigrants.</a:t>
+            </a:r>
+            <a:endParaRPr lang="en-US" sz="4000" dirty="0"/>
+          </a:p>
+        </p:txBody>
+      </p:sp>
+      <p:sp>
+        <p:nvSpPr>
+          <p:cNvPr id="25" name="Slide Number Placeholder 0"/>
+          <p:cNvSpPr>
+            <a:spLocks noGrp="1"/>
+          </p:cNvSpPr>
+          <p:nvPr>
+            <p:ph type="sldNum" sz="quarter" idx="4294967295"/>
+          </p:nvPr>
+        </p:nvSpPr>
+        <p:spPr>
+          <a:xfrm>
+            <a:off x="27432" y="91440"/>
+            <a:ext cx="585216" cy="475488"/>
+          </a:xfrm>
+          <a:prstGeom prst="rect">
+            <a:avLst/>
+          </a:prstGeom>
+          <a:extLst>
+            <a:ext uri="{C572A759-6A51-4108-AA02-DFA0A04FC94B}">
+              <ma14:wrappingTextBoxFlag xmlns:ma14="http://schemas.microsoft.com/office/mac/drawingml/2011/main" val="0"/>
+            </a:ext>
+          </a:extLst>
+        </p:spPr>
+        <p:txBody>
+          <a:bodyPr/>
+          <a:lstStyle>
+            <a:lvl1pPr>
+              <a:defRPr sz="2000">
+                <a:solidFill>
+                  <a:srgbClr val="FFFFFF"/>
+                </a:solidFill>
+                <a:latin typeface="Calibri"/>
+                <a:ea typeface="Calibri"/>
+                <a:cs typeface="Calibri"/>
+              </a:defRPr>
+            </a:lvl1pPr>
+          </a:lstStyle>
+          <a:p>
+            <a:pPr algn="ctr"/>
+            <a:fld id="{F7021451-1387-4CA6-816F-3879F97B5CBC}" type="slidenum">
+              <a:rPr b="1" lang="en-US"/>
+              <a:t>64</a:t>
+            </a:fld>
+            <a:endParaRPr lang="en-US"/>
+          </a:p>
+        </p:txBody>
+      </p:sp>
+    </p:spTree>
+  </p:cSld>
+  <p:clrMapOvr>
+    <a:masterClrMapping/>
+  </p:clrMapOvr>
+</p:sld>
+</file>
+
+<file path=ppt/slides/slide65.xml><?xml version="1.0" encoding="utf-8"?>
+<p:sld xmlns:a="http://schemas.openxmlformats.org/drawingml/2006/main" xmlns:r="http://schemas.openxmlformats.org/officeDocument/2006/relationships" xmlns:p="http://schemas.openxmlformats.org/presentationml/2006/main">
+  <p:cSld name="Slide 65">
+    <p:spTree>
+      <p:nvGrpSpPr>
+        <p:cNvPr id="1" name=""/>
+        <p:cNvGrpSpPr/>
+        <p:nvPr/>
+      </p:nvGrpSpPr>
+      <p:grpSpPr>
+        <a:xfrm>
+          <a:off x="0" y="0"/>
+          <a:ext cx="0" cy="0"/>
+          <a:chOff x="0" y="0"/>
+          <a:chExt cx="0" cy="0"/>
+        </a:xfrm>
+      </p:grpSpPr>
+      <p:sp>
+        <p:nvSpPr>
+          <p:cNvPr id="2" name="Text 0"/>
+          <p:cNvSpPr/>
+          <p:nvPr/>
+        </p:nvSpPr>
+        <p:spPr>
+          <a:xfrm>
+            <a:off x="457200" y="713232"/>
+            <a:ext cx="11368735" cy="274320"/>
+          </a:xfrm>
+          <a:prstGeom prst="rect">
+            <a:avLst/>
+          </a:prstGeom>
+          <a:noFill/>
+          <a:ln/>
+        </p:spPr>
+        <p:txBody>
+          <a:bodyPr wrap="square" lIns="0" tIns="0" rIns="0" bIns="0" rtlCol="0" anchor="ctr"/>
+          <a:lstStyle/>
+          <a:p>
+            <a:pPr algn="r" indent="0" marL="0">
+              <a:buNone/>
+            </a:pPr>
+            <a:r>
+              <a:rPr lang="en-US" sz="1400" b="1" dirty="0">
+                <a:solidFill>
+                  <a:srgbClr val="1C3F6E"/>
+                </a:solidFill>
+                <a:latin typeface="Calibri" pitchFamily="34" charset="0"/>
+                <a:ea typeface="Calibri" pitchFamily="34" charset="-122"/>
+                <a:cs typeface="Calibri" pitchFamily="34" charset="-120"/>
+              </a:rPr>
+              <a:t>FORMATIVE EVALUATION</a:t>
+            </a:r>
+            <a:endParaRPr lang="en-US" sz="1400" dirty="0"/>
+          </a:p>
+        </p:txBody>
+      </p:sp>
+      <p:pic>
+        <p:nvPicPr>
+          <p:cNvPr id="3" name="Image 0" descr="/home/claude/f4/img/minesec_sheet.png">    </p:cNvPr>
+          <p:cNvPicPr>
+            <a:picLocks noChangeAspect="1"/>
+          </p:cNvPicPr>
+          <p:nvPr/>
+        </p:nvPicPr>
+        <p:blipFill>
+          <a:blip r:embed="rId1"/>
+          <a:stretch>
+            <a:fillRect/>
+          </a:stretch>
+        </p:blipFill>
+        <p:spPr>
+          <a:xfrm>
+            <a:off x="0" y="658368"/>
+            <a:ext cx="5120640" cy="5833872"/>
+          </a:xfrm>
+          <a:prstGeom prst="rect">
+            <a:avLst/>
+          </a:prstGeom>
+        </p:spPr>
+      </p:pic>
+      <p:sp>
+        <p:nvSpPr>
+          <p:cNvPr id="4" name="Text 1"/>
+          <p:cNvSpPr/>
+          <p:nvPr/>
+        </p:nvSpPr>
+        <p:spPr>
+          <a:xfrm>
+            <a:off x="5349240" y="1005840"/>
+            <a:ext cx="6522415" cy="731520"/>
+          </a:xfrm>
+          <a:prstGeom prst="rect">
+            <a:avLst/>
+          </a:prstGeom>
+          <a:noFill/>
+          <a:ln/>
+        </p:spPr>
+        <p:txBody>
+          <a:bodyPr wrap="square" lIns="0" tIns="0" rIns="0" bIns="0" rtlCol="0" anchor="ctr">
+            <a:normAutofit/>
+          </a:bodyPr>
+          <a:lstStyle/>
+          <a:p>
+            <a:pPr algn="ctr" indent="0" marL="0">
+              <a:buNone/>
+            </a:pPr>
+            <a:r>
+              <a:rPr lang="en-US" sz="3600" b="1" dirty="0">
+                <a:solidFill>
+                  <a:srgbClr val="990011"/>
+                </a:solidFill>
+                <a:latin typeface="Times New Roman" pitchFamily="34" charset="0"/>
+                <a:ea typeface="Times New Roman" pitchFamily="34" charset="-122"/>
+                <a:cs typeface="Times New Roman" pitchFamily="34" charset="-120"/>
+              </a:rPr>
+              <a:t>Evaluation 2</a:t>
+            </a:r>
+            <a:endParaRPr lang="en-US" sz="3600" dirty="0"/>
+          </a:p>
+        </p:txBody>
+      </p:sp>
+      <p:sp>
+        <p:nvSpPr>
+          <p:cNvPr id="5" name="Text 2"/>
+          <p:cNvSpPr/>
+          <p:nvPr/>
+        </p:nvSpPr>
+        <p:spPr>
+          <a:xfrm>
+            <a:off x="5349240" y="1783080"/>
+            <a:ext cx="6522415" cy="4663440"/>
+          </a:xfrm>
+          <a:prstGeom prst="rect">
+            <a:avLst/>
+          </a:prstGeom>
+          <a:noFill/>
+          <a:ln/>
+        </p:spPr>
+        <p:txBody>
+          <a:bodyPr wrap="square" lIns="0" tIns="0" rIns="0" bIns="0" rtlCol="0" anchor="t"/>
+          <a:lstStyle/>
+          <a:p>
+            <a:pPr algn="l" indent="0" marL="0">
+              <a:spcAft>
+                <a:spcPts val="800"/>
+              </a:spcAft>
+              <a:buNone/>
+            </a:pPr>
+            <a:r>
+              <a:rPr lang="en-US" sz="4000" dirty="0">
+                <a:solidFill>
+                  <a:srgbClr val="111111"/>
+                </a:solidFill>
+                <a:latin typeface="Times New Roman" pitchFamily="34" charset="0"/>
+                <a:ea typeface="Times New Roman" pitchFamily="34" charset="-122"/>
+                <a:cs typeface="Times New Roman" pitchFamily="34" charset="-120"/>
+              </a:rPr>
+              <a:t>Give two factors of low mortality.</a:t>
+            </a:r>
+            <a:endParaRPr lang="en-US" sz="4000" dirty="0"/>
+          </a:p>
+        </p:txBody>
+      </p:sp>
+      <p:sp>
+        <p:nvSpPr>
+          <p:cNvPr id="25" name="Slide Number Placeholder 0"/>
+          <p:cNvSpPr>
+            <a:spLocks noGrp="1"/>
+          </p:cNvSpPr>
+          <p:nvPr>
+            <p:ph type="sldNum" sz="quarter" idx="4294967295"/>
+          </p:nvPr>
+        </p:nvSpPr>
+        <p:spPr>
+          <a:xfrm>
+            <a:off x="27432" y="91440"/>
+            <a:ext cx="585216" cy="475488"/>
+          </a:xfrm>
+          <a:prstGeom prst="rect">
+            <a:avLst/>
+          </a:prstGeom>
+          <a:extLst>
+            <a:ext uri="{C572A759-6A51-4108-AA02-DFA0A04FC94B}">
+              <ma14:wrappingTextBoxFlag xmlns:ma14="http://schemas.microsoft.com/office/mac/drawingml/2011/main" val="0"/>
+            </a:ext>
+          </a:extLst>
+        </p:spPr>
+        <p:txBody>
+          <a:bodyPr/>
+          <a:lstStyle>
+            <a:lvl1pPr>
+              <a:defRPr sz="2000">
+                <a:solidFill>
+                  <a:srgbClr val="FFFFFF"/>
+                </a:solidFill>
+                <a:latin typeface="Calibri"/>
+                <a:ea typeface="Calibri"/>
+                <a:cs typeface="Calibri"/>
+              </a:defRPr>
+            </a:lvl1pPr>
+          </a:lstStyle>
+          <a:p>
+            <a:pPr algn="ctr"/>
+            <a:fld id="{F7021451-1387-4CA6-816F-3879F97B5CBC}" type="slidenum">
+              <a:rPr b="1" lang="en-US"/>
+              <a:t>65</a:t>
+            </a:fld>
+            <a:endParaRPr lang="en-US"/>
+          </a:p>
+        </p:txBody>
+      </p:sp>
+    </p:spTree>
+  </p:cSld>
+  <p:clrMapOvr>
+    <a:masterClrMapping/>
+  </p:clrMapOvr>
+</p:sld>
+</file>
+
+<file path=ppt/slides/slide66.xml><?xml version="1.0" encoding="utf-8"?>
+<p:sld xmlns:a="http://schemas.openxmlformats.org/drawingml/2006/main" xmlns:r="http://schemas.openxmlformats.org/officeDocument/2006/relationships" xmlns:p="http://schemas.openxmlformats.org/presentationml/2006/main">
+  <p:cSld name="Slide 66">
+    <p:spTree>
+      <p:nvGrpSpPr>
+        <p:cNvPr id="1" name=""/>
+        <p:cNvGrpSpPr/>
+        <p:nvPr/>
+      </p:nvGrpSpPr>
+      <p:grpSpPr>
+        <a:xfrm>
+          <a:off x="0" y="0"/>
+          <a:ext cx="0" cy="0"/>
+          <a:chOff x="0" y="0"/>
+          <a:chExt cx="0" cy="0"/>
+        </a:xfrm>
+      </p:grpSpPr>
+      <p:sp>
+        <p:nvSpPr>
+          <p:cNvPr id="2" name="Text 0"/>
+          <p:cNvSpPr/>
+          <p:nvPr/>
+        </p:nvSpPr>
+        <p:spPr>
+          <a:xfrm>
+            <a:off x="457200" y="713232"/>
+            <a:ext cx="11368735" cy="274320"/>
+          </a:xfrm>
+          <a:prstGeom prst="rect">
+            <a:avLst/>
+          </a:prstGeom>
+          <a:noFill/>
+          <a:ln/>
+        </p:spPr>
+        <p:txBody>
+          <a:bodyPr wrap="square" lIns="0" tIns="0" rIns="0" bIns="0" rtlCol="0" anchor="ctr"/>
+          <a:lstStyle/>
+          <a:p>
+            <a:pPr algn="r" indent="0" marL="0">
+              <a:buNone/>
+            </a:pPr>
+            <a:r>
+              <a:rPr lang="en-US" sz="1400" b="1" dirty="0">
+                <a:solidFill>
+                  <a:srgbClr val="1C3F6E"/>
+                </a:solidFill>
+                <a:latin typeface="Calibri" pitchFamily="34" charset="0"/>
+                <a:ea typeface="Calibri" pitchFamily="34" charset="-122"/>
+                <a:cs typeface="Calibri" pitchFamily="34" charset="-120"/>
+              </a:rPr>
+              <a:t>FORMATIVE EVALUATION</a:t>
+            </a:r>
+            <a:endParaRPr lang="en-US" sz="1400" dirty="0"/>
+          </a:p>
+        </p:txBody>
+      </p:sp>
+      <p:pic>
+        <p:nvPicPr>
+          <p:cNvPr id="3" name="Image 0" descr="/home/claude/f4/img/minesec_sheet.png">    </p:cNvPr>
+          <p:cNvPicPr>
+            <a:picLocks noChangeAspect="1"/>
+          </p:cNvPicPr>
+          <p:nvPr/>
+        </p:nvPicPr>
+        <p:blipFill>
+          <a:blip r:embed="rId1"/>
+          <a:stretch>
+            <a:fillRect/>
+          </a:stretch>
+        </p:blipFill>
+        <p:spPr>
+          <a:xfrm>
+            <a:off x="0" y="658368"/>
+            <a:ext cx="5120640" cy="5833872"/>
+          </a:xfrm>
+          <a:prstGeom prst="rect">
+            <a:avLst/>
+          </a:prstGeom>
+        </p:spPr>
+      </p:pic>
+      <p:sp>
+        <p:nvSpPr>
+          <p:cNvPr id="4" name="Text 1"/>
+          <p:cNvSpPr/>
+          <p:nvPr/>
+        </p:nvSpPr>
+        <p:spPr>
+          <a:xfrm>
+            <a:off x="5349240" y="1005840"/>
+            <a:ext cx="6522415" cy="731520"/>
+          </a:xfrm>
+          <a:prstGeom prst="rect">
+            <a:avLst/>
+          </a:prstGeom>
+          <a:noFill/>
+          <a:ln/>
+        </p:spPr>
+        <p:txBody>
+          <a:bodyPr wrap="square" lIns="0" tIns="0" rIns="0" bIns="0" rtlCol="0" anchor="ctr">
+            <a:normAutofit/>
+          </a:bodyPr>
+          <a:lstStyle/>
+          <a:p>
+            <a:pPr algn="ctr" indent="0" marL="0">
+              <a:buNone/>
+            </a:pPr>
+            <a:r>
+              <a:rPr lang="en-US" sz="3600" b="1" dirty="0">
+                <a:solidFill>
+                  <a:srgbClr val="990011"/>
+                </a:solidFill>
+                <a:latin typeface="Times New Roman" pitchFamily="34" charset="0"/>
+                <a:ea typeface="Times New Roman" pitchFamily="34" charset="-122"/>
+                <a:cs typeface="Times New Roman" pitchFamily="34" charset="-120"/>
+              </a:rPr>
+              <a:t>Expected Answer</a:t>
+            </a:r>
+            <a:endParaRPr lang="en-US" sz="3600" dirty="0"/>
+          </a:p>
+        </p:txBody>
+      </p:sp>
+      <p:sp>
+        <p:nvSpPr>
+          <p:cNvPr id="5" name="Text 2"/>
+          <p:cNvSpPr/>
+          <p:nvPr/>
+        </p:nvSpPr>
+        <p:spPr>
+          <a:xfrm>
+            <a:off x="5349240" y="1783080"/>
+            <a:ext cx="6522415" cy="4663440"/>
+          </a:xfrm>
+          <a:prstGeom prst="rect">
+            <a:avLst/>
+          </a:prstGeom>
+          <a:noFill/>
+          <a:ln/>
+        </p:spPr>
+        <p:txBody>
+          <a:bodyPr wrap="square" lIns="0" tIns="0" rIns="0" bIns="0" rtlCol="0" anchor="t"/>
+          <a:lstStyle/>
+          <a:p>
+            <a:pPr algn="l" indent="0" marL="0">
+              <a:spcAft>
+                <a:spcPts val="800"/>
+              </a:spcAft>
+              <a:buNone/>
+            </a:pPr>
+            <a:r>
+              <a:rPr lang="en-US" sz="4000" dirty="0">
+                <a:solidFill>
+                  <a:srgbClr val="111111"/>
+                </a:solidFill>
+                <a:latin typeface="Times New Roman" pitchFamily="34" charset="0"/>
+                <a:ea typeface="Times New Roman" pitchFamily="34" charset="-122"/>
+                <a:cs typeface="Times New Roman" pitchFamily="34" charset="-120"/>
+              </a:rPr>
+              <a:t>Vaccines and hospitals, clean water, good nutrition (any two).</a:t>
+            </a:r>
+            <a:endParaRPr lang="en-US" sz="4000" dirty="0"/>
+          </a:p>
+        </p:txBody>
+      </p:sp>
+      <p:sp>
+        <p:nvSpPr>
+          <p:cNvPr id="25" name="Slide Number Placeholder 0"/>
+          <p:cNvSpPr>
+            <a:spLocks noGrp="1"/>
+          </p:cNvSpPr>
+          <p:nvPr>
+            <p:ph type="sldNum" sz="quarter" idx="4294967295"/>
+          </p:nvPr>
+        </p:nvSpPr>
+        <p:spPr>
+          <a:xfrm>
+            <a:off x="27432" y="91440"/>
+            <a:ext cx="585216" cy="475488"/>
+          </a:xfrm>
+          <a:prstGeom prst="rect">
+            <a:avLst/>
+          </a:prstGeom>
+          <a:extLst>
+            <a:ext uri="{C572A759-6A51-4108-AA02-DFA0A04FC94B}">
+              <ma14:wrappingTextBoxFlag xmlns:ma14="http://schemas.microsoft.com/office/mac/drawingml/2011/main" val="0"/>
+            </a:ext>
+          </a:extLst>
+        </p:spPr>
+        <p:txBody>
+          <a:bodyPr/>
+          <a:lstStyle>
+            <a:lvl1pPr>
+              <a:defRPr sz="2000">
+                <a:solidFill>
+                  <a:srgbClr val="FFFFFF"/>
+                </a:solidFill>
+                <a:latin typeface="Calibri"/>
+                <a:ea typeface="Calibri"/>
+                <a:cs typeface="Calibri"/>
+              </a:defRPr>
+            </a:lvl1pPr>
+          </a:lstStyle>
+          <a:p>
+            <a:pPr algn="ctr"/>
+            <a:fld id="{F7021451-1387-4CA6-816F-3879F97B5CBC}" type="slidenum">
+              <a:rPr b="1" lang="en-US"/>
+              <a:t>66</a:t>
+            </a:fld>
+            <a:endParaRPr lang="en-US"/>
+          </a:p>
+        </p:txBody>
+      </p:sp>
+    </p:spTree>
+  </p:cSld>
+  <p:clrMapOvr>
+    <a:masterClrMapping/>
+  </p:clrMapOvr>
+</p:sld>
+</file>
+
+<file path=ppt/slides/slide67.xml><?xml version="1.0" encoding="utf-8"?>
+<p:sld xmlns:a="http://schemas.openxmlformats.org/drawingml/2006/main" xmlns:r="http://schemas.openxmlformats.org/officeDocument/2006/relationships" xmlns:p="http://schemas.openxmlformats.org/presentationml/2006/main">
+  <p:cSld name="Slide 67">
+    <p:spTree>
+      <p:nvGrpSpPr>
+        <p:cNvPr id="1" name=""/>
+        <p:cNvGrpSpPr/>
+        <p:nvPr/>
+      </p:nvGrpSpPr>
+      <p:grpSpPr>
+        <a:xfrm>
+          <a:off x="0" y="0"/>
+          <a:ext cx="0" cy="0"/>
+          <a:chOff x="0" y="0"/>
+          <a:chExt cx="0" cy="0"/>
+        </a:xfrm>
+      </p:grpSpPr>
+      <p:sp>
+        <p:nvSpPr>
+          <p:cNvPr id="2" name="Text 0"/>
+          <p:cNvSpPr/>
+          <p:nvPr/>
+        </p:nvSpPr>
+        <p:spPr>
+          <a:xfrm>
+            <a:off x="457200" y="713232"/>
+            <a:ext cx="11368735" cy="274320"/>
+          </a:xfrm>
+          <a:prstGeom prst="rect">
+            <a:avLst/>
+          </a:prstGeom>
+          <a:noFill/>
+          <a:ln/>
+        </p:spPr>
+        <p:txBody>
+          <a:bodyPr wrap="square" lIns="0" tIns="0" rIns="0" bIns="0" rtlCol="0" anchor="ctr"/>
+          <a:lstStyle/>
+          <a:p>
+            <a:pPr algn="r" indent="0" marL="0">
+              <a:buNone/>
+            </a:pPr>
+            <a:r>
+              <a:rPr lang="en-US" sz="1400" b="1" dirty="0">
+                <a:solidFill>
+                  <a:srgbClr val="1C3F6E"/>
+                </a:solidFill>
+                <a:latin typeface="Calibri" pitchFamily="34" charset="0"/>
+                <a:ea typeface="Calibri" pitchFamily="34" charset="-122"/>
+                <a:cs typeface="Calibri" pitchFamily="34" charset="-120"/>
+              </a:rPr>
+              <a:t>REMEDIATION</a:t>
+            </a:r>
+            <a:endParaRPr lang="en-US" sz="1400" dirty="0"/>
+          </a:p>
+        </p:txBody>
+      </p:sp>
+      <p:pic>
+        <p:nvPicPr>
+          <p:cNvPr id="3" name="Image 0" descr="/home/claude/f4/img/minesec_sheet.png">    </p:cNvPr>
+          <p:cNvPicPr>
+            <a:picLocks noChangeAspect="1"/>
+          </p:cNvPicPr>
+          <p:nvPr/>
+        </p:nvPicPr>
+        <p:blipFill>
+          <a:blip r:embed="rId1"/>
+          <a:stretch>
+            <a:fillRect/>
+          </a:stretch>
+        </p:blipFill>
+        <p:spPr>
+          <a:xfrm>
+            <a:off x="0" y="658368"/>
+            <a:ext cx="5120640" cy="5833872"/>
+          </a:xfrm>
+          <a:prstGeom prst="rect">
+            <a:avLst/>
+          </a:prstGeom>
+        </p:spPr>
+      </p:pic>
+      <p:sp>
+        <p:nvSpPr>
+          <p:cNvPr id="4" name="Text 1"/>
+          <p:cNvSpPr/>
+          <p:nvPr/>
+        </p:nvSpPr>
+        <p:spPr>
+          <a:xfrm>
+            <a:off x="5349240" y="1005840"/>
+            <a:ext cx="6522415" cy="731520"/>
+          </a:xfrm>
+          <a:prstGeom prst="rect">
+            <a:avLst/>
+          </a:prstGeom>
+          <a:noFill/>
+          <a:ln/>
+        </p:spPr>
+        <p:txBody>
+          <a:bodyPr wrap="square" lIns="0" tIns="0" rIns="0" bIns="0" rtlCol="0" anchor="ctr">
+            <a:normAutofit/>
+          </a:bodyPr>
+          <a:lstStyle/>
+          <a:p>
+            <a:pPr algn="ctr" indent="0" marL="0">
+              <a:buNone/>
+            </a:pPr>
+            <a:r>
+              <a:rPr lang="en-US" sz="3600" b="1" dirty="0">
+                <a:solidFill>
+                  <a:srgbClr val="990011"/>
+                </a:solidFill>
+                <a:latin typeface="Times New Roman" pitchFamily="34" charset="0"/>
+                <a:ea typeface="Times New Roman" pitchFamily="34" charset="-122"/>
+                <a:cs typeface="Times New Roman" pitchFamily="34" charset="-120"/>
+              </a:rPr>
+              <a:t>Remediation</a:t>
+            </a:r>
+            <a:endParaRPr lang="en-US" sz="3600" dirty="0"/>
+          </a:p>
+        </p:txBody>
+      </p:sp>
+      <p:sp>
+        <p:nvSpPr>
+          <p:cNvPr id="5" name="Text 2"/>
+          <p:cNvSpPr/>
+          <p:nvPr/>
+        </p:nvSpPr>
+        <p:spPr>
+          <a:xfrm>
+            <a:off x="5349240" y="1783080"/>
+            <a:ext cx="6522415" cy="4663440"/>
+          </a:xfrm>
+          <a:prstGeom prst="rect">
+            <a:avLst/>
+          </a:prstGeom>
+          <a:noFill/>
+          <a:ln/>
+        </p:spPr>
+        <p:txBody>
+          <a:bodyPr wrap="square" lIns="0" tIns="0" rIns="0" bIns="0" rtlCol="0" anchor="t"/>
+          <a:lstStyle/>
+          <a:p>
+            <a:pPr algn="l" indent="0" marL="0">
+              <a:spcAft>
+                <a:spcPts val="800"/>
+              </a:spcAft>
+              <a:buNone/>
+            </a:pPr>
+            <a:r>
+              <a:rPr lang="en-US" sz="4000" b="1" dirty="0">
+                <a:solidFill>
+                  <a:srgbClr val="111111"/>
+                </a:solidFill>
+                <a:latin typeface="Times New Roman" pitchFamily="34" charset="0"/>
+                <a:ea typeface="Times New Roman" pitchFamily="34" charset="-122"/>
+                <a:cs typeface="Times New Roman" pitchFamily="34" charset="-120"/>
+              </a:rPr>
+              <a:t>Fill in the blanks:</a:t>
+            </a:r>
+            <a:endParaRPr lang="en-US" sz="4000" dirty="0"/>
+          </a:p>
+          <a:p>
+            <a:pPr algn="l" marL="342900" indent="-342900">
+              <a:spcAft>
+                <a:spcPts val="800"/>
+              </a:spcAft>
+              <a:buSzPct val="100000"/>
+              <a:buFont typeface="+mj-lt"/>
+              <a:buAutoNum type="arabicPeriod" startAt="1"/>
+            </a:pPr>
+            <a:r>
+              <a:rPr lang="en-US" sz="4000" dirty="0">
+                <a:solidFill>
+                  <a:srgbClr val="111111"/>
+                </a:solidFill>
+                <a:latin typeface="Times New Roman" pitchFamily="34" charset="0"/>
+                <a:ea typeface="Times New Roman" pitchFamily="34" charset="-122"/>
+                <a:cs typeface="Times New Roman" pitchFamily="34" charset="-120"/>
+              </a:rPr>
+              <a:t>When births exceed deaths, there is natural ______.</a:t>
+            </a:r>
+            <a:endParaRPr lang="en-US" sz="4000" dirty="0"/>
+          </a:p>
+          <a:p>
+            <a:pPr algn="l" marL="342900" indent="-342900">
+              <a:spcAft>
+                <a:spcPts val="800"/>
+              </a:spcAft>
+              <a:buSzPct val="100000"/>
+              <a:buFont typeface="+mj-lt"/>
+              <a:buAutoNum type="arabicPeriod" startAt="1"/>
+            </a:pPr>
+            <a:r>
+              <a:rPr lang="en-US" sz="4000" dirty="0">
+                <a:solidFill>
+                  <a:srgbClr val="111111"/>
+                </a:solidFill>
+                <a:latin typeface="Times New Roman" pitchFamily="34" charset="0"/>
+                <a:ea typeface="Times New Roman" pitchFamily="34" charset="-122"/>
+                <a:cs typeface="Times New Roman" pitchFamily="34" charset="-120"/>
+              </a:rPr>
+              <a:t>Immigrants − emigrants = net ______.</a:t>
+            </a:r>
+            <a:endParaRPr lang="en-US" sz="4000" dirty="0"/>
+          </a:p>
+          <a:p>
+            <a:pPr algn="l" marL="342900" indent="-342900">
+              <a:spcAft>
+                <a:spcPts val="800"/>
+              </a:spcAft>
+              <a:buSzPct val="100000"/>
+              <a:buFont typeface="+mj-lt"/>
+              <a:buAutoNum type="arabicPeriod" startAt="1"/>
+            </a:pPr>
+            <a:r>
+              <a:rPr lang="en-US" sz="4000" dirty="0">
+                <a:solidFill>
+                  <a:srgbClr val="111111"/>
+                </a:solidFill>
+                <a:latin typeface="Times New Roman" pitchFamily="34" charset="0"/>
+                <a:ea typeface="Times New Roman" pitchFamily="34" charset="-122"/>
+                <a:cs typeface="Times New Roman" pitchFamily="34" charset="-120"/>
+              </a:rPr>
+              <a:t>Japan has ______ growth.</a:t>
+            </a:r>
+            <a:endParaRPr lang="en-US" sz="4000" dirty="0"/>
+          </a:p>
+        </p:txBody>
+      </p:sp>
+      <p:sp>
+        <p:nvSpPr>
+          <p:cNvPr id="25" name="Slide Number Placeholder 0"/>
+          <p:cNvSpPr>
+            <a:spLocks noGrp="1"/>
+          </p:cNvSpPr>
+          <p:nvPr>
+            <p:ph type="sldNum" sz="quarter" idx="4294967295"/>
+          </p:nvPr>
+        </p:nvSpPr>
+        <p:spPr>
+          <a:xfrm>
+            <a:off x="27432" y="91440"/>
+            <a:ext cx="585216" cy="475488"/>
+          </a:xfrm>
+          <a:prstGeom prst="rect">
+            <a:avLst/>
+          </a:prstGeom>
+          <a:extLst>
+            <a:ext uri="{C572A759-6A51-4108-AA02-DFA0A04FC94B}">
+              <ma14:wrappingTextBoxFlag xmlns:ma14="http://schemas.microsoft.com/office/mac/drawingml/2011/main" val="0"/>
+            </a:ext>
+          </a:extLst>
+        </p:spPr>
+        <p:txBody>
+          <a:bodyPr/>
+          <a:lstStyle>
+            <a:lvl1pPr>
+              <a:defRPr sz="2000">
+                <a:solidFill>
+                  <a:srgbClr val="FFFFFF"/>
+                </a:solidFill>
+                <a:latin typeface="Calibri"/>
+                <a:ea typeface="Calibri"/>
+                <a:cs typeface="Calibri"/>
+              </a:defRPr>
+            </a:lvl1pPr>
+          </a:lstStyle>
+          <a:p>
+            <a:pPr algn="ctr"/>
+            <a:fld id="{F7021451-1387-4CA6-816F-3879F97B5CBC}" type="slidenum">
+              <a:rPr b="1" lang="en-US"/>
+              <a:t>67</a:t>
+            </a:fld>
+            <a:endParaRPr lang="en-US"/>
+          </a:p>
+        </p:txBody>
+      </p:sp>
+    </p:spTree>
+  </p:cSld>
+  <p:clrMapOvr>
+    <a:masterClrMapping/>
+  </p:clrMapOvr>
+</p:sld>
+</file>
+
+<file path=ppt/slides/slide68.xml><?xml version="1.0" encoding="utf-8"?>
+<p:sld xmlns:a="http://schemas.openxmlformats.org/drawingml/2006/main" xmlns:r="http://schemas.openxmlformats.org/officeDocument/2006/relationships" xmlns:p="http://schemas.openxmlformats.org/presentationml/2006/main">
+  <p:cSld name="Slide 68">
+    <p:spTree>
+      <p:nvGrpSpPr>
+        <p:cNvPr id="1" name=""/>
+        <p:cNvGrpSpPr/>
+        <p:nvPr/>
+      </p:nvGrpSpPr>
+      <p:grpSpPr>
+        <a:xfrm>
+          <a:off x="0" y="0"/>
+          <a:ext cx="0" cy="0"/>
+          <a:chOff x="0" y="0"/>
+          <a:chExt cx="0" cy="0"/>
+        </a:xfrm>
+      </p:grpSpPr>
+      <p:sp>
+        <p:nvSpPr>
+          <p:cNvPr id="2" name="Text 0"/>
+          <p:cNvSpPr/>
+          <p:nvPr/>
+        </p:nvSpPr>
+        <p:spPr>
+          <a:xfrm>
+            <a:off x="457200" y="713232"/>
+            <a:ext cx="11368735" cy="274320"/>
+          </a:xfrm>
+          <a:prstGeom prst="rect">
+            <a:avLst/>
+          </a:prstGeom>
+          <a:noFill/>
+          <a:ln/>
+        </p:spPr>
+        <p:txBody>
+          <a:bodyPr wrap="square" lIns="0" tIns="0" rIns="0" bIns="0" rtlCol="0" anchor="ctr"/>
+          <a:lstStyle/>
+          <a:p>
+            <a:pPr algn="r" indent="0" marL="0">
+              <a:buNone/>
+            </a:pPr>
+            <a:r>
+              <a:rPr lang="en-US" sz="1400" b="1" dirty="0">
+                <a:solidFill>
+                  <a:srgbClr val="1C3F6E"/>
+                </a:solidFill>
+                <a:latin typeface="Calibri" pitchFamily="34" charset="0"/>
+                <a:ea typeface="Calibri" pitchFamily="34" charset="-122"/>
+                <a:cs typeface="Calibri" pitchFamily="34" charset="-120"/>
+              </a:rPr>
+              <a:t>HOMEWORK</a:t>
+            </a:r>
+            <a:endParaRPr lang="en-US" sz="1400" dirty="0"/>
+          </a:p>
+        </p:txBody>
+      </p:sp>
+      <p:pic>
+        <p:nvPicPr>
+          <p:cNvPr id="3" name="Image 0" descr="/home/claude/f4/img/minesec_sheet.png">    </p:cNvPr>
+          <p:cNvPicPr>
+            <a:picLocks noChangeAspect="1"/>
+          </p:cNvPicPr>
+          <p:nvPr/>
+        </p:nvPicPr>
+        <p:blipFill>
+          <a:blip r:embed="rId1"/>
+          <a:stretch>
+            <a:fillRect/>
+          </a:stretch>
+        </p:blipFill>
+        <p:spPr>
+          <a:xfrm>
+            <a:off x="0" y="658368"/>
+            <a:ext cx="5120640" cy="5833872"/>
+          </a:xfrm>
+          <a:prstGeom prst="rect">
+            <a:avLst/>
+          </a:prstGeom>
+        </p:spPr>
+      </p:pic>
+      <p:sp>
+        <p:nvSpPr>
+          <p:cNvPr id="4" name="Text 1"/>
+          <p:cNvSpPr/>
+          <p:nvPr/>
+        </p:nvSpPr>
+        <p:spPr>
+          <a:xfrm>
+            <a:off x="5349240" y="1005840"/>
+            <a:ext cx="6522415" cy="731520"/>
+          </a:xfrm>
+          <a:prstGeom prst="rect">
+            <a:avLst/>
+          </a:prstGeom>
+          <a:noFill/>
+          <a:ln/>
+        </p:spPr>
+        <p:txBody>
+          <a:bodyPr wrap="square" lIns="0" tIns="0" rIns="0" bIns="0" rtlCol="0" anchor="ctr">
+            <a:normAutofit/>
+          </a:bodyPr>
+          <a:lstStyle/>
+          <a:p>
+            <a:pPr algn="ctr" indent="0" marL="0">
+              <a:buNone/>
+            </a:pPr>
+            <a:r>
+              <a:rPr lang="en-US" sz="3600" b="1" dirty="0">
+                <a:solidFill>
+                  <a:srgbClr val="990011"/>
+                </a:solidFill>
+                <a:latin typeface="Times New Roman" pitchFamily="34" charset="0"/>
+                <a:ea typeface="Times New Roman" pitchFamily="34" charset="-122"/>
+                <a:cs typeface="Times New Roman" pitchFamily="34" charset="-120"/>
+              </a:rPr>
+              <a:t>Homework</a:t>
+            </a:r>
+            <a:endParaRPr lang="en-US" sz="3600" dirty="0"/>
+          </a:p>
+        </p:txBody>
+      </p:sp>
+      <p:sp>
+        <p:nvSpPr>
+          <p:cNvPr id="5" name="Text 2"/>
+          <p:cNvSpPr/>
+          <p:nvPr/>
+        </p:nvSpPr>
+        <p:spPr>
+          <a:xfrm>
+            <a:off x="5349240" y="1783080"/>
+            <a:ext cx="6522415" cy="4663440"/>
+          </a:xfrm>
+          <a:prstGeom prst="rect">
+            <a:avLst/>
+          </a:prstGeom>
+          <a:noFill/>
+          <a:ln/>
+        </p:spPr>
+        <p:txBody>
+          <a:bodyPr wrap="square" lIns="0" tIns="0" rIns="0" bIns="0" rtlCol="0" anchor="t"/>
+          <a:lstStyle/>
+          <a:p>
+            <a:pPr algn="l" indent="0" marL="0">
+              <a:spcAft>
+                <a:spcPts val="800"/>
+              </a:spcAft>
+              <a:buNone/>
+            </a:pPr>
+            <a:r>
+              <a:rPr lang="en-US" sz="4000" dirty="0">
+                <a:solidFill>
+                  <a:srgbClr val="111111"/>
+                </a:solidFill>
+                <a:latin typeface="Times New Roman" pitchFamily="34" charset="0"/>
+                <a:ea typeface="Times New Roman" pitchFamily="34" charset="-122"/>
+                <a:cs typeface="Times New Roman" pitchFamily="34" charset="-120"/>
+              </a:rPr>
+              <a:t>Define the crude birth rate.</a:t>
+            </a:r>
+            <a:endParaRPr lang="en-US" sz="4000" dirty="0"/>
+          </a:p>
+        </p:txBody>
+      </p:sp>
+      <p:sp>
+        <p:nvSpPr>
+          <p:cNvPr id="25" name="Slide Number Placeholder 0"/>
+          <p:cNvSpPr>
+            <a:spLocks noGrp="1"/>
+          </p:cNvSpPr>
+          <p:nvPr>
+            <p:ph type="sldNum" sz="quarter" idx="4294967295"/>
+          </p:nvPr>
+        </p:nvSpPr>
+        <p:spPr>
+          <a:xfrm>
+            <a:off x="27432" y="91440"/>
+            <a:ext cx="585216" cy="475488"/>
+          </a:xfrm>
+          <a:prstGeom prst="rect">
+            <a:avLst/>
+          </a:prstGeom>
+          <a:extLst>
+            <a:ext uri="{C572A759-6A51-4108-AA02-DFA0A04FC94B}">
+              <ma14:wrappingTextBoxFlag xmlns:ma14="http://schemas.microsoft.com/office/mac/drawingml/2011/main" val="0"/>
+            </a:ext>
+          </a:extLst>
+        </p:spPr>
+        <p:txBody>
+          <a:bodyPr/>
+          <a:lstStyle>
+            <a:lvl1pPr>
+              <a:defRPr sz="2000">
+                <a:solidFill>
+                  <a:srgbClr val="FFFFFF"/>
+                </a:solidFill>
+                <a:latin typeface="Calibri"/>
+                <a:ea typeface="Calibri"/>
+                <a:cs typeface="Calibri"/>
+              </a:defRPr>
+            </a:lvl1pPr>
+          </a:lstStyle>
+          <a:p>
+            <a:pPr algn="ctr"/>
+            <a:fld id="{F7021451-1387-4CA6-816F-3879F97B5CBC}" type="slidenum">
+              <a:rPr b="1" lang="en-US"/>
+              <a:t>68</a:t>
+            </a:fld>
+            <a:endParaRPr lang="en-US"/>
+          </a:p>
+        </p:txBody>
+      </p:sp>
+    </p:spTree>
+  </p:cSld>
+  <p:clrMapOvr>
+    <a:masterClrMapping/>
+  </p:clrMapOvr>
+</p:sld>
+</file>
+
+<file path=ppt/slides/slide69.xml><?xml version="1.0" encoding="utf-8"?>
+<p:sld xmlns:a="http://schemas.openxmlformats.org/drawingml/2006/main" xmlns:r="http://schemas.openxmlformats.org/officeDocument/2006/relationships" xmlns:p="http://schemas.openxmlformats.org/presentationml/2006/main">
+  <p:cSld name="Slide 69">
+    <p:spTree>
+      <p:nvGrpSpPr>
+        <p:cNvPr id="1" name=""/>
+        <p:cNvGrpSpPr/>
+        <p:nvPr/>
+      </p:nvGrpSpPr>
+      <p:grpSpPr>
+        <a:xfrm>
+          <a:off x="0" y="0"/>
+          <a:ext cx="0" cy="0"/>
+          <a:chOff x="0" y="0"/>
+          <a:chExt cx="0" cy="0"/>
+        </a:xfrm>
+      </p:grpSpPr>
+      <p:sp>
+        <p:nvSpPr>
+          <p:cNvPr id="2" name="Text 0"/>
+          <p:cNvSpPr/>
+          <p:nvPr/>
+        </p:nvSpPr>
+        <p:spPr>
+          <a:xfrm>
+            <a:off x="457200" y="713232"/>
+            <a:ext cx="11368735" cy="274320"/>
+          </a:xfrm>
+          <a:prstGeom prst="rect">
+            <a:avLst/>
+          </a:prstGeom>
+          <a:noFill/>
+          <a:ln/>
+        </p:spPr>
+        <p:txBody>
+          <a:bodyPr wrap="square" lIns="0" tIns="0" rIns="0" bIns="0" rtlCol="0" anchor="ctr"/>
+          <a:lstStyle/>
+          <a:p>
+            <a:pPr algn="r" indent="0" marL="0">
+              <a:buNone/>
+            </a:pPr>
+            <a:r>
+              <a:rPr lang="en-US" sz="1400" b="1" dirty="0">
+                <a:solidFill>
+                  <a:srgbClr val="1C3F6E"/>
+                </a:solidFill>
+                <a:latin typeface="Calibri" pitchFamily="34" charset="0"/>
+                <a:ea typeface="Calibri" pitchFamily="34" charset="-122"/>
+                <a:cs typeface="Calibri" pitchFamily="34" charset="-120"/>
+              </a:rPr>
+              <a:t>NEXT LESSON</a:t>
+            </a:r>
+            <a:endParaRPr lang="en-US" sz="1400" dirty="0"/>
+          </a:p>
+        </p:txBody>
+      </p:sp>
+      <p:pic>
+        <p:nvPicPr>
+          <p:cNvPr id="3" name="Image 0" descr="/home/claude/f4/img/minesec_sheet.png">    </p:cNvPr>
+          <p:cNvPicPr>
+            <a:picLocks noChangeAspect="1"/>
+          </p:cNvPicPr>
+          <p:nvPr/>
+        </p:nvPicPr>
+        <p:blipFill>
+          <a:blip r:embed="rId1"/>
+          <a:stretch>
+            <a:fillRect/>
+          </a:stretch>
+        </p:blipFill>
+        <p:spPr>
+          <a:xfrm>
+            <a:off x="0" y="658368"/>
+            <a:ext cx="5120640" cy="5833872"/>
+          </a:xfrm>
+          <a:prstGeom prst="rect">
+            <a:avLst/>
+          </a:prstGeom>
+        </p:spPr>
+      </p:pic>
+      <p:sp>
+        <p:nvSpPr>
+          <p:cNvPr id="4" name="Text 1"/>
+          <p:cNvSpPr/>
+          <p:nvPr/>
+        </p:nvSpPr>
+        <p:spPr>
+          <a:xfrm>
+            <a:off x="5349240" y="1005840"/>
+            <a:ext cx="6522415" cy="731520"/>
+          </a:xfrm>
+          <a:prstGeom prst="rect">
+            <a:avLst/>
+          </a:prstGeom>
+          <a:noFill/>
+          <a:ln/>
+        </p:spPr>
+        <p:txBody>
+          <a:bodyPr wrap="square" lIns="0" tIns="0" rIns="0" bIns="0" rtlCol="0" anchor="ctr">
+            <a:normAutofit/>
+          </a:bodyPr>
+          <a:lstStyle/>
+          <a:p>
+            <a:pPr algn="ctr" indent="0" marL="0">
+              <a:buNone/>
+            </a:pPr>
+            <a:r>
+              <a:rPr lang="en-US" sz="3600" b="1" dirty="0">
+                <a:solidFill>
+                  <a:srgbClr val="990011"/>
+                </a:solidFill>
+                <a:latin typeface="Times New Roman" pitchFamily="34" charset="0"/>
+                <a:ea typeface="Times New Roman" pitchFamily="34" charset="-122"/>
+                <a:cs typeface="Times New Roman" pitchFamily="34" charset="-120"/>
+              </a:rPr>
+              <a:t>Next Lesson</a:t>
+            </a:r>
+            <a:endParaRPr lang="en-US" sz="3600" dirty="0"/>
+          </a:p>
+        </p:txBody>
+      </p:sp>
+      <p:sp>
+        <p:nvSpPr>
+          <p:cNvPr id="5" name="Text 2"/>
+          <p:cNvSpPr/>
+          <p:nvPr/>
+        </p:nvSpPr>
+        <p:spPr>
+          <a:xfrm>
+            <a:off x="5349240" y="1783080"/>
+            <a:ext cx="6522415" cy="4663440"/>
+          </a:xfrm>
+          <a:prstGeom prst="rect">
+            <a:avLst/>
+          </a:prstGeom>
+          <a:noFill/>
+          <a:ln/>
+        </p:spPr>
+        <p:txBody>
+          <a:bodyPr wrap="square" lIns="0" tIns="0" rIns="0" bIns="0" rtlCol="0" anchor="ctr"/>
+          <a:lstStyle/>
+          <a:p>
+            <a:pPr algn="ctr" indent="0" marL="0">
+              <a:spcAft>
+                <a:spcPts val="800"/>
+              </a:spcAft>
+              <a:buNone/>
+            </a:pPr>
+            <a:r>
+              <a:rPr lang="en-US" sz="4000" b="1" dirty="0">
+                <a:solidFill>
+                  <a:srgbClr val="111111"/>
+                </a:solidFill>
+                <a:latin typeface="Times New Roman" pitchFamily="34" charset="0"/>
+                <a:ea typeface="Times New Roman" pitchFamily="34" charset="-122"/>
+                <a:cs typeface="Times New Roman" pitchFamily="34" charset="-120"/>
+              </a:rPr>
+              <a:t>Our next lesson will be on:</a:t>
+            </a:r>
+            <a:endParaRPr lang="en-US" sz="4000" dirty="0"/>
+          </a:p>
+          <a:p>
+            <a:pPr algn="ctr" indent="0" marL="0">
+              <a:spcAft>
+                <a:spcPts val="800"/>
+              </a:spcAft>
+              <a:buNone/>
+            </a:pPr>
+            <a:r>
+              <a:rPr lang="en-US" sz="4000" b="1" dirty="0">
+                <a:solidFill>
+                  <a:srgbClr val="990011"/>
+                </a:solidFill>
+                <a:latin typeface="Times New Roman" pitchFamily="34" charset="0"/>
+                <a:ea typeface="Times New Roman" pitchFamily="34" charset="-122"/>
+                <a:cs typeface="Times New Roman" pitchFamily="34" charset="-120"/>
+              </a:rPr>
+              <a:t>Practical Work 4: Calculating Demographic Indices</a:t>
+            </a:r>
+            <a:endParaRPr lang="en-US" sz="4000" dirty="0"/>
+          </a:p>
+        </p:txBody>
+      </p:sp>
+      <p:sp>
+        <p:nvSpPr>
+          <p:cNvPr id="25" name="Slide Number Placeholder 0"/>
+          <p:cNvSpPr>
+            <a:spLocks noGrp="1"/>
+          </p:cNvSpPr>
+          <p:nvPr>
+            <p:ph type="sldNum" sz="quarter" idx="4294967295"/>
+          </p:nvPr>
+        </p:nvSpPr>
+        <p:spPr>
+          <a:xfrm>
+            <a:off x="27432" y="91440"/>
+            <a:ext cx="585216" cy="475488"/>
+          </a:xfrm>
+          <a:prstGeom prst="rect">
+            <a:avLst/>
+          </a:prstGeom>
+          <a:extLst>
+            <a:ext uri="{C572A759-6A51-4108-AA02-DFA0A04FC94B}">
+              <ma14:wrappingTextBoxFlag xmlns:ma14="http://schemas.microsoft.com/office/mac/drawingml/2011/main" val="0"/>
+            </a:ext>
+          </a:extLst>
+        </p:spPr>
+        <p:txBody>
+          <a:bodyPr/>
+          <a:lstStyle>
+            <a:lvl1pPr>
+              <a:defRPr sz="2000">
+                <a:solidFill>
+                  <a:srgbClr val="FFFFFF"/>
+                </a:solidFill>
+                <a:latin typeface="Calibri"/>
+                <a:ea typeface="Calibri"/>
+                <a:cs typeface="Calibri"/>
+              </a:defRPr>
+            </a:lvl1pPr>
+          </a:lstStyle>
+          <a:p>
+            <a:pPr algn="ctr"/>
+            <a:fld id="{F7021451-1387-4CA6-816F-3879F97B5CBC}" type="slidenum">
+              <a:rPr b="1" lang="en-US"/>
+              <a:t>69</a:t>
+            </a:fld>
+            <a:endParaRPr lang="en-US"/>
+          </a:p>
+        </p:txBody>
+      </p:sp>
+    </p:spTree>
+  </p:cSld>
+  <p:clrMapOvr>
+    <a:masterClrMapping/>
+  </p:clrMapOvr>
+</p:sld>
+</file>
+
+<file path=ppt/slides/slide7.xml><?xml version="1.0" encoding="utf-8"?>
+<p:sld xmlns:a="http://schemas.openxmlformats.org/drawingml/2006/main" xmlns:r="http://schemas.openxmlformats.org/officeDocument/2006/relationships" xmlns:p="http://schemas.openxmlformats.org/presentationml/2006/main">
+  <p:cSld name="Slide 7">
+    <p:spTree>
+      <p:nvGrpSpPr>
+        <p:cNvPr id="1" name=""/>
+        <p:cNvGrpSpPr/>
+        <p:nvPr/>
+      </p:nvGrpSpPr>
+      <p:grpSpPr>
+        <a:xfrm>
+          <a:off x="0" y="0"/>
+          <a:ext cx="0" cy="0"/>
+          <a:chOff x="0" y="0"/>
+          <a:chExt cx="0" cy="0"/>
+        </a:xfrm>
+      </p:grpSpPr>
+      <p:sp>
+        <p:nvSpPr>
+          <p:cNvPr id="2" name="Text 0"/>
+          <p:cNvSpPr/>
+          <p:nvPr/>
+        </p:nvSpPr>
+        <p:spPr>
+          <a:xfrm>
+            <a:off x="457200" y="713232"/>
+            <a:ext cx="11368735" cy="274320"/>
+          </a:xfrm>
+          <a:prstGeom prst="rect">
+            <a:avLst/>
+          </a:prstGeom>
+          <a:noFill/>
+          <a:ln/>
+        </p:spPr>
+        <p:txBody>
+          <a:bodyPr wrap="square" lIns="0" tIns="0" rIns="0" bIns="0" rtlCol="0" anchor="ctr"/>
+          <a:lstStyle/>
+          <a:p>
+            <a:pPr algn="r" indent="0" marL="0">
+              <a:buNone/>
+            </a:pPr>
+            <a:r>
+              <a:rPr lang="en-US" sz="1400" b="1" dirty="0">
+                <a:solidFill>
+                  <a:srgbClr val="1C3F6E"/>
+                </a:solidFill>
+                <a:latin typeface="Calibri" pitchFamily="34" charset="0"/>
+                <a:ea typeface="Calibri" pitchFamily="34" charset="-122"/>
+                <a:cs typeface="Calibri" pitchFamily="34" charset="-120"/>
+              </a:rPr>
+              <a:t>OBJECTIVES</a:t>
+            </a:r>
+            <a:endParaRPr lang="en-US" sz="1400" dirty="0"/>
+          </a:p>
+        </p:txBody>
+      </p:sp>
+      <p:pic>
+        <p:nvPicPr>
+          <p:cNvPr id="3" name="Image 0" descr="/home/claude/f4/img/minesec_sheet.png">    </p:cNvPr>
+          <p:cNvPicPr>
+            <a:picLocks noChangeAspect="1"/>
+          </p:cNvPicPr>
+          <p:nvPr/>
+        </p:nvPicPr>
+        <p:blipFill>
+          <a:blip r:embed="rId1"/>
+          <a:stretch>
+            <a:fillRect/>
+          </a:stretch>
+        </p:blipFill>
+        <p:spPr>
+          <a:xfrm>
+            <a:off x="0" y="658368"/>
+            <a:ext cx="5120640" cy="5833872"/>
+          </a:xfrm>
+          <a:prstGeom prst="rect">
+            <a:avLst/>
+          </a:prstGeom>
+        </p:spPr>
+      </p:pic>
+      <p:sp>
+        <p:nvSpPr>
+          <p:cNvPr id="4" name="Text 1"/>
+          <p:cNvSpPr/>
+          <p:nvPr/>
+        </p:nvSpPr>
+        <p:spPr>
+          <a:xfrm>
+            <a:off x="5349240" y="1005840"/>
+            <a:ext cx="6522415" cy="731520"/>
+          </a:xfrm>
+          <a:prstGeom prst="rect">
+            <a:avLst/>
+          </a:prstGeom>
+          <a:noFill/>
+          <a:ln/>
+        </p:spPr>
+        <p:txBody>
+          <a:bodyPr wrap="square" lIns="0" tIns="0" rIns="0" bIns="0" rtlCol="0" anchor="ctr">
+            <a:normAutofit/>
+          </a:bodyPr>
+          <a:lstStyle/>
+          <a:p>
+            <a:pPr algn="ctr" indent="0" marL="0">
+              <a:buNone/>
+            </a:pPr>
+            <a:r>
+              <a:rPr lang="en-US" sz="3600" b="1" dirty="0">
+                <a:solidFill>
+                  <a:srgbClr val="990011"/>
+                </a:solidFill>
+                <a:latin typeface="Times New Roman" pitchFamily="34" charset="0"/>
+                <a:ea typeface="Times New Roman" pitchFamily="34" charset="-122"/>
+                <a:cs typeface="Times New Roman" pitchFamily="34" charset="-120"/>
+              </a:rPr>
+              <a:t>Objectives</a:t>
+            </a:r>
+            <a:endParaRPr lang="en-US" sz="3600" dirty="0"/>
+          </a:p>
+        </p:txBody>
+      </p:sp>
+      <p:sp>
+        <p:nvSpPr>
+          <p:cNvPr id="5" name="Text 2"/>
+          <p:cNvSpPr/>
+          <p:nvPr/>
+        </p:nvSpPr>
+        <p:spPr>
+          <a:xfrm>
+            <a:off x="5349240" y="1783080"/>
+            <a:ext cx="6522415" cy="4663440"/>
+          </a:xfrm>
+          <a:prstGeom prst="rect">
+            <a:avLst/>
+          </a:prstGeom>
+          <a:noFill/>
+          <a:ln/>
+        </p:spPr>
+        <p:txBody>
+          <a:bodyPr wrap="square" lIns="0" tIns="0" rIns="0" bIns="0" rtlCol="0" anchor="t"/>
+          <a:lstStyle/>
+          <a:p>
+            <a:pPr algn="l" indent="0" marL="0">
+              <a:spcAft>
+                <a:spcPts val="800"/>
+              </a:spcAft>
+              <a:buNone/>
+            </a:pPr>
+            <a:r>
+              <a:rPr lang="en-US" sz="4000" b="1" dirty="0">
+                <a:solidFill>
+                  <a:srgbClr val="111111"/>
+                </a:solidFill>
+                <a:latin typeface="Times New Roman" pitchFamily="34" charset="0"/>
+                <a:ea typeface="Times New Roman" pitchFamily="34" charset="-122"/>
+                <a:cs typeface="Times New Roman" pitchFamily="34" charset="-120"/>
+              </a:rPr>
+              <a:t>By the end of this lesson, you should be able to:</a:t>
+            </a:r>
+            <a:endParaRPr lang="en-US" sz="4000" dirty="0"/>
+          </a:p>
+          <a:p>
+            <a:pPr algn="l" marL="342900" indent="-342900">
+              <a:spcAft>
+                <a:spcPts val="800"/>
+              </a:spcAft>
+              <a:buSzPct val="100000"/>
+              <a:buFont typeface="+mj-lt"/>
+              <a:buAutoNum type="arabicPeriod" startAt="1"/>
+            </a:pPr>
+            <a:r>
+              <a:rPr lang="en-US" sz="4000" dirty="0">
+                <a:solidFill>
+                  <a:srgbClr val="111111"/>
+                </a:solidFill>
+                <a:latin typeface="Times New Roman" pitchFamily="34" charset="0"/>
+                <a:ea typeface="Times New Roman" pitchFamily="34" charset="-122"/>
+                <a:cs typeface="Times New Roman" pitchFamily="34" charset="-120"/>
+              </a:rPr>
+              <a:t>Define positive, negative and zero growth.</a:t>
+            </a:r>
+            <a:endParaRPr lang="en-US" sz="4000" dirty="0"/>
+          </a:p>
+          <a:p>
+            <a:pPr algn="l" marL="342900" indent="-342900">
+              <a:spcAft>
+                <a:spcPts val="800"/>
+              </a:spcAft>
+              <a:buSzPct val="100000"/>
+              <a:buFont typeface="+mj-lt"/>
+              <a:buAutoNum type="arabicPeriod" startAt="1"/>
+            </a:pPr>
+            <a:r>
+              <a:rPr lang="en-US" sz="4000" dirty="0">
+                <a:solidFill>
+                  <a:srgbClr val="111111"/>
+                </a:solidFill>
+                <a:latin typeface="Times New Roman" pitchFamily="34" charset="0"/>
+                <a:ea typeface="Times New Roman" pitchFamily="34" charset="-122"/>
+                <a:cs typeface="Times New Roman" pitchFamily="34" charset="-120"/>
+              </a:rPr>
+              <a:t>Explain the population change system and its formula.</a:t>
+            </a:r>
+            <a:endParaRPr lang="en-US" sz="4000" dirty="0"/>
+          </a:p>
+        </p:txBody>
+      </p:sp>
+      <p:sp>
+        <p:nvSpPr>
+          <p:cNvPr id="25" name="Slide Number Placeholder 0"/>
+          <p:cNvSpPr>
+            <a:spLocks noGrp="1"/>
+          </p:cNvSpPr>
+          <p:nvPr>
+            <p:ph type="sldNum" sz="quarter" idx="4294967295"/>
+          </p:nvPr>
+        </p:nvSpPr>
+        <p:spPr>
+          <a:xfrm>
+            <a:off x="27432" y="91440"/>
+            <a:ext cx="585216" cy="475488"/>
+          </a:xfrm>
+          <a:prstGeom prst="rect">
+            <a:avLst/>
+          </a:prstGeom>
+          <a:extLst>
+            <a:ext uri="{C572A759-6A51-4108-AA02-DFA0A04FC94B}">
+              <ma14:wrappingTextBoxFlag xmlns:ma14="http://schemas.microsoft.com/office/mac/drawingml/2011/main" val="0"/>
+            </a:ext>
+          </a:extLst>
+        </p:spPr>
+        <p:txBody>
+          <a:bodyPr/>
+          <a:lstStyle>
+            <a:lvl1pPr>
+              <a:defRPr sz="2000">
+                <a:solidFill>
+                  <a:srgbClr val="FFFFFF"/>
+                </a:solidFill>
+                <a:latin typeface="Calibri"/>
+                <a:ea typeface="Calibri"/>
+                <a:cs typeface="Calibri"/>
+              </a:defRPr>
+            </a:lvl1pPr>
+          </a:lstStyle>
+          <a:p>
+            <a:pPr algn="ctr"/>
+            <a:fld id="{F7021451-1387-4CA6-816F-3879F97B5CBC}" type="slidenum">
+              <a:rPr b="1" lang="en-US"/>
+              <a:t>7</a:t>
+            </a:fld>
+            <a:endParaRPr lang="en-US"/>
+          </a:p>
+        </p:txBody>
+      </p:sp>
+    </p:spTree>
+  </p:cSld>
+  <p:clrMapOvr>
+    <a:masterClrMapping/>
+  </p:clrMapOvr>
+</p:sld>
+</file>
+
+<file path=ppt/slides/slide70.xml><?xml version="1.0" encoding="utf-8"?>
+<p:sld xmlns:a="http://schemas.openxmlformats.org/drawingml/2006/main" xmlns:r="http://schemas.openxmlformats.org/officeDocument/2006/relationships" xmlns:p="http://schemas.openxmlformats.org/presentationml/2006/main">
+  <p:cSld name="Slide 70">
+    <p:spTree>
+      <p:nvGrpSpPr>
+        <p:cNvPr id="1" name=""/>
+        <p:cNvGrpSpPr/>
+        <p:nvPr/>
+      </p:nvGrpSpPr>
+      <p:grpSpPr>
+        <a:xfrm>
+          <a:off x="0" y="0"/>
+          <a:ext cx="0" cy="0"/>
+          <a:chOff x="0" y="0"/>
+          <a:chExt cx="0" cy="0"/>
+        </a:xfrm>
+      </p:grpSpPr>
+      <p:sp>
+        <p:nvSpPr>
+          <p:cNvPr id="2" name="Text 0"/>
+          <p:cNvSpPr/>
+          <p:nvPr/>
+        </p:nvSpPr>
+        <p:spPr>
+          <a:xfrm>
+            <a:off x="457200" y="713232"/>
+            <a:ext cx="11368735" cy="274320"/>
+          </a:xfrm>
+          <a:prstGeom prst="rect">
+            <a:avLst/>
+          </a:prstGeom>
+          <a:noFill/>
+          <a:ln/>
+        </p:spPr>
+        <p:txBody>
+          <a:bodyPr wrap="square" lIns="0" tIns="0" rIns="0" bIns="0" rtlCol="0" anchor="ctr"/>
+          <a:lstStyle/>
+          <a:p>
+            <a:pPr algn="r" indent="0" marL="0">
+              <a:buNone/>
+            </a:pPr>
+            <a:r>
+              <a:rPr lang="en-US" sz="1400" b="1" dirty="0">
+                <a:solidFill>
+                  <a:srgbClr val="1C3F6E"/>
+                </a:solidFill>
+                <a:latin typeface="Calibri" pitchFamily="34" charset="0"/>
+                <a:ea typeface="Calibri" pitchFamily="34" charset="-122"/>
+                <a:cs typeface="Calibri" pitchFamily="34" charset="-120"/>
+              </a:rPr>
+              <a:t>BILINGUAL GAME</a:t>
+            </a:r>
+            <a:endParaRPr lang="en-US" sz="1400" dirty="0"/>
+          </a:p>
+        </p:txBody>
+      </p:sp>
+      <p:sp>
+        <p:nvSpPr>
+          <p:cNvPr id="3" name="Text 1"/>
+          <p:cNvSpPr/>
+          <p:nvPr/>
+        </p:nvSpPr>
+        <p:spPr>
+          <a:xfrm>
+            <a:off x="457200" y="1005840"/>
+            <a:ext cx="11277295" cy="731520"/>
+          </a:xfrm>
+          <a:prstGeom prst="rect">
+            <a:avLst/>
+          </a:prstGeom>
+          <a:noFill/>
+          <a:ln/>
+        </p:spPr>
+        <p:txBody>
+          <a:bodyPr wrap="square" lIns="0" tIns="0" rIns="0" bIns="0" rtlCol="0" anchor="ctr"/>
+          <a:lstStyle/>
+          <a:p>
+            <a:pPr algn="ctr" indent="0" marL="0">
+              <a:buNone/>
+            </a:pPr>
+            <a:r>
+              <a:rPr lang="en-US" sz="3600" b="1" dirty="0">
+                <a:solidFill>
+                  <a:srgbClr val="990011"/>
+                </a:solidFill>
+                <a:latin typeface="Times New Roman" pitchFamily="34" charset="0"/>
+                <a:ea typeface="Times New Roman" pitchFamily="34" charset="-122"/>
+                <a:cs typeface="Times New Roman" pitchFamily="34" charset="-120"/>
+              </a:rPr>
               <a:t>Bilingual Game (Jeu Bilingue)</a:t>
             </a:r>
             <a:endParaRPr lang="en-US" sz="3600" dirty="0"/>
@@ -22496,7 +26075,7 @@
       </p:sp>
       <p:graphicFrame>
         <p:nvGraphicFramePr>
-          <p:cNvPr id="62" name="Table 0"/>
+          <p:cNvPr id="71" name="Table 0"/>
           <p:cNvGraphicFramePr>
             <a:graphicFrameLocks noGrp="1"/>
           </p:cNvGraphicFramePr>
@@ -23532,7 +27111,7 @@
             <a:pPr algn="ctr"/>
             <a:fld id="{F7021451-1387-4CA6-816F-3879F97B5CBC}" type="slidenum">
               <a:rPr b="1" lang="en-US"/>
-              <a:t>61</a:t>
+              <a:t>70</a:t>
             </a:fld>
             <a:endParaRPr lang="en-US"/>
           </a:p>
@@ -23546,9 +27125,9 @@
 </p:sld>
 </file>
 
-<file path=ppt/slides/slide62.xml><?xml version="1.0" encoding="utf-8"?>
+<file path=ppt/slides/slide71.xml><?xml version="1.0" encoding="utf-8"?>
 <p:sld xmlns:a="http://schemas.openxmlformats.org/drawingml/2006/main" xmlns:r="http://schemas.openxmlformats.org/officeDocument/2006/relationships" xmlns:p="http://schemas.openxmlformats.org/presentationml/2006/main">
-  <p:cSld name="Slide 62">
+  <p:cSld name="Slide 71">
     <p:spTree>
       <p:nvGrpSpPr>
         <p:cNvPr id="1" name=""/>
@@ -23643,7 +27222,7 @@
       </p:sp>
       <p:graphicFrame>
         <p:nvGraphicFramePr>
-          <p:cNvPr id="63" name="Table 0"/>
+          <p:cNvPr id="72" name="Table 0"/>
           <p:cNvGraphicFramePr>
             <a:graphicFrameLocks noGrp="1"/>
           </p:cNvGraphicFramePr>
@@ -24265,7 +27844,7 @@
             <a:pPr algn="ctr"/>
             <a:fld id="{F7021451-1387-4CA6-816F-3879F97B5CBC}" type="slidenum">
               <a:rPr b="1" lang="en-US"/>
-              <a:t>62</a:t>
+              <a:t>71</a:t>
             </a:fld>
             <a:endParaRPr lang="en-US"/>
           </a:p>
@@ -24279,9 +27858,9 @@
 </p:sld>
 </file>
 
-<file path=ppt/slides/slide63.xml><?xml version="1.0" encoding="utf-8"?>
+<file path=ppt/slides/slide72.xml><?xml version="1.0" encoding="utf-8"?>
 <p:sld xmlns:a="http://schemas.openxmlformats.org/drawingml/2006/main" xmlns:r="http://schemas.openxmlformats.org/officeDocument/2006/relationships" xmlns:p="http://schemas.openxmlformats.org/presentationml/2006/main">
-  <p:cSld name="Slide 63">
+  <p:cSld name="Slide 72">
     <p:spTree>
       <p:nvGrpSpPr>
         <p:cNvPr id="1" name=""/>
@@ -24376,7 +27955,7 @@
       </p:sp>
       <p:graphicFrame>
         <p:nvGraphicFramePr>
-          <p:cNvPr id="64" name="Table 0"/>
+          <p:cNvPr id="73" name="Table 0"/>
           <p:cNvGraphicFramePr>
             <a:graphicFrameLocks noGrp="1"/>
           </p:cNvGraphicFramePr>
@@ -24486,7 +28065,7 @@
                           <a:ea typeface="Calibri" pitchFamily="34" charset="-122"/>
                           <a:cs typeface="Calibri" pitchFamily="34" charset="-120"/>
                         </a:rPr>
-                        <a:t>DEFINITIONS; Types of Growth; The Population Change System; Fertility; Mortality and Migration; Spatial Differences on a World Scale.</a:t>
+                        <a:t>DEFINITIONS; Types of Growth; The Population Change System; Factors of High Fertility; Factors of Low Fertility; Factors of Mortality; Factors of Migration; Spatial Differences on a World Scale.</a:t>
                       </a:r>
                       <a:endParaRPr lang="en-US" sz="1600" dirty="0">
                         <a:latin typeface="Calibri" charset="0"/>
@@ -25136,7 +28715,7 @@
             <a:pPr algn="ctr"/>
             <a:fld id="{F7021451-1387-4CA6-816F-3879F97B5CBC}" type="slidenum">
               <a:rPr b="1" lang="en-US"/>
-              <a:t>63</a:t>
+              <a:t>72</a:t>
             </a:fld>
             <a:endParaRPr lang="en-US"/>
           </a:p>
@@ -25150,9 +28729,9 @@
 </p:sld>
 </file>
 
-<file path=ppt/slides/slide64.xml><?xml version="1.0" encoding="utf-8"?>
+<file path=ppt/slides/slide73.xml><?xml version="1.0" encoding="utf-8"?>
 <p:sld xmlns:a="http://schemas.openxmlformats.org/drawingml/2006/main" xmlns:r="http://schemas.openxmlformats.org/officeDocument/2006/relationships" xmlns:p="http://schemas.openxmlformats.org/presentationml/2006/main">
-  <p:cSld name="Slide 64">
+  <p:cSld name="Slide 73">
     <p:spTree>
       <p:nvGrpSpPr>
         <p:cNvPr id="1" name=""/>
@@ -25461,7 +29040,7 @@
             <a:pPr algn="ctr"/>
             <a:fld id="{F7021451-1387-4CA6-816F-3879F97B5CBC}" type="slidenum">
               <a:rPr b="1" lang="en-US"/>
-              <a:t>64</a:t>
+              <a:t>73</a:t>
             </a:fld>
             <a:endParaRPr lang="en-US"/>
           </a:p>
@@ -25475,9 +29054,9 @@
 </p:sld>
 </file>
 
-<file path=ppt/slides/slide65.xml><?xml version="1.0" encoding="utf-8"?>
+<file path=ppt/slides/slide74.xml><?xml version="1.0" encoding="utf-8"?>
 <p:sld xmlns:a="http://schemas.openxmlformats.org/drawingml/2006/main" xmlns:r="http://schemas.openxmlformats.org/officeDocument/2006/relationships" xmlns:p="http://schemas.openxmlformats.org/presentationml/2006/main">
-  <p:cSld name="Slide 65">
+  <p:cSld name="Slide 74">
     <p:spTree>
       <p:nvGrpSpPr>
         <p:cNvPr id="1" name=""/>
@@ -25765,270 +29344,7 @@
             <a:pPr algn="ctr"/>
             <a:fld id="{F7021451-1387-4CA6-816F-3879F97B5CBC}" type="slidenum">
               <a:rPr b="1" lang="en-US"/>
-              <a:t>65</a:t>
-            </a:fld>
-            <a:endParaRPr lang="en-US"/>
-          </a:p>
-        </p:txBody>
-      </p:sp>
-    </p:spTree>
-  </p:cSld>
-  <p:clrMapOvr>
-    <a:masterClrMapping/>
-  </p:clrMapOvr>
-</p:sld>
-</file>
-
-<file path=ppt/slides/slide7.xml><?xml version="1.0" encoding="utf-8"?>
-<p:sld xmlns:a="http://schemas.openxmlformats.org/drawingml/2006/main" xmlns:r="http://schemas.openxmlformats.org/officeDocument/2006/relationships" xmlns:p="http://schemas.openxmlformats.org/presentationml/2006/main">
-  <p:cSld name="Slide 7">
-    <p:spTree>
-      <p:nvGrpSpPr>
-        <p:cNvPr id="1" name=""/>
-        <p:cNvGrpSpPr/>
-        <p:nvPr/>
-      </p:nvGrpSpPr>
-      <p:grpSpPr>
-        <a:xfrm>
-          <a:off x="0" y="0"/>
-          <a:ext cx="0" cy="0"/>
-          <a:chOff x="0" y="0"/>
-          <a:chExt cx="0" cy="0"/>
-        </a:xfrm>
-      </p:grpSpPr>
-      <p:sp>
-        <p:nvSpPr>
-          <p:cNvPr id="2" name="Text 0"/>
-          <p:cNvSpPr/>
-          <p:nvPr/>
-        </p:nvSpPr>
-        <p:spPr>
-          <a:xfrm>
-            <a:off x="457200" y="713232"/>
-            <a:ext cx="11368735" cy="274320"/>
-          </a:xfrm>
-          <a:prstGeom prst="rect">
-            <a:avLst/>
-          </a:prstGeom>
-          <a:noFill/>
-          <a:ln/>
-        </p:spPr>
-        <p:txBody>
-          <a:bodyPr wrap="square" lIns="0" tIns="0" rIns="0" bIns="0" rtlCol="0" anchor="ctr"/>
-          <a:lstStyle/>
-          <a:p>
-            <a:pPr algn="r" indent="0" marL="0">
-              <a:buNone/>
-            </a:pPr>
-            <a:r>
-              <a:rPr lang="en-US" sz="1400" b="1" dirty="0">
-                <a:solidFill>
-                  <a:srgbClr val="1C3F6E"/>
-                </a:solidFill>
-                <a:latin typeface="Calibri" pitchFamily="34" charset="0"/>
-                <a:ea typeface="Calibri" pitchFamily="34" charset="-122"/>
-                <a:cs typeface="Calibri" pitchFamily="34" charset="-120"/>
-              </a:rPr>
-              <a:t>OBJECTIVES</a:t>
-            </a:r>
-            <a:endParaRPr lang="en-US" sz="1400" dirty="0"/>
-          </a:p>
-        </p:txBody>
-      </p:sp>
-      <p:pic>
-        <p:nvPicPr>
-          <p:cNvPr id="3" name="Image 0" descr="/home/claude/f4/img/minesec_sheet.png">    </p:cNvPr>
-          <p:cNvPicPr>
-            <a:picLocks noChangeAspect="1"/>
-          </p:cNvPicPr>
-          <p:nvPr/>
-        </p:nvPicPr>
-        <p:blipFill>
-          <a:blip r:embed="rId1"/>
-          <a:stretch>
-            <a:fillRect/>
-          </a:stretch>
-        </p:blipFill>
-        <p:spPr>
-          <a:xfrm>
-            <a:off x="0" y="658368"/>
-            <a:ext cx="5120640" cy="5833872"/>
-          </a:xfrm>
-          <a:prstGeom prst="rect">
-            <a:avLst/>
-          </a:prstGeom>
-        </p:spPr>
-      </p:pic>
-      <p:sp>
-        <p:nvSpPr>
-          <p:cNvPr id="4" name="Text 1"/>
-          <p:cNvSpPr/>
-          <p:nvPr/>
-        </p:nvSpPr>
-        <p:spPr>
-          <a:xfrm>
-            <a:off x="5349240" y="1005840"/>
-            <a:ext cx="6522415" cy="731520"/>
-          </a:xfrm>
-          <a:prstGeom prst="rect">
-            <a:avLst/>
-          </a:prstGeom>
-          <a:noFill/>
-          <a:ln/>
-        </p:spPr>
-        <p:txBody>
-          <a:bodyPr wrap="square" lIns="0" tIns="0" rIns="0" bIns="0" rtlCol="0" anchor="ctr">
-            <a:normAutofit/>
-          </a:bodyPr>
-          <a:lstStyle/>
-          <a:p>
-            <a:pPr algn="ctr" indent="0" marL="0">
-              <a:buNone/>
-            </a:pPr>
-            <a:r>
-              <a:rPr lang="en-US" sz="3600" b="1" dirty="0">
-                <a:solidFill>
-                  <a:srgbClr val="990011"/>
-                </a:solidFill>
-                <a:latin typeface="Times New Roman" pitchFamily="34" charset="0"/>
-                <a:ea typeface="Times New Roman" pitchFamily="34" charset="-122"/>
-                <a:cs typeface="Times New Roman" pitchFamily="34" charset="-120"/>
-              </a:rPr>
-              <a:t>Objectives</a:t>
-            </a:r>
-            <a:endParaRPr lang="en-US" sz="3600" dirty="0"/>
-          </a:p>
-        </p:txBody>
-      </p:sp>
-      <p:sp>
-        <p:nvSpPr>
-          <p:cNvPr id="5" name="Text 2"/>
-          <p:cNvSpPr/>
-          <p:nvPr/>
-        </p:nvSpPr>
-        <p:spPr>
-          <a:xfrm>
-            <a:off x="5349240" y="1783080"/>
-            <a:ext cx="6522415" cy="4663440"/>
-          </a:xfrm>
-          <a:prstGeom prst="rect">
-            <a:avLst/>
-          </a:prstGeom>
-          <a:noFill/>
-          <a:ln/>
-        </p:spPr>
-        <p:txBody>
-          <a:bodyPr wrap="square" lIns="0" tIns="0" rIns="0" bIns="0" rtlCol="0" anchor="t"/>
-          <a:lstStyle/>
-          <a:p>
-            <a:pPr algn="l" indent="0" marL="0">
-              <a:spcAft>
-                <a:spcPts val="800"/>
-              </a:spcAft>
-              <a:buNone/>
-            </a:pPr>
-            <a:r>
-              <a:rPr lang="en-US" sz="4000" b="1" dirty="0">
-                <a:solidFill>
-                  <a:srgbClr val="111111"/>
-                </a:solidFill>
-                <a:latin typeface="Times New Roman" pitchFamily="34" charset="0"/>
-                <a:ea typeface="Times New Roman" pitchFamily="34" charset="-122"/>
-                <a:cs typeface="Times New Roman" pitchFamily="34" charset="-120"/>
-              </a:rPr>
-              <a:t>By the end of this lesson, you should be able to:</a:t>
-            </a:r>
-            <a:endParaRPr lang="en-US" sz="4000" dirty="0"/>
-          </a:p>
-          <a:p>
-            <a:pPr algn="l" marL="342900" indent="-342900">
-              <a:spcAft>
-                <a:spcPts val="800"/>
-              </a:spcAft>
-              <a:buSzPct val="100000"/>
-              <a:buFont typeface="+mj-lt"/>
-              <a:buAutoNum type="arabicPeriod" startAt="1"/>
-            </a:pPr>
-            <a:r>
-              <a:rPr lang="en-US" sz="4000" dirty="0">
-                <a:solidFill>
-                  <a:srgbClr val="111111"/>
-                </a:solidFill>
-                <a:latin typeface="Times New Roman" pitchFamily="34" charset="0"/>
-                <a:ea typeface="Times New Roman" pitchFamily="34" charset="-122"/>
-                <a:cs typeface="Times New Roman" pitchFamily="34" charset="-120"/>
-              </a:rPr>
-              <a:t>Define positive, negative and zero growth.</a:t>
-            </a:r>
-            <a:endParaRPr lang="en-US" sz="4000" dirty="0"/>
-          </a:p>
-          <a:p>
-            <a:pPr algn="l" marL="342900" indent="-342900">
-              <a:spcAft>
-                <a:spcPts val="800"/>
-              </a:spcAft>
-              <a:buSzPct val="100000"/>
-              <a:buFont typeface="+mj-lt"/>
-              <a:buAutoNum type="arabicPeriod" startAt="1"/>
-            </a:pPr>
-            <a:r>
-              <a:rPr lang="en-US" sz="4000" dirty="0">
-                <a:solidFill>
-                  <a:srgbClr val="111111"/>
-                </a:solidFill>
-                <a:latin typeface="Times New Roman" pitchFamily="34" charset="0"/>
-                <a:ea typeface="Times New Roman" pitchFamily="34" charset="-122"/>
-                <a:cs typeface="Times New Roman" pitchFamily="34" charset="-120"/>
-              </a:rPr>
-              <a:t>Explain the population change system and its formula.</a:t>
-            </a:r>
-            <a:endParaRPr lang="en-US" sz="4000" dirty="0"/>
-          </a:p>
-        </p:txBody>
-      </p:sp>
-      <p:sp>
-        <p:nvSpPr>
-          <p:cNvPr id="25" name="Slide Number Placeholder 0"/>
-          <p:cNvSpPr>
-            <a:spLocks noGrp="1"/>
-          </p:cNvSpPr>
-          <p:nvPr>
-            <p:ph type="sldNum" sz="quarter" idx="4294967295"/>
-          </p:nvPr>
-        </p:nvSpPr>
-        <p:spPr>
-          <a:xfrm>
-            <a:off x="27432" y="91440"/>
-            <a:ext cx="585216" cy="475488"/>
-          </a:xfrm>
-          <a:prstGeom prst="rect">
-            <a:avLst/>
-          </a:prstGeom>
-          <a:extLst>
-            <a:ext uri="{C572A759-6A51-4108-AA02-DFA0A04FC94B}">
-              <ma14:wrappingTextBoxFlag xmlns:ma14="http://schemas.microsoft.com/office/mac/drawingml/2011/main" val="0"/>
-            </a:ext>
-          </a:extLst>
-        </p:spPr>
-        <p:txBody>
-          <a:bodyPr/>
-          <a:lstStyle>
-            <a:lvl1pPr>
-              <a:defRPr sz="2000">
-                <a:solidFill>
-                  <a:srgbClr val="FFFFFF"/>
-                </a:solidFill>
-                <a:latin typeface="Calibri"/>
-                <a:ea typeface="Calibri"/>
-                <a:cs typeface="Calibri"/>
-              </a:defRPr>
-            </a:lvl1pPr>
-          </a:lstStyle>
-          <a:p>
-            <a:pPr algn="ctr"/>
-            <a:fld id="{F7021451-1387-4CA6-816F-3879F97B5CBC}" type="slidenum">
-              <a:rPr b="1" lang="en-US"/>
-              <a:t>7</a:t>
+              <a:t>74</a:t>
             </a:fld>
             <a:endParaRPr lang="en-US"/>
           </a:p>
